--- a/docs/downloads/de/DRX_Ministerial_Presentation_DE.pptx
+++ b/docs/downloads/de/DRX_Ministerial_Presentation_DE.pptx
@@ -2,28 +2,28 @@
 <file path=ppt/presentation.xml><?xml version="1.0" encoding="utf-8"?>
 <p:presentation xmlns:p="http://schemas.openxmlformats.org/presentationml/2006/main">
   <p:sldMasterIdLst>
-    <p:sldMasterId xmlns:r="http://schemas.openxmlformats.org/officeDocument/2006/relationships" id="2147483648" r:id="Rfe0dfd2a5c514731"/>
+    <p:sldMasterId xmlns:r="http://schemas.openxmlformats.org/officeDocument/2006/relationships" id="2147483648" r:id="R8b7971954ee04976"/>
   </p:sldMasterIdLst>
   <p:notesMasterIdLst>
-    <p:notesMasterId xmlns:r="http://schemas.openxmlformats.org/officeDocument/2006/relationships" r:id="R1562d356ec604ec6"/>
+    <p:notesMasterId xmlns:r="http://schemas.openxmlformats.org/officeDocument/2006/relationships" r:id="R600eddcb4a874a23"/>
   </p:notesMasterIdLst>
   <p:sldIdLst>
-    <p:sldId xmlns:r="http://schemas.openxmlformats.org/officeDocument/2006/relationships" id="256" r:id="R0f6bda84c5cf4b3b"/>
-    <p:sldId xmlns:r="http://schemas.openxmlformats.org/officeDocument/2006/relationships" id="257" r:id="R5325c4710e5b4a14"/>
-    <p:sldId xmlns:r="http://schemas.openxmlformats.org/officeDocument/2006/relationships" id="258" r:id="Rbab0bb6e644d4c2e"/>
-    <p:sldId xmlns:r="http://schemas.openxmlformats.org/officeDocument/2006/relationships" id="259" r:id="R329571af92e2455b"/>
-    <p:sldId xmlns:r="http://schemas.openxmlformats.org/officeDocument/2006/relationships" id="260" r:id="Rd845e3d986cf44cb"/>
-    <p:sldId xmlns:r="http://schemas.openxmlformats.org/officeDocument/2006/relationships" id="261" r:id="R538613ff414545d2"/>
-    <p:sldId xmlns:r="http://schemas.openxmlformats.org/officeDocument/2006/relationships" id="262" r:id="Rdf0915fd3d6844b2"/>
-    <p:sldId xmlns:r="http://schemas.openxmlformats.org/officeDocument/2006/relationships" id="263" r:id="R159639febbd047c3"/>
-    <p:sldId xmlns:r="http://schemas.openxmlformats.org/officeDocument/2006/relationships" id="264" r:id="R4dfbc8c4c40f460b"/>
-    <p:sldId xmlns:r="http://schemas.openxmlformats.org/officeDocument/2006/relationships" id="265" r:id="R731b1f97bd1a4788"/>
-    <p:sldId xmlns:r="http://schemas.openxmlformats.org/officeDocument/2006/relationships" id="266" r:id="R8255647ea69a4db0"/>
-    <p:sldId xmlns:r="http://schemas.openxmlformats.org/officeDocument/2006/relationships" id="267" r:id="R5f1fe013a39e4774"/>
-    <p:sldId xmlns:r="http://schemas.openxmlformats.org/officeDocument/2006/relationships" id="268" r:id="R5d7222ddf47c403e"/>
-    <p:sldId xmlns:r="http://schemas.openxmlformats.org/officeDocument/2006/relationships" id="269" r:id="R14de6ea8f2cb43fe"/>
-    <p:sldId xmlns:r="http://schemas.openxmlformats.org/officeDocument/2006/relationships" id="270" r:id="Rd6c8b64aa4f24249"/>
-    <p:sldId xmlns:r="http://schemas.openxmlformats.org/officeDocument/2006/relationships" id="271" r:id="R42e19032930748d4"/>
+    <p:sldId xmlns:r="http://schemas.openxmlformats.org/officeDocument/2006/relationships" id="256" r:id="R9ff57b7d50804438"/>
+    <p:sldId xmlns:r="http://schemas.openxmlformats.org/officeDocument/2006/relationships" id="257" r:id="Recd0e7b6c32945b2"/>
+    <p:sldId xmlns:r="http://schemas.openxmlformats.org/officeDocument/2006/relationships" id="258" r:id="R9cf556fd2c8947d0"/>
+    <p:sldId xmlns:r="http://schemas.openxmlformats.org/officeDocument/2006/relationships" id="259" r:id="R5d153d2f9e4e433b"/>
+    <p:sldId xmlns:r="http://schemas.openxmlformats.org/officeDocument/2006/relationships" id="260" r:id="R0aba8e6e36764f30"/>
+    <p:sldId xmlns:r="http://schemas.openxmlformats.org/officeDocument/2006/relationships" id="261" r:id="R14c3a489dafe4323"/>
+    <p:sldId xmlns:r="http://schemas.openxmlformats.org/officeDocument/2006/relationships" id="262" r:id="Radc73637f66c4899"/>
+    <p:sldId xmlns:r="http://schemas.openxmlformats.org/officeDocument/2006/relationships" id="263" r:id="R7e19e5a58b6c4a3e"/>
+    <p:sldId xmlns:r="http://schemas.openxmlformats.org/officeDocument/2006/relationships" id="264" r:id="R50a0db5418a549ad"/>
+    <p:sldId xmlns:r="http://schemas.openxmlformats.org/officeDocument/2006/relationships" id="265" r:id="R0a350c9b9d4d4443"/>
+    <p:sldId xmlns:r="http://schemas.openxmlformats.org/officeDocument/2006/relationships" id="266" r:id="R10588a13c8474527"/>
+    <p:sldId xmlns:r="http://schemas.openxmlformats.org/officeDocument/2006/relationships" id="267" r:id="R32507c01e3214403"/>
+    <p:sldId xmlns:r="http://schemas.openxmlformats.org/officeDocument/2006/relationships" id="268" r:id="Rd69388e6e1734d62"/>
+    <p:sldId xmlns:r="http://schemas.openxmlformats.org/officeDocument/2006/relationships" id="269" r:id="Rf1c73779dd714132"/>
+    <p:sldId xmlns:r="http://schemas.openxmlformats.org/officeDocument/2006/relationships" id="270" r:id="Rcc3f5c3942194fe0"/>
+    <p:sldId xmlns:r="http://schemas.openxmlformats.org/officeDocument/2006/relationships" id="271" r:id="Rc1afd99f857243b2"/>
   </p:sldIdLst>
   <p:sldSz cx="12192000" cy="6858000"/>
   <p:notesSz cx="6858000" cy="9144000"/>
@@ -1701,7 +1701,7 @@
   </p:cSld>
   <p:clrMap bg1="lt1" tx1="dk1" bg2="lt2" tx2="dk2" accent1="accent1" accent2="accent2" accent3="accent3" accent4="accent4" accent5="accent5" accent6="accent6" hlink="hlink" folHlink="folHlink"/>
   <p:sldLayoutIdLst>
-    <p:sldLayoutId xmlns:r="http://schemas.openxmlformats.org/officeDocument/2006/relationships" id="2147483649" r:id="Rad71379f6e714857"/>
+    <p:sldLayoutId xmlns:r="http://schemas.openxmlformats.org/officeDocument/2006/relationships" id="2147483649" r:id="R5723b03f2a7e4b0c"/>
   </p:sldLayoutIdLst>
   <p:txStyles>
     <p:titleStyle>
@@ -2252,7 +2252,7 @@
           <p:cNvPr id="12" name="">
             <a:extLst xmlns:a="http://schemas.openxmlformats.org/drawingml/2006/main">
               <a:ext uri="{FF2B5EF4-FFF2-40B4-BE49-F238E27FC236}">
-                <a16:creationId xmlns:a16="http://schemas.microsoft.com/office/drawing/2014/main" id="{C304685C-AB9B-44CA-8B13-2BC71A678213}"/>
+                <a16:creationId xmlns:a16="http://schemas.microsoft.com/office/drawing/2014/main" id="{7D7F305C-BF9B-470A-8D3D-9985CD563F1A}"/>
               </a:ext>
             </a:extLst>
           </p:cNvPr>
@@ -2283,7 +2283,7 @@
           <p:cNvPr id="2" name="">
             <a:extLst xmlns:a="http://schemas.openxmlformats.org/drawingml/2006/main">
               <a:ext uri="{FF2B5EF4-FFF2-40B4-BE49-F238E27FC236}">
-                <a16:creationId xmlns:a16="http://schemas.microsoft.com/office/drawing/2014/main" id="{99DDCCFB-409A-4230-B965-5B76B9F19B6D}"/>
+                <a16:creationId xmlns:a16="http://schemas.microsoft.com/office/drawing/2014/main" id="{F3A97410-785A-49FA-AE6B-A6E0C1CA8F0E}"/>
               </a:ext>
             </a:extLst>
           </p:cNvPr>
@@ -2314,7 +2314,7 @@
           <p:cNvPr id="3" name="">
             <a:extLst xmlns:a="http://schemas.openxmlformats.org/drawingml/2006/main">
               <a:ext uri="{FF2B5EF4-FFF2-40B4-BE49-F238E27FC236}">
-                <a16:creationId xmlns:a16="http://schemas.microsoft.com/office/drawing/2014/main" id="{9F66BD7D-6005-420C-B752-ACC5C390B4CE}"/>
+                <a16:creationId xmlns:a16="http://schemas.microsoft.com/office/drawing/2014/main" id="{163B545D-E829-4561-A62C-E2CAD87D3A6C}"/>
               </a:ext>
             </a:extLst>
           </p:cNvPr>
@@ -2376,7 +2376,7 @@
           <p:cNvPr id="4" name="">
             <a:extLst xmlns:a="http://schemas.openxmlformats.org/drawingml/2006/main">
               <a:ext uri="{FF2B5EF4-FFF2-40B4-BE49-F238E27FC236}">
-                <a16:creationId xmlns:a16="http://schemas.microsoft.com/office/drawing/2014/main" id="{E548A693-6BD4-4B55-85E9-5225F7E9BDEE}"/>
+                <a16:creationId xmlns:a16="http://schemas.microsoft.com/office/drawing/2014/main" id="{FB0A15C7-9978-4E88-AC20-AEBB03B31EFE}"/>
               </a:ext>
             </a:extLst>
           </p:cNvPr>
@@ -2438,7 +2438,7 @@
           <p:cNvPr id="5" name="">
             <a:extLst xmlns:a="http://schemas.openxmlformats.org/drawingml/2006/main">
               <a:ext uri="{FF2B5EF4-FFF2-40B4-BE49-F238E27FC236}">
-                <a16:creationId xmlns:a16="http://schemas.microsoft.com/office/drawing/2014/main" id="{30A2F2BD-77C1-44DC-B672-67B931FA1BE0}"/>
+                <a16:creationId xmlns:a16="http://schemas.microsoft.com/office/drawing/2014/main" id="{0D472A9C-81A5-4651-B41F-3DB61F309C82}"/>
               </a:ext>
             </a:extLst>
           </p:cNvPr>
@@ -2500,7 +2500,7 @@
           <p:cNvPr id="6" name="">
             <a:extLst xmlns:a="http://schemas.openxmlformats.org/drawingml/2006/main">
               <a:ext uri="{FF2B5EF4-FFF2-40B4-BE49-F238E27FC236}">
-                <a16:creationId xmlns:a16="http://schemas.microsoft.com/office/drawing/2014/main" id="{B009F7B0-7607-4FC8-926E-5BC127DEAF9C}"/>
+                <a16:creationId xmlns:a16="http://schemas.microsoft.com/office/drawing/2014/main" id="{4EB95B57-4B5A-4097-A56E-C8B72ED3C769}"/>
               </a:ext>
             </a:extLst>
           </p:cNvPr>
@@ -2562,7 +2562,7 @@
           <p:cNvPr id="7" name="">
             <a:extLst xmlns:a="http://schemas.openxmlformats.org/drawingml/2006/main">
               <a:ext uri="{FF2B5EF4-FFF2-40B4-BE49-F238E27FC236}">
-                <a16:creationId xmlns:a16="http://schemas.microsoft.com/office/drawing/2014/main" id="{6438B594-CD6D-44FD-ACA1-105EF11ECA74}"/>
+                <a16:creationId xmlns:a16="http://schemas.microsoft.com/office/drawing/2014/main" id="{243F3C84-4DEF-4736-AF23-C7C2462E1F40}"/>
               </a:ext>
             </a:extLst>
           </p:cNvPr>
@@ -2624,7 +2624,7 @@
           <p:cNvPr id="8" name="">
             <a:extLst xmlns:a="http://schemas.openxmlformats.org/drawingml/2006/main">
               <a:ext uri="{FF2B5EF4-FFF2-40B4-BE49-F238E27FC236}">
-                <a16:creationId xmlns:a16="http://schemas.microsoft.com/office/drawing/2014/main" id="{32670A47-B6CF-4424-AEC2-76E2E474B71F}"/>
+                <a16:creationId xmlns:a16="http://schemas.microsoft.com/office/drawing/2014/main" id="{49254DD1-2AA4-42EE-AD57-0890E2AECB91}"/>
               </a:ext>
             </a:extLst>
           </p:cNvPr>
@@ -2686,7 +2686,7 @@
           <p:cNvPr id="9" name="">
             <a:extLst xmlns:a="http://schemas.openxmlformats.org/drawingml/2006/main">
               <a:ext uri="{FF2B5EF4-FFF2-40B4-BE49-F238E27FC236}">
-                <a16:creationId xmlns:a16="http://schemas.microsoft.com/office/drawing/2014/main" id="{2D365EF9-CD24-4FC2-86B7-EF13187BFE68}"/>
+                <a16:creationId xmlns:a16="http://schemas.microsoft.com/office/drawing/2014/main" id="{62C2E116-D68E-4BA2-B082-50BF696F70F9}"/>
               </a:ext>
             </a:extLst>
           </p:cNvPr>
@@ -2752,7 +2752,7 @@
           <p:nvPr/>
         </p:nvPicPr>
         <p:blipFill>
-          <a:blip xmlns:r="http://schemas.openxmlformats.org/officeDocument/2006/relationships" xmlns:a="http://schemas.openxmlformats.org/drawingml/2006/main" r:embed="Rdd5c3a92cd6146fa"/>
+          <a:blip xmlns:r="http://schemas.openxmlformats.org/officeDocument/2006/relationships" xmlns:a="http://schemas.openxmlformats.org/drawingml/2006/main" r:embed="R5d91693585fc4a05"/>
           <a:srcRect xmlns:a="http://schemas.openxmlformats.org/drawingml/2006/main" l="0" t="0" r="0" b="0"/>
           <a:stretch xmlns:a="http://schemas.openxmlformats.org/drawingml/2006/main">
             <a:fillRect l="0" t="0" r="0" b="0"/>
@@ -2773,7 +2773,7 @@
           <p:cNvPr id="11" name="">
             <a:extLst xmlns:a="http://schemas.openxmlformats.org/drawingml/2006/main">
               <a:ext uri="{FF2B5EF4-FFF2-40B4-BE49-F238E27FC236}">
-                <a16:creationId xmlns:a16="http://schemas.microsoft.com/office/drawing/2014/main" id="{B6A4430E-B5FE-4475-993E-26842FBF5D7F}"/>
+                <a16:creationId xmlns:a16="http://schemas.microsoft.com/office/drawing/2014/main" id="{CDCA0F0C-3C67-4258-9C2A-EB2F59DCC0DF}"/>
               </a:ext>
             </a:extLst>
           </p:cNvPr>
@@ -2833,7 +2833,7 @@
     </p:spTree>
     <p:extLst>
       <p:ext uri="{BB962C8B-B14F-4D97-AF65-F5344CB8AC3E}">
-        <p14:creationId xmlns:p14="http://schemas.microsoft.com/office/powerpoint/2010/main" val="697074694"/>
+        <p14:creationId xmlns:p14="http://schemas.microsoft.com/office/powerpoint/2010/main" val="308276951"/>
       </p:ext>
     </p:extLst>
   </p:cSld>
@@ -2864,7 +2864,7 @@
           <p:cNvPr id="17" name="">
             <a:extLst xmlns:a="http://schemas.openxmlformats.org/drawingml/2006/main">
               <a:ext uri="{FF2B5EF4-FFF2-40B4-BE49-F238E27FC236}">
-                <a16:creationId xmlns:a16="http://schemas.microsoft.com/office/drawing/2014/main" id="{B64AE072-8887-4A0C-A759-9E4EAC2B6C27}"/>
+                <a16:creationId xmlns:a16="http://schemas.microsoft.com/office/drawing/2014/main" id="{28A88FA3-52AE-4D93-9775-8E8EDE6A0B6E}"/>
               </a:ext>
             </a:extLst>
           </p:cNvPr>
@@ -2895,7 +2895,7 @@
           <p:cNvPr id="2" name="">
             <a:extLst xmlns:a="http://schemas.openxmlformats.org/drawingml/2006/main">
               <a:ext uri="{FF2B5EF4-FFF2-40B4-BE49-F238E27FC236}">
-                <a16:creationId xmlns:a16="http://schemas.microsoft.com/office/drawing/2014/main" id="{DFC8FDC8-403D-4B7E-911C-353BDA7322B6}"/>
+                <a16:creationId xmlns:a16="http://schemas.microsoft.com/office/drawing/2014/main" id="{1592EBC6-7897-42CD-B76A-BB651CC03419}"/>
               </a:ext>
             </a:extLst>
           </p:cNvPr>
@@ -2957,7 +2957,7 @@
           <p:cNvPr id="3" name="">
             <a:extLst xmlns:a="http://schemas.openxmlformats.org/drawingml/2006/main">
               <a:ext uri="{FF2B5EF4-FFF2-40B4-BE49-F238E27FC236}">
-                <a16:creationId xmlns:a16="http://schemas.microsoft.com/office/drawing/2014/main" id="{A6AC39EE-75B1-4A4D-9750-7AE403F0B8A5}"/>
+                <a16:creationId xmlns:a16="http://schemas.microsoft.com/office/drawing/2014/main" id="{919B8DCE-5F99-4BC7-B250-18E9BBD30993}"/>
               </a:ext>
             </a:extLst>
           </p:cNvPr>
@@ -2991,7 +2991,7 @@
                 <a:spcPct val="108000"/>
               </a:lnSpc>
               <a:buNone/>
-              <a:defRPr sz="2700" b="1">
+              <a:defRPr sz="2250" b="1">
                 <a:solidFill>
                   <a:srgbClr val="071426"/>
                 </a:solidFill>
@@ -3001,7 +3001,7 @@
               </a:defRPr>
             </a:pPr>
             <a:r>
-              <a:rPr sz="2700" b="1">
+              <a:rPr sz="2250" b="1">
                 <a:solidFill>
                   <a:srgbClr val="071426"/>
                 </a:solidFill>
@@ -3019,7 +3019,7 @@
           <p:cNvPr id="4" name="">
             <a:extLst xmlns:a="http://schemas.openxmlformats.org/drawingml/2006/main">
               <a:ext uri="{FF2B5EF4-FFF2-40B4-BE49-F238E27FC236}">
-                <a16:creationId xmlns:a16="http://schemas.microsoft.com/office/drawing/2014/main" id="{339858EA-8DBC-45D3-9CB0-7B914119B88F}"/>
+                <a16:creationId xmlns:a16="http://schemas.microsoft.com/office/drawing/2014/main" id="{5371D148-FA83-4A05-845C-9D812260FC81}"/>
               </a:ext>
             </a:extLst>
           </p:cNvPr>
@@ -3054,7 +3054,7 @@
           <p:nvPr/>
         </p:nvPicPr>
         <p:blipFill>
-          <a:blip xmlns:r="http://schemas.openxmlformats.org/officeDocument/2006/relationships" xmlns:a="http://schemas.openxmlformats.org/drawingml/2006/main" r:embed="R15ee359b53a244b0"/>
+          <a:blip xmlns:r="http://schemas.openxmlformats.org/officeDocument/2006/relationships" xmlns:a="http://schemas.openxmlformats.org/drawingml/2006/main" r:embed="R5fcdaea808474d5d"/>
           <a:srcRect xmlns:a="http://schemas.openxmlformats.org/drawingml/2006/main" l="0" t="0" r="0" b="0"/>
           <a:stretch xmlns:a="http://schemas.openxmlformats.org/drawingml/2006/main">
             <a:fillRect l="0" t="0" r="0" b="0"/>
@@ -3075,7 +3075,7 @@
           <p:cNvPr id="6" name="">
             <a:extLst xmlns:a="http://schemas.openxmlformats.org/drawingml/2006/main">
               <a:ext uri="{FF2B5EF4-FFF2-40B4-BE49-F238E27FC236}">
-                <a16:creationId xmlns:a16="http://schemas.microsoft.com/office/drawing/2014/main" id="{F021D6F3-C296-4EA6-BAA4-6C1CC042619F}"/>
+                <a16:creationId xmlns:a16="http://schemas.microsoft.com/office/drawing/2014/main" id="{9F46EC5E-11A5-48EC-B965-7173A834F358}"/>
               </a:ext>
             </a:extLst>
           </p:cNvPr>
@@ -3137,7 +3137,7 @@
           <p:cNvPr id="7" name="">
             <a:extLst xmlns:a="http://schemas.openxmlformats.org/drawingml/2006/main">
               <a:ext uri="{FF2B5EF4-FFF2-40B4-BE49-F238E27FC236}">
-                <a16:creationId xmlns:a16="http://schemas.microsoft.com/office/drawing/2014/main" id="{738C35C9-146E-41F6-B002-DBC9B13CCA8D}"/>
+                <a16:creationId xmlns:a16="http://schemas.microsoft.com/office/drawing/2014/main" id="{9ACE54C0-8FF1-44DA-832B-9A3ED4F01E07}"/>
               </a:ext>
             </a:extLst>
           </p:cNvPr>
@@ -3199,7 +3199,7 @@
           <p:cNvPr id="8" name="">
             <a:extLst xmlns:a="http://schemas.openxmlformats.org/drawingml/2006/main">
               <a:ext uri="{FF2B5EF4-FFF2-40B4-BE49-F238E27FC236}">
-                <a16:creationId xmlns:a16="http://schemas.microsoft.com/office/drawing/2014/main" id="{E6883DD5-159F-4100-BF4A-DA2D620D0396}"/>
+                <a16:creationId xmlns:a16="http://schemas.microsoft.com/office/drawing/2014/main" id="{BE0A756D-2705-4108-8CF7-9707D1303257}"/>
               </a:ext>
             </a:extLst>
           </p:cNvPr>
@@ -3234,7 +3234,7 @@
           <p:cNvPr id="9" name="">
             <a:extLst xmlns:a="http://schemas.openxmlformats.org/drawingml/2006/main">
               <a:ext uri="{FF2B5EF4-FFF2-40B4-BE49-F238E27FC236}">
-                <a16:creationId xmlns:a16="http://schemas.microsoft.com/office/drawing/2014/main" id="{7588B0D4-4B11-48A8-B5A1-653DFC20CDE1}"/>
+                <a16:creationId xmlns:a16="http://schemas.microsoft.com/office/drawing/2014/main" id="{B077F188-61D0-41D9-B598-9167B8501ADE}"/>
               </a:ext>
             </a:extLst>
           </p:cNvPr>
@@ -3265,7 +3265,7 @@
           <p:cNvPr id="10" name="">
             <a:extLst xmlns:a="http://schemas.openxmlformats.org/drawingml/2006/main">
               <a:ext uri="{FF2B5EF4-FFF2-40B4-BE49-F238E27FC236}">
-                <a16:creationId xmlns:a16="http://schemas.microsoft.com/office/drawing/2014/main" id="{38C19C32-4357-4F25-B8BE-B0BEBDC6DCDA}"/>
+                <a16:creationId xmlns:a16="http://schemas.microsoft.com/office/drawing/2014/main" id="{A4157394-5620-49C4-8094-92C981E60669}"/>
               </a:ext>
             </a:extLst>
           </p:cNvPr>
@@ -3327,7 +3327,7 @@
           <p:cNvPr id="11" name="">
             <a:extLst xmlns:a="http://schemas.openxmlformats.org/drawingml/2006/main">
               <a:ext uri="{FF2B5EF4-FFF2-40B4-BE49-F238E27FC236}">
-                <a16:creationId xmlns:a16="http://schemas.microsoft.com/office/drawing/2014/main" id="{C4081237-B37C-40BD-841F-E1733F4F6183}"/>
+                <a16:creationId xmlns:a16="http://schemas.microsoft.com/office/drawing/2014/main" id="{ED26CB7B-92A1-44F6-824D-A30791D9E41E}"/>
               </a:ext>
             </a:extLst>
           </p:cNvPr>
@@ -3443,7 +3443,7 @@
           <p:cNvPr id="12" name="">
             <a:extLst xmlns:a="http://schemas.openxmlformats.org/drawingml/2006/main">
               <a:ext uri="{FF2B5EF4-FFF2-40B4-BE49-F238E27FC236}">
-                <a16:creationId xmlns:a16="http://schemas.microsoft.com/office/drawing/2014/main" id="{F277277B-6A01-4AB5-92CA-D67034A04C9E}"/>
+                <a16:creationId xmlns:a16="http://schemas.microsoft.com/office/drawing/2014/main" id="{02B06881-5D30-44E5-9F25-F1ABC1D87092}"/>
               </a:ext>
             </a:extLst>
           </p:cNvPr>
@@ -3478,7 +3478,7 @@
           <p:cNvPr id="13" name="">
             <a:extLst xmlns:a="http://schemas.openxmlformats.org/drawingml/2006/main">
               <a:ext uri="{FF2B5EF4-FFF2-40B4-BE49-F238E27FC236}">
-                <a16:creationId xmlns:a16="http://schemas.microsoft.com/office/drawing/2014/main" id="{30597752-DC63-451A-AABD-7F4C2875A5CE}"/>
+                <a16:creationId xmlns:a16="http://schemas.microsoft.com/office/drawing/2014/main" id="{006AD432-E8B5-4866-B9BD-D17856FAEE44}"/>
               </a:ext>
             </a:extLst>
           </p:cNvPr>
@@ -3509,7 +3509,7 @@
           <p:cNvPr id="14" name="">
             <a:extLst xmlns:a="http://schemas.openxmlformats.org/drawingml/2006/main">
               <a:ext uri="{FF2B5EF4-FFF2-40B4-BE49-F238E27FC236}">
-                <a16:creationId xmlns:a16="http://schemas.microsoft.com/office/drawing/2014/main" id="{6857FAA2-F47F-41EE-907E-2483405DA6F6}"/>
+                <a16:creationId xmlns:a16="http://schemas.microsoft.com/office/drawing/2014/main" id="{A116A6B1-9186-492D-A63F-4286BC1038F7}"/>
               </a:ext>
             </a:extLst>
           </p:cNvPr>
@@ -3571,7 +3571,7 @@
           <p:cNvPr id="15" name="">
             <a:extLst xmlns:a="http://schemas.openxmlformats.org/drawingml/2006/main">
               <a:ext uri="{FF2B5EF4-FFF2-40B4-BE49-F238E27FC236}">
-                <a16:creationId xmlns:a16="http://schemas.microsoft.com/office/drawing/2014/main" id="{BD49E166-CCF0-4E5C-BA86-98298B242382}"/>
+                <a16:creationId xmlns:a16="http://schemas.microsoft.com/office/drawing/2014/main" id="{B4226696-769E-4DFF-A468-311DB7EAC172}"/>
               </a:ext>
             </a:extLst>
           </p:cNvPr>
@@ -3687,7 +3687,7 @@
           <p:cNvPr id="16" name="">
             <a:extLst xmlns:a="http://schemas.openxmlformats.org/drawingml/2006/main">
               <a:ext uri="{FF2B5EF4-FFF2-40B4-BE49-F238E27FC236}">
-                <a16:creationId xmlns:a16="http://schemas.microsoft.com/office/drawing/2014/main" id="{E1374650-45E4-4FF3-93EB-BD641AFE5324}"/>
+                <a16:creationId xmlns:a16="http://schemas.microsoft.com/office/drawing/2014/main" id="{D289B838-A2A0-4E2F-AD6D-9360F3F2B73E}"/>
               </a:ext>
             </a:extLst>
           </p:cNvPr>
@@ -3749,7 +3749,7 @@
     </p:spTree>
     <p:extLst>
       <p:ext uri="{BB962C8B-B14F-4D97-AF65-F5344CB8AC3E}">
-        <p14:creationId xmlns:p14="http://schemas.microsoft.com/office/powerpoint/2010/main" val="1489633987"/>
+        <p14:creationId xmlns:p14="http://schemas.microsoft.com/office/powerpoint/2010/main" val="2100871234"/>
       </p:ext>
     </p:extLst>
   </p:cSld>
@@ -3780,7 +3780,7 @@
           <p:cNvPr id="25" name="">
             <a:extLst xmlns:a="http://schemas.openxmlformats.org/drawingml/2006/main">
               <a:ext uri="{FF2B5EF4-FFF2-40B4-BE49-F238E27FC236}">
-                <a16:creationId xmlns:a16="http://schemas.microsoft.com/office/drawing/2014/main" id="{8AB906A1-C483-4872-8EDF-6DA8BC20564F}"/>
+                <a16:creationId xmlns:a16="http://schemas.microsoft.com/office/drawing/2014/main" id="{06B9FECB-69E6-432D-9812-F7F514690DC9}"/>
               </a:ext>
             </a:extLst>
           </p:cNvPr>
@@ -3811,7 +3811,7 @@
           <p:cNvPr id="2" name="">
             <a:extLst xmlns:a="http://schemas.openxmlformats.org/drawingml/2006/main">
               <a:ext uri="{FF2B5EF4-FFF2-40B4-BE49-F238E27FC236}">
-                <a16:creationId xmlns:a16="http://schemas.microsoft.com/office/drawing/2014/main" id="{87216867-C297-468C-A5D4-8DD14932B2DE}"/>
+                <a16:creationId xmlns:a16="http://schemas.microsoft.com/office/drawing/2014/main" id="{5A0AB683-FA17-43FF-B9F4-178529C91D05}"/>
               </a:ext>
             </a:extLst>
           </p:cNvPr>
@@ -3863,7 +3863,7 @@
                 <a:ea typeface="Aptos"/>
                 <a:cs typeface="Aptos"/>
               </a:rPr>
-              <a:t>BANKEN</a:t>
+              <a:t>WELTWIRTSCHAFT</a:t>
             </a:r>
           </a:p>
         </p:txBody>
@@ -3873,7 +3873,7 @@
           <p:cNvPr id="3" name="">
             <a:extLst xmlns:a="http://schemas.openxmlformats.org/drawingml/2006/main">
               <a:ext uri="{FF2B5EF4-FFF2-40B4-BE49-F238E27FC236}">
-                <a16:creationId xmlns:a16="http://schemas.microsoft.com/office/drawing/2014/main" id="{E7AC11F7-2D02-49EA-8739-363D8C05B41E}"/>
+                <a16:creationId xmlns:a16="http://schemas.microsoft.com/office/drawing/2014/main" id="{7C33DDCC-B967-4CF1-9891-3603897E949A}"/>
               </a:ext>
             </a:extLst>
           </p:cNvPr>
@@ -3907,7 +3907,7 @@
                 <a:spcPct val="108000"/>
               </a:lnSpc>
               <a:buNone/>
-              <a:defRPr sz="3150" b="1">
+              <a:defRPr sz="2250" b="1">
                 <a:solidFill>
                   <a:srgbClr val="071426"/>
                 </a:solidFill>
@@ -3917,7 +3917,7 @@
               </a:defRPr>
             </a:pPr>
             <a:r>
-              <a:rPr sz="3150" b="1">
+              <a:rPr sz="2250" b="1">
                 <a:solidFill>
                   <a:srgbClr val="071426"/>
                 </a:solidFill>
@@ -3935,7 +3935,7 @@
           <p:cNvPr id="4" name="">
             <a:extLst xmlns:a="http://schemas.openxmlformats.org/drawingml/2006/main">
               <a:ext uri="{FF2B5EF4-FFF2-40B4-BE49-F238E27FC236}">
-                <a16:creationId xmlns:a16="http://schemas.microsoft.com/office/drawing/2014/main" id="{481690C6-F57C-44E4-9FC5-59D04CDE291A}"/>
+                <a16:creationId xmlns:a16="http://schemas.microsoft.com/office/drawing/2014/main" id="{C9FAE903-5F0F-4913-84D1-60BC392306AD}"/>
               </a:ext>
             </a:extLst>
           </p:cNvPr>
@@ -3970,7 +3970,7 @@
           <p:nvPr/>
         </p:nvPicPr>
         <p:blipFill>
-          <a:blip xmlns:r="http://schemas.openxmlformats.org/officeDocument/2006/relationships" xmlns:a="http://schemas.openxmlformats.org/drawingml/2006/main" r:embed="Rad1cf50a0a5141a9"/>
+          <a:blip xmlns:r="http://schemas.openxmlformats.org/officeDocument/2006/relationships" xmlns:a="http://schemas.openxmlformats.org/drawingml/2006/main" r:embed="R3851b8faabf74f60"/>
           <a:srcRect xmlns:a="http://schemas.openxmlformats.org/drawingml/2006/main" l="0" t="0" r="0" b="0"/>
           <a:stretch xmlns:a="http://schemas.openxmlformats.org/drawingml/2006/main">
             <a:fillRect l="0" t="0" r="0" b="0"/>
@@ -3991,7 +3991,7 @@
           <p:cNvPr id="6" name="">
             <a:extLst xmlns:a="http://schemas.openxmlformats.org/drawingml/2006/main">
               <a:ext uri="{FF2B5EF4-FFF2-40B4-BE49-F238E27FC236}">
-                <a16:creationId xmlns:a16="http://schemas.microsoft.com/office/drawing/2014/main" id="{43E3C83A-2932-4B4C-83DD-9FE829C8B1EA}"/>
+                <a16:creationId xmlns:a16="http://schemas.microsoft.com/office/drawing/2014/main" id="{803FE060-DD10-436E-93C5-36BB38B846AE}"/>
               </a:ext>
             </a:extLst>
           </p:cNvPr>
@@ -4053,7 +4053,7 @@
           <p:cNvPr id="7" name="">
             <a:extLst xmlns:a="http://schemas.openxmlformats.org/drawingml/2006/main">
               <a:ext uri="{FF2B5EF4-FFF2-40B4-BE49-F238E27FC236}">
-                <a16:creationId xmlns:a16="http://schemas.microsoft.com/office/drawing/2014/main" id="{09D1F62A-D2FA-423B-9B92-A17DEEF740F3}"/>
+                <a16:creationId xmlns:a16="http://schemas.microsoft.com/office/drawing/2014/main" id="{701C6509-D169-43C4-8AC8-285B28863BA8}"/>
               </a:ext>
             </a:extLst>
           </p:cNvPr>
@@ -4115,7 +4115,7 @@
           <p:cNvPr id="8" name="">
             <a:extLst xmlns:a="http://schemas.openxmlformats.org/drawingml/2006/main">
               <a:ext uri="{FF2B5EF4-FFF2-40B4-BE49-F238E27FC236}">
-                <a16:creationId xmlns:a16="http://schemas.microsoft.com/office/drawing/2014/main" id="{80988A66-9FE3-4D74-9116-5370A2162388}"/>
+                <a16:creationId xmlns:a16="http://schemas.microsoft.com/office/drawing/2014/main" id="{043441AC-C157-46F1-AEFD-D847A01EB2B4}"/>
               </a:ext>
             </a:extLst>
           </p:cNvPr>
@@ -4150,7 +4150,7 @@
           <p:cNvPr id="9" name="">
             <a:extLst xmlns:a="http://schemas.openxmlformats.org/drawingml/2006/main">
               <a:ext uri="{FF2B5EF4-FFF2-40B4-BE49-F238E27FC236}">
-                <a16:creationId xmlns:a16="http://schemas.microsoft.com/office/drawing/2014/main" id="{D0E0F960-82DD-44DE-8D2C-B195DC637C91}"/>
+                <a16:creationId xmlns:a16="http://schemas.microsoft.com/office/drawing/2014/main" id="{08009DA9-637A-4FFA-B57B-3B64DC7D8E3E}"/>
               </a:ext>
             </a:extLst>
           </p:cNvPr>
@@ -4181,7 +4181,7 @@
           <p:cNvPr id="10" name="">
             <a:extLst xmlns:a="http://schemas.openxmlformats.org/drawingml/2006/main">
               <a:ext uri="{FF2B5EF4-FFF2-40B4-BE49-F238E27FC236}">
-                <a16:creationId xmlns:a16="http://schemas.microsoft.com/office/drawing/2014/main" id="{3BD619EC-3DC3-40D3-8769-81D685316976}"/>
+                <a16:creationId xmlns:a16="http://schemas.microsoft.com/office/drawing/2014/main" id="{5D9F2E6C-41D2-472F-975E-6240033B8254}"/>
               </a:ext>
             </a:extLst>
           </p:cNvPr>
@@ -4243,7 +4243,7 @@
           <p:cNvPr id="11" name="">
             <a:extLst xmlns:a="http://schemas.openxmlformats.org/drawingml/2006/main">
               <a:ext uri="{FF2B5EF4-FFF2-40B4-BE49-F238E27FC236}">
-                <a16:creationId xmlns:a16="http://schemas.microsoft.com/office/drawing/2014/main" id="{B203D017-3004-49A8-A6B3-323FEF470C98}"/>
+                <a16:creationId xmlns:a16="http://schemas.microsoft.com/office/drawing/2014/main" id="{41F16758-4BF5-4EC7-A06A-FA9DD38A931A}"/>
               </a:ext>
             </a:extLst>
           </p:cNvPr>
@@ -4305,7 +4305,7 @@
           <p:cNvPr id="12" name="">
             <a:extLst xmlns:a="http://schemas.openxmlformats.org/drawingml/2006/main">
               <a:ext uri="{FF2B5EF4-FFF2-40B4-BE49-F238E27FC236}">
-                <a16:creationId xmlns:a16="http://schemas.microsoft.com/office/drawing/2014/main" id="{FE5A990A-FB63-458B-B7E7-26E3D8950396}"/>
+                <a16:creationId xmlns:a16="http://schemas.microsoft.com/office/drawing/2014/main" id="{A55ECCAE-7339-4BF2-859E-E7F42C2FA145}"/>
               </a:ext>
             </a:extLst>
           </p:cNvPr>
@@ -4340,7 +4340,7 @@
           <p:cNvPr id="13" name="">
             <a:extLst xmlns:a="http://schemas.openxmlformats.org/drawingml/2006/main">
               <a:ext uri="{FF2B5EF4-FFF2-40B4-BE49-F238E27FC236}">
-                <a16:creationId xmlns:a16="http://schemas.microsoft.com/office/drawing/2014/main" id="{C17AC745-B65F-4248-BDBA-88654AD1A0E4}"/>
+                <a16:creationId xmlns:a16="http://schemas.microsoft.com/office/drawing/2014/main" id="{0364BAAC-BF0A-41F1-8620-6A4BEFF3662E}"/>
               </a:ext>
             </a:extLst>
           </p:cNvPr>
@@ -4371,7 +4371,7 @@
           <p:cNvPr id="14" name="">
             <a:extLst xmlns:a="http://schemas.openxmlformats.org/drawingml/2006/main">
               <a:ext uri="{FF2B5EF4-FFF2-40B4-BE49-F238E27FC236}">
-                <a16:creationId xmlns:a16="http://schemas.microsoft.com/office/drawing/2014/main" id="{EDD3C5E0-8EA8-49C8-A864-F517D7BC477B}"/>
+                <a16:creationId xmlns:a16="http://schemas.microsoft.com/office/drawing/2014/main" id="{FC1FD71E-565E-410D-BC3A-8530C09E9601}"/>
               </a:ext>
             </a:extLst>
           </p:cNvPr>
@@ -4433,7 +4433,7 @@
           <p:cNvPr id="15" name="">
             <a:extLst xmlns:a="http://schemas.openxmlformats.org/drawingml/2006/main">
               <a:ext uri="{FF2B5EF4-FFF2-40B4-BE49-F238E27FC236}">
-                <a16:creationId xmlns:a16="http://schemas.microsoft.com/office/drawing/2014/main" id="{9FDC2B65-E52A-4D2F-94FB-B92C2E1614F9}"/>
+                <a16:creationId xmlns:a16="http://schemas.microsoft.com/office/drawing/2014/main" id="{41621ECB-CDF0-4912-823F-85B224503A0D}"/>
               </a:ext>
             </a:extLst>
           </p:cNvPr>
@@ -4485,7 +4485,7 @@
                 <a:ea typeface="Aptos"/>
                 <a:cs typeface="Aptos"/>
               </a:rPr>
-              <a:t>Reiseeinnahmen 2025</a:t>
+              <a:t>Reiseeinnahmen 2025: 23,6268 Mrd. Euro.</a:t>
             </a:r>
           </a:p>
         </p:txBody>
@@ -4495,7 +4495,7 @@
           <p:cNvPr id="16" name="">
             <a:extLst xmlns:a="http://schemas.openxmlformats.org/drawingml/2006/main">
               <a:ext uri="{FF2B5EF4-FFF2-40B4-BE49-F238E27FC236}">
-                <a16:creationId xmlns:a16="http://schemas.microsoft.com/office/drawing/2014/main" id="{EB4F7303-50A6-4766-9E08-A1141C2800C9}"/>
+                <a16:creationId xmlns:a16="http://schemas.microsoft.com/office/drawing/2014/main" id="{0A500D1D-0876-4D87-AB13-596A1712CF4B}"/>
               </a:ext>
             </a:extLst>
           </p:cNvPr>
@@ -4530,7 +4530,7 @@
           <p:cNvPr id="17" name="">
             <a:extLst xmlns:a="http://schemas.openxmlformats.org/drawingml/2006/main">
               <a:ext uri="{FF2B5EF4-FFF2-40B4-BE49-F238E27FC236}">
-                <a16:creationId xmlns:a16="http://schemas.microsoft.com/office/drawing/2014/main" id="{5094EEE5-2C63-447E-AAA3-82DF339C51A2}"/>
+                <a16:creationId xmlns:a16="http://schemas.microsoft.com/office/drawing/2014/main" id="{38D1CFDF-A64E-48F5-9386-1D5D6F9A4489}"/>
               </a:ext>
             </a:extLst>
           </p:cNvPr>
@@ -4561,7 +4561,7 @@
           <p:cNvPr id="18" name="">
             <a:extLst xmlns:a="http://schemas.openxmlformats.org/drawingml/2006/main">
               <a:ext uri="{FF2B5EF4-FFF2-40B4-BE49-F238E27FC236}">
-                <a16:creationId xmlns:a16="http://schemas.microsoft.com/office/drawing/2014/main" id="{D622B8F0-BB6A-45E6-995B-AE10032653F8}"/>
+                <a16:creationId xmlns:a16="http://schemas.microsoft.com/office/drawing/2014/main" id="{6F2CF5C0-5509-4EA3-95F9-496ACA061976}"/>
               </a:ext>
             </a:extLst>
           </p:cNvPr>
@@ -4623,7 +4623,7 @@
           <p:cNvPr id="19" name="">
             <a:extLst xmlns:a="http://schemas.openxmlformats.org/drawingml/2006/main">
               <a:ext uri="{FF2B5EF4-FFF2-40B4-BE49-F238E27FC236}">
-                <a16:creationId xmlns:a16="http://schemas.microsoft.com/office/drawing/2014/main" id="{E4F4F7EC-EBAA-468A-8BD7-82D1B62D6C21}"/>
+                <a16:creationId xmlns:a16="http://schemas.microsoft.com/office/drawing/2014/main" id="{6F011ADA-84DA-4F05-9663-3137F0C94C02}"/>
               </a:ext>
             </a:extLst>
           </p:cNvPr>
@@ -4685,7 +4685,7 @@
           <p:cNvPr id="20" name="">
             <a:extLst xmlns:a="http://schemas.openxmlformats.org/drawingml/2006/main">
               <a:ext uri="{FF2B5EF4-FFF2-40B4-BE49-F238E27FC236}">
-                <a16:creationId xmlns:a16="http://schemas.microsoft.com/office/drawing/2014/main" id="{B583AC35-427E-488F-A084-E9EFAE2EDA9B}"/>
+                <a16:creationId xmlns:a16="http://schemas.microsoft.com/office/drawing/2014/main" id="{9E273B29-32E9-4F0F-A25B-ACD6C6A921D8}"/>
               </a:ext>
             </a:extLst>
           </p:cNvPr>
@@ -4720,7 +4720,7 @@
           <p:cNvPr id="21" name="">
             <a:extLst xmlns:a="http://schemas.openxmlformats.org/drawingml/2006/main">
               <a:ext uri="{FF2B5EF4-FFF2-40B4-BE49-F238E27FC236}">
-                <a16:creationId xmlns:a16="http://schemas.microsoft.com/office/drawing/2014/main" id="{9EF8D141-60D3-41EB-ABE1-DAE87CD24956}"/>
+                <a16:creationId xmlns:a16="http://schemas.microsoft.com/office/drawing/2014/main" id="{002F4B27-EBE5-4780-8815-941760617212}"/>
               </a:ext>
             </a:extLst>
           </p:cNvPr>
@@ -4751,7 +4751,7 @@
           <p:cNvPr id="22" name="">
             <a:extLst xmlns:a="http://schemas.openxmlformats.org/drawingml/2006/main">
               <a:ext uri="{FF2B5EF4-FFF2-40B4-BE49-F238E27FC236}">
-                <a16:creationId xmlns:a16="http://schemas.microsoft.com/office/drawing/2014/main" id="{8D019C44-E4F0-49C9-8A85-2282F0FB3CF8}"/>
+                <a16:creationId xmlns:a16="http://schemas.microsoft.com/office/drawing/2014/main" id="{79635136-9C57-40EE-BDE3-D3CA36A6C9FD}"/>
               </a:ext>
             </a:extLst>
           </p:cNvPr>
@@ -4813,7 +4813,7 @@
           <p:cNvPr id="23" name="">
             <a:extLst xmlns:a="http://schemas.openxmlformats.org/drawingml/2006/main">
               <a:ext uri="{FF2B5EF4-FFF2-40B4-BE49-F238E27FC236}">
-                <a16:creationId xmlns:a16="http://schemas.microsoft.com/office/drawing/2014/main" id="{76806092-21DE-49EA-A17F-B7103A100848}"/>
+                <a16:creationId xmlns:a16="http://schemas.microsoft.com/office/drawing/2014/main" id="{622DC706-3026-4D20-93CD-B469067CE56E}"/>
               </a:ext>
             </a:extLst>
           </p:cNvPr>
@@ -4875,7 +4875,7 @@
           <p:cNvPr id="24" name="">
             <a:extLst xmlns:a="http://schemas.openxmlformats.org/drawingml/2006/main">
               <a:ext uri="{FF2B5EF4-FFF2-40B4-BE49-F238E27FC236}">
-                <a16:creationId xmlns:a16="http://schemas.microsoft.com/office/drawing/2014/main" id="{7B482819-E040-4693-82AE-CAA3587CB563}"/>
+                <a16:creationId xmlns:a16="http://schemas.microsoft.com/office/drawing/2014/main" id="{78FD9FDC-1EF9-4ABF-83FC-6715006DEC69}"/>
               </a:ext>
             </a:extLst>
           </p:cNvPr>
@@ -4937,7 +4937,7 @@
     </p:spTree>
     <p:extLst>
       <p:ext uri="{BB962C8B-B14F-4D97-AF65-F5344CB8AC3E}">
-        <p14:creationId xmlns:p14="http://schemas.microsoft.com/office/powerpoint/2010/main" val="314677135"/>
+        <p14:creationId xmlns:p14="http://schemas.microsoft.com/office/powerpoint/2010/main" val="153558359"/>
       </p:ext>
     </p:extLst>
   </p:cSld>
@@ -4968,7 +4968,7 @@
           <p:cNvPr id="17" name="">
             <a:extLst xmlns:a="http://schemas.openxmlformats.org/drawingml/2006/main">
               <a:ext uri="{FF2B5EF4-FFF2-40B4-BE49-F238E27FC236}">
-                <a16:creationId xmlns:a16="http://schemas.microsoft.com/office/drawing/2014/main" id="{5FE14F40-7200-4056-AB94-BB6859D0B3AF}"/>
+                <a16:creationId xmlns:a16="http://schemas.microsoft.com/office/drawing/2014/main" id="{1D02005B-30DD-49C1-B87D-9E1573681A98}"/>
               </a:ext>
             </a:extLst>
           </p:cNvPr>
@@ -4999,7 +4999,7 @@
           <p:cNvPr id="2" name="">
             <a:extLst xmlns:a="http://schemas.openxmlformats.org/drawingml/2006/main">
               <a:ext uri="{FF2B5EF4-FFF2-40B4-BE49-F238E27FC236}">
-                <a16:creationId xmlns:a16="http://schemas.microsoft.com/office/drawing/2014/main" id="{7EF45329-9869-44DB-B158-4933E2AF0403}"/>
+                <a16:creationId xmlns:a16="http://schemas.microsoft.com/office/drawing/2014/main" id="{B2C87AC0-818A-46A4-A692-91410EFB9414}"/>
               </a:ext>
             </a:extLst>
           </p:cNvPr>
@@ -5051,7 +5051,7 @@
                 <a:ea typeface="Aptos"/>
                 <a:cs typeface="Aptos"/>
               </a:rPr>
-              <a:t>WELTWIRTSCHAFT</a:t>
+              <a:t>RECHT</a:t>
             </a:r>
           </a:p>
         </p:txBody>
@@ -5061,7 +5061,7 @@
           <p:cNvPr id="3" name="">
             <a:extLst xmlns:a="http://schemas.openxmlformats.org/drawingml/2006/main">
               <a:ext uri="{FF2B5EF4-FFF2-40B4-BE49-F238E27FC236}">
-                <a16:creationId xmlns:a16="http://schemas.microsoft.com/office/drawing/2014/main" id="{0F686154-ACA9-4F20-BD5F-313F8B1ABB31}"/>
+                <a16:creationId xmlns:a16="http://schemas.microsoft.com/office/drawing/2014/main" id="{6D203C38-1529-48F7-A25B-2CBFACAF57F1}"/>
               </a:ext>
             </a:extLst>
           </p:cNvPr>
@@ -5095,7 +5095,7 @@
                 <a:spcPct val="108000"/>
               </a:lnSpc>
               <a:buNone/>
-              <a:defRPr sz="3150" b="1">
+              <a:defRPr sz="2550" b="1">
                 <a:solidFill>
                   <a:srgbClr val="071426"/>
                 </a:solidFill>
@@ -5105,7 +5105,7 @@
               </a:defRPr>
             </a:pPr>
             <a:r>
-              <a:rPr sz="3150" b="1">
+              <a:rPr sz="2550" b="1">
                 <a:solidFill>
                   <a:srgbClr val="071426"/>
                 </a:solidFill>
@@ -5123,7 +5123,7 @@
           <p:cNvPr id="4" name="">
             <a:extLst xmlns:a="http://schemas.openxmlformats.org/drawingml/2006/main">
               <a:ext uri="{FF2B5EF4-FFF2-40B4-BE49-F238E27FC236}">
-                <a16:creationId xmlns:a16="http://schemas.microsoft.com/office/drawing/2014/main" id="{852CC8F6-C91C-4A7B-BE32-A608A1FE1F16}"/>
+                <a16:creationId xmlns:a16="http://schemas.microsoft.com/office/drawing/2014/main" id="{01B8B646-5F6F-4981-A76B-3778CA16A941}"/>
               </a:ext>
             </a:extLst>
           </p:cNvPr>
@@ -5158,7 +5158,7 @@
           <p:nvPr/>
         </p:nvPicPr>
         <p:blipFill>
-          <a:blip xmlns:r="http://schemas.openxmlformats.org/officeDocument/2006/relationships" xmlns:a="http://schemas.openxmlformats.org/drawingml/2006/main" r:embed="Rdbbfb19e88144065"/>
+          <a:blip xmlns:r="http://schemas.openxmlformats.org/officeDocument/2006/relationships" xmlns:a="http://schemas.openxmlformats.org/drawingml/2006/main" r:embed="Rf57f25858d3e4190"/>
           <a:srcRect xmlns:a="http://schemas.openxmlformats.org/drawingml/2006/main" l="0" t="0" r="0" b="0"/>
           <a:stretch xmlns:a="http://schemas.openxmlformats.org/drawingml/2006/main">
             <a:fillRect l="0" t="0" r="0" b="0"/>
@@ -5179,7 +5179,7 @@
           <p:cNvPr id="6" name="">
             <a:extLst xmlns:a="http://schemas.openxmlformats.org/drawingml/2006/main">
               <a:ext uri="{FF2B5EF4-FFF2-40B4-BE49-F238E27FC236}">
-                <a16:creationId xmlns:a16="http://schemas.microsoft.com/office/drawing/2014/main" id="{5A07878C-19BB-4C9C-831C-7C2CF422041E}"/>
+                <a16:creationId xmlns:a16="http://schemas.microsoft.com/office/drawing/2014/main" id="{38C0FE62-4434-4A1C-814B-D0F7D3237024}"/>
               </a:ext>
             </a:extLst>
           </p:cNvPr>
@@ -5241,7 +5241,7 @@
           <p:cNvPr id="7" name="">
             <a:extLst xmlns:a="http://schemas.openxmlformats.org/drawingml/2006/main">
               <a:ext uri="{FF2B5EF4-FFF2-40B4-BE49-F238E27FC236}">
-                <a16:creationId xmlns:a16="http://schemas.microsoft.com/office/drawing/2014/main" id="{6F63CE27-22F4-4C4E-9C9B-FD1CF3E85EFE}"/>
+                <a16:creationId xmlns:a16="http://schemas.microsoft.com/office/drawing/2014/main" id="{C455AD41-EEAE-476F-A558-E2FD73DA9029}"/>
               </a:ext>
             </a:extLst>
           </p:cNvPr>
@@ -5303,7 +5303,7 @@
           <p:cNvPr id="8" name="">
             <a:extLst xmlns:a="http://schemas.openxmlformats.org/drawingml/2006/main">
               <a:ext uri="{FF2B5EF4-FFF2-40B4-BE49-F238E27FC236}">
-                <a16:creationId xmlns:a16="http://schemas.microsoft.com/office/drawing/2014/main" id="{3CDDD46B-1B89-4B66-AF04-A830E66EE6F5}"/>
+                <a16:creationId xmlns:a16="http://schemas.microsoft.com/office/drawing/2014/main" id="{635CCCEE-9293-4557-AAC3-59FD6EEDA43A}"/>
               </a:ext>
             </a:extLst>
           </p:cNvPr>
@@ -5338,7 +5338,7 @@
           <p:cNvPr id="9" name="">
             <a:extLst xmlns:a="http://schemas.openxmlformats.org/drawingml/2006/main">
               <a:ext uri="{FF2B5EF4-FFF2-40B4-BE49-F238E27FC236}">
-                <a16:creationId xmlns:a16="http://schemas.microsoft.com/office/drawing/2014/main" id="{F95F3BB9-A88A-44BB-A538-DB24BC382724}"/>
+                <a16:creationId xmlns:a16="http://schemas.microsoft.com/office/drawing/2014/main" id="{A6BE39DC-4193-4EA2-B983-9012EC140D37}"/>
               </a:ext>
             </a:extLst>
           </p:cNvPr>
@@ -5369,7 +5369,7 @@
           <p:cNvPr id="10" name="">
             <a:extLst xmlns:a="http://schemas.openxmlformats.org/drawingml/2006/main">
               <a:ext uri="{FF2B5EF4-FFF2-40B4-BE49-F238E27FC236}">
-                <a16:creationId xmlns:a16="http://schemas.microsoft.com/office/drawing/2014/main" id="{94F345C9-13D0-4EC3-AF9E-DD328920E431}"/>
+                <a16:creationId xmlns:a16="http://schemas.microsoft.com/office/drawing/2014/main" id="{155A66ED-1BF6-43F7-89A3-FF98A3EE3006}"/>
               </a:ext>
             </a:extLst>
           </p:cNvPr>
@@ -5431,7 +5431,7 @@
           <p:cNvPr id="11" name="">
             <a:extLst xmlns:a="http://schemas.openxmlformats.org/drawingml/2006/main">
               <a:ext uri="{FF2B5EF4-FFF2-40B4-BE49-F238E27FC236}">
-                <a16:creationId xmlns:a16="http://schemas.microsoft.com/office/drawing/2014/main" id="{ED9F79D8-94F8-4A9C-92C2-ED4EA1471B9A}"/>
+                <a16:creationId xmlns:a16="http://schemas.microsoft.com/office/drawing/2014/main" id="{7256F968-8B39-4E6E-8FD8-44FC5BAFBA3B}"/>
               </a:ext>
             </a:extLst>
           </p:cNvPr>
@@ -5547,7 +5547,7 @@
           <p:cNvPr id="12" name="">
             <a:extLst xmlns:a="http://schemas.openxmlformats.org/drawingml/2006/main">
               <a:ext uri="{FF2B5EF4-FFF2-40B4-BE49-F238E27FC236}">
-                <a16:creationId xmlns:a16="http://schemas.microsoft.com/office/drawing/2014/main" id="{116276D5-8203-498E-8944-954061607C25}"/>
+                <a16:creationId xmlns:a16="http://schemas.microsoft.com/office/drawing/2014/main" id="{7DE52157-C8E2-429F-AEFD-3F04DD0E3B3E}"/>
               </a:ext>
             </a:extLst>
           </p:cNvPr>
@@ -5582,7 +5582,7 @@
           <p:cNvPr id="13" name="">
             <a:extLst xmlns:a="http://schemas.openxmlformats.org/drawingml/2006/main">
               <a:ext uri="{FF2B5EF4-FFF2-40B4-BE49-F238E27FC236}">
-                <a16:creationId xmlns:a16="http://schemas.microsoft.com/office/drawing/2014/main" id="{07618E91-6B7E-4F72-8E50-503D495A6117}"/>
+                <a16:creationId xmlns:a16="http://schemas.microsoft.com/office/drawing/2014/main" id="{7E93083F-A955-4119-96A0-FF1452AA3735}"/>
               </a:ext>
             </a:extLst>
           </p:cNvPr>
@@ -5613,7 +5613,7 @@
           <p:cNvPr id="14" name="">
             <a:extLst xmlns:a="http://schemas.openxmlformats.org/drawingml/2006/main">
               <a:ext uri="{FF2B5EF4-FFF2-40B4-BE49-F238E27FC236}">
-                <a16:creationId xmlns:a16="http://schemas.microsoft.com/office/drawing/2014/main" id="{59F12744-E38B-4877-9508-434C34288BFC}"/>
+                <a16:creationId xmlns:a16="http://schemas.microsoft.com/office/drawing/2014/main" id="{F334B574-7144-4CA4-AF0E-12125BAEBF99}"/>
               </a:ext>
             </a:extLst>
           </p:cNvPr>
@@ -5675,7 +5675,7 @@
           <p:cNvPr id="15" name="">
             <a:extLst xmlns:a="http://schemas.openxmlformats.org/drawingml/2006/main">
               <a:ext uri="{FF2B5EF4-FFF2-40B4-BE49-F238E27FC236}">
-                <a16:creationId xmlns:a16="http://schemas.microsoft.com/office/drawing/2014/main" id="{C7B31CC5-C0D3-4C2A-B228-3DD373CCA085}"/>
+                <a16:creationId xmlns:a16="http://schemas.microsoft.com/office/drawing/2014/main" id="{6A5C3895-FE0B-4D62-9178-E5B26D934B1C}"/>
               </a:ext>
             </a:extLst>
           </p:cNvPr>
@@ -5764,7 +5764,7 @@
           <p:cNvPr id="16" name="">
             <a:extLst xmlns:a="http://schemas.openxmlformats.org/drawingml/2006/main">
               <a:ext uri="{FF2B5EF4-FFF2-40B4-BE49-F238E27FC236}">
-                <a16:creationId xmlns:a16="http://schemas.microsoft.com/office/drawing/2014/main" id="{F9F2D951-7EF6-4A54-A58F-9384BA75CE02}"/>
+                <a16:creationId xmlns:a16="http://schemas.microsoft.com/office/drawing/2014/main" id="{231FCD0A-1FD8-480E-BCB1-D66DAD7B406E}"/>
               </a:ext>
             </a:extLst>
           </p:cNvPr>
@@ -5826,7 +5826,7 @@
     </p:spTree>
     <p:extLst>
       <p:ext uri="{BB962C8B-B14F-4D97-AF65-F5344CB8AC3E}">
-        <p14:creationId xmlns:p14="http://schemas.microsoft.com/office/powerpoint/2010/main" val="355504830"/>
+        <p14:creationId xmlns:p14="http://schemas.microsoft.com/office/powerpoint/2010/main" val="1111585900"/>
       </p:ext>
     </p:extLst>
   </p:cSld>
@@ -5857,7 +5857,7 @@
           <p:cNvPr id="32" name="">
             <a:extLst xmlns:a="http://schemas.openxmlformats.org/drawingml/2006/main">
               <a:ext uri="{FF2B5EF4-FFF2-40B4-BE49-F238E27FC236}">
-                <a16:creationId xmlns:a16="http://schemas.microsoft.com/office/drawing/2014/main" id="{DF891060-7224-432B-8077-05595120A3DF}"/>
+                <a16:creationId xmlns:a16="http://schemas.microsoft.com/office/drawing/2014/main" id="{AB25E895-2CAA-40B7-835B-6BACD111C05B}"/>
               </a:ext>
             </a:extLst>
           </p:cNvPr>
@@ -5888,7 +5888,7 @@
           <p:cNvPr id="2" name="">
             <a:extLst xmlns:a="http://schemas.openxmlformats.org/drawingml/2006/main">
               <a:ext uri="{FF2B5EF4-FFF2-40B4-BE49-F238E27FC236}">
-                <a16:creationId xmlns:a16="http://schemas.microsoft.com/office/drawing/2014/main" id="{0D5C0C5F-7FF5-44B8-A543-7A28B6803D3F}"/>
+                <a16:creationId xmlns:a16="http://schemas.microsoft.com/office/drawing/2014/main" id="{B9DFB5F2-83A7-4081-AC44-AA5BF1D18BAD}"/>
               </a:ext>
             </a:extLst>
           </p:cNvPr>
@@ -5940,7 +5940,7 @@
                 <a:ea typeface="Aptos"/>
                 <a:cs typeface="Aptos"/>
               </a:rPr>
-              <a:t>WELTWIRTSCHAFT</a:t>
+              <a:t>RISIKEN</a:t>
             </a:r>
           </a:p>
         </p:txBody>
@@ -5950,7 +5950,7 @@
           <p:cNvPr id="3" name="">
             <a:extLst xmlns:a="http://schemas.openxmlformats.org/drawingml/2006/main">
               <a:ext uri="{FF2B5EF4-FFF2-40B4-BE49-F238E27FC236}">
-                <a16:creationId xmlns:a16="http://schemas.microsoft.com/office/drawing/2014/main" id="{341BF731-FC7F-4DAB-B95B-2D52760AE8A3}"/>
+                <a16:creationId xmlns:a16="http://schemas.microsoft.com/office/drawing/2014/main" id="{37C4BA4B-916A-491F-AF59-8CAFB947DF30}"/>
               </a:ext>
             </a:extLst>
           </p:cNvPr>
@@ -5984,7 +5984,7 @@
                 <a:spcPct val="108000"/>
               </a:lnSpc>
               <a:buNone/>
-              <a:defRPr sz="3150" b="1">
+              <a:defRPr sz="2550" b="1">
                 <a:solidFill>
                   <a:srgbClr val="071426"/>
                 </a:solidFill>
@@ -5994,7 +5994,7 @@
               </a:defRPr>
             </a:pPr>
             <a:r>
-              <a:rPr sz="3150" b="1">
+              <a:rPr sz="2550" b="1">
                 <a:solidFill>
                   <a:srgbClr val="071426"/>
                 </a:solidFill>
@@ -6012,7 +6012,7 @@
           <p:cNvPr id="4" name="">
             <a:extLst xmlns:a="http://schemas.openxmlformats.org/drawingml/2006/main">
               <a:ext uri="{FF2B5EF4-FFF2-40B4-BE49-F238E27FC236}">
-                <a16:creationId xmlns:a16="http://schemas.microsoft.com/office/drawing/2014/main" id="{37B1EBB7-7ABC-48D9-A95F-B26108F30463}"/>
+                <a16:creationId xmlns:a16="http://schemas.microsoft.com/office/drawing/2014/main" id="{F12DA227-F0D0-4BCC-AF2E-8FF9D48E1A0D}"/>
               </a:ext>
             </a:extLst>
           </p:cNvPr>
@@ -6047,7 +6047,7 @@
           <p:nvPr/>
         </p:nvPicPr>
         <p:blipFill>
-          <a:blip xmlns:r="http://schemas.openxmlformats.org/officeDocument/2006/relationships" xmlns:a="http://schemas.openxmlformats.org/drawingml/2006/main" r:embed="R708ecc461f2f4e92"/>
+          <a:blip xmlns:r="http://schemas.openxmlformats.org/officeDocument/2006/relationships" xmlns:a="http://schemas.openxmlformats.org/drawingml/2006/main" r:embed="Rb7092dcd0710498c"/>
           <a:srcRect xmlns:a="http://schemas.openxmlformats.org/drawingml/2006/main" l="0" t="0" r="0" b="0"/>
           <a:stretch xmlns:a="http://schemas.openxmlformats.org/drawingml/2006/main">
             <a:fillRect l="0" t="0" r="0" b="0"/>
@@ -6068,7 +6068,7 @@
           <p:cNvPr id="6" name="">
             <a:extLst xmlns:a="http://schemas.openxmlformats.org/drawingml/2006/main">
               <a:ext uri="{FF2B5EF4-FFF2-40B4-BE49-F238E27FC236}">
-                <a16:creationId xmlns:a16="http://schemas.microsoft.com/office/drawing/2014/main" id="{790CB01A-74FD-422D-A688-1B1BCCC76B2A}"/>
+                <a16:creationId xmlns:a16="http://schemas.microsoft.com/office/drawing/2014/main" id="{5DE38A9C-4166-4334-B3B5-455B2FC4582F}"/>
               </a:ext>
             </a:extLst>
           </p:cNvPr>
@@ -6130,7 +6130,7 @@
           <p:cNvPr id="7" name="">
             <a:extLst xmlns:a="http://schemas.openxmlformats.org/drawingml/2006/main">
               <a:ext uri="{FF2B5EF4-FFF2-40B4-BE49-F238E27FC236}">
-                <a16:creationId xmlns:a16="http://schemas.microsoft.com/office/drawing/2014/main" id="{0FBD92A6-DA62-4E26-AC8B-CDB911640537}"/>
+                <a16:creationId xmlns:a16="http://schemas.microsoft.com/office/drawing/2014/main" id="{23C0BD5C-45C6-4A0A-8CF5-698FCBFD6FA7}"/>
               </a:ext>
             </a:extLst>
           </p:cNvPr>
@@ -6192,7 +6192,7 @@
           <p:cNvPr id="8" name="">
             <a:extLst xmlns:a="http://schemas.openxmlformats.org/drawingml/2006/main">
               <a:ext uri="{FF2B5EF4-FFF2-40B4-BE49-F238E27FC236}">
-                <a16:creationId xmlns:a16="http://schemas.microsoft.com/office/drawing/2014/main" id="{8265AE50-B6E0-4EC6-A950-12AA2A97A197}"/>
+                <a16:creationId xmlns:a16="http://schemas.microsoft.com/office/drawing/2014/main" id="{3CC75EF2-AEC5-48FB-AD6F-BC939B1D2EF7}"/>
               </a:ext>
             </a:extLst>
           </p:cNvPr>
@@ -6227,7 +6227,7 @@
           <p:cNvPr id="9" name="">
             <a:extLst xmlns:a="http://schemas.openxmlformats.org/drawingml/2006/main">
               <a:ext uri="{FF2B5EF4-FFF2-40B4-BE49-F238E27FC236}">
-                <a16:creationId xmlns:a16="http://schemas.microsoft.com/office/drawing/2014/main" id="{5B163634-9BD3-4DF1-A8BF-16FA365DBB15}"/>
+                <a16:creationId xmlns:a16="http://schemas.microsoft.com/office/drawing/2014/main" id="{098B7E7B-C10A-4111-B322-C922E9806718}"/>
               </a:ext>
             </a:extLst>
           </p:cNvPr>
@@ -6258,7 +6258,7 @@
           <p:cNvPr id="10" name="">
             <a:extLst xmlns:a="http://schemas.openxmlformats.org/drawingml/2006/main">
               <a:ext uri="{FF2B5EF4-FFF2-40B4-BE49-F238E27FC236}">
-                <a16:creationId xmlns:a16="http://schemas.microsoft.com/office/drawing/2014/main" id="{39C209E7-0E04-4F50-B202-29212AAE7861}"/>
+                <a16:creationId xmlns:a16="http://schemas.microsoft.com/office/drawing/2014/main" id="{42F872B8-F898-4F18-99B6-6FD9A70F15BB}"/>
               </a:ext>
             </a:extLst>
           </p:cNvPr>
@@ -6320,7 +6320,7 @@
           <p:cNvPr id="11" name="">
             <a:extLst xmlns:a="http://schemas.openxmlformats.org/drawingml/2006/main">
               <a:ext uri="{FF2B5EF4-FFF2-40B4-BE49-F238E27FC236}">
-                <a16:creationId xmlns:a16="http://schemas.microsoft.com/office/drawing/2014/main" id="{216E4A83-0322-4811-B9EA-995D1A103CA8}"/>
+                <a16:creationId xmlns:a16="http://schemas.microsoft.com/office/drawing/2014/main" id="{4514FA21-AB60-4B5E-8644-E68AA5487D2F}"/>
               </a:ext>
             </a:extLst>
           </p:cNvPr>
@@ -6382,7 +6382,7 @@
           <p:cNvPr id="12" name="">
             <a:extLst xmlns:a="http://schemas.openxmlformats.org/drawingml/2006/main">
               <a:ext uri="{FF2B5EF4-FFF2-40B4-BE49-F238E27FC236}">
-                <a16:creationId xmlns:a16="http://schemas.microsoft.com/office/drawing/2014/main" id="{415AD54C-C041-4042-8D01-F1BFCEE9C917}"/>
+                <a16:creationId xmlns:a16="http://schemas.microsoft.com/office/drawing/2014/main" id="{6AF019F0-C7FE-4C23-B322-CAAB078FDA53}"/>
               </a:ext>
             </a:extLst>
           </p:cNvPr>
@@ -6417,7 +6417,7 @@
           <p:cNvPr id="13" name="">
             <a:extLst xmlns:a="http://schemas.openxmlformats.org/drawingml/2006/main">
               <a:ext uri="{FF2B5EF4-FFF2-40B4-BE49-F238E27FC236}">
-                <a16:creationId xmlns:a16="http://schemas.microsoft.com/office/drawing/2014/main" id="{E37AD4B0-FA91-4B42-8CC9-F329F275E47F}"/>
+                <a16:creationId xmlns:a16="http://schemas.microsoft.com/office/drawing/2014/main" id="{57691677-89BD-46CD-B11F-C6282E16D84C}"/>
               </a:ext>
             </a:extLst>
           </p:cNvPr>
@@ -6448,7 +6448,7 @@
           <p:cNvPr id="14" name="">
             <a:extLst xmlns:a="http://schemas.openxmlformats.org/drawingml/2006/main">
               <a:ext uri="{FF2B5EF4-FFF2-40B4-BE49-F238E27FC236}">
-                <a16:creationId xmlns:a16="http://schemas.microsoft.com/office/drawing/2014/main" id="{E157576A-D72B-4CCE-9333-30CDAF188D3E}"/>
+                <a16:creationId xmlns:a16="http://schemas.microsoft.com/office/drawing/2014/main" id="{36EA603C-2918-4BCB-95E6-08BCC7E04EBB}"/>
               </a:ext>
             </a:extLst>
           </p:cNvPr>
@@ -6510,7 +6510,7 @@
           <p:cNvPr id="15" name="">
             <a:extLst xmlns:a="http://schemas.openxmlformats.org/drawingml/2006/main">
               <a:ext uri="{FF2B5EF4-FFF2-40B4-BE49-F238E27FC236}">
-                <a16:creationId xmlns:a16="http://schemas.microsoft.com/office/drawing/2014/main" id="{0B4E390F-6EEF-4D42-B65E-B69ED76C5F70}"/>
+                <a16:creationId xmlns:a16="http://schemas.microsoft.com/office/drawing/2014/main" id="{668A2FAD-FEA6-4C60-BAA9-9BAC8B42F50D}"/>
               </a:ext>
             </a:extLst>
           </p:cNvPr>
@@ -6572,7 +6572,7 @@
           <p:cNvPr id="16" name="">
             <a:extLst xmlns:a="http://schemas.openxmlformats.org/drawingml/2006/main">
               <a:ext uri="{FF2B5EF4-FFF2-40B4-BE49-F238E27FC236}">
-                <a16:creationId xmlns:a16="http://schemas.microsoft.com/office/drawing/2014/main" id="{722AF8E5-6423-459F-BE66-B42868CFC960}"/>
+                <a16:creationId xmlns:a16="http://schemas.microsoft.com/office/drawing/2014/main" id="{CA8C6E09-82D6-4924-979C-3A9C0F6CBF30}"/>
               </a:ext>
             </a:extLst>
           </p:cNvPr>
@@ -6607,7 +6607,7 @@
           <p:cNvPr id="17" name="">
             <a:extLst xmlns:a="http://schemas.openxmlformats.org/drawingml/2006/main">
               <a:ext uri="{FF2B5EF4-FFF2-40B4-BE49-F238E27FC236}">
-                <a16:creationId xmlns:a16="http://schemas.microsoft.com/office/drawing/2014/main" id="{5FB7F48E-171E-48B5-BFB0-19AA3D5D8C73}"/>
+                <a16:creationId xmlns:a16="http://schemas.microsoft.com/office/drawing/2014/main" id="{3729711A-33CD-4F33-8161-62DBDFE14BC9}"/>
               </a:ext>
             </a:extLst>
           </p:cNvPr>
@@ -6638,7 +6638,7 @@
           <p:cNvPr id="18" name="">
             <a:extLst xmlns:a="http://schemas.openxmlformats.org/drawingml/2006/main">
               <a:ext uri="{FF2B5EF4-FFF2-40B4-BE49-F238E27FC236}">
-                <a16:creationId xmlns:a16="http://schemas.microsoft.com/office/drawing/2014/main" id="{F46CAFCB-6B3C-4C60-AF3D-2A712E6B743F}"/>
+                <a16:creationId xmlns:a16="http://schemas.microsoft.com/office/drawing/2014/main" id="{71973BAF-056B-4B97-8402-03AD36CAAE0A}"/>
               </a:ext>
             </a:extLst>
           </p:cNvPr>
@@ -6700,7 +6700,7 @@
           <p:cNvPr id="19" name="">
             <a:extLst xmlns:a="http://schemas.openxmlformats.org/drawingml/2006/main">
               <a:ext uri="{FF2B5EF4-FFF2-40B4-BE49-F238E27FC236}">
-                <a16:creationId xmlns:a16="http://schemas.microsoft.com/office/drawing/2014/main" id="{E885317F-3BA8-459B-A8EC-548751CD4260}"/>
+                <a16:creationId xmlns:a16="http://schemas.microsoft.com/office/drawing/2014/main" id="{D93562C4-D7E1-40DC-BCDC-F9605E232C00}"/>
               </a:ext>
             </a:extLst>
           </p:cNvPr>
@@ -6762,7 +6762,7 @@
           <p:cNvPr id="20" name="">
             <a:extLst xmlns:a="http://schemas.openxmlformats.org/drawingml/2006/main">
               <a:ext uri="{FF2B5EF4-FFF2-40B4-BE49-F238E27FC236}">
-                <a16:creationId xmlns:a16="http://schemas.microsoft.com/office/drawing/2014/main" id="{E9C65606-81C1-45C5-ABDA-6D89D3BFC214}"/>
+                <a16:creationId xmlns:a16="http://schemas.microsoft.com/office/drawing/2014/main" id="{E63D0F10-CD6A-4A8A-B3CA-A9FFEAC95453}"/>
               </a:ext>
             </a:extLst>
           </p:cNvPr>
@@ -6797,7 +6797,7 @@
           <p:cNvPr id="21" name="">
             <a:extLst xmlns:a="http://schemas.openxmlformats.org/drawingml/2006/main">
               <a:ext uri="{FF2B5EF4-FFF2-40B4-BE49-F238E27FC236}">
-                <a16:creationId xmlns:a16="http://schemas.microsoft.com/office/drawing/2014/main" id="{655F5F95-D88E-4174-9E66-4814FC5ADAED}"/>
+                <a16:creationId xmlns:a16="http://schemas.microsoft.com/office/drawing/2014/main" id="{BC3893C4-2010-4CFD-9542-2BE0775E4650}"/>
               </a:ext>
             </a:extLst>
           </p:cNvPr>
@@ -6828,7 +6828,7 @@
           <p:cNvPr id="22" name="">
             <a:extLst xmlns:a="http://schemas.openxmlformats.org/drawingml/2006/main">
               <a:ext uri="{FF2B5EF4-FFF2-40B4-BE49-F238E27FC236}">
-                <a16:creationId xmlns:a16="http://schemas.microsoft.com/office/drawing/2014/main" id="{416B3A88-A740-4BE0-B075-AC606CEB4F74}"/>
+                <a16:creationId xmlns:a16="http://schemas.microsoft.com/office/drawing/2014/main" id="{246AA047-7D0A-40BC-853F-45338685C8DE}"/>
               </a:ext>
             </a:extLst>
           </p:cNvPr>
@@ -6890,7 +6890,7 @@
           <p:cNvPr id="23" name="">
             <a:extLst xmlns:a="http://schemas.openxmlformats.org/drawingml/2006/main">
               <a:ext uri="{FF2B5EF4-FFF2-40B4-BE49-F238E27FC236}">
-                <a16:creationId xmlns:a16="http://schemas.microsoft.com/office/drawing/2014/main" id="{A54D3B3D-1E7A-4343-8336-6904B1184C18}"/>
+                <a16:creationId xmlns:a16="http://schemas.microsoft.com/office/drawing/2014/main" id="{87AC720D-6434-454C-A6FE-3628E1D730E1}"/>
               </a:ext>
             </a:extLst>
           </p:cNvPr>
@@ -6952,7 +6952,7 @@
           <p:cNvPr id="24" name="">
             <a:extLst xmlns:a="http://schemas.openxmlformats.org/drawingml/2006/main">
               <a:ext uri="{FF2B5EF4-FFF2-40B4-BE49-F238E27FC236}">
-                <a16:creationId xmlns:a16="http://schemas.microsoft.com/office/drawing/2014/main" id="{C41AF99B-0078-4F60-B8E5-1CE108E4212E}"/>
+                <a16:creationId xmlns:a16="http://schemas.microsoft.com/office/drawing/2014/main" id="{7231B5CA-05DC-4467-88BD-89C6EBBBDA5D}"/>
               </a:ext>
             </a:extLst>
           </p:cNvPr>
@@ -6987,7 +6987,7 @@
           <p:cNvPr id="25" name="">
             <a:extLst xmlns:a="http://schemas.openxmlformats.org/drawingml/2006/main">
               <a:ext uri="{FF2B5EF4-FFF2-40B4-BE49-F238E27FC236}">
-                <a16:creationId xmlns:a16="http://schemas.microsoft.com/office/drawing/2014/main" id="{39DF53F5-F5D2-4FA5-869C-3C202D8ED597}"/>
+                <a16:creationId xmlns:a16="http://schemas.microsoft.com/office/drawing/2014/main" id="{A0FB9F3E-323E-40E5-A111-C6C64927A8E7}"/>
               </a:ext>
             </a:extLst>
           </p:cNvPr>
@@ -7018,7 +7018,7 @@
           <p:cNvPr id="26" name="">
             <a:extLst xmlns:a="http://schemas.openxmlformats.org/drawingml/2006/main">
               <a:ext uri="{FF2B5EF4-FFF2-40B4-BE49-F238E27FC236}">
-                <a16:creationId xmlns:a16="http://schemas.microsoft.com/office/drawing/2014/main" id="{455399FD-DCA3-498F-A64A-B75D43080849}"/>
+                <a16:creationId xmlns:a16="http://schemas.microsoft.com/office/drawing/2014/main" id="{3F5F25C9-69B6-47C5-98E9-0583683973ED}"/>
               </a:ext>
             </a:extLst>
           </p:cNvPr>
@@ -7080,7 +7080,7 @@
           <p:cNvPr id="27" name="">
             <a:extLst xmlns:a="http://schemas.openxmlformats.org/drawingml/2006/main">
               <a:ext uri="{FF2B5EF4-FFF2-40B4-BE49-F238E27FC236}">
-                <a16:creationId xmlns:a16="http://schemas.microsoft.com/office/drawing/2014/main" id="{0D635874-7E5D-4E56-9FC2-42E428C54005}"/>
+                <a16:creationId xmlns:a16="http://schemas.microsoft.com/office/drawing/2014/main" id="{87CAEF40-3895-412A-AD30-E3693424B0F9}"/>
               </a:ext>
             </a:extLst>
           </p:cNvPr>
@@ -7142,7 +7142,7 @@
           <p:cNvPr id="28" name="">
             <a:extLst xmlns:a="http://schemas.openxmlformats.org/drawingml/2006/main">
               <a:ext uri="{FF2B5EF4-FFF2-40B4-BE49-F238E27FC236}">
-                <a16:creationId xmlns:a16="http://schemas.microsoft.com/office/drawing/2014/main" id="{E755F2E3-F4FF-4BCC-8BF5-D92335EB8D47}"/>
+                <a16:creationId xmlns:a16="http://schemas.microsoft.com/office/drawing/2014/main" id="{70741B3D-7DE2-427D-8C89-525C5C3A3DCA}"/>
               </a:ext>
             </a:extLst>
           </p:cNvPr>
@@ -7177,7 +7177,7 @@
           <p:cNvPr id="29" name="">
             <a:extLst xmlns:a="http://schemas.openxmlformats.org/drawingml/2006/main">
               <a:ext uri="{FF2B5EF4-FFF2-40B4-BE49-F238E27FC236}">
-                <a16:creationId xmlns:a16="http://schemas.microsoft.com/office/drawing/2014/main" id="{5C8B71C5-B614-4C93-8B89-69D07A7BEF4B}"/>
+                <a16:creationId xmlns:a16="http://schemas.microsoft.com/office/drawing/2014/main" id="{0E9093AA-D3F3-4C71-B8EF-38E6FEBF101F}"/>
               </a:ext>
             </a:extLst>
           </p:cNvPr>
@@ -7208,7 +7208,7 @@
           <p:cNvPr id="30" name="">
             <a:extLst xmlns:a="http://schemas.openxmlformats.org/drawingml/2006/main">
               <a:ext uri="{FF2B5EF4-FFF2-40B4-BE49-F238E27FC236}">
-                <a16:creationId xmlns:a16="http://schemas.microsoft.com/office/drawing/2014/main" id="{4867147E-6285-4B8B-A3BF-E4FF55BC9DE0}"/>
+                <a16:creationId xmlns:a16="http://schemas.microsoft.com/office/drawing/2014/main" id="{4DEC5B01-D259-4B69-A51E-62923E6A7B63}"/>
               </a:ext>
             </a:extLst>
           </p:cNvPr>
@@ -7270,7 +7270,7 @@
           <p:cNvPr id="31" name="">
             <a:extLst xmlns:a="http://schemas.openxmlformats.org/drawingml/2006/main">
               <a:ext uri="{FF2B5EF4-FFF2-40B4-BE49-F238E27FC236}">
-                <a16:creationId xmlns:a16="http://schemas.microsoft.com/office/drawing/2014/main" id="{EFCDE84D-174E-4FE1-A775-4A0FA7DEDFF2}"/>
+                <a16:creationId xmlns:a16="http://schemas.microsoft.com/office/drawing/2014/main" id="{97489745-97EC-41A6-A1BF-4EF1A299FCC6}"/>
               </a:ext>
             </a:extLst>
           </p:cNvPr>
@@ -7330,7 +7330,7 @@
     </p:spTree>
     <p:extLst>
       <p:ext uri="{BB962C8B-B14F-4D97-AF65-F5344CB8AC3E}">
-        <p14:creationId xmlns:p14="http://schemas.microsoft.com/office/powerpoint/2010/main" val="1985935074"/>
+        <p14:creationId xmlns:p14="http://schemas.microsoft.com/office/powerpoint/2010/main" val="1791905602"/>
       </p:ext>
     </p:extLst>
   </p:cSld>
@@ -7361,7 +7361,7 @@
           <p:cNvPr id="26" name="">
             <a:extLst xmlns:a="http://schemas.openxmlformats.org/drawingml/2006/main">
               <a:ext uri="{FF2B5EF4-FFF2-40B4-BE49-F238E27FC236}">
-                <a16:creationId xmlns:a16="http://schemas.microsoft.com/office/drawing/2014/main" id="{B2D8981C-8B65-4982-9659-FC0BED5E3EFE}"/>
+                <a16:creationId xmlns:a16="http://schemas.microsoft.com/office/drawing/2014/main" id="{7BB8D0F3-23D8-4FAB-80CF-6F3591D9E895}"/>
               </a:ext>
             </a:extLst>
           </p:cNvPr>
@@ -7392,7 +7392,7 @@
           <p:cNvPr id="2" name="">
             <a:extLst xmlns:a="http://schemas.openxmlformats.org/drawingml/2006/main">
               <a:ext uri="{FF2B5EF4-FFF2-40B4-BE49-F238E27FC236}">
-                <a16:creationId xmlns:a16="http://schemas.microsoft.com/office/drawing/2014/main" id="{21919CF9-650C-4E62-854F-D689C31AC9F8}"/>
+                <a16:creationId xmlns:a16="http://schemas.microsoft.com/office/drawing/2014/main" id="{1A78B6D6-B3A7-4DFB-AD10-4D13B40CFC71}"/>
               </a:ext>
             </a:extLst>
           </p:cNvPr>
@@ -7444,7 +7444,7 @@
                 <a:ea typeface="Aptos"/>
                 <a:cs typeface="Aptos"/>
               </a:rPr>
-              <a:t>RISIKEN</a:t>
+              <a:t>PHASE 0</a:t>
             </a:r>
           </a:p>
         </p:txBody>
@@ -7454,7 +7454,7 @@
           <p:cNvPr id="3" name="">
             <a:extLst xmlns:a="http://schemas.openxmlformats.org/drawingml/2006/main">
               <a:ext uri="{FF2B5EF4-FFF2-40B4-BE49-F238E27FC236}">
-                <a16:creationId xmlns:a16="http://schemas.microsoft.com/office/drawing/2014/main" id="{C2E38377-9AD1-444B-8FC4-AA6198224BC2}"/>
+                <a16:creationId xmlns:a16="http://schemas.microsoft.com/office/drawing/2014/main" id="{A7B9657B-8A28-4EC7-A472-3B5C60CE33B3}"/>
               </a:ext>
             </a:extLst>
           </p:cNvPr>
@@ -7488,7 +7488,7 @@
                 <a:spcPct val="108000"/>
               </a:lnSpc>
               <a:buNone/>
-              <a:defRPr sz="3150" b="1">
+              <a:defRPr sz="2550" b="1">
                 <a:solidFill>
                   <a:srgbClr val="071426"/>
                 </a:solidFill>
@@ -7498,7 +7498,7 @@
               </a:defRPr>
             </a:pPr>
             <a:r>
-              <a:rPr sz="3150" b="1">
+              <a:rPr sz="2550" b="1">
                 <a:solidFill>
                   <a:srgbClr val="071426"/>
                 </a:solidFill>
@@ -7516,7 +7516,7 @@
           <p:cNvPr id="4" name="">
             <a:extLst xmlns:a="http://schemas.openxmlformats.org/drawingml/2006/main">
               <a:ext uri="{FF2B5EF4-FFF2-40B4-BE49-F238E27FC236}">
-                <a16:creationId xmlns:a16="http://schemas.microsoft.com/office/drawing/2014/main" id="{22D669EF-10A9-47D7-B787-70D5FFBB7441}"/>
+                <a16:creationId xmlns:a16="http://schemas.microsoft.com/office/drawing/2014/main" id="{53D2B992-5B17-4FC7-AA7E-A4262E6B4454}"/>
               </a:ext>
             </a:extLst>
           </p:cNvPr>
@@ -7551,7 +7551,7 @@
           <p:nvPr/>
         </p:nvPicPr>
         <p:blipFill>
-          <a:blip xmlns:r="http://schemas.openxmlformats.org/officeDocument/2006/relationships" xmlns:a="http://schemas.openxmlformats.org/drawingml/2006/main" r:embed="R72be9e6a2b544014"/>
+          <a:blip xmlns:r="http://schemas.openxmlformats.org/officeDocument/2006/relationships" xmlns:a="http://schemas.openxmlformats.org/drawingml/2006/main" r:embed="R477f18ce04194679"/>
           <a:srcRect xmlns:a="http://schemas.openxmlformats.org/drawingml/2006/main" l="0" t="0" r="0" b="0"/>
           <a:stretch xmlns:a="http://schemas.openxmlformats.org/drawingml/2006/main">
             <a:fillRect l="0" t="0" r="0" b="0"/>
@@ -7572,7 +7572,7 @@
           <p:cNvPr id="6" name="">
             <a:extLst xmlns:a="http://schemas.openxmlformats.org/drawingml/2006/main">
               <a:ext uri="{FF2B5EF4-FFF2-40B4-BE49-F238E27FC236}">
-                <a16:creationId xmlns:a16="http://schemas.microsoft.com/office/drawing/2014/main" id="{45611373-C971-4C81-952F-8D3FBCA7CB8E}"/>
+                <a16:creationId xmlns:a16="http://schemas.microsoft.com/office/drawing/2014/main" id="{9A2AC71C-2F77-42BC-AEF9-60CEF9687515}"/>
               </a:ext>
             </a:extLst>
           </p:cNvPr>
@@ -7634,7 +7634,7 @@
           <p:cNvPr id="7" name="">
             <a:extLst xmlns:a="http://schemas.openxmlformats.org/drawingml/2006/main">
               <a:ext uri="{FF2B5EF4-FFF2-40B4-BE49-F238E27FC236}">
-                <a16:creationId xmlns:a16="http://schemas.microsoft.com/office/drawing/2014/main" id="{4E7922A5-E34F-4D16-9EAB-4A2ABDF99FD7}"/>
+                <a16:creationId xmlns:a16="http://schemas.microsoft.com/office/drawing/2014/main" id="{09201C95-EFDB-4CB5-9C76-7EE5B10352EC}"/>
               </a:ext>
             </a:extLst>
           </p:cNvPr>
@@ -7696,7 +7696,7 @@
           <p:cNvPr id="8" name="">
             <a:extLst xmlns:a="http://schemas.openxmlformats.org/drawingml/2006/main">
               <a:ext uri="{FF2B5EF4-FFF2-40B4-BE49-F238E27FC236}">
-                <a16:creationId xmlns:a16="http://schemas.microsoft.com/office/drawing/2014/main" id="{371B81CE-9571-408F-A3BA-6F91F1D8C29D}"/>
+                <a16:creationId xmlns:a16="http://schemas.microsoft.com/office/drawing/2014/main" id="{3F94911D-27FB-4B99-9DF9-56994D1C51D9}"/>
               </a:ext>
             </a:extLst>
           </p:cNvPr>
@@ -7731,7 +7731,7 @@
           <p:cNvPr id="9" name="">
             <a:extLst xmlns:a="http://schemas.openxmlformats.org/drawingml/2006/main">
               <a:ext uri="{FF2B5EF4-FFF2-40B4-BE49-F238E27FC236}">
-                <a16:creationId xmlns:a16="http://schemas.microsoft.com/office/drawing/2014/main" id="{C06ABC47-280F-4C12-B7C3-CAFFC066E053}"/>
+                <a16:creationId xmlns:a16="http://schemas.microsoft.com/office/drawing/2014/main" id="{AE1BECDE-9ECD-4626-B1BF-65A318571830}"/>
               </a:ext>
             </a:extLst>
           </p:cNvPr>
@@ -7793,7 +7793,7 @@
           <p:cNvPr id="10" name="">
             <a:extLst xmlns:a="http://schemas.openxmlformats.org/drawingml/2006/main">
               <a:ext uri="{FF2B5EF4-FFF2-40B4-BE49-F238E27FC236}">
-                <a16:creationId xmlns:a16="http://schemas.microsoft.com/office/drawing/2014/main" id="{C3225B68-9F5E-4C6C-9077-8B74A67F497E}"/>
+                <a16:creationId xmlns:a16="http://schemas.microsoft.com/office/drawing/2014/main" id="{B5123646-18A4-4821-98AF-1E667FA33779}"/>
               </a:ext>
             </a:extLst>
           </p:cNvPr>
@@ -7855,7 +7855,7 @@
           <p:cNvPr id="11" name="">
             <a:extLst xmlns:a="http://schemas.openxmlformats.org/drawingml/2006/main">
               <a:ext uri="{FF2B5EF4-FFF2-40B4-BE49-F238E27FC236}">
-                <a16:creationId xmlns:a16="http://schemas.microsoft.com/office/drawing/2014/main" id="{1F90063C-51F1-4F12-995D-21252C856DF3}"/>
+                <a16:creationId xmlns:a16="http://schemas.microsoft.com/office/drawing/2014/main" id="{3AB3B86B-77C9-46CD-ACBF-2D1A2B67BE08}"/>
               </a:ext>
             </a:extLst>
           </p:cNvPr>
@@ -7890,7 +7890,7 @@
           <p:cNvPr id="12" name="">
             <a:extLst xmlns:a="http://schemas.openxmlformats.org/drawingml/2006/main">
               <a:ext uri="{FF2B5EF4-FFF2-40B4-BE49-F238E27FC236}">
-                <a16:creationId xmlns:a16="http://schemas.microsoft.com/office/drawing/2014/main" id="{0909A21B-A03F-4CA5-8490-4381B6E0284D}"/>
+                <a16:creationId xmlns:a16="http://schemas.microsoft.com/office/drawing/2014/main" id="{D563B321-72D0-4924-AF53-7176CB4FE974}"/>
               </a:ext>
             </a:extLst>
           </p:cNvPr>
@@ -7952,7 +7952,7 @@
           <p:cNvPr id="13" name="">
             <a:extLst xmlns:a="http://schemas.openxmlformats.org/drawingml/2006/main">
               <a:ext uri="{FF2B5EF4-FFF2-40B4-BE49-F238E27FC236}">
-                <a16:creationId xmlns:a16="http://schemas.microsoft.com/office/drawing/2014/main" id="{178E866E-55F8-46C8-BF18-65A47730ECA3}"/>
+                <a16:creationId xmlns:a16="http://schemas.microsoft.com/office/drawing/2014/main" id="{285466D8-6331-4D59-A60F-EF3FC52EC552}"/>
               </a:ext>
             </a:extLst>
           </p:cNvPr>
@@ -8014,7 +8014,7 @@
           <p:cNvPr id="14" name="">
             <a:extLst xmlns:a="http://schemas.openxmlformats.org/drawingml/2006/main">
               <a:ext uri="{FF2B5EF4-FFF2-40B4-BE49-F238E27FC236}">
-                <a16:creationId xmlns:a16="http://schemas.microsoft.com/office/drawing/2014/main" id="{EB0CF2A6-B788-4BDA-8E8D-FB9E3A7E0739}"/>
+                <a16:creationId xmlns:a16="http://schemas.microsoft.com/office/drawing/2014/main" id="{8F6055AB-F961-43F7-9A51-1667E1EE32A8}"/>
               </a:ext>
             </a:extLst>
           </p:cNvPr>
@@ -8049,7 +8049,7 @@
           <p:cNvPr id="15" name="">
             <a:extLst xmlns:a="http://schemas.openxmlformats.org/drawingml/2006/main">
               <a:ext uri="{FF2B5EF4-FFF2-40B4-BE49-F238E27FC236}">
-                <a16:creationId xmlns:a16="http://schemas.microsoft.com/office/drawing/2014/main" id="{326A921D-F791-41BF-9031-6284CB3427FB}"/>
+                <a16:creationId xmlns:a16="http://schemas.microsoft.com/office/drawing/2014/main" id="{6362CCAB-0B22-4A0E-B9A6-AAFB752B0CAD}"/>
               </a:ext>
             </a:extLst>
           </p:cNvPr>
@@ -8111,7 +8111,7 @@
           <p:cNvPr id="16" name="">
             <a:extLst xmlns:a="http://schemas.openxmlformats.org/drawingml/2006/main">
               <a:ext uri="{FF2B5EF4-FFF2-40B4-BE49-F238E27FC236}">
-                <a16:creationId xmlns:a16="http://schemas.microsoft.com/office/drawing/2014/main" id="{665B5D49-3568-4DD0-971E-4B0484927523}"/>
+                <a16:creationId xmlns:a16="http://schemas.microsoft.com/office/drawing/2014/main" id="{A4117BF5-30BD-4D44-A81E-ECF95514F52F}"/>
               </a:ext>
             </a:extLst>
           </p:cNvPr>
@@ -8173,7 +8173,7 @@
           <p:cNvPr id="17" name="">
             <a:extLst xmlns:a="http://schemas.openxmlformats.org/drawingml/2006/main">
               <a:ext uri="{FF2B5EF4-FFF2-40B4-BE49-F238E27FC236}">
-                <a16:creationId xmlns:a16="http://schemas.microsoft.com/office/drawing/2014/main" id="{40F3ECF9-984C-4384-A1B1-9CFFE0F62129}"/>
+                <a16:creationId xmlns:a16="http://schemas.microsoft.com/office/drawing/2014/main" id="{BE5F214A-AF94-41D7-819F-E210EC127B37}"/>
               </a:ext>
             </a:extLst>
           </p:cNvPr>
@@ -8208,7 +8208,7 @@
           <p:cNvPr id="18" name="">
             <a:extLst xmlns:a="http://schemas.openxmlformats.org/drawingml/2006/main">
               <a:ext uri="{FF2B5EF4-FFF2-40B4-BE49-F238E27FC236}">
-                <a16:creationId xmlns:a16="http://schemas.microsoft.com/office/drawing/2014/main" id="{6EC63590-AD4A-4DE6-9921-795DC0F7309A}"/>
+                <a16:creationId xmlns:a16="http://schemas.microsoft.com/office/drawing/2014/main" id="{61B1507F-5616-4845-A1CA-B59BBB1E037D}"/>
               </a:ext>
             </a:extLst>
           </p:cNvPr>
@@ -8270,7 +8270,7 @@
           <p:cNvPr id="19" name="">
             <a:extLst xmlns:a="http://schemas.openxmlformats.org/drawingml/2006/main">
               <a:ext uri="{FF2B5EF4-FFF2-40B4-BE49-F238E27FC236}">
-                <a16:creationId xmlns:a16="http://schemas.microsoft.com/office/drawing/2014/main" id="{24422DA1-1908-4D7E-BB74-18F8803A0187}"/>
+                <a16:creationId xmlns:a16="http://schemas.microsoft.com/office/drawing/2014/main" id="{FD5D60E0-10C5-423C-B264-6DD179A30A0D}"/>
               </a:ext>
             </a:extLst>
           </p:cNvPr>
@@ -8332,7 +8332,7 @@
           <p:cNvPr id="20" name="">
             <a:extLst xmlns:a="http://schemas.openxmlformats.org/drawingml/2006/main">
               <a:ext uri="{FF2B5EF4-FFF2-40B4-BE49-F238E27FC236}">
-                <a16:creationId xmlns:a16="http://schemas.microsoft.com/office/drawing/2014/main" id="{DFF1E1E4-A295-4435-87DD-CE46862926F0}"/>
+                <a16:creationId xmlns:a16="http://schemas.microsoft.com/office/drawing/2014/main" id="{1208926C-CB32-44A7-B571-DA7AD3DD1E3A}"/>
               </a:ext>
             </a:extLst>
           </p:cNvPr>
@@ -8367,7 +8367,7 @@
           <p:cNvPr id="21" name="">
             <a:extLst xmlns:a="http://schemas.openxmlformats.org/drawingml/2006/main">
               <a:ext uri="{FF2B5EF4-FFF2-40B4-BE49-F238E27FC236}">
-                <a16:creationId xmlns:a16="http://schemas.microsoft.com/office/drawing/2014/main" id="{6CF4A702-8C0A-4C3A-9071-B92A865203AB}"/>
+                <a16:creationId xmlns:a16="http://schemas.microsoft.com/office/drawing/2014/main" id="{4719193A-4D68-426E-B37E-94312E1C38AB}"/>
               </a:ext>
             </a:extLst>
           </p:cNvPr>
@@ -8429,7 +8429,7 @@
           <p:cNvPr id="22" name="">
             <a:extLst xmlns:a="http://schemas.openxmlformats.org/drawingml/2006/main">
               <a:ext uri="{FF2B5EF4-FFF2-40B4-BE49-F238E27FC236}">
-                <a16:creationId xmlns:a16="http://schemas.microsoft.com/office/drawing/2014/main" id="{884648E7-CE39-4D21-BE8D-F462FE425647}"/>
+                <a16:creationId xmlns:a16="http://schemas.microsoft.com/office/drawing/2014/main" id="{59E399F6-62CB-4E04-9262-09FC251DC0AD}"/>
               </a:ext>
             </a:extLst>
           </p:cNvPr>
@@ -8491,7 +8491,7 @@
           <p:cNvPr id="23" name="">
             <a:extLst xmlns:a="http://schemas.openxmlformats.org/drawingml/2006/main">
               <a:ext uri="{FF2B5EF4-FFF2-40B4-BE49-F238E27FC236}">
-                <a16:creationId xmlns:a16="http://schemas.microsoft.com/office/drawing/2014/main" id="{0BB5060D-EB53-424B-941D-BB6B7129473C}"/>
+                <a16:creationId xmlns:a16="http://schemas.microsoft.com/office/drawing/2014/main" id="{FABBDCFA-89D3-45E8-94EE-1639CF1A23DA}"/>
               </a:ext>
             </a:extLst>
           </p:cNvPr>
@@ -8526,7 +8526,7 @@
           <p:cNvPr id="24" name="">
             <a:extLst xmlns:a="http://schemas.openxmlformats.org/drawingml/2006/main">
               <a:ext uri="{FF2B5EF4-FFF2-40B4-BE49-F238E27FC236}">
-                <a16:creationId xmlns:a16="http://schemas.microsoft.com/office/drawing/2014/main" id="{474DAF01-1421-4E66-9668-3FD13B4B32C8}"/>
+                <a16:creationId xmlns:a16="http://schemas.microsoft.com/office/drawing/2014/main" id="{3FB6BCCB-BFCE-4C2A-894D-2EFDF876986F}"/>
               </a:ext>
             </a:extLst>
           </p:cNvPr>
@@ -8588,7 +8588,7 @@
           <p:cNvPr id="25" name="">
             <a:extLst xmlns:a="http://schemas.openxmlformats.org/drawingml/2006/main">
               <a:ext uri="{FF2B5EF4-FFF2-40B4-BE49-F238E27FC236}">
-                <a16:creationId xmlns:a16="http://schemas.microsoft.com/office/drawing/2014/main" id="{6AE2FB0D-8859-4304-8F7F-BD97D5567A82}"/>
+                <a16:creationId xmlns:a16="http://schemas.microsoft.com/office/drawing/2014/main" id="{98EE0402-4BF7-477F-B674-1023821A1D81}"/>
               </a:ext>
             </a:extLst>
           </p:cNvPr>
@@ -8648,7 +8648,7 @@
     </p:spTree>
     <p:extLst>
       <p:ext uri="{BB962C8B-B14F-4D97-AF65-F5344CB8AC3E}">
-        <p14:creationId xmlns:p14="http://schemas.microsoft.com/office/powerpoint/2010/main" val="1777476628"/>
+        <p14:creationId xmlns:p14="http://schemas.microsoft.com/office/powerpoint/2010/main" val="1810836101"/>
       </p:ext>
     </p:extLst>
   </p:cSld>
@@ -8679,7 +8679,7 @@
           <p:cNvPr id="26" name="">
             <a:extLst xmlns:a="http://schemas.openxmlformats.org/drawingml/2006/main">
               <a:ext uri="{FF2B5EF4-FFF2-40B4-BE49-F238E27FC236}">
-                <a16:creationId xmlns:a16="http://schemas.microsoft.com/office/drawing/2014/main" id="{A1D00133-06AC-4885-A9D1-5D60B84FD98F}"/>
+                <a16:creationId xmlns:a16="http://schemas.microsoft.com/office/drawing/2014/main" id="{29A7F875-3E12-4401-B197-C4D6ED44EB95}"/>
               </a:ext>
             </a:extLst>
           </p:cNvPr>
@@ -8710,7 +8710,7 @@
           <p:cNvPr id="2" name="">
             <a:extLst xmlns:a="http://schemas.openxmlformats.org/drawingml/2006/main">
               <a:ext uri="{FF2B5EF4-FFF2-40B4-BE49-F238E27FC236}">
-                <a16:creationId xmlns:a16="http://schemas.microsoft.com/office/drawing/2014/main" id="{B04CB3D2-B2C6-4F17-B410-BB62121B3FAF}"/>
+                <a16:creationId xmlns:a16="http://schemas.microsoft.com/office/drawing/2014/main" id="{A92B2B53-DC08-4CC4-896E-B743DBB408F6}"/>
               </a:ext>
             </a:extLst>
           </p:cNvPr>
@@ -8762,7 +8762,7 @@
                 <a:ea typeface="Aptos"/>
                 <a:cs typeface="Aptos"/>
               </a:rPr>
-              <a:t>RISIKEN</a:t>
+              <a:t>PHASE 0</a:t>
             </a:r>
           </a:p>
         </p:txBody>
@@ -8772,7 +8772,7 @@
           <p:cNvPr id="3" name="">
             <a:extLst xmlns:a="http://schemas.openxmlformats.org/drawingml/2006/main">
               <a:ext uri="{FF2B5EF4-FFF2-40B4-BE49-F238E27FC236}">
-                <a16:creationId xmlns:a16="http://schemas.microsoft.com/office/drawing/2014/main" id="{C7F1702C-F177-43E5-9222-53F047243E10}"/>
+                <a16:creationId xmlns:a16="http://schemas.microsoft.com/office/drawing/2014/main" id="{A7EF5527-655C-4F2D-A97A-0269216C40B7}"/>
               </a:ext>
             </a:extLst>
           </p:cNvPr>
@@ -8834,7 +8834,7 @@
           <p:cNvPr id="4" name="">
             <a:extLst xmlns:a="http://schemas.openxmlformats.org/drawingml/2006/main">
               <a:ext uri="{FF2B5EF4-FFF2-40B4-BE49-F238E27FC236}">
-                <a16:creationId xmlns:a16="http://schemas.microsoft.com/office/drawing/2014/main" id="{5B35E28F-314E-4C0B-BB4B-EFEE7B5C13BA}"/>
+                <a16:creationId xmlns:a16="http://schemas.microsoft.com/office/drawing/2014/main" id="{1519450A-FD34-4C61-9CB3-3E2AC44DAA67}"/>
               </a:ext>
             </a:extLst>
           </p:cNvPr>
@@ -8869,7 +8869,7 @@
           <p:nvPr/>
         </p:nvPicPr>
         <p:blipFill>
-          <a:blip xmlns:r="http://schemas.openxmlformats.org/officeDocument/2006/relationships" xmlns:a="http://schemas.openxmlformats.org/drawingml/2006/main" r:embed="R331ae5d6736142fe"/>
+          <a:blip xmlns:r="http://schemas.openxmlformats.org/officeDocument/2006/relationships" xmlns:a="http://schemas.openxmlformats.org/drawingml/2006/main" r:embed="R5596905c6afe46ee"/>
           <a:srcRect xmlns:a="http://schemas.openxmlformats.org/drawingml/2006/main" l="0" t="0" r="0" b="0"/>
           <a:stretch xmlns:a="http://schemas.openxmlformats.org/drawingml/2006/main">
             <a:fillRect l="0" t="0" r="0" b="0"/>
@@ -8890,7 +8890,7 @@
           <p:cNvPr id="6" name="">
             <a:extLst xmlns:a="http://schemas.openxmlformats.org/drawingml/2006/main">
               <a:ext uri="{FF2B5EF4-FFF2-40B4-BE49-F238E27FC236}">
-                <a16:creationId xmlns:a16="http://schemas.microsoft.com/office/drawing/2014/main" id="{38E207B8-FA89-452A-92A3-8099964FE90D}"/>
+                <a16:creationId xmlns:a16="http://schemas.microsoft.com/office/drawing/2014/main" id="{C82CF375-D816-4721-B13F-B0E6BAAF9A2A}"/>
               </a:ext>
             </a:extLst>
           </p:cNvPr>
@@ -8952,7 +8952,7 @@
           <p:cNvPr id="7" name="">
             <a:extLst xmlns:a="http://schemas.openxmlformats.org/drawingml/2006/main">
               <a:ext uri="{FF2B5EF4-FFF2-40B4-BE49-F238E27FC236}">
-                <a16:creationId xmlns:a16="http://schemas.microsoft.com/office/drawing/2014/main" id="{6F12B415-908A-4251-AF80-6A02B2D38A79}"/>
+                <a16:creationId xmlns:a16="http://schemas.microsoft.com/office/drawing/2014/main" id="{96779EF0-F4DD-47DA-A0E5-B31B3FC96630}"/>
               </a:ext>
             </a:extLst>
           </p:cNvPr>
@@ -9014,19 +9014,19 @@
           <p:cNvPr id="8" name="">
             <a:extLst xmlns:a="http://schemas.openxmlformats.org/drawingml/2006/main">
               <a:ext uri="{FF2B5EF4-FFF2-40B4-BE49-F238E27FC236}">
-                <a16:creationId xmlns:a16="http://schemas.microsoft.com/office/drawing/2014/main" id="{BF4BA2C3-F3ED-43B9-B059-4A29AFC9ABCE}"/>
-              </a:ext>
-            </a:extLst>
-          </p:cNvPr>
-          <p:cNvSpPr>
-            <a:spLocks xmlns:a="http://schemas.openxmlformats.org/drawingml/2006/main" noGrp="1"/>
-          </p:cNvSpPr>
-          <p:nvPr/>
-        </p:nvSpPr>
-        <p:spPr>
-          <a:xfrm xmlns:a="http://schemas.openxmlformats.org/drawingml/2006/main">
-            <a:off x="609600" y="1847850"/>
-            <a:ext cx="10972800" cy="495300"/>
+                <a16:creationId xmlns:a16="http://schemas.microsoft.com/office/drawing/2014/main" id="{F9ED0CBE-BB90-4445-9B14-2BECBE206F54}"/>
+              </a:ext>
+            </a:extLst>
+          </p:cNvPr>
+          <p:cNvSpPr>
+            <a:spLocks xmlns:a="http://schemas.openxmlformats.org/drawingml/2006/main" noGrp="1"/>
+          </p:cNvSpPr>
+          <p:nvPr/>
+        </p:nvSpPr>
+        <p:spPr>
+          <a:xfrm xmlns:a="http://schemas.openxmlformats.org/drawingml/2006/main">
+            <a:off x="609600" y="1752600"/>
+            <a:ext cx="10972800" cy="438150"/>
           </a:xfrm>
           <a:prstGeom xmlns:a="http://schemas.openxmlformats.org/drawingml/2006/main" prst="rect">
             <a:avLst/>
@@ -9048,7 +9048,7 @@
                 <a:spcPct val="108000"/>
               </a:lnSpc>
               <a:buNone/>
-              <a:defRPr sz="1800" b="1">
+              <a:defRPr sz="1650" b="1">
                 <a:solidFill>
                   <a:srgbClr val="1B4F78"/>
                 </a:solidFill>
@@ -9058,7 +9058,7 @@
               </a:defRPr>
             </a:pPr>
             <a:r>
-              <a:rPr sz="1800" b="1">
+              <a:rPr sz="1650" b="1">
                 <a:solidFill>
                   <a:srgbClr val="1B4F78"/>
                 </a:solidFill>
@@ -9076,23 +9076,23 @@
           <p:cNvPr id="9" name="">
             <a:extLst xmlns:a="http://schemas.openxmlformats.org/drawingml/2006/main">
               <a:ext uri="{FF2B5EF4-FFF2-40B4-BE49-F238E27FC236}">
-                <a16:creationId xmlns:a16="http://schemas.microsoft.com/office/drawing/2014/main" id="{E2426284-EC52-41C8-AEF1-16A0DF7C77DC}"/>
-              </a:ext>
-            </a:extLst>
-          </p:cNvPr>
-          <p:cNvSpPr>
-            <a:spLocks xmlns:a="http://schemas.openxmlformats.org/drawingml/2006/main" noGrp="1"/>
-          </p:cNvSpPr>
-          <p:nvPr/>
-        </p:nvSpPr>
-        <p:spPr>
-          <a:xfrm xmlns:a="http://schemas.openxmlformats.org/drawingml/2006/main">
-            <a:off x="609600" y="1885950"/>
-            <a:ext cx="5400675" cy="1962150"/>
+                <a16:creationId xmlns:a16="http://schemas.microsoft.com/office/drawing/2014/main" id="{6985F055-6C80-4675-8D94-0441D91E1F78}"/>
+              </a:ext>
+            </a:extLst>
+          </p:cNvPr>
+          <p:cNvSpPr>
+            <a:spLocks xmlns:a="http://schemas.openxmlformats.org/drawingml/2006/main" noGrp="1"/>
+          </p:cNvSpPr>
+          <p:nvPr/>
+        </p:nvSpPr>
+        <p:spPr>
+          <a:xfrm xmlns:a="http://schemas.openxmlformats.org/drawingml/2006/main">
+            <a:off x="609600" y="2343150"/>
+            <a:ext cx="5400675" cy="1485900"/>
           </a:xfrm>
           <a:prstGeom xmlns:a="http://schemas.openxmlformats.org/drawingml/2006/main" prst="roundRect">
             <a:avLst>
-              <a:gd name="adj" fmla="val 8738"/>
+              <a:gd name="adj" fmla="val 11538"/>
             </a:avLst>
           </a:prstGeom>
           <a:solidFill xmlns:a="http://schemas.openxmlformats.org/drawingml/2006/main">
@@ -9111,19 +9111,19 @@
           <p:cNvPr id="10" name="">
             <a:extLst xmlns:a="http://schemas.openxmlformats.org/drawingml/2006/main">
               <a:ext uri="{FF2B5EF4-FFF2-40B4-BE49-F238E27FC236}">
-                <a16:creationId xmlns:a16="http://schemas.microsoft.com/office/drawing/2014/main" id="{C739B14E-D1F8-467E-8A10-11E2E9B4A626}"/>
-              </a:ext>
-            </a:extLst>
-          </p:cNvPr>
-          <p:cNvSpPr>
-            <a:spLocks xmlns:a="http://schemas.openxmlformats.org/drawingml/2006/main" noGrp="1"/>
-          </p:cNvSpPr>
-          <p:nvPr/>
-        </p:nvSpPr>
-        <p:spPr>
-          <a:xfrm xmlns:a="http://schemas.openxmlformats.org/drawingml/2006/main">
-            <a:off x="609600" y="1885950"/>
-            <a:ext cx="66675" cy="1962150"/>
+                <a16:creationId xmlns:a16="http://schemas.microsoft.com/office/drawing/2014/main" id="{E572F215-78C2-4198-92CB-2E1029D83AB2}"/>
+              </a:ext>
+            </a:extLst>
+          </p:cNvPr>
+          <p:cNvSpPr>
+            <a:spLocks xmlns:a="http://schemas.openxmlformats.org/drawingml/2006/main" noGrp="1"/>
+          </p:cNvSpPr>
+          <p:nvPr/>
+        </p:nvSpPr>
+        <p:spPr>
+          <a:xfrm xmlns:a="http://schemas.openxmlformats.org/drawingml/2006/main">
+            <a:off x="609600" y="2343150"/>
+            <a:ext cx="66675" cy="1485900"/>
           </a:xfrm>
           <a:prstGeom xmlns:a="http://schemas.openxmlformats.org/drawingml/2006/main" prst="rect">
             <a:avLst/>
@@ -9142,18 +9142,18 @@
           <p:cNvPr id="11" name="">
             <a:extLst xmlns:a="http://schemas.openxmlformats.org/drawingml/2006/main">
               <a:ext uri="{FF2B5EF4-FFF2-40B4-BE49-F238E27FC236}">
-                <a16:creationId xmlns:a16="http://schemas.microsoft.com/office/drawing/2014/main" id="{30AB252F-F944-4F28-80E4-9D43A0E177A9}"/>
-              </a:ext>
-            </a:extLst>
-          </p:cNvPr>
-          <p:cNvSpPr>
-            <a:spLocks xmlns:a="http://schemas.openxmlformats.org/drawingml/2006/main" noGrp="1"/>
-          </p:cNvSpPr>
-          <p:nvPr/>
-        </p:nvSpPr>
-        <p:spPr>
-          <a:xfrm xmlns:a="http://schemas.openxmlformats.org/drawingml/2006/main">
-            <a:off x="819150" y="2038350"/>
+                <a16:creationId xmlns:a16="http://schemas.microsoft.com/office/drawing/2014/main" id="{E16CEEAD-A22A-4A7F-979E-04518FCBE99A}"/>
+              </a:ext>
+            </a:extLst>
+          </p:cNvPr>
+          <p:cNvSpPr>
+            <a:spLocks xmlns:a="http://schemas.openxmlformats.org/drawingml/2006/main" noGrp="1"/>
+          </p:cNvSpPr>
+          <p:nvPr/>
+        </p:nvSpPr>
+        <p:spPr>
+          <a:xfrm xmlns:a="http://schemas.openxmlformats.org/drawingml/2006/main">
+            <a:off x="819150" y="2495550"/>
             <a:ext cx="5038725" cy="419100"/>
           </a:xfrm>
           <a:prstGeom xmlns:a="http://schemas.openxmlformats.org/drawingml/2006/main" prst="rect">
@@ -9204,19 +9204,19 @@
           <p:cNvPr id="12" name="">
             <a:extLst xmlns:a="http://schemas.openxmlformats.org/drawingml/2006/main">
               <a:ext uri="{FF2B5EF4-FFF2-40B4-BE49-F238E27FC236}">
-                <a16:creationId xmlns:a16="http://schemas.microsoft.com/office/drawing/2014/main" id="{6577B282-2654-453C-86EF-CB821EE363D3}"/>
-              </a:ext>
-            </a:extLst>
-          </p:cNvPr>
-          <p:cNvSpPr>
-            <a:spLocks xmlns:a="http://schemas.openxmlformats.org/drawingml/2006/main" noGrp="1"/>
-          </p:cNvSpPr>
-          <p:nvPr/>
-        </p:nvSpPr>
-        <p:spPr>
-          <a:xfrm xmlns:a="http://schemas.openxmlformats.org/drawingml/2006/main">
-            <a:off x="819150" y="2466975"/>
-            <a:ext cx="5038725" cy="1257300"/>
+                <a16:creationId xmlns:a16="http://schemas.microsoft.com/office/drawing/2014/main" id="{A58510F1-6BAD-48F0-A7E4-10AABE81D3B5}"/>
+              </a:ext>
+            </a:extLst>
+          </p:cNvPr>
+          <p:cNvSpPr>
+            <a:spLocks xmlns:a="http://schemas.openxmlformats.org/drawingml/2006/main" noGrp="1"/>
+          </p:cNvSpPr>
+          <p:nvPr/>
+        </p:nvSpPr>
+        <p:spPr>
+          <a:xfrm xmlns:a="http://schemas.openxmlformats.org/drawingml/2006/main">
+            <a:off x="819150" y="2924175"/>
+            <a:ext cx="5038725" cy="781050"/>
           </a:xfrm>
           <a:prstGeom xmlns:a="http://schemas.openxmlformats.org/drawingml/2006/main" prst="rect">
             <a:avLst/>
@@ -9266,23 +9266,23 @@
           <p:cNvPr id="13" name="">
             <a:extLst xmlns:a="http://schemas.openxmlformats.org/drawingml/2006/main">
               <a:ext uri="{FF2B5EF4-FFF2-40B4-BE49-F238E27FC236}">
-                <a16:creationId xmlns:a16="http://schemas.microsoft.com/office/drawing/2014/main" id="{DD0B6377-7D66-4B9A-9D9A-B7698A3B9545}"/>
-              </a:ext>
-            </a:extLst>
-          </p:cNvPr>
-          <p:cNvSpPr>
-            <a:spLocks xmlns:a="http://schemas.openxmlformats.org/drawingml/2006/main" noGrp="1"/>
-          </p:cNvSpPr>
-          <p:nvPr/>
-        </p:nvSpPr>
-        <p:spPr>
-          <a:xfrm xmlns:a="http://schemas.openxmlformats.org/drawingml/2006/main">
-            <a:off x="6181725" y="1885950"/>
-            <a:ext cx="5400675" cy="1962150"/>
+                <a16:creationId xmlns:a16="http://schemas.microsoft.com/office/drawing/2014/main" id="{136F2ADA-EA56-46F8-8687-4584DF08E8F3}"/>
+              </a:ext>
+            </a:extLst>
+          </p:cNvPr>
+          <p:cNvSpPr>
+            <a:spLocks xmlns:a="http://schemas.openxmlformats.org/drawingml/2006/main" noGrp="1"/>
+          </p:cNvSpPr>
+          <p:nvPr/>
+        </p:nvSpPr>
+        <p:spPr>
+          <a:xfrm xmlns:a="http://schemas.openxmlformats.org/drawingml/2006/main">
+            <a:off x="6181725" y="2343150"/>
+            <a:ext cx="5400675" cy="1485900"/>
           </a:xfrm>
           <a:prstGeom xmlns:a="http://schemas.openxmlformats.org/drawingml/2006/main" prst="roundRect">
             <a:avLst>
-              <a:gd name="adj" fmla="val 8738"/>
+              <a:gd name="adj" fmla="val 11538"/>
             </a:avLst>
           </a:prstGeom>
           <a:solidFill xmlns:a="http://schemas.openxmlformats.org/drawingml/2006/main">
@@ -9301,19 +9301,19 @@
           <p:cNvPr id="14" name="">
             <a:extLst xmlns:a="http://schemas.openxmlformats.org/drawingml/2006/main">
               <a:ext uri="{FF2B5EF4-FFF2-40B4-BE49-F238E27FC236}">
-                <a16:creationId xmlns:a16="http://schemas.microsoft.com/office/drawing/2014/main" id="{66F28BD7-F0F2-4AB0-9D05-EC2581EA92A9}"/>
-              </a:ext>
-            </a:extLst>
-          </p:cNvPr>
-          <p:cNvSpPr>
-            <a:spLocks xmlns:a="http://schemas.openxmlformats.org/drawingml/2006/main" noGrp="1"/>
-          </p:cNvSpPr>
-          <p:nvPr/>
-        </p:nvSpPr>
-        <p:spPr>
-          <a:xfrm xmlns:a="http://schemas.openxmlformats.org/drawingml/2006/main">
-            <a:off x="6181725" y="1885950"/>
-            <a:ext cx="66675" cy="1962150"/>
+                <a16:creationId xmlns:a16="http://schemas.microsoft.com/office/drawing/2014/main" id="{E842448B-8B6D-4490-A390-C1FD80357361}"/>
+              </a:ext>
+            </a:extLst>
+          </p:cNvPr>
+          <p:cNvSpPr>
+            <a:spLocks xmlns:a="http://schemas.openxmlformats.org/drawingml/2006/main" noGrp="1"/>
+          </p:cNvSpPr>
+          <p:nvPr/>
+        </p:nvSpPr>
+        <p:spPr>
+          <a:xfrm xmlns:a="http://schemas.openxmlformats.org/drawingml/2006/main">
+            <a:off x="6181725" y="2343150"/>
+            <a:ext cx="66675" cy="1485900"/>
           </a:xfrm>
           <a:prstGeom xmlns:a="http://schemas.openxmlformats.org/drawingml/2006/main" prst="rect">
             <a:avLst/>
@@ -9332,18 +9332,18 @@
           <p:cNvPr id="15" name="">
             <a:extLst xmlns:a="http://schemas.openxmlformats.org/drawingml/2006/main">
               <a:ext uri="{FF2B5EF4-FFF2-40B4-BE49-F238E27FC236}">
-                <a16:creationId xmlns:a16="http://schemas.microsoft.com/office/drawing/2014/main" id="{340C1655-0FB2-4CB6-B422-71E1A1C01205}"/>
-              </a:ext>
-            </a:extLst>
-          </p:cNvPr>
-          <p:cNvSpPr>
-            <a:spLocks xmlns:a="http://schemas.openxmlformats.org/drawingml/2006/main" noGrp="1"/>
-          </p:cNvSpPr>
-          <p:nvPr/>
-        </p:nvSpPr>
-        <p:spPr>
-          <a:xfrm xmlns:a="http://schemas.openxmlformats.org/drawingml/2006/main">
-            <a:off x="6391275" y="2038350"/>
+                <a16:creationId xmlns:a16="http://schemas.microsoft.com/office/drawing/2014/main" id="{A0EFB53D-D927-4AF0-9C90-31FF51639C80}"/>
+              </a:ext>
+            </a:extLst>
+          </p:cNvPr>
+          <p:cNvSpPr>
+            <a:spLocks xmlns:a="http://schemas.openxmlformats.org/drawingml/2006/main" noGrp="1"/>
+          </p:cNvSpPr>
+          <p:nvPr/>
+        </p:nvSpPr>
+        <p:spPr>
+          <a:xfrm xmlns:a="http://schemas.openxmlformats.org/drawingml/2006/main">
+            <a:off x="6391275" y="2495550"/>
             <a:ext cx="5038725" cy="419100"/>
           </a:xfrm>
           <a:prstGeom xmlns:a="http://schemas.openxmlformats.org/drawingml/2006/main" prst="rect">
@@ -9394,19 +9394,19 @@
           <p:cNvPr id="16" name="">
             <a:extLst xmlns:a="http://schemas.openxmlformats.org/drawingml/2006/main">
               <a:ext uri="{FF2B5EF4-FFF2-40B4-BE49-F238E27FC236}">
-                <a16:creationId xmlns:a16="http://schemas.microsoft.com/office/drawing/2014/main" id="{72776C8F-508D-4EA4-9474-D28E37F1174C}"/>
-              </a:ext>
-            </a:extLst>
-          </p:cNvPr>
-          <p:cNvSpPr>
-            <a:spLocks xmlns:a="http://schemas.openxmlformats.org/drawingml/2006/main" noGrp="1"/>
-          </p:cNvSpPr>
-          <p:nvPr/>
-        </p:nvSpPr>
-        <p:spPr>
-          <a:xfrm xmlns:a="http://schemas.openxmlformats.org/drawingml/2006/main">
-            <a:off x="6391275" y="2466975"/>
-            <a:ext cx="5038725" cy="1257300"/>
+                <a16:creationId xmlns:a16="http://schemas.microsoft.com/office/drawing/2014/main" id="{61DCB621-499E-46EE-9726-9EE6105D0CF6}"/>
+              </a:ext>
+            </a:extLst>
+          </p:cNvPr>
+          <p:cNvSpPr>
+            <a:spLocks xmlns:a="http://schemas.openxmlformats.org/drawingml/2006/main" noGrp="1"/>
+          </p:cNvSpPr>
+          <p:nvPr/>
+        </p:nvSpPr>
+        <p:spPr>
+          <a:xfrm xmlns:a="http://schemas.openxmlformats.org/drawingml/2006/main">
+            <a:off x="6391275" y="2924175"/>
+            <a:ext cx="5038725" cy="781050"/>
           </a:xfrm>
           <a:prstGeom xmlns:a="http://schemas.openxmlformats.org/drawingml/2006/main" prst="rect">
             <a:avLst/>
@@ -9456,23 +9456,23 @@
           <p:cNvPr id="17" name="">
             <a:extLst xmlns:a="http://schemas.openxmlformats.org/drawingml/2006/main">
               <a:ext uri="{FF2B5EF4-FFF2-40B4-BE49-F238E27FC236}">
-                <a16:creationId xmlns:a16="http://schemas.microsoft.com/office/drawing/2014/main" id="{587B835D-0163-44E4-9A7F-A26E0EF16139}"/>
-              </a:ext>
-            </a:extLst>
-          </p:cNvPr>
-          <p:cNvSpPr>
-            <a:spLocks xmlns:a="http://schemas.openxmlformats.org/drawingml/2006/main" noGrp="1"/>
-          </p:cNvSpPr>
-          <p:nvPr/>
-        </p:nvSpPr>
-        <p:spPr>
-          <a:xfrm xmlns:a="http://schemas.openxmlformats.org/drawingml/2006/main">
-            <a:off x="609600" y="4019550"/>
-            <a:ext cx="5400675" cy="1962150"/>
+                <a16:creationId xmlns:a16="http://schemas.microsoft.com/office/drawing/2014/main" id="{77C5E08C-BAA2-40CB-A1D3-B0DCA80BC8E2}"/>
+              </a:ext>
+            </a:extLst>
+          </p:cNvPr>
+          <p:cNvSpPr>
+            <a:spLocks xmlns:a="http://schemas.openxmlformats.org/drawingml/2006/main" noGrp="1"/>
+          </p:cNvSpPr>
+          <p:nvPr/>
+        </p:nvSpPr>
+        <p:spPr>
+          <a:xfrm xmlns:a="http://schemas.openxmlformats.org/drawingml/2006/main">
+            <a:off x="609600" y="4000500"/>
+            <a:ext cx="5400675" cy="1485900"/>
           </a:xfrm>
           <a:prstGeom xmlns:a="http://schemas.openxmlformats.org/drawingml/2006/main" prst="roundRect">
             <a:avLst>
-              <a:gd name="adj" fmla="val 8738"/>
+              <a:gd name="adj" fmla="val 11538"/>
             </a:avLst>
           </a:prstGeom>
           <a:solidFill xmlns:a="http://schemas.openxmlformats.org/drawingml/2006/main">
@@ -9491,19 +9491,19 @@
           <p:cNvPr id="18" name="">
             <a:extLst xmlns:a="http://schemas.openxmlformats.org/drawingml/2006/main">
               <a:ext uri="{FF2B5EF4-FFF2-40B4-BE49-F238E27FC236}">
-                <a16:creationId xmlns:a16="http://schemas.microsoft.com/office/drawing/2014/main" id="{88C8CEF0-BC54-49EC-8907-46EE8232BF0D}"/>
-              </a:ext>
-            </a:extLst>
-          </p:cNvPr>
-          <p:cNvSpPr>
-            <a:spLocks xmlns:a="http://schemas.openxmlformats.org/drawingml/2006/main" noGrp="1"/>
-          </p:cNvSpPr>
-          <p:nvPr/>
-        </p:nvSpPr>
-        <p:spPr>
-          <a:xfrm xmlns:a="http://schemas.openxmlformats.org/drawingml/2006/main">
-            <a:off x="609600" y="4019550"/>
-            <a:ext cx="66675" cy="1962150"/>
+                <a16:creationId xmlns:a16="http://schemas.microsoft.com/office/drawing/2014/main" id="{EC8628F8-FAD4-4480-B869-79F6639D9918}"/>
+              </a:ext>
+            </a:extLst>
+          </p:cNvPr>
+          <p:cNvSpPr>
+            <a:spLocks xmlns:a="http://schemas.openxmlformats.org/drawingml/2006/main" noGrp="1"/>
+          </p:cNvSpPr>
+          <p:nvPr/>
+        </p:nvSpPr>
+        <p:spPr>
+          <a:xfrm xmlns:a="http://schemas.openxmlformats.org/drawingml/2006/main">
+            <a:off x="609600" y="4000500"/>
+            <a:ext cx="66675" cy="1485900"/>
           </a:xfrm>
           <a:prstGeom xmlns:a="http://schemas.openxmlformats.org/drawingml/2006/main" prst="rect">
             <a:avLst/>
@@ -9522,18 +9522,18 @@
           <p:cNvPr id="19" name="">
             <a:extLst xmlns:a="http://schemas.openxmlformats.org/drawingml/2006/main">
               <a:ext uri="{FF2B5EF4-FFF2-40B4-BE49-F238E27FC236}">
-                <a16:creationId xmlns:a16="http://schemas.microsoft.com/office/drawing/2014/main" id="{363E15D0-F9E3-40E9-92A9-05AF970D766D}"/>
-              </a:ext>
-            </a:extLst>
-          </p:cNvPr>
-          <p:cNvSpPr>
-            <a:spLocks xmlns:a="http://schemas.openxmlformats.org/drawingml/2006/main" noGrp="1"/>
-          </p:cNvSpPr>
-          <p:nvPr/>
-        </p:nvSpPr>
-        <p:spPr>
-          <a:xfrm xmlns:a="http://schemas.openxmlformats.org/drawingml/2006/main">
-            <a:off x="819150" y="4171950"/>
+                <a16:creationId xmlns:a16="http://schemas.microsoft.com/office/drawing/2014/main" id="{2B200A88-8623-4C57-869F-0E8B5AD4485C}"/>
+              </a:ext>
+            </a:extLst>
+          </p:cNvPr>
+          <p:cNvSpPr>
+            <a:spLocks xmlns:a="http://schemas.openxmlformats.org/drawingml/2006/main" noGrp="1"/>
+          </p:cNvSpPr>
+          <p:nvPr/>
+        </p:nvSpPr>
+        <p:spPr>
+          <a:xfrm xmlns:a="http://schemas.openxmlformats.org/drawingml/2006/main">
+            <a:off x="819150" y="4152900"/>
             <a:ext cx="5038725" cy="419100"/>
           </a:xfrm>
           <a:prstGeom xmlns:a="http://schemas.openxmlformats.org/drawingml/2006/main" prst="rect">
@@ -9584,19 +9584,19 @@
           <p:cNvPr id="20" name="">
             <a:extLst xmlns:a="http://schemas.openxmlformats.org/drawingml/2006/main">
               <a:ext uri="{FF2B5EF4-FFF2-40B4-BE49-F238E27FC236}">
-                <a16:creationId xmlns:a16="http://schemas.microsoft.com/office/drawing/2014/main" id="{098428C0-D8DF-4FCC-8CFF-DEB4CA35E3EF}"/>
-              </a:ext>
-            </a:extLst>
-          </p:cNvPr>
-          <p:cNvSpPr>
-            <a:spLocks xmlns:a="http://schemas.openxmlformats.org/drawingml/2006/main" noGrp="1"/>
-          </p:cNvSpPr>
-          <p:nvPr/>
-        </p:nvSpPr>
-        <p:spPr>
-          <a:xfrm xmlns:a="http://schemas.openxmlformats.org/drawingml/2006/main">
-            <a:off x="819150" y="4600575"/>
-            <a:ext cx="5038725" cy="1257300"/>
+                <a16:creationId xmlns:a16="http://schemas.microsoft.com/office/drawing/2014/main" id="{2EB287B2-1B85-4952-9A68-7C2A9499D7C1}"/>
+              </a:ext>
+            </a:extLst>
+          </p:cNvPr>
+          <p:cNvSpPr>
+            <a:spLocks xmlns:a="http://schemas.openxmlformats.org/drawingml/2006/main" noGrp="1"/>
+          </p:cNvSpPr>
+          <p:nvPr/>
+        </p:nvSpPr>
+        <p:spPr>
+          <a:xfrm xmlns:a="http://schemas.openxmlformats.org/drawingml/2006/main">
+            <a:off x="819150" y="4581525"/>
+            <a:ext cx="5038725" cy="781050"/>
           </a:xfrm>
           <a:prstGeom xmlns:a="http://schemas.openxmlformats.org/drawingml/2006/main" prst="rect">
             <a:avLst/>
@@ -9646,23 +9646,23 @@
           <p:cNvPr id="21" name="">
             <a:extLst xmlns:a="http://schemas.openxmlformats.org/drawingml/2006/main">
               <a:ext uri="{FF2B5EF4-FFF2-40B4-BE49-F238E27FC236}">
-                <a16:creationId xmlns:a16="http://schemas.microsoft.com/office/drawing/2014/main" id="{1B0ACE09-B1FD-4C44-8348-CCB6BDD936DA}"/>
-              </a:ext>
-            </a:extLst>
-          </p:cNvPr>
-          <p:cNvSpPr>
-            <a:spLocks xmlns:a="http://schemas.openxmlformats.org/drawingml/2006/main" noGrp="1"/>
-          </p:cNvSpPr>
-          <p:nvPr/>
-        </p:nvSpPr>
-        <p:spPr>
-          <a:xfrm xmlns:a="http://schemas.openxmlformats.org/drawingml/2006/main">
-            <a:off x="6181725" y="4019550"/>
-            <a:ext cx="5400675" cy="1962150"/>
+                <a16:creationId xmlns:a16="http://schemas.microsoft.com/office/drawing/2014/main" id="{E8D73B6E-8A18-455B-89AD-8CF4F75920E7}"/>
+              </a:ext>
+            </a:extLst>
+          </p:cNvPr>
+          <p:cNvSpPr>
+            <a:spLocks xmlns:a="http://schemas.openxmlformats.org/drawingml/2006/main" noGrp="1"/>
+          </p:cNvSpPr>
+          <p:nvPr/>
+        </p:nvSpPr>
+        <p:spPr>
+          <a:xfrm xmlns:a="http://schemas.openxmlformats.org/drawingml/2006/main">
+            <a:off x="6181725" y="4000500"/>
+            <a:ext cx="5400675" cy="1485900"/>
           </a:xfrm>
           <a:prstGeom xmlns:a="http://schemas.openxmlformats.org/drawingml/2006/main" prst="roundRect">
             <a:avLst>
-              <a:gd name="adj" fmla="val 8738"/>
+              <a:gd name="adj" fmla="val 11538"/>
             </a:avLst>
           </a:prstGeom>
           <a:solidFill xmlns:a="http://schemas.openxmlformats.org/drawingml/2006/main">
@@ -9681,19 +9681,19 @@
           <p:cNvPr id="22" name="">
             <a:extLst xmlns:a="http://schemas.openxmlformats.org/drawingml/2006/main">
               <a:ext uri="{FF2B5EF4-FFF2-40B4-BE49-F238E27FC236}">
-                <a16:creationId xmlns:a16="http://schemas.microsoft.com/office/drawing/2014/main" id="{9E52F008-5637-48E0-A801-ADDAB483A68A}"/>
-              </a:ext>
-            </a:extLst>
-          </p:cNvPr>
-          <p:cNvSpPr>
-            <a:spLocks xmlns:a="http://schemas.openxmlformats.org/drawingml/2006/main" noGrp="1"/>
-          </p:cNvSpPr>
-          <p:nvPr/>
-        </p:nvSpPr>
-        <p:spPr>
-          <a:xfrm xmlns:a="http://schemas.openxmlformats.org/drawingml/2006/main">
-            <a:off x="6181725" y="4019550"/>
-            <a:ext cx="66675" cy="1962150"/>
+                <a16:creationId xmlns:a16="http://schemas.microsoft.com/office/drawing/2014/main" id="{67683B59-53B9-48EC-B30C-C591853B03C4}"/>
+              </a:ext>
+            </a:extLst>
+          </p:cNvPr>
+          <p:cNvSpPr>
+            <a:spLocks xmlns:a="http://schemas.openxmlformats.org/drawingml/2006/main" noGrp="1"/>
+          </p:cNvSpPr>
+          <p:nvPr/>
+        </p:nvSpPr>
+        <p:spPr>
+          <a:xfrm xmlns:a="http://schemas.openxmlformats.org/drawingml/2006/main">
+            <a:off x="6181725" y="4000500"/>
+            <a:ext cx="66675" cy="1485900"/>
           </a:xfrm>
           <a:prstGeom xmlns:a="http://schemas.openxmlformats.org/drawingml/2006/main" prst="rect">
             <a:avLst/>
@@ -9712,18 +9712,18 @@
           <p:cNvPr id="23" name="">
             <a:extLst xmlns:a="http://schemas.openxmlformats.org/drawingml/2006/main">
               <a:ext uri="{FF2B5EF4-FFF2-40B4-BE49-F238E27FC236}">
-                <a16:creationId xmlns:a16="http://schemas.microsoft.com/office/drawing/2014/main" id="{6EFE0D72-969A-4CD0-95D4-86A602EA6CFE}"/>
-              </a:ext>
-            </a:extLst>
-          </p:cNvPr>
-          <p:cNvSpPr>
-            <a:spLocks xmlns:a="http://schemas.openxmlformats.org/drawingml/2006/main" noGrp="1"/>
-          </p:cNvSpPr>
-          <p:nvPr/>
-        </p:nvSpPr>
-        <p:spPr>
-          <a:xfrm xmlns:a="http://schemas.openxmlformats.org/drawingml/2006/main">
-            <a:off x="6391275" y="4171950"/>
+                <a16:creationId xmlns:a16="http://schemas.microsoft.com/office/drawing/2014/main" id="{34E8AC14-EE99-4435-8336-3F49EDA82C20}"/>
+              </a:ext>
+            </a:extLst>
+          </p:cNvPr>
+          <p:cNvSpPr>
+            <a:spLocks xmlns:a="http://schemas.openxmlformats.org/drawingml/2006/main" noGrp="1"/>
+          </p:cNvSpPr>
+          <p:nvPr/>
+        </p:nvSpPr>
+        <p:spPr>
+          <a:xfrm xmlns:a="http://schemas.openxmlformats.org/drawingml/2006/main">
+            <a:off x="6391275" y="4152900"/>
             <a:ext cx="5038725" cy="419100"/>
           </a:xfrm>
           <a:prstGeom xmlns:a="http://schemas.openxmlformats.org/drawingml/2006/main" prst="rect">
@@ -9774,19 +9774,19 @@
           <p:cNvPr id="24" name="">
             <a:extLst xmlns:a="http://schemas.openxmlformats.org/drawingml/2006/main">
               <a:ext uri="{FF2B5EF4-FFF2-40B4-BE49-F238E27FC236}">
-                <a16:creationId xmlns:a16="http://schemas.microsoft.com/office/drawing/2014/main" id="{AA374D66-001A-4221-BC04-537E67040B86}"/>
-              </a:ext>
-            </a:extLst>
-          </p:cNvPr>
-          <p:cNvSpPr>
-            <a:spLocks xmlns:a="http://schemas.openxmlformats.org/drawingml/2006/main" noGrp="1"/>
-          </p:cNvSpPr>
-          <p:nvPr/>
-        </p:nvSpPr>
-        <p:spPr>
-          <a:xfrm xmlns:a="http://schemas.openxmlformats.org/drawingml/2006/main">
-            <a:off x="6391275" y="4600575"/>
-            <a:ext cx="5038725" cy="1257300"/>
+                <a16:creationId xmlns:a16="http://schemas.microsoft.com/office/drawing/2014/main" id="{F4BFCF3B-5F45-4337-A820-B19D0BA6B722}"/>
+              </a:ext>
+            </a:extLst>
+          </p:cNvPr>
+          <p:cNvSpPr>
+            <a:spLocks xmlns:a="http://schemas.openxmlformats.org/drawingml/2006/main" noGrp="1"/>
+          </p:cNvSpPr>
+          <p:nvPr/>
+        </p:nvSpPr>
+        <p:spPr>
+          <a:xfrm xmlns:a="http://schemas.openxmlformats.org/drawingml/2006/main">
+            <a:off x="6391275" y="4581525"/>
+            <a:ext cx="5038725" cy="781050"/>
           </a:xfrm>
           <a:prstGeom xmlns:a="http://schemas.openxmlformats.org/drawingml/2006/main" prst="rect">
             <a:avLst/>
@@ -9836,19 +9836,19 @@
           <p:cNvPr id="25" name="">
             <a:extLst xmlns:a="http://schemas.openxmlformats.org/drawingml/2006/main">
               <a:ext uri="{FF2B5EF4-FFF2-40B4-BE49-F238E27FC236}">
-                <a16:creationId xmlns:a16="http://schemas.microsoft.com/office/drawing/2014/main" id="{C8EE2511-6BB2-4400-9A26-2A85A18FA063}"/>
-              </a:ext>
-            </a:extLst>
-          </p:cNvPr>
-          <p:cNvSpPr>
-            <a:spLocks xmlns:a="http://schemas.openxmlformats.org/drawingml/2006/main" noGrp="1"/>
-          </p:cNvSpPr>
-          <p:nvPr/>
-        </p:nvSpPr>
-        <p:spPr>
-          <a:xfrm xmlns:a="http://schemas.openxmlformats.org/drawingml/2006/main">
-            <a:off x="609600" y="5829300"/>
-            <a:ext cx="10972800" cy="457200"/>
+                <a16:creationId xmlns:a16="http://schemas.microsoft.com/office/drawing/2014/main" id="{E46DDAFB-2D2F-48AE-A41D-1D11B4DC8ECC}"/>
+              </a:ext>
+            </a:extLst>
+          </p:cNvPr>
+          <p:cNvSpPr>
+            <a:spLocks xmlns:a="http://schemas.openxmlformats.org/drawingml/2006/main" noGrp="1"/>
+          </p:cNvSpPr>
+          <p:nvPr/>
+        </p:nvSpPr>
+        <p:spPr>
+          <a:xfrm xmlns:a="http://schemas.openxmlformats.org/drawingml/2006/main">
+            <a:off x="609600" y="5676900"/>
+            <a:ext cx="10972800" cy="590550"/>
           </a:xfrm>
           <a:prstGeom xmlns:a="http://schemas.openxmlformats.org/drawingml/2006/main" prst="rect">
             <a:avLst/>
@@ -9898,7 +9898,7 @@
     </p:spTree>
     <p:extLst>
       <p:ext uri="{BB962C8B-B14F-4D97-AF65-F5344CB8AC3E}">
-        <p14:creationId xmlns:p14="http://schemas.microsoft.com/office/powerpoint/2010/main" val="1805760231"/>
+        <p14:creationId xmlns:p14="http://schemas.microsoft.com/office/powerpoint/2010/main" val="1652020677"/>
       </p:ext>
     </p:extLst>
   </p:cSld>
@@ -9929,7 +9929,7 @@
           <p:cNvPr id="24" name="">
             <a:extLst xmlns:a="http://schemas.openxmlformats.org/drawingml/2006/main">
               <a:ext uri="{FF2B5EF4-FFF2-40B4-BE49-F238E27FC236}">
-                <a16:creationId xmlns:a16="http://schemas.microsoft.com/office/drawing/2014/main" id="{8CFD8463-BE6C-471F-8190-541C46DBED10}"/>
+                <a16:creationId xmlns:a16="http://schemas.microsoft.com/office/drawing/2014/main" id="{9013163C-50E8-4F9B-B965-1767A7452B06}"/>
               </a:ext>
             </a:extLst>
           </p:cNvPr>
@@ -9960,7 +9960,7 @@
           <p:cNvPr id="2" name="">
             <a:extLst xmlns:a="http://schemas.openxmlformats.org/drawingml/2006/main">
               <a:ext uri="{FF2B5EF4-FFF2-40B4-BE49-F238E27FC236}">
-                <a16:creationId xmlns:a16="http://schemas.microsoft.com/office/drawing/2014/main" id="{67F231D6-5C61-4D1B-9B7C-07B0831A1023}"/>
+                <a16:creationId xmlns:a16="http://schemas.microsoft.com/office/drawing/2014/main" id="{9C28E0D0-F257-49E1-A351-4A6AFCBCB90D}"/>
               </a:ext>
             </a:extLst>
           </p:cNvPr>
@@ -10012,7 +10012,7 @@
                 <a:ea typeface="Aptos"/>
                 <a:cs typeface="Aptos"/>
               </a:rPr>
-              <a:t>PHASE 0</a:t>
+              <a:t>BESCHLUSS</a:t>
             </a:r>
           </a:p>
         </p:txBody>
@@ -10022,7 +10022,7 @@
           <p:cNvPr id="3" name="">
             <a:extLst xmlns:a="http://schemas.openxmlformats.org/drawingml/2006/main">
               <a:ext uri="{FF2B5EF4-FFF2-40B4-BE49-F238E27FC236}">
-                <a16:creationId xmlns:a16="http://schemas.microsoft.com/office/drawing/2014/main" id="{2F39926E-2DCA-4691-B01F-7430037F3BD6}"/>
+                <a16:creationId xmlns:a16="http://schemas.microsoft.com/office/drawing/2014/main" id="{D96B0DAF-F814-446F-B041-526C0AB55EBC}"/>
               </a:ext>
             </a:extLst>
           </p:cNvPr>
@@ -10056,7 +10056,7 @@
                 <a:spcPct val="108000"/>
               </a:lnSpc>
               <a:buNone/>
-              <a:defRPr sz="3150" b="1">
+              <a:defRPr sz="2550" b="1">
                 <a:solidFill>
                   <a:srgbClr val="071426"/>
                 </a:solidFill>
@@ -10066,7 +10066,7 @@
               </a:defRPr>
             </a:pPr>
             <a:r>
-              <a:rPr sz="3150" b="1">
+              <a:rPr sz="2550" b="1">
                 <a:solidFill>
                   <a:srgbClr val="071426"/>
                 </a:solidFill>
@@ -10084,7 +10084,7 @@
           <p:cNvPr id="4" name="">
             <a:extLst xmlns:a="http://schemas.openxmlformats.org/drawingml/2006/main">
               <a:ext uri="{FF2B5EF4-FFF2-40B4-BE49-F238E27FC236}">
-                <a16:creationId xmlns:a16="http://schemas.microsoft.com/office/drawing/2014/main" id="{273B51BF-7B96-44F0-B67F-5AE9E35308AD}"/>
+                <a16:creationId xmlns:a16="http://schemas.microsoft.com/office/drawing/2014/main" id="{66DB8355-2D9E-4A26-BDF0-B75A98047EF0}"/>
               </a:ext>
             </a:extLst>
           </p:cNvPr>
@@ -10119,7 +10119,7 @@
           <p:nvPr/>
         </p:nvPicPr>
         <p:blipFill>
-          <a:blip xmlns:r="http://schemas.openxmlformats.org/officeDocument/2006/relationships" xmlns:a="http://schemas.openxmlformats.org/drawingml/2006/main" r:embed="Rbef338ebd6dd4d52"/>
+          <a:blip xmlns:r="http://schemas.openxmlformats.org/officeDocument/2006/relationships" xmlns:a="http://schemas.openxmlformats.org/drawingml/2006/main" r:embed="R68416ec879434f62"/>
           <a:srcRect xmlns:a="http://schemas.openxmlformats.org/drawingml/2006/main" l="0" t="0" r="0" b="0"/>
           <a:stretch xmlns:a="http://schemas.openxmlformats.org/drawingml/2006/main">
             <a:fillRect l="0" t="0" r="0" b="0"/>
@@ -10140,7 +10140,7 @@
           <p:cNvPr id="6" name="">
             <a:extLst xmlns:a="http://schemas.openxmlformats.org/drawingml/2006/main">
               <a:ext uri="{FF2B5EF4-FFF2-40B4-BE49-F238E27FC236}">
-                <a16:creationId xmlns:a16="http://schemas.microsoft.com/office/drawing/2014/main" id="{90B8AF07-B71A-4B20-BEB9-04C0F915D1C2}"/>
+                <a16:creationId xmlns:a16="http://schemas.microsoft.com/office/drawing/2014/main" id="{296A5089-D75F-4767-A133-8092582EBC2D}"/>
               </a:ext>
             </a:extLst>
           </p:cNvPr>
@@ -10202,7 +10202,7 @@
           <p:cNvPr id="7" name="">
             <a:extLst xmlns:a="http://schemas.openxmlformats.org/drawingml/2006/main">
               <a:ext uri="{FF2B5EF4-FFF2-40B4-BE49-F238E27FC236}">
-                <a16:creationId xmlns:a16="http://schemas.microsoft.com/office/drawing/2014/main" id="{1734EDE1-96B9-45AA-894C-E225FF7D02BE}"/>
+                <a16:creationId xmlns:a16="http://schemas.microsoft.com/office/drawing/2014/main" id="{B056EA7E-6FA1-4FFC-A75F-E527187C52A4}"/>
               </a:ext>
             </a:extLst>
           </p:cNvPr>
@@ -10264,7 +10264,7 @@
           <p:cNvPr id="8" name="">
             <a:extLst xmlns:a="http://schemas.openxmlformats.org/drawingml/2006/main">
               <a:ext uri="{FF2B5EF4-FFF2-40B4-BE49-F238E27FC236}">
-                <a16:creationId xmlns:a16="http://schemas.microsoft.com/office/drawing/2014/main" id="{579DCB2A-17BA-4ED0-9A17-AADA0C11E0AD}"/>
+                <a16:creationId xmlns:a16="http://schemas.microsoft.com/office/drawing/2014/main" id="{B09AC602-88B6-4029-AC5B-E1519A95B298}"/>
               </a:ext>
             </a:extLst>
           </p:cNvPr>
@@ -10295,7 +10295,7 @@
           <p:cNvPr id="9" name="">
             <a:extLst xmlns:a="http://schemas.openxmlformats.org/drawingml/2006/main">
               <a:ext uri="{FF2B5EF4-FFF2-40B4-BE49-F238E27FC236}">
-                <a16:creationId xmlns:a16="http://schemas.microsoft.com/office/drawing/2014/main" id="{AB892792-E4B1-4B54-ABB7-B915DDC2C488}"/>
+                <a16:creationId xmlns:a16="http://schemas.microsoft.com/office/drawing/2014/main" id="{FABAC118-55A7-45CA-ADE0-B49A4508B016}"/>
               </a:ext>
             </a:extLst>
           </p:cNvPr>
@@ -10357,7 +10357,7 @@
           <p:cNvPr id="10" name="">
             <a:extLst xmlns:a="http://schemas.openxmlformats.org/drawingml/2006/main">
               <a:ext uri="{FF2B5EF4-FFF2-40B4-BE49-F238E27FC236}">
-                <a16:creationId xmlns:a16="http://schemas.microsoft.com/office/drawing/2014/main" id="{5E66214C-4180-4472-8015-6EF16F10B274}"/>
+                <a16:creationId xmlns:a16="http://schemas.microsoft.com/office/drawing/2014/main" id="{638B3186-2FB1-4C4E-8D3B-7CB4ED04141A}"/>
               </a:ext>
             </a:extLst>
           </p:cNvPr>
@@ -10419,7 +10419,7 @@
           <p:cNvPr id="11" name="">
             <a:extLst xmlns:a="http://schemas.openxmlformats.org/drawingml/2006/main">
               <a:ext uri="{FF2B5EF4-FFF2-40B4-BE49-F238E27FC236}">
-                <a16:creationId xmlns:a16="http://schemas.microsoft.com/office/drawing/2014/main" id="{9084F412-1012-4403-A408-A5A02D0F2158}"/>
+                <a16:creationId xmlns:a16="http://schemas.microsoft.com/office/drawing/2014/main" id="{DDE4FF24-4CC6-4493-B0F7-942992D17738}"/>
               </a:ext>
             </a:extLst>
           </p:cNvPr>
@@ -10450,7 +10450,7 @@
           <p:cNvPr id="12" name="">
             <a:extLst xmlns:a="http://schemas.openxmlformats.org/drawingml/2006/main">
               <a:ext uri="{FF2B5EF4-FFF2-40B4-BE49-F238E27FC236}">
-                <a16:creationId xmlns:a16="http://schemas.microsoft.com/office/drawing/2014/main" id="{1C8750E4-7C4F-4F4F-8A54-35DA9D152D0F}"/>
+                <a16:creationId xmlns:a16="http://schemas.microsoft.com/office/drawing/2014/main" id="{826D1497-1BCE-40BA-A486-119D49575C5E}"/>
               </a:ext>
             </a:extLst>
           </p:cNvPr>
@@ -10512,7 +10512,7 @@
           <p:cNvPr id="13" name="">
             <a:extLst xmlns:a="http://schemas.openxmlformats.org/drawingml/2006/main">
               <a:ext uri="{FF2B5EF4-FFF2-40B4-BE49-F238E27FC236}">
-                <a16:creationId xmlns:a16="http://schemas.microsoft.com/office/drawing/2014/main" id="{93EBAB09-79F7-4324-9651-731DCA6024DB}"/>
+                <a16:creationId xmlns:a16="http://schemas.microsoft.com/office/drawing/2014/main" id="{2E470904-0202-4594-9B81-8D1049E22B48}"/>
               </a:ext>
             </a:extLst>
           </p:cNvPr>
@@ -10574,7 +10574,7 @@
           <p:cNvPr id="14" name="">
             <a:extLst xmlns:a="http://schemas.openxmlformats.org/drawingml/2006/main">
               <a:ext uri="{FF2B5EF4-FFF2-40B4-BE49-F238E27FC236}">
-                <a16:creationId xmlns:a16="http://schemas.microsoft.com/office/drawing/2014/main" id="{295C9E80-273D-4353-9600-6FA97CB6A1B3}"/>
+                <a16:creationId xmlns:a16="http://schemas.microsoft.com/office/drawing/2014/main" id="{CDEB18F9-0016-403F-930B-8B8412B495A3}"/>
               </a:ext>
             </a:extLst>
           </p:cNvPr>
@@ -10605,7 +10605,7 @@
           <p:cNvPr id="15" name="">
             <a:extLst xmlns:a="http://schemas.openxmlformats.org/drawingml/2006/main">
               <a:ext uri="{FF2B5EF4-FFF2-40B4-BE49-F238E27FC236}">
-                <a16:creationId xmlns:a16="http://schemas.microsoft.com/office/drawing/2014/main" id="{C1FD5A2F-8861-48CD-A42F-1D1E72029169}"/>
+                <a16:creationId xmlns:a16="http://schemas.microsoft.com/office/drawing/2014/main" id="{ED4874D8-CB6A-4E27-A724-90AA95D40F5D}"/>
               </a:ext>
             </a:extLst>
           </p:cNvPr>
@@ -10667,7 +10667,7 @@
           <p:cNvPr id="16" name="">
             <a:extLst xmlns:a="http://schemas.openxmlformats.org/drawingml/2006/main">
               <a:ext uri="{FF2B5EF4-FFF2-40B4-BE49-F238E27FC236}">
-                <a16:creationId xmlns:a16="http://schemas.microsoft.com/office/drawing/2014/main" id="{134D86FE-401F-4E42-BB0F-9329C5A4DB8B}"/>
+                <a16:creationId xmlns:a16="http://schemas.microsoft.com/office/drawing/2014/main" id="{08779A36-1357-47B8-942A-47C9C75ABA96}"/>
               </a:ext>
             </a:extLst>
           </p:cNvPr>
@@ -10729,7 +10729,7 @@
           <p:cNvPr id="17" name="">
             <a:extLst xmlns:a="http://schemas.openxmlformats.org/drawingml/2006/main">
               <a:ext uri="{FF2B5EF4-FFF2-40B4-BE49-F238E27FC236}">
-                <a16:creationId xmlns:a16="http://schemas.microsoft.com/office/drawing/2014/main" id="{FAACCE44-2EFD-4D76-9CD3-394C655AFE02}"/>
+                <a16:creationId xmlns:a16="http://schemas.microsoft.com/office/drawing/2014/main" id="{1219DC53-900A-483B-9238-00DE5FC19E7D}"/>
               </a:ext>
             </a:extLst>
           </p:cNvPr>
@@ -10760,7 +10760,7 @@
           <p:cNvPr id="18" name="">
             <a:extLst xmlns:a="http://schemas.openxmlformats.org/drawingml/2006/main">
               <a:ext uri="{FF2B5EF4-FFF2-40B4-BE49-F238E27FC236}">
-                <a16:creationId xmlns:a16="http://schemas.microsoft.com/office/drawing/2014/main" id="{947CF63E-E80B-45E7-BAC6-DBEC136FB096}"/>
+                <a16:creationId xmlns:a16="http://schemas.microsoft.com/office/drawing/2014/main" id="{F3BE42A9-9F6B-4AB4-AB24-23FC13DE54A7}"/>
               </a:ext>
             </a:extLst>
           </p:cNvPr>
@@ -10822,7 +10822,7 @@
           <p:cNvPr id="19" name="">
             <a:extLst xmlns:a="http://schemas.openxmlformats.org/drawingml/2006/main">
               <a:ext uri="{FF2B5EF4-FFF2-40B4-BE49-F238E27FC236}">
-                <a16:creationId xmlns:a16="http://schemas.microsoft.com/office/drawing/2014/main" id="{00A916AF-ED9D-4E77-8E76-8C3A4F79C96C}"/>
+                <a16:creationId xmlns:a16="http://schemas.microsoft.com/office/drawing/2014/main" id="{61768759-621D-4F5E-81A1-199282347B69}"/>
               </a:ext>
             </a:extLst>
           </p:cNvPr>
@@ -10884,7 +10884,7 @@
           <p:cNvPr id="20" name="">
             <a:extLst xmlns:a="http://schemas.openxmlformats.org/drawingml/2006/main">
               <a:ext uri="{FF2B5EF4-FFF2-40B4-BE49-F238E27FC236}">
-                <a16:creationId xmlns:a16="http://schemas.microsoft.com/office/drawing/2014/main" id="{9109DEA6-D54E-4866-963C-25396634F314}"/>
+                <a16:creationId xmlns:a16="http://schemas.microsoft.com/office/drawing/2014/main" id="{F6622D39-8BD1-4028-8E4C-73861D4572BF}"/>
               </a:ext>
             </a:extLst>
           </p:cNvPr>
@@ -10915,7 +10915,7 @@
           <p:cNvPr id="21" name="">
             <a:extLst xmlns:a="http://schemas.openxmlformats.org/drawingml/2006/main">
               <a:ext uri="{FF2B5EF4-FFF2-40B4-BE49-F238E27FC236}">
-                <a16:creationId xmlns:a16="http://schemas.microsoft.com/office/drawing/2014/main" id="{0C1B6ACF-1FB6-407E-9B4A-0906BAB11FE3}"/>
+                <a16:creationId xmlns:a16="http://schemas.microsoft.com/office/drawing/2014/main" id="{CC4F0745-478E-442C-A2E0-484F412FA41D}"/>
               </a:ext>
             </a:extLst>
           </p:cNvPr>
@@ -10977,7 +10977,7 @@
           <p:cNvPr id="22" name="">
             <a:extLst xmlns:a="http://schemas.openxmlformats.org/drawingml/2006/main">
               <a:ext uri="{FF2B5EF4-FFF2-40B4-BE49-F238E27FC236}">
-                <a16:creationId xmlns:a16="http://schemas.microsoft.com/office/drawing/2014/main" id="{C2C99217-8241-4533-815E-085C573D3DC9}"/>
+                <a16:creationId xmlns:a16="http://schemas.microsoft.com/office/drawing/2014/main" id="{ABD249C6-3A0A-4434-A67F-C4AFAB420594}"/>
               </a:ext>
             </a:extLst>
           </p:cNvPr>
@@ -11039,7 +11039,7 @@
           <p:cNvPr id="23" name="">
             <a:extLst xmlns:a="http://schemas.openxmlformats.org/drawingml/2006/main">
               <a:ext uri="{FF2B5EF4-FFF2-40B4-BE49-F238E27FC236}">
-                <a16:creationId xmlns:a16="http://schemas.microsoft.com/office/drawing/2014/main" id="{0459F7CA-0682-46A3-B208-3778E6012163}"/>
+                <a16:creationId xmlns:a16="http://schemas.microsoft.com/office/drawing/2014/main" id="{CE905750-D094-4B34-B83D-BFE9C3AD1794}"/>
               </a:ext>
             </a:extLst>
           </p:cNvPr>
@@ -11101,7 +11101,7 @@
     </p:spTree>
     <p:extLst>
       <p:ext uri="{BB962C8B-B14F-4D97-AF65-F5344CB8AC3E}">
-        <p14:creationId xmlns:p14="http://schemas.microsoft.com/office/powerpoint/2010/main" val="457039540"/>
+        <p14:creationId xmlns:p14="http://schemas.microsoft.com/office/powerpoint/2010/main" val="167907446"/>
       </p:ext>
     </p:extLst>
   </p:cSld>
@@ -11132,7 +11132,7 @@
           <p:cNvPr id="22" name="">
             <a:extLst xmlns:a="http://schemas.openxmlformats.org/drawingml/2006/main">
               <a:ext uri="{FF2B5EF4-FFF2-40B4-BE49-F238E27FC236}">
-                <a16:creationId xmlns:a16="http://schemas.microsoft.com/office/drawing/2014/main" id="{D6DE4AF4-029C-4096-86C7-2493B8986468}"/>
+                <a16:creationId xmlns:a16="http://schemas.microsoft.com/office/drawing/2014/main" id="{2F73BA67-4332-4751-A80C-8B8D18A56147}"/>
               </a:ext>
             </a:extLst>
           </p:cNvPr>
@@ -11163,7 +11163,7 @@
           <p:cNvPr id="2" name="">
             <a:extLst xmlns:a="http://schemas.openxmlformats.org/drawingml/2006/main">
               <a:ext uri="{FF2B5EF4-FFF2-40B4-BE49-F238E27FC236}">
-                <a16:creationId xmlns:a16="http://schemas.microsoft.com/office/drawing/2014/main" id="{69E93315-77DC-4FAE-B840-960CE7AE8901}"/>
+                <a16:creationId xmlns:a16="http://schemas.microsoft.com/office/drawing/2014/main" id="{5AC2D51F-ABA8-4A85-8A27-DC97F6A96C31}"/>
               </a:ext>
             </a:extLst>
           </p:cNvPr>
@@ -11225,7 +11225,7 @@
           <p:cNvPr id="3" name="">
             <a:extLst xmlns:a="http://schemas.openxmlformats.org/drawingml/2006/main">
               <a:ext uri="{FF2B5EF4-FFF2-40B4-BE49-F238E27FC236}">
-                <a16:creationId xmlns:a16="http://schemas.microsoft.com/office/drawing/2014/main" id="{E1AE1BCB-BE84-4674-BA90-D256BBA03E34}"/>
+                <a16:creationId xmlns:a16="http://schemas.microsoft.com/office/drawing/2014/main" id="{C013224F-FC44-48E0-90F9-E68CACA31ACA}"/>
               </a:ext>
             </a:extLst>
           </p:cNvPr>
@@ -11250,7 +11250,7 @@
         </p:spPr>
         <p:txBody>
           <a:bodyPr xmlns:a="http://schemas.openxmlformats.org/drawingml/2006/main" lIns="76200" tIns="57150" rIns="76200" bIns="57150" anchor="ctr">
-            <a:normAutofit fontScale="96687"/>
+            <a:normAutofit fontScale="100000"/>
           </a:bodyPr>
           <a:lstStyle xmlns:a="http://schemas.openxmlformats.org/drawingml/2006/main"/>
           <a:p xmlns:a="http://schemas.openxmlformats.org/drawingml/2006/main">
@@ -11259,7 +11259,7 @@
                 <a:spcPct val="108000"/>
               </a:lnSpc>
               <a:buNone/>
-              <a:defRPr sz="3150" b="1">
+              <a:defRPr sz="2250" b="1">
                 <a:solidFill>
                   <a:srgbClr val="071426"/>
                 </a:solidFill>
@@ -11269,7 +11269,7 @@
               </a:defRPr>
             </a:pPr>
             <a:r>
-              <a:rPr sz="3150" b="1">
+              <a:rPr sz="2250" b="1">
                 <a:solidFill>
                   <a:srgbClr val="071426"/>
                 </a:solidFill>
@@ -11287,7 +11287,7 @@
           <p:cNvPr id="4" name="">
             <a:extLst xmlns:a="http://schemas.openxmlformats.org/drawingml/2006/main">
               <a:ext uri="{FF2B5EF4-FFF2-40B4-BE49-F238E27FC236}">
-                <a16:creationId xmlns:a16="http://schemas.microsoft.com/office/drawing/2014/main" id="{C7763CA8-0F74-4574-AED7-55983941FE5C}"/>
+                <a16:creationId xmlns:a16="http://schemas.microsoft.com/office/drawing/2014/main" id="{3935A53D-6FEC-4ABC-AFF7-F2D2A110531C}"/>
               </a:ext>
             </a:extLst>
           </p:cNvPr>
@@ -11322,7 +11322,7 @@
           <p:nvPr/>
         </p:nvPicPr>
         <p:blipFill>
-          <a:blip xmlns:r="http://schemas.openxmlformats.org/officeDocument/2006/relationships" xmlns:a="http://schemas.openxmlformats.org/drawingml/2006/main" r:embed="Ra19da5097e2a4a61"/>
+          <a:blip xmlns:r="http://schemas.openxmlformats.org/officeDocument/2006/relationships" xmlns:a="http://schemas.openxmlformats.org/drawingml/2006/main" r:embed="R638e759e7396478f"/>
           <a:srcRect xmlns:a="http://schemas.openxmlformats.org/drawingml/2006/main" l="0" t="0" r="0" b="0"/>
           <a:stretch xmlns:a="http://schemas.openxmlformats.org/drawingml/2006/main">
             <a:fillRect l="0" t="0" r="0" b="0"/>
@@ -11343,7 +11343,7 @@
           <p:cNvPr id="6" name="">
             <a:extLst xmlns:a="http://schemas.openxmlformats.org/drawingml/2006/main">
               <a:ext uri="{FF2B5EF4-FFF2-40B4-BE49-F238E27FC236}">
-                <a16:creationId xmlns:a16="http://schemas.microsoft.com/office/drawing/2014/main" id="{E82081BA-2618-4551-B07D-137AA86B2632}"/>
+                <a16:creationId xmlns:a16="http://schemas.microsoft.com/office/drawing/2014/main" id="{4921E498-1969-46DF-8935-90425B1F03F1}"/>
               </a:ext>
             </a:extLst>
           </p:cNvPr>
@@ -11405,7 +11405,7 @@
           <p:cNvPr id="7" name="">
             <a:extLst xmlns:a="http://schemas.openxmlformats.org/drawingml/2006/main">
               <a:ext uri="{FF2B5EF4-FFF2-40B4-BE49-F238E27FC236}">
-                <a16:creationId xmlns:a16="http://schemas.microsoft.com/office/drawing/2014/main" id="{D7D9F2EC-81B8-428B-887A-3D5674925F0A}"/>
+                <a16:creationId xmlns:a16="http://schemas.microsoft.com/office/drawing/2014/main" id="{8546D870-BD3D-469E-93D0-5DB3DE55419D}"/>
               </a:ext>
             </a:extLst>
           </p:cNvPr>
@@ -11467,19 +11467,19 @@
           <p:cNvPr id="8" name="">
             <a:extLst xmlns:a="http://schemas.openxmlformats.org/drawingml/2006/main">
               <a:ext uri="{FF2B5EF4-FFF2-40B4-BE49-F238E27FC236}">
-                <a16:creationId xmlns:a16="http://schemas.microsoft.com/office/drawing/2014/main" id="{6DD586B7-983E-47BF-847E-0221D895C044}"/>
-              </a:ext>
-            </a:extLst>
-          </p:cNvPr>
-          <p:cNvSpPr>
-            <a:spLocks xmlns:a="http://schemas.openxmlformats.org/drawingml/2006/main" noGrp="1"/>
-          </p:cNvSpPr>
-          <p:nvPr/>
-        </p:nvSpPr>
-        <p:spPr>
-          <a:xfrm xmlns:a="http://schemas.openxmlformats.org/drawingml/2006/main">
-            <a:off x="609600" y="1847850"/>
-            <a:ext cx="10972800" cy="495300"/>
+                <a16:creationId xmlns:a16="http://schemas.microsoft.com/office/drawing/2014/main" id="{84E671FF-FAD5-4DEA-AB01-35B098D233E4}"/>
+              </a:ext>
+            </a:extLst>
+          </p:cNvPr>
+          <p:cNvSpPr>
+            <a:spLocks xmlns:a="http://schemas.openxmlformats.org/drawingml/2006/main" noGrp="1"/>
+          </p:cNvSpPr>
+          <p:nvPr/>
+        </p:nvSpPr>
+        <p:spPr>
+          <a:xfrm xmlns:a="http://schemas.openxmlformats.org/drawingml/2006/main">
+            <a:off x="609600" y="1752600"/>
+            <a:ext cx="10972800" cy="400050"/>
           </a:xfrm>
           <a:prstGeom xmlns:a="http://schemas.openxmlformats.org/drawingml/2006/main" prst="rect">
             <a:avLst/>
@@ -11501,7 +11501,7 @@
                 <a:spcPct val="108000"/>
               </a:lnSpc>
               <a:buNone/>
-              <a:defRPr sz="1875" b="1">
+              <a:defRPr sz="1575" b="1">
                 <a:solidFill>
                   <a:srgbClr val="1B4F78"/>
                 </a:solidFill>
@@ -11511,7 +11511,7 @@
               </a:defRPr>
             </a:pPr>
             <a:r>
-              <a:rPr sz="1875" b="1">
+              <a:rPr sz="1575" b="1">
                 <a:solidFill>
                   <a:srgbClr val="1B4F78"/>
                 </a:solidFill>
@@ -11529,23 +11529,23 @@
           <p:cNvPr id="9" name="">
             <a:extLst xmlns:a="http://schemas.openxmlformats.org/drawingml/2006/main">
               <a:ext uri="{FF2B5EF4-FFF2-40B4-BE49-F238E27FC236}">
-                <a16:creationId xmlns:a16="http://schemas.microsoft.com/office/drawing/2014/main" id="{BC3DEF13-2434-43D8-8F27-28B203CD5552}"/>
-              </a:ext>
-            </a:extLst>
-          </p:cNvPr>
-          <p:cNvSpPr>
-            <a:spLocks xmlns:a="http://schemas.openxmlformats.org/drawingml/2006/main" noGrp="1"/>
-          </p:cNvSpPr>
-          <p:nvPr/>
-        </p:nvSpPr>
-        <p:spPr>
-          <a:xfrm xmlns:a="http://schemas.openxmlformats.org/drawingml/2006/main">
-            <a:off x="609600" y="1885950"/>
-            <a:ext cx="5400675" cy="1962150"/>
+                <a16:creationId xmlns:a16="http://schemas.microsoft.com/office/drawing/2014/main" id="{3C71E775-6A7A-49D8-BB27-6CAA5F06C7A3}"/>
+              </a:ext>
+            </a:extLst>
+          </p:cNvPr>
+          <p:cNvSpPr>
+            <a:spLocks xmlns:a="http://schemas.openxmlformats.org/drawingml/2006/main" noGrp="1"/>
+          </p:cNvSpPr>
+          <p:nvPr/>
+        </p:nvSpPr>
+        <p:spPr>
+          <a:xfrm xmlns:a="http://schemas.openxmlformats.org/drawingml/2006/main">
+            <a:off x="609600" y="2266950"/>
+            <a:ext cx="5400675" cy="1571625"/>
           </a:xfrm>
           <a:prstGeom xmlns:a="http://schemas.openxmlformats.org/drawingml/2006/main" prst="roundRect">
             <a:avLst>
-              <a:gd name="adj" fmla="val 8738"/>
+              <a:gd name="adj" fmla="val 10909"/>
             </a:avLst>
           </a:prstGeom>
           <a:solidFill xmlns:a="http://schemas.openxmlformats.org/drawingml/2006/main">
@@ -11564,19 +11564,19 @@
           <p:cNvPr id="10" name="">
             <a:extLst xmlns:a="http://schemas.openxmlformats.org/drawingml/2006/main">
               <a:ext uri="{FF2B5EF4-FFF2-40B4-BE49-F238E27FC236}">
-                <a16:creationId xmlns:a16="http://schemas.microsoft.com/office/drawing/2014/main" id="{97C18EB4-AB1D-4A7E-B54D-3895ADFD60A0}"/>
-              </a:ext>
-            </a:extLst>
-          </p:cNvPr>
-          <p:cNvSpPr>
-            <a:spLocks xmlns:a="http://schemas.openxmlformats.org/drawingml/2006/main" noGrp="1"/>
-          </p:cNvSpPr>
-          <p:nvPr/>
-        </p:nvSpPr>
-        <p:spPr>
-          <a:xfrm xmlns:a="http://schemas.openxmlformats.org/drawingml/2006/main">
-            <a:off x="609600" y="1885950"/>
-            <a:ext cx="66675" cy="1962150"/>
+                <a16:creationId xmlns:a16="http://schemas.microsoft.com/office/drawing/2014/main" id="{AF5314B9-533F-49F5-B345-7BEE5175FF24}"/>
+              </a:ext>
+            </a:extLst>
+          </p:cNvPr>
+          <p:cNvSpPr>
+            <a:spLocks xmlns:a="http://schemas.openxmlformats.org/drawingml/2006/main" noGrp="1"/>
+          </p:cNvSpPr>
+          <p:nvPr/>
+        </p:nvSpPr>
+        <p:spPr>
+          <a:xfrm xmlns:a="http://schemas.openxmlformats.org/drawingml/2006/main">
+            <a:off x="609600" y="2266950"/>
+            <a:ext cx="66675" cy="1571625"/>
           </a:xfrm>
           <a:prstGeom xmlns:a="http://schemas.openxmlformats.org/drawingml/2006/main" prst="rect">
             <a:avLst/>
@@ -11595,18 +11595,18 @@
           <p:cNvPr id="11" name="">
             <a:extLst xmlns:a="http://schemas.openxmlformats.org/drawingml/2006/main">
               <a:ext uri="{FF2B5EF4-FFF2-40B4-BE49-F238E27FC236}">
-                <a16:creationId xmlns:a16="http://schemas.microsoft.com/office/drawing/2014/main" id="{B036A534-A4A5-4790-ADAD-D3A0F0753AF5}"/>
-              </a:ext>
-            </a:extLst>
-          </p:cNvPr>
-          <p:cNvSpPr>
-            <a:spLocks xmlns:a="http://schemas.openxmlformats.org/drawingml/2006/main" noGrp="1"/>
-          </p:cNvSpPr>
-          <p:nvPr/>
-        </p:nvSpPr>
-        <p:spPr>
-          <a:xfrm xmlns:a="http://schemas.openxmlformats.org/drawingml/2006/main">
-            <a:off x="819150" y="2038350"/>
+                <a16:creationId xmlns:a16="http://schemas.microsoft.com/office/drawing/2014/main" id="{7AEC5114-6E5E-4E68-B38D-E2CB2475F2BD}"/>
+              </a:ext>
+            </a:extLst>
+          </p:cNvPr>
+          <p:cNvSpPr>
+            <a:spLocks xmlns:a="http://schemas.openxmlformats.org/drawingml/2006/main" noGrp="1"/>
+          </p:cNvSpPr>
+          <p:nvPr/>
+        </p:nvSpPr>
+        <p:spPr>
+          <a:xfrm xmlns:a="http://schemas.openxmlformats.org/drawingml/2006/main">
+            <a:off x="819150" y="2419350"/>
             <a:ext cx="5038725" cy="419100"/>
           </a:xfrm>
           <a:prstGeom xmlns:a="http://schemas.openxmlformats.org/drawingml/2006/main" prst="rect">
@@ -11657,23 +11657,23 @@
           <p:cNvPr id="12" name="">
             <a:extLst xmlns:a="http://schemas.openxmlformats.org/drawingml/2006/main">
               <a:ext uri="{FF2B5EF4-FFF2-40B4-BE49-F238E27FC236}">
-                <a16:creationId xmlns:a16="http://schemas.microsoft.com/office/drawing/2014/main" id="{A3777E87-AB33-4F55-87EB-AE3BC3DD5E60}"/>
-              </a:ext>
-            </a:extLst>
-          </p:cNvPr>
-          <p:cNvSpPr>
-            <a:spLocks xmlns:a="http://schemas.openxmlformats.org/drawingml/2006/main" noGrp="1"/>
-          </p:cNvSpPr>
-          <p:nvPr/>
-        </p:nvSpPr>
-        <p:spPr>
-          <a:xfrm xmlns:a="http://schemas.openxmlformats.org/drawingml/2006/main">
-            <a:off x="6181725" y="1885950"/>
-            <a:ext cx="5400675" cy="1962150"/>
+                <a16:creationId xmlns:a16="http://schemas.microsoft.com/office/drawing/2014/main" id="{0BB62E74-C327-4D0C-A026-356E9FAE0D84}"/>
+              </a:ext>
+            </a:extLst>
+          </p:cNvPr>
+          <p:cNvSpPr>
+            <a:spLocks xmlns:a="http://schemas.openxmlformats.org/drawingml/2006/main" noGrp="1"/>
+          </p:cNvSpPr>
+          <p:nvPr/>
+        </p:nvSpPr>
+        <p:spPr>
+          <a:xfrm xmlns:a="http://schemas.openxmlformats.org/drawingml/2006/main">
+            <a:off x="6181725" y="2266950"/>
+            <a:ext cx="5400675" cy="1571625"/>
           </a:xfrm>
           <a:prstGeom xmlns:a="http://schemas.openxmlformats.org/drawingml/2006/main" prst="roundRect">
             <a:avLst>
-              <a:gd name="adj" fmla="val 8738"/>
+              <a:gd name="adj" fmla="val 10909"/>
             </a:avLst>
           </a:prstGeom>
           <a:solidFill xmlns:a="http://schemas.openxmlformats.org/drawingml/2006/main">
@@ -11692,19 +11692,19 @@
           <p:cNvPr id="13" name="">
             <a:extLst xmlns:a="http://schemas.openxmlformats.org/drawingml/2006/main">
               <a:ext uri="{FF2B5EF4-FFF2-40B4-BE49-F238E27FC236}">
-                <a16:creationId xmlns:a16="http://schemas.microsoft.com/office/drawing/2014/main" id="{7DDF3EFB-FC75-403D-BDC5-AB8C5F969721}"/>
-              </a:ext>
-            </a:extLst>
-          </p:cNvPr>
-          <p:cNvSpPr>
-            <a:spLocks xmlns:a="http://schemas.openxmlformats.org/drawingml/2006/main" noGrp="1"/>
-          </p:cNvSpPr>
-          <p:nvPr/>
-        </p:nvSpPr>
-        <p:spPr>
-          <a:xfrm xmlns:a="http://schemas.openxmlformats.org/drawingml/2006/main">
-            <a:off x="6181725" y="1885950"/>
-            <a:ext cx="66675" cy="1962150"/>
+                <a16:creationId xmlns:a16="http://schemas.microsoft.com/office/drawing/2014/main" id="{6A7E71F0-ACCB-41AA-A1C1-EACEFE62FD5D}"/>
+              </a:ext>
+            </a:extLst>
+          </p:cNvPr>
+          <p:cNvSpPr>
+            <a:spLocks xmlns:a="http://schemas.openxmlformats.org/drawingml/2006/main" noGrp="1"/>
+          </p:cNvSpPr>
+          <p:nvPr/>
+        </p:nvSpPr>
+        <p:spPr>
+          <a:xfrm xmlns:a="http://schemas.openxmlformats.org/drawingml/2006/main">
+            <a:off x="6181725" y="2266950"/>
+            <a:ext cx="66675" cy="1571625"/>
           </a:xfrm>
           <a:prstGeom xmlns:a="http://schemas.openxmlformats.org/drawingml/2006/main" prst="rect">
             <a:avLst/>
@@ -11723,18 +11723,18 @@
           <p:cNvPr id="14" name="">
             <a:extLst xmlns:a="http://schemas.openxmlformats.org/drawingml/2006/main">
               <a:ext uri="{FF2B5EF4-FFF2-40B4-BE49-F238E27FC236}">
-                <a16:creationId xmlns:a16="http://schemas.microsoft.com/office/drawing/2014/main" id="{F6B4F2F0-76A6-4D4C-8B4D-69E65D189F09}"/>
-              </a:ext>
-            </a:extLst>
-          </p:cNvPr>
-          <p:cNvSpPr>
-            <a:spLocks xmlns:a="http://schemas.openxmlformats.org/drawingml/2006/main" noGrp="1"/>
-          </p:cNvSpPr>
-          <p:nvPr/>
-        </p:nvSpPr>
-        <p:spPr>
-          <a:xfrm xmlns:a="http://schemas.openxmlformats.org/drawingml/2006/main">
-            <a:off x="6391275" y="2038350"/>
+                <a16:creationId xmlns:a16="http://schemas.microsoft.com/office/drawing/2014/main" id="{C640993E-9105-4AF0-96F6-372573EED8C1}"/>
+              </a:ext>
+            </a:extLst>
+          </p:cNvPr>
+          <p:cNvSpPr>
+            <a:spLocks xmlns:a="http://schemas.openxmlformats.org/drawingml/2006/main" noGrp="1"/>
+          </p:cNvSpPr>
+          <p:nvPr/>
+        </p:nvSpPr>
+        <p:spPr>
+          <a:xfrm xmlns:a="http://schemas.openxmlformats.org/drawingml/2006/main">
+            <a:off x="6391275" y="2419350"/>
             <a:ext cx="5038725" cy="419100"/>
           </a:xfrm>
           <a:prstGeom xmlns:a="http://schemas.openxmlformats.org/drawingml/2006/main" prst="rect">
@@ -11785,23 +11785,23 @@
           <p:cNvPr id="15" name="">
             <a:extLst xmlns:a="http://schemas.openxmlformats.org/drawingml/2006/main">
               <a:ext uri="{FF2B5EF4-FFF2-40B4-BE49-F238E27FC236}">
-                <a16:creationId xmlns:a16="http://schemas.microsoft.com/office/drawing/2014/main" id="{1C5E0020-0277-44F0-943B-7EBAF2A724AC}"/>
-              </a:ext>
-            </a:extLst>
-          </p:cNvPr>
-          <p:cNvSpPr>
-            <a:spLocks xmlns:a="http://schemas.openxmlformats.org/drawingml/2006/main" noGrp="1"/>
-          </p:cNvSpPr>
-          <p:nvPr/>
-        </p:nvSpPr>
-        <p:spPr>
-          <a:xfrm xmlns:a="http://schemas.openxmlformats.org/drawingml/2006/main">
-            <a:off x="609600" y="4019550"/>
-            <a:ext cx="5400675" cy="1962150"/>
+                <a16:creationId xmlns:a16="http://schemas.microsoft.com/office/drawing/2014/main" id="{0DA95BA0-B3E9-4DFD-ACE3-F5A654028EDC}"/>
+              </a:ext>
+            </a:extLst>
+          </p:cNvPr>
+          <p:cNvSpPr>
+            <a:spLocks xmlns:a="http://schemas.openxmlformats.org/drawingml/2006/main" noGrp="1"/>
+          </p:cNvSpPr>
+          <p:nvPr/>
+        </p:nvSpPr>
+        <p:spPr>
+          <a:xfrm xmlns:a="http://schemas.openxmlformats.org/drawingml/2006/main">
+            <a:off x="609600" y="4010025"/>
+            <a:ext cx="5400675" cy="1571625"/>
           </a:xfrm>
           <a:prstGeom xmlns:a="http://schemas.openxmlformats.org/drawingml/2006/main" prst="roundRect">
             <a:avLst>
-              <a:gd name="adj" fmla="val 8738"/>
+              <a:gd name="adj" fmla="val 10909"/>
             </a:avLst>
           </a:prstGeom>
           <a:solidFill xmlns:a="http://schemas.openxmlformats.org/drawingml/2006/main">
@@ -11820,19 +11820,19 @@
           <p:cNvPr id="16" name="">
             <a:extLst xmlns:a="http://schemas.openxmlformats.org/drawingml/2006/main">
               <a:ext uri="{FF2B5EF4-FFF2-40B4-BE49-F238E27FC236}">
-                <a16:creationId xmlns:a16="http://schemas.microsoft.com/office/drawing/2014/main" id="{20D437E3-F257-4741-81EB-56BD6F730C60}"/>
-              </a:ext>
-            </a:extLst>
-          </p:cNvPr>
-          <p:cNvSpPr>
-            <a:spLocks xmlns:a="http://schemas.openxmlformats.org/drawingml/2006/main" noGrp="1"/>
-          </p:cNvSpPr>
-          <p:nvPr/>
-        </p:nvSpPr>
-        <p:spPr>
-          <a:xfrm xmlns:a="http://schemas.openxmlformats.org/drawingml/2006/main">
-            <a:off x="609600" y="4019550"/>
-            <a:ext cx="66675" cy="1962150"/>
+                <a16:creationId xmlns:a16="http://schemas.microsoft.com/office/drawing/2014/main" id="{A5BD95CF-6144-4B1A-BC33-50580BA9A1E9}"/>
+              </a:ext>
+            </a:extLst>
+          </p:cNvPr>
+          <p:cNvSpPr>
+            <a:spLocks xmlns:a="http://schemas.openxmlformats.org/drawingml/2006/main" noGrp="1"/>
+          </p:cNvSpPr>
+          <p:nvPr/>
+        </p:nvSpPr>
+        <p:spPr>
+          <a:xfrm xmlns:a="http://schemas.openxmlformats.org/drawingml/2006/main">
+            <a:off x="609600" y="4010025"/>
+            <a:ext cx="66675" cy="1571625"/>
           </a:xfrm>
           <a:prstGeom xmlns:a="http://schemas.openxmlformats.org/drawingml/2006/main" prst="rect">
             <a:avLst/>
@@ -11851,18 +11851,18 @@
           <p:cNvPr id="17" name="">
             <a:extLst xmlns:a="http://schemas.openxmlformats.org/drawingml/2006/main">
               <a:ext uri="{FF2B5EF4-FFF2-40B4-BE49-F238E27FC236}">
-                <a16:creationId xmlns:a16="http://schemas.microsoft.com/office/drawing/2014/main" id="{B22EB60C-4301-4CD6-8915-537243F2326E}"/>
-              </a:ext>
-            </a:extLst>
-          </p:cNvPr>
-          <p:cNvSpPr>
-            <a:spLocks xmlns:a="http://schemas.openxmlformats.org/drawingml/2006/main" noGrp="1"/>
-          </p:cNvSpPr>
-          <p:nvPr/>
-        </p:nvSpPr>
-        <p:spPr>
-          <a:xfrm xmlns:a="http://schemas.openxmlformats.org/drawingml/2006/main">
-            <a:off x="819150" y="4171950"/>
+                <a16:creationId xmlns:a16="http://schemas.microsoft.com/office/drawing/2014/main" id="{4157E6DD-755E-467C-B784-330C46A22900}"/>
+              </a:ext>
+            </a:extLst>
+          </p:cNvPr>
+          <p:cNvSpPr>
+            <a:spLocks xmlns:a="http://schemas.openxmlformats.org/drawingml/2006/main" noGrp="1"/>
+          </p:cNvSpPr>
+          <p:nvPr/>
+        </p:nvSpPr>
+        <p:spPr>
+          <a:xfrm xmlns:a="http://schemas.openxmlformats.org/drawingml/2006/main">
+            <a:off x="819150" y="4162425"/>
             <a:ext cx="5038725" cy="419100"/>
           </a:xfrm>
           <a:prstGeom xmlns:a="http://schemas.openxmlformats.org/drawingml/2006/main" prst="rect">
@@ -11913,23 +11913,23 @@
           <p:cNvPr id="18" name="">
             <a:extLst xmlns:a="http://schemas.openxmlformats.org/drawingml/2006/main">
               <a:ext uri="{FF2B5EF4-FFF2-40B4-BE49-F238E27FC236}">
-                <a16:creationId xmlns:a16="http://schemas.microsoft.com/office/drawing/2014/main" id="{AFD3AB7C-1FF4-45B8-B19A-FC8979FD8F35}"/>
-              </a:ext>
-            </a:extLst>
-          </p:cNvPr>
-          <p:cNvSpPr>
-            <a:spLocks xmlns:a="http://schemas.openxmlformats.org/drawingml/2006/main" noGrp="1"/>
-          </p:cNvSpPr>
-          <p:nvPr/>
-        </p:nvSpPr>
-        <p:spPr>
-          <a:xfrm xmlns:a="http://schemas.openxmlformats.org/drawingml/2006/main">
-            <a:off x="6181725" y="4019550"/>
-            <a:ext cx="5400675" cy="1962150"/>
+                <a16:creationId xmlns:a16="http://schemas.microsoft.com/office/drawing/2014/main" id="{698DEEAB-29C1-4F8E-8D08-5FC872E5C041}"/>
+              </a:ext>
+            </a:extLst>
+          </p:cNvPr>
+          <p:cNvSpPr>
+            <a:spLocks xmlns:a="http://schemas.openxmlformats.org/drawingml/2006/main" noGrp="1"/>
+          </p:cNvSpPr>
+          <p:nvPr/>
+        </p:nvSpPr>
+        <p:spPr>
+          <a:xfrm xmlns:a="http://schemas.openxmlformats.org/drawingml/2006/main">
+            <a:off x="6181725" y="4010025"/>
+            <a:ext cx="5400675" cy="1571625"/>
           </a:xfrm>
           <a:prstGeom xmlns:a="http://schemas.openxmlformats.org/drawingml/2006/main" prst="roundRect">
             <a:avLst>
-              <a:gd name="adj" fmla="val 8738"/>
+              <a:gd name="adj" fmla="val 10909"/>
             </a:avLst>
           </a:prstGeom>
           <a:solidFill xmlns:a="http://schemas.openxmlformats.org/drawingml/2006/main">
@@ -11948,19 +11948,19 @@
           <p:cNvPr id="19" name="">
             <a:extLst xmlns:a="http://schemas.openxmlformats.org/drawingml/2006/main">
               <a:ext uri="{FF2B5EF4-FFF2-40B4-BE49-F238E27FC236}">
-                <a16:creationId xmlns:a16="http://schemas.microsoft.com/office/drawing/2014/main" id="{636244F9-F332-4E9B-8BF6-DF6B896FBC1A}"/>
-              </a:ext>
-            </a:extLst>
-          </p:cNvPr>
-          <p:cNvSpPr>
-            <a:spLocks xmlns:a="http://schemas.openxmlformats.org/drawingml/2006/main" noGrp="1"/>
-          </p:cNvSpPr>
-          <p:nvPr/>
-        </p:nvSpPr>
-        <p:spPr>
-          <a:xfrm xmlns:a="http://schemas.openxmlformats.org/drawingml/2006/main">
-            <a:off x="6181725" y="4019550"/>
-            <a:ext cx="66675" cy="1962150"/>
+                <a16:creationId xmlns:a16="http://schemas.microsoft.com/office/drawing/2014/main" id="{47E6E01F-6500-42E7-BAE8-171DC3A539CC}"/>
+              </a:ext>
+            </a:extLst>
+          </p:cNvPr>
+          <p:cNvSpPr>
+            <a:spLocks xmlns:a="http://schemas.openxmlformats.org/drawingml/2006/main" noGrp="1"/>
+          </p:cNvSpPr>
+          <p:nvPr/>
+        </p:nvSpPr>
+        <p:spPr>
+          <a:xfrm xmlns:a="http://schemas.openxmlformats.org/drawingml/2006/main">
+            <a:off x="6181725" y="4010025"/>
+            <a:ext cx="66675" cy="1571625"/>
           </a:xfrm>
           <a:prstGeom xmlns:a="http://schemas.openxmlformats.org/drawingml/2006/main" prst="rect">
             <a:avLst/>
@@ -11979,18 +11979,18 @@
           <p:cNvPr id="20" name="">
             <a:extLst xmlns:a="http://schemas.openxmlformats.org/drawingml/2006/main">
               <a:ext uri="{FF2B5EF4-FFF2-40B4-BE49-F238E27FC236}">
-                <a16:creationId xmlns:a16="http://schemas.microsoft.com/office/drawing/2014/main" id="{6090D7B1-C051-4C9A-ABE6-18A9CFE2A45A}"/>
-              </a:ext>
-            </a:extLst>
-          </p:cNvPr>
-          <p:cNvSpPr>
-            <a:spLocks xmlns:a="http://schemas.openxmlformats.org/drawingml/2006/main" noGrp="1"/>
-          </p:cNvSpPr>
-          <p:nvPr/>
-        </p:nvSpPr>
-        <p:spPr>
-          <a:xfrm xmlns:a="http://schemas.openxmlformats.org/drawingml/2006/main">
-            <a:off x="6391275" y="4171950"/>
+                <a16:creationId xmlns:a16="http://schemas.microsoft.com/office/drawing/2014/main" id="{AC387F7C-3C4F-40D6-8AF3-B491DE1EABA3}"/>
+              </a:ext>
+            </a:extLst>
+          </p:cNvPr>
+          <p:cNvSpPr>
+            <a:spLocks xmlns:a="http://schemas.openxmlformats.org/drawingml/2006/main" noGrp="1"/>
+          </p:cNvSpPr>
+          <p:nvPr/>
+        </p:nvSpPr>
+        <p:spPr>
+          <a:xfrm xmlns:a="http://schemas.openxmlformats.org/drawingml/2006/main">
+            <a:off x="6391275" y="4162425"/>
             <a:ext cx="5038725" cy="419100"/>
           </a:xfrm>
           <a:prstGeom xmlns:a="http://schemas.openxmlformats.org/drawingml/2006/main" prst="rect">
@@ -12041,19 +12041,19 @@
           <p:cNvPr id="21" name="">
             <a:extLst xmlns:a="http://schemas.openxmlformats.org/drawingml/2006/main">
               <a:ext uri="{FF2B5EF4-FFF2-40B4-BE49-F238E27FC236}">
-                <a16:creationId xmlns:a16="http://schemas.microsoft.com/office/drawing/2014/main" id="{ACC3C2C8-0F74-46E0-A3B2-8B38E201DBD4}"/>
-              </a:ext>
-            </a:extLst>
-          </p:cNvPr>
-          <p:cNvSpPr>
-            <a:spLocks xmlns:a="http://schemas.openxmlformats.org/drawingml/2006/main" noGrp="1"/>
-          </p:cNvSpPr>
-          <p:nvPr/>
-        </p:nvSpPr>
-        <p:spPr>
-          <a:xfrm xmlns:a="http://schemas.openxmlformats.org/drawingml/2006/main">
-            <a:off x="609600" y="5943600"/>
-            <a:ext cx="10972800" cy="361950"/>
+                <a16:creationId xmlns:a16="http://schemas.microsoft.com/office/drawing/2014/main" id="{6550AB84-432F-4DDC-8767-0F90C46B1130}"/>
+              </a:ext>
+            </a:extLst>
+          </p:cNvPr>
+          <p:cNvSpPr>
+            <a:spLocks xmlns:a="http://schemas.openxmlformats.org/drawingml/2006/main" noGrp="1"/>
+          </p:cNvSpPr>
+          <p:nvPr/>
+        </p:nvSpPr>
+        <p:spPr>
+          <a:xfrm xmlns:a="http://schemas.openxmlformats.org/drawingml/2006/main">
+            <a:off x="609600" y="5753100"/>
+            <a:ext cx="10972800" cy="457200"/>
           </a:xfrm>
           <a:prstGeom xmlns:a="http://schemas.openxmlformats.org/drawingml/2006/main" prst="rect">
             <a:avLst/>
@@ -12103,7 +12103,7 @@
     </p:spTree>
     <p:extLst>
       <p:ext uri="{BB962C8B-B14F-4D97-AF65-F5344CB8AC3E}">
-        <p14:creationId xmlns:p14="http://schemas.microsoft.com/office/powerpoint/2010/main" val="1949093782"/>
+        <p14:creationId xmlns:p14="http://schemas.microsoft.com/office/powerpoint/2010/main" val="1975402440"/>
       </p:ext>
     </p:extLst>
   </p:cSld>
@@ -12134,7 +12134,7 @@
           <p:cNvPr id="22" name="">
             <a:extLst xmlns:a="http://schemas.openxmlformats.org/drawingml/2006/main">
               <a:ext uri="{FF2B5EF4-FFF2-40B4-BE49-F238E27FC236}">
-                <a16:creationId xmlns:a16="http://schemas.microsoft.com/office/drawing/2014/main" id="{7C44FB2F-235B-41E7-B845-39B524CAD4C7}"/>
+                <a16:creationId xmlns:a16="http://schemas.microsoft.com/office/drawing/2014/main" id="{C1A47881-F631-4189-A109-EC0B8CC4312E}"/>
               </a:ext>
             </a:extLst>
           </p:cNvPr>
@@ -12165,7 +12165,7 @@
           <p:cNvPr id="2" name="">
             <a:extLst xmlns:a="http://schemas.openxmlformats.org/drawingml/2006/main">
               <a:ext uri="{FF2B5EF4-FFF2-40B4-BE49-F238E27FC236}">
-                <a16:creationId xmlns:a16="http://schemas.microsoft.com/office/drawing/2014/main" id="{700134B0-90A9-42FD-B83F-93C3AB3AA021}"/>
+                <a16:creationId xmlns:a16="http://schemas.microsoft.com/office/drawing/2014/main" id="{87BD286A-DCFA-4D2D-87A8-5E6A9DD3AC2C}"/>
               </a:ext>
             </a:extLst>
           </p:cNvPr>
@@ -12227,7 +12227,7 @@
           <p:cNvPr id="3" name="">
             <a:extLst xmlns:a="http://schemas.openxmlformats.org/drawingml/2006/main">
               <a:ext uri="{FF2B5EF4-FFF2-40B4-BE49-F238E27FC236}">
-                <a16:creationId xmlns:a16="http://schemas.microsoft.com/office/drawing/2014/main" id="{F37ADC8F-BDB2-4922-8436-2DDE4C3F5486}"/>
+                <a16:creationId xmlns:a16="http://schemas.microsoft.com/office/drawing/2014/main" id="{6A79ADDD-0E39-4ACF-832B-C8E0AC64C2AB}"/>
               </a:ext>
             </a:extLst>
           </p:cNvPr>
@@ -12289,7 +12289,7 @@
           <p:cNvPr id="4" name="">
             <a:extLst xmlns:a="http://schemas.openxmlformats.org/drawingml/2006/main">
               <a:ext uri="{FF2B5EF4-FFF2-40B4-BE49-F238E27FC236}">
-                <a16:creationId xmlns:a16="http://schemas.microsoft.com/office/drawing/2014/main" id="{86C9DA34-7EBC-4CC9-B999-9208FE12E63A}"/>
+                <a16:creationId xmlns:a16="http://schemas.microsoft.com/office/drawing/2014/main" id="{8E22069A-71D7-4978-9C9D-45C8D3C6E445}"/>
               </a:ext>
             </a:extLst>
           </p:cNvPr>
@@ -12324,7 +12324,7 @@
           <p:nvPr/>
         </p:nvPicPr>
         <p:blipFill>
-          <a:blip xmlns:r="http://schemas.openxmlformats.org/officeDocument/2006/relationships" xmlns:a="http://schemas.openxmlformats.org/drawingml/2006/main" r:embed="Rd494724f878c4391"/>
+          <a:blip xmlns:r="http://schemas.openxmlformats.org/officeDocument/2006/relationships" xmlns:a="http://schemas.openxmlformats.org/drawingml/2006/main" r:embed="Rdf0aa4d4497c46bb"/>
           <a:srcRect xmlns:a="http://schemas.openxmlformats.org/drawingml/2006/main" l="0" t="0" r="0" b="0"/>
           <a:stretch xmlns:a="http://schemas.openxmlformats.org/drawingml/2006/main">
             <a:fillRect l="0" t="0" r="0" b="0"/>
@@ -12345,7 +12345,7 @@
           <p:cNvPr id="6" name="">
             <a:extLst xmlns:a="http://schemas.openxmlformats.org/drawingml/2006/main">
               <a:ext uri="{FF2B5EF4-FFF2-40B4-BE49-F238E27FC236}">
-                <a16:creationId xmlns:a16="http://schemas.microsoft.com/office/drawing/2014/main" id="{2464C309-0A1C-4D77-A557-8A3B10DB27B9}"/>
+                <a16:creationId xmlns:a16="http://schemas.microsoft.com/office/drawing/2014/main" id="{735AB6EF-0AB5-4C68-BD88-CE6673C31798}"/>
               </a:ext>
             </a:extLst>
           </p:cNvPr>
@@ -12407,7 +12407,7 @@
           <p:cNvPr id="7" name="">
             <a:extLst xmlns:a="http://schemas.openxmlformats.org/drawingml/2006/main">
               <a:ext uri="{FF2B5EF4-FFF2-40B4-BE49-F238E27FC236}">
-                <a16:creationId xmlns:a16="http://schemas.microsoft.com/office/drawing/2014/main" id="{240D5CEE-44D9-4165-838F-81BC7232617A}"/>
+                <a16:creationId xmlns:a16="http://schemas.microsoft.com/office/drawing/2014/main" id="{680A5B50-50B1-49DB-9178-038ACFA1DCF0}"/>
               </a:ext>
             </a:extLst>
           </p:cNvPr>
@@ -12469,19 +12469,19 @@
           <p:cNvPr id="8" name="">
             <a:extLst xmlns:a="http://schemas.openxmlformats.org/drawingml/2006/main">
               <a:ext uri="{FF2B5EF4-FFF2-40B4-BE49-F238E27FC236}">
-                <a16:creationId xmlns:a16="http://schemas.microsoft.com/office/drawing/2014/main" id="{652DA454-4ECB-400E-B352-B0FC9FA78FF9}"/>
-              </a:ext>
-            </a:extLst>
-          </p:cNvPr>
-          <p:cNvSpPr>
-            <a:spLocks xmlns:a="http://schemas.openxmlformats.org/drawingml/2006/main" noGrp="1"/>
-          </p:cNvSpPr>
-          <p:nvPr/>
-        </p:nvSpPr>
-        <p:spPr>
-          <a:xfrm xmlns:a="http://schemas.openxmlformats.org/drawingml/2006/main">
-            <a:off x="609600" y="1790700"/>
-            <a:ext cx="10972800" cy="419100"/>
+                <a16:creationId xmlns:a16="http://schemas.microsoft.com/office/drawing/2014/main" id="{9A820A10-C5E4-49BE-AA58-A8843C414BD8}"/>
+              </a:ext>
+            </a:extLst>
+          </p:cNvPr>
+          <p:cNvSpPr>
+            <a:spLocks xmlns:a="http://schemas.openxmlformats.org/drawingml/2006/main" noGrp="1"/>
+          </p:cNvSpPr>
+          <p:nvPr/>
+        </p:nvSpPr>
+        <p:spPr>
+          <a:xfrm xmlns:a="http://schemas.openxmlformats.org/drawingml/2006/main">
+            <a:off x="609600" y="1752600"/>
+            <a:ext cx="10972800" cy="400050"/>
           </a:xfrm>
           <a:prstGeom xmlns:a="http://schemas.openxmlformats.org/drawingml/2006/main" prst="rect">
             <a:avLst/>
@@ -12503,7 +12503,7 @@
                 <a:spcPct val="108000"/>
               </a:lnSpc>
               <a:buNone/>
-              <a:defRPr sz="1650" b="1">
+              <a:defRPr sz="1575" b="1">
                 <a:solidFill>
                   <a:srgbClr val="1B4F78"/>
                 </a:solidFill>
@@ -12513,7 +12513,7 @@
               </a:defRPr>
             </a:pPr>
             <a:r>
-              <a:rPr sz="1650" b="1">
+              <a:rPr sz="1575" b="1">
                 <a:solidFill>
                   <a:srgbClr val="1B4F78"/>
                 </a:solidFill>
@@ -12531,19 +12531,19 @@
           <p:cNvPr id="9" name="">
             <a:extLst xmlns:a="http://schemas.openxmlformats.org/drawingml/2006/main">
               <a:ext uri="{FF2B5EF4-FFF2-40B4-BE49-F238E27FC236}">
-                <a16:creationId xmlns:a16="http://schemas.microsoft.com/office/drawing/2014/main" id="{92C17014-E279-4548-BCCD-938952306FD8}"/>
-              </a:ext>
-            </a:extLst>
-          </p:cNvPr>
-          <p:cNvSpPr>
-            <a:spLocks xmlns:a="http://schemas.openxmlformats.org/drawingml/2006/main" noGrp="1"/>
-          </p:cNvSpPr>
-          <p:nvPr/>
-        </p:nvSpPr>
-        <p:spPr>
-          <a:xfrm xmlns:a="http://schemas.openxmlformats.org/drawingml/2006/main">
-            <a:off x="609600" y="1885950"/>
-            <a:ext cx="2614613" cy="4095750"/>
+                <a16:creationId xmlns:a16="http://schemas.microsoft.com/office/drawing/2014/main" id="{B1D5A764-2D18-4F4C-A695-063AA11D9586}"/>
+              </a:ext>
+            </a:extLst>
+          </p:cNvPr>
+          <p:cNvSpPr>
+            <a:spLocks xmlns:a="http://schemas.openxmlformats.org/drawingml/2006/main" noGrp="1"/>
+          </p:cNvSpPr>
+          <p:nvPr/>
+        </p:nvSpPr>
+        <p:spPr>
+          <a:xfrm xmlns:a="http://schemas.openxmlformats.org/drawingml/2006/main">
+            <a:off x="609600" y="2324100"/>
+            <a:ext cx="2614613" cy="3238500"/>
           </a:xfrm>
           <a:prstGeom xmlns:a="http://schemas.openxmlformats.org/drawingml/2006/main" prst="roundRect">
             <a:avLst>
@@ -12566,19 +12566,19 @@
           <p:cNvPr id="10" name="">
             <a:extLst xmlns:a="http://schemas.openxmlformats.org/drawingml/2006/main">
               <a:ext uri="{FF2B5EF4-FFF2-40B4-BE49-F238E27FC236}">
-                <a16:creationId xmlns:a16="http://schemas.microsoft.com/office/drawing/2014/main" id="{7584DFB6-8C25-4079-8DC2-9ECB9554B909}"/>
-              </a:ext>
-            </a:extLst>
-          </p:cNvPr>
-          <p:cNvSpPr>
-            <a:spLocks xmlns:a="http://schemas.openxmlformats.org/drawingml/2006/main" noGrp="1"/>
-          </p:cNvSpPr>
-          <p:nvPr/>
-        </p:nvSpPr>
-        <p:spPr>
-          <a:xfrm xmlns:a="http://schemas.openxmlformats.org/drawingml/2006/main">
-            <a:off x="609600" y="1885950"/>
-            <a:ext cx="66675" cy="4095750"/>
+                <a16:creationId xmlns:a16="http://schemas.microsoft.com/office/drawing/2014/main" id="{2C1F5C45-75A2-476C-8C33-F80EE898044F}"/>
+              </a:ext>
+            </a:extLst>
+          </p:cNvPr>
+          <p:cNvSpPr>
+            <a:spLocks xmlns:a="http://schemas.openxmlformats.org/drawingml/2006/main" noGrp="1"/>
+          </p:cNvSpPr>
+          <p:nvPr/>
+        </p:nvSpPr>
+        <p:spPr>
+          <a:xfrm xmlns:a="http://schemas.openxmlformats.org/drawingml/2006/main">
+            <a:off x="609600" y="2324100"/>
+            <a:ext cx="66675" cy="3238500"/>
           </a:xfrm>
           <a:prstGeom xmlns:a="http://schemas.openxmlformats.org/drawingml/2006/main" prst="rect">
             <a:avLst/>
@@ -12597,19 +12597,19 @@
           <p:cNvPr id="11" name="">
             <a:extLst xmlns:a="http://schemas.openxmlformats.org/drawingml/2006/main">
               <a:ext uri="{FF2B5EF4-FFF2-40B4-BE49-F238E27FC236}">
-                <a16:creationId xmlns:a16="http://schemas.microsoft.com/office/drawing/2014/main" id="{63569987-2AF2-4EA9-BA33-BA797EBA4A89}"/>
-              </a:ext>
-            </a:extLst>
-          </p:cNvPr>
-          <p:cNvSpPr>
-            <a:spLocks xmlns:a="http://schemas.openxmlformats.org/drawingml/2006/main" noGrp="1"/>
-          </p:cNvSpPr>
-          <p:nvPr/>
-        </p:nvSpPr>
-        <p:spPr>
-          <a:xfrm xmlns:a="http://schemas.openxmlformats.org/drawingml/2006/main">
-            <a:off x="819150" y="2038350"/>
-            <a:ext cx="2252663" cy="419100"/>
+                <a16:creationId xmlns:a16="http://schemas.microsoft.com/office/drawing/2014/main" id="{4AAF0B30-EF05-4387-8BCF-FCFC0CCC0015}"/>
+              </a:ext>
+            </a:extLst>
+          </p:cNvPr>
+          <p:cNvSpPr>
+            <a:spLocks xmlns:a="http://schemas.openxmlformats.org/drawingml/2006/main" noGrp="1"/>
+          </p:cNvSpPr>
+          <p:nvPr/>
+        </p:nvSpPr>
+        <p:spPr>
+          <a:xfrm xmlns:a="http://schemas.openxmlformats.org/drawingml/2006/main">
+            <a:off x="819150" y="2590800"/>
+            <a:ext cx="2252663" cy="819150"/>
           </a:xfrm>
           <a:prstGeom xmlns:a="http://schemas.openxmlformats.org/drawingml/2006/main" prst="rect">
             <a:avLst/>
@@ -12622,7 +12622,7 @@
         </p:spPr>
         <p:txBody>
           <a:bodyPr xmlns:a="http://schemas.openxmlformats.org/drawingml/2006/main" lIns="76200" tIns="57150" rIns="76200" bIns="57150" anchor="ctr">
-            <a:normAutofit fontScale="56207"/>
+            <a:normAutofit fontScale="100000"/>
           </a:bodyPr>
           <a:lstStyle xmlns:a="http://schemas.openxmlformats.org/drawingml/2006/main"/>
           <a:p xmlns:a="http://schemas.openxmlformats.org/drawingml/2006/main">
@@ -12631,7 +12631,7 @@
                 <a:spcPct val="108000"/>
               </a:lnSpc>
               <a:buNone/>
-              <a:defRPr sz="1650" b="1">
+              <a:defRPr sz="1350" b="1">
                 <a:solidFill>
                   <a:srgbClr val="071426"/>
                 </a:solidFill>
@@ -12641,7 +12641,7 @@
               </a:defRPr>
             </a:pPr>
             <a:r>
-              <a:rPr sz="1650" b="1">
+              <a:rPr sz="1350" b="1">
                 <a:solidFill>
                   <a:srgbClr val="071426"/>
                 </a:solidFill>
@@ -12659,19 +12659,19 @@
           <p:cNvPr id="12" name="">
             <a:extLst xmlns:a="http://schemas.openxmlformats.org/drawingml/2006/main">
               <a:ext uri="{FF2B5EF4-FFF2-40B4-BE49-F238E27FC236}">
-                <a16:creationId xmlns:a16="http://schemas.microsoft.com/office/drawing/2014/main" id="{AB6FE0AA-9D27-41C8-9632-868139EC721D}"/>
-              </a:ext>
-            </a:extLst>
-          </p:cNvPr>
-          <p:cNvSpPr>
-            <a:spLocks xmlns:a="http://schemas.openxmlformats.org/drawingml/2006/main" noGrp="1"/>
-          </p:cNvSpPr>
-          <p:nvPr/>
-        </p:nvSpPr>
-        <p:spPr>
-          <a:xfrm xmlns:a="http://schemas.openxmlformats.org/drawingml/2006/main">
-            <a:off x="3395663" y="1885950"/>
-            <a:ext cx="2614613" cy="4095750"/>
+                <a16:creationId xmlns:a16="http://schemas.microsoft.com/office/drawing/2014/main" id="{8AAC3F09-B22D-4CC3-823E-AE087B3F1723}"/>
+              </a:ext>
+            </a:extLst>
+          </p:cNvPr>
+          <p:cNvSpPr>
+            <a:spLocks xmlns:a="http://schemas.openxmlformats.org/drawingml/2006/main" noGrp="1"/>
+          </p:cNvSpPr>
+          <p:nvPr/>
+        </p:nvSpPr>
+        <p:spPr>
+          <a:xfrm xmlns:a="http://schemas.openxmlformats.org/drawingml/2006/main">
+            <a:off x="3395663" y="2324100"/>
+            <a:ext cx="2614613" cy="3238500"/>
           </a:xfrm>
           <a:prstGeom xmlns:a="http://schemas.openxmlformats.org/drawingml/2006/main" prst="roundRect">
             <a:avLst>
@@ -12694,19 +12694,19 @@
           <p:cNvPr id="13" name="">
             <a:extLst xmlns:a="http://schemas.openxmlformats.org/drawingml/2006/main">
               <a:ext uri="{FF2B5EF4-FFF2-40B4-BE49-F238E27FC236}">
-                <a16:creationId xmlns:a16="http://schemas.microsoft.com/office/drawing/2014/main" id="{6E8E9E69-157D-4A84-B9CC-5D216699C8DA}"/>
-              </a:ext>
-            </a:extLst>
-          </p:cNvPr>
-          <p:cNvSpPr>
-            <a:spLocks xmlns:a="http://schemas.openxmlformats.org/drawingml/2006/main" noGrp="1"/>
-          </p:cNvSpPr>
-          <p:nvPr/>
-        </p:nvSpPr>
-        <p:spPr>
-          <a:xfrm xmlns:a="http://schemas.openxmlformats.org/drawingml/2006/main">
-            <a:off x="3395663" y="1885950"/>
-            <a:ext cx="66675" cy="4095750"/>
+                <a16:creationId xmlns:a16="http://schemas.microsoft.com/office/drawing/2014/main" id="{1E238404-257C-4616-8D7F-79BE5F4D6FBF}"/>
+              </a:ext>
+            </a:extLst>
+          </p:cNvPr>
+          <p:cNvSpPr>
+            <a:spLocks xmlns:a="http://schemas.openxmlformats.org/drawingml/2006/main" noGrp="1"/>
+          </p:cNvSpPr>
+          <p:nvPr/>
+        </p:nvSpPr>
+        <p:spPr>
+          <a:xfrm xmlns:a="http://schemas.openxmlformats.org/drawingml/2006/main">
+            <a:off x="3395663" y="2324100"/>
+            <a:ext cx="66675" cy="3238500"/>
           </a:xfrm>
           <a:prstGeom xmlns:a="http://schemas.openxmlformats.org/drawingml/2006/main" prst="rect">
             <a:avLst/>
@@ -12725,19 +12725,19 @@
           <p:cNvPr id="14" name="">
             <a:extLst xmlns:a="http://schemas.openxmlformats.org/drawingml/2006/main">
               <a:ext uri="{FF2B5EF4-FFF2-40B4-BE49-F238E27FC236}">
-                <a16:creationId xmlns:a16="http://schemas.microsoft.com/office/drawing/2014/main" id="{B5E2FAC5-D985-4BC7-99F4-2357571DF8B3}"/>
-              </a:ext>
-            </a:extLst>
-          </p:cNvPr>
-          <p:cNvSpPr>
-            <a:spLocks xmlns:a="http://schemas.openxmlformats.org/drawingml/2006/main" noGrp="1"/>
-          </p:cNvSpPr>
-          <p:nvPr/>
-        </p:nvSpPr>
-        <p:spPr>
-          <a:xfrm xmlns:a="http://schemas.openxmlformats.org/drawingml/2006/main">
-            <a:off x="3605213" y="2038350"/>
-            <a:ext cx="2252663" cy="419100"/>
+                <a16:creationId xmlns:a16="http://schemas.microsoft.com/office/drawing/2014/main" id="{679CF25F-140E-4C58-829D-0645F83EE3BB}"/>
+              </a:ext>
+            </a:extLst>
+          </p:cNvPr>
+          <p:cNvSpPr>
+            <a:spLocks xmlns:a="http://schemas.openxmlformats.org/drawingml/2006/main" noGrp="1"/>
+          </p:cNvSpPr>
+          <p:nvPr/>
+        </p:nvSpPr>
+        <p:spPr>
+          <a:xfrm xmlns:a="http://schemas.openxmlformats.org/drawingml/2006/main">
+            <a:off x="3605213" y="2590800"/>
+            <a:ext cx="2252663" cy="819150"/>
           </a:xfrm>
           <a:prstGeom xmlns:a="http://schemas.openxmlformats.org/drawingml/2006/main" prst="rect">
             <a:avLst/>
@@ -12750,7 +12750,7 @@
         </p:spPr>
         <p:txBody>
           <a:bodyPr xmlns:a="http://schemas.openxmlformats.org/drawingml/2006/main" lIns="76200" tIns="57150" rIns="76200" bIns="57150" anchor="ctr">
-            <a:normAutofit fontScale="77298"/>
+            <a:normAutofit fontScale="100000"/>
           </a:bodyPr>
           <a:lstStyle xmlns:a="http://schemas.openxmlformats.org/drawingml/2006/main"/>
           <a:p xmlns:a="http://schemas.openxmlformats.org/drawingml/2006/main">
@@ -12759,7 +12759,7 @@
                 <a:spcPct val="108000"/>
               </a:lnSpc>
               <a:buNone/>
-              <a:defRPr sz="1650" b="1">
+              <a:defRPr sz="1350" b="1">
                 <a:solidFill>
                   <a:srgbClr val="071426"/>
                 </a:solidFill>
@@ -12769,7 +12769,7 @@
               </a:defRPr>
             </a:pPr>
             <a:r>
-              <a:rPr sz="1650" b="1">
+              <a:rPr sz="1350" b="1">
                 <a:solidFill>
                   <a:srgbClr val="071426"/>
                 </a:solidFill>
@@ -12787,19 +12787,19 @@
           <p:cNvPr id="15" name="">
             <a:extLst xmlns:a="http://schemas.openxmlformats.org/drawingml/2006/main">
               <a:ext uri="{FF2B5EF4-FFF2-40B4-BE49-F238E27FC236}">
-                <a16:creationId xmlns:a16="http://schemas.microsoft.com/office/drawing/2014/main" id="{90F25C39-1A02-4703-87A1-C41489C35064}"/>
-              </a:ext>
-            </a:extLst>
-          </p:cNvPr>
-          <p:cNvSpPr>
-            <a:spLocks xmlns:a="http://schemas.openxmlformats.org/drawingml/2006/main" noGrp="1"/>
-          </p:cNvSpPr>
-          <p:nvPr/>
-        </p:nvSpPr>
-        <p:spPr>
-          <a:xfrm xmlns:a="http://schemas.openxmlformats.org/drawingml/2006/main">
-            <a:off x="6181725" y="1885950"/>
-            <a:ext cx="2614613" cy="4095750"/>
+                <a16:creationId xmlns:a16="http://schemas.microsoft.com/office/drawing/2014/main" id="{3C1470ED-DE7E-4494-8243-B4364564A5F1}"/>
+              </a:ext>
+            </a:extLst>
+          </p:cNvPr>
+          <p:cNvSpPr>
+            <a:spLocks xmlns:a="http://schemas.openxmlformats.org/drawingml/2006/main" noGrp="1"/>
+          </p:cNvSpPr>
+          <p:nvPr/>
+        </p:nvSpPr>
+        <p:spPr>
+          <a:xfrm xmlns:a="http://schemas.openxmlformats.org/drawingml/2006/main">
+            <a:off x="6181725" y="2324100"/>
+            <a:ext cx="2614613" cy="3238500"/>
           </a:xfrm>
           <a:prstGeom xmlns:a="http://schemas.openxmlformats.org/drawingml/2006/main" prst="roundRect">
             <a:avLst>
@@ -12822,19 +12822,19 @@
           <p:cNvPr id="16" name="">
             <a:extLst xmlns:a="http://schemas.openxmlformats.org/drawingml/2006/main">
               <a:ext uri="{FF2B5EF4-FFF2-40B4-BE49-F238E27FC236}">
-                <a16:creationId xmlns:a16="http://schemas.microsoft.com/office/drawing/2014/main" id="{19DA0A4D-4A12-4451-AB85-4B8D2E89CA0F}"/>
-              </a:ext>
-            </a:extLst>
-          </p:cNvPr>
-          <p:cNvSpPr>
-            <a:spLocks xmlns:a="http://schemas.openxmlformats.org/drawingml/2006/main" noGrp="1"/>
-          </p:cNvSpPr>
-          <p:nvPr/>
-        </p:nvSpPr>
-        <p:spPr>
-          <a:xfrm xmlns:a="http://schemas.openxmlformats.org/drawingml/2006/main">
-            <a:off x="6181725" y="1885950"/>
-            <a:ext cx="66675" cy="4095750"/>
+                <a16:creationId xmlns:a16="http://schemas.microsoft.com/office/drawing/2014/main" id="{5A0CDCF4-1ADD-4434-A465-FD1EB88335CF}"/>
+              </a:ext>
+            </a:extLst>
+          </p:cNvPr>
+          <p:cNvSpPr>
+            <a:spLocks xmlns:a="http://schemas.openxmlformats.org/drawingml/2006/main" noGrp="1"/>
+          </p:cNvSpPr>
+          <p:nvPr/>
+        </p:nvSpPr>
+        <p:spPr>
+          <a:xfrm xmlns:a="http://schemas.openxmlformats.org/drawingml/2006/main">
+            <a:off x="6181725" y="2324100"/>
+            <a:ext cx="66675" cy="3238500"/>
           </a:xfrm>
           <a:prstGeom xmlns:a="http://schemas.openxmlformats.org/drawingml/2006/main" prst="rect">
             <a:avLst/>
@@ -12853,19 +12853,19 @@
           <p:cNvPr id="17" name="">
             <a:extLst xmlns:a="http://schemas.openxmlformats.org/drawingml/2006/main">
               <a:ext uri="{FF2B5EF4-FFF2-40B4-BE49-F238E27FC236}">
-                <a16:creationId xmlns:a16="http://schemas.microsoft.com/office/drawing/2014/main" id="{0556AC3E-5CC5-4A01-B656-CA01DCA97E66}"/>
-              </a:ext>
-            </a:extLst>
-          </p:cNvPr>
-          <p:cNvSpPr>
-            <a:spLocks xmlns:a="http://schemas.openxmlformats.org/drawingml/2006/main" noGrp="1"/>
-          </p:cNvSpPr>
-          <p:nvPr/>
-        </p:nvSpPr>
-        <p:spPr>
-          <a:xfrm xmlns:a="http://schemas.openxmlformats.org/drawingml/2006/main">
-            <a:off x="6391275" y="2038350"/>
-            <a:ext cx="2252663" cy="419100"/>
+                <a16:creationId xmlns:a16="http://schemas.microsoft.com/office/drawing/2014/main" id="{5670BECE-982F-4E50-BC68-7A8A30DCE5D8}"/>
+              </a:ext>
+            </a:extLst>
+          </p:cNvPr>
+          <p:cNvSpPr>
+            <a:spLocks xmlns:a="http://schemas.openxmlformats.org/drawingml/2006/main" noGrp="1"/>
+          </p:cNvSpPr>
+          <p:nvPr/>
+        </p:nvSpPr>
+        <p:spPr>
+          <a:xfrm xmlns:a="http://schemas.openxmlformats.org/drawingml/2006/main">
+            <a:off x="6391275" y="2590800"/>
+            <a:ext cx="2252663" cy="819150"/>
           </a:xfrm>
           <a:prstGeom xmlns:a="http://schemas.openxmlformats.org/drawingml/2006/main" prst="rect">
             <a:avLst/>
@@ -12887,7 +12887,7 @@
                 <a:spcPct val="108000"/>
               </a:lnSpc>
               <a:buNone/>
-              <a:defRPr sz="1650" b="1">
+              <a:defRPr sz="1350" b="1">
                 <a:solidFill>
                   <a:srgbClr val="071426"/>
                 </a:solidFill>
@@ -12897,7 +12897,7 @@
               </a:defRPr>
             </a:pPr>
             <a:r>
-              <a:rPr sz="1650" b="1">
+              <a:rPr sz="1350" b="1">
                 <a:solidFill>
                   <a:srgbClr val="071426"/>
                 </a:solidFill>
@@ -12915,19 +12915,19 @@
           <p:cNvPr id="18" name="">
             <a:extLst xmlns:a="http://schemas.openxmlformats.org/drawingml/2006/main">
               <a:ext uri="{FF2B5EF4-FFF2-40B4-BE49-F238E27FC236}">
-                <a16:creationId xmlns:a16="http://schemas.microsoft.com/office/drawing/2014/main" id="{86000A25-FAEF-4C46-8AED-E4DCB878C20E}"/>
-              </a:ext>
-            </a:extLst>
-          </p:cNvPr>
-          <p:cNvSpPr>
-            <a:spLocks xmlns:a="http://schemas.openxmlformats.org/drawingml/2006/main" noGrp="1"/>
-          </p:cNvSpPr>
-          <p:nvPr/>
-        </p:nvSpPr>
-        <p:spPr>
-          <a:xfrm xmlns:a="http://schemas.openxmlformats.org/drawingml/2006/main">
-            <a:off x="8967788" y="1885950"/>
-            <a:ext cx="2614613" cy="4095750"/>
+                <a16:creationId xmlns:a16="http://schemas.microsoft.com/office/drawing/2014/main" id="{F6C55478-E233-4EA2-9945-C5A937BE37EA}"/>
+              </a:ext>
+            </a:extLst>
+          </p:cNvPr>
+          <p:cNvSpPr>
+            <a:spLocks xmlns:a="http://schemas.openxmlformats.org/drawingml/2006/main" noGrp="1"/>
+          </p:cNvSpPr>
+          <p:nvPr/>
+        </p:nvSpPr>
+        <p:spPr>
+          <a:xfrm xmlns:a="http://schemas.openxmlformats.org/drawingml/2006/main">
+            <a:off x="8967788" y="2324100"/>
+            <a:ext cx="2614613" cy="3238500"/>
           </a:xfrm>
           <a:prstGeom xmlns:a="http://schemas.openxmlformats.org/drawingml/2006/main" prst="roundRect">
             <a:avLst>
@@ -12950,19 +12950,19 @@
           <p:cNvPr id="19" name="">
             <a:extLst xmlns:a="http://schemas.openxmlformats.org/drawingml/2006/main">
               <a:ext uri="{FF2B5EF4-FFF2-40B4-BE49-F238E27FC236}">
-                <a16:creationId xmlns:a16="http://schemas.microsoft.com/office/drawing/2014/main" id="{06B03A12-A049-437C-A772-44B8BA1A3FA3}"/>
-              </a:ext>
-            </a:extLst>
-          </p:cNvPr>
-          <p:cNvSpPr>
-            <a:spLocks xmlns:a="http://schemas.openxmlformats.org/drawingml/2006/main" noGrp="1"/>
-          </p:cNvSpPr>
-          <p:nvPr/>
-        </p:nvSpPr>
-        <p:spPr>
-          <a:xfrm xmlns:a="http://schemas.openxmlformats.org/drawingml/2006/main">
-            <a:off x="8967788" y="1885950"/>
-            <a:ext cx="66675" cy="4095750"/>
+                <a16:creationId xmlns:a16="http://schemas.microsoft.com/office/drawing/2014/main" id="{DB8542B8-480C-4896-827A-DC48A99F18BA}"/>
+              </a:ext>
+            </a:extLst>
+          </p:cNvPr>
+          <p:cNvSpPr>
+            <a:spLocks xmlns:a="http://schemas.openxmlformats.org/drawingml/2006/main" noGrp="1"/>
+          </p:cNvSpPr>
+          <p:nvPr/>
+        </p:nvSpPr>
+        <p:spPr>
+          <a:xfrm xmlns:a="http://schemas.openxmlformats.org/drawingml/2006/main">
+            <a:off x="8967788" y="2324100"/>
+            <a:ext cx="66675" cy="3238500"/>
           </a:xfrm>
           <a:prstGeom xmlns:a="http://schemas.openxmlformats.org/drawingml/2006/main" prst="rect">
             <a:avLst/>
@@ -12981,19 +12981,19 @@
           <p:cNvPr id="20" name="">
             <a:extLst xmlns:a="http://schemas.openxmlformats.org/drawingml/2006/main">
               <a:ext uri="{FF2B5EF4-FFF2-40B4-BE49-F238E27FC236}">
-                <a16:creationId xmlns:a16="http://schemas.microsoft.com/office/drawing/2014/main" id="{C9DCB1BF-D994-450F-94AE-4DE81119058A}"/>
-              </a:ext>
-            </a:extLst>
-          </p:cNvPr>
-          <p:cNvSpPr>
-            <a:spLocks xmlns:a="http://schemas.openxmlformats.org/drawingml/2006/main" noGrp="1"/>
-          </p:cNvSpPr>
-          <p:nvPr/>
-        </p:nvSpPr>
-        <p:spPr>
-          <a:xfrm xmlns:a="http://schemas.openxmlformats.org/drawingml/2006/main">
-            <a:off x="9177338" y="2038350"/>
-            <a:ext cx="2252663" cy="419100"/>
+                <a16:creationId xmlns:a16="http://schemas.microsoft.com/office/drawing/2014/main" id="{8B6BA1D2-1B70-4125-94F7-67A94C3DD328}"/>
+              </a:ext>
+            </a:extLst>
+          </p:cNvPr>
+          <p:cNvSpPr>
+            <a:spLocks xmlns:a="http://schemas.openxmlformats.org/drawingml/2006/main" noGrp="1"/>
+          </p:cNvSpPr>
+          <p:nvPr/>
+        </p:nvSpPr>
+        <p:spPr>
+          <a:xfrm xmlns:a="http://schemas.openxmlformats.org/drawingml/2006/main">
+            <a:off x="9177338" y="2590800"/>
+            <a:ext cx="2252663" cy="819150"/>
           </a:xfrm>
           <a:prstGeom xmlns:a="http://schemas.openxmlformats.org/drawingml/2006/main" prst="rect">
             <a:avLst/>
@@ -13015,7 +13015,7 @@
                 <a:spcPct val="108000"/>
               </a:lnSpc>
               <a:buNone/>
-              <a:defRPr sz="1650" b="1">
+              <a:defRPr sz="1350" b="1">
                 <a:solidFill>
                   <a:srgbClr val="071426"/>
                 </a:solidFill>
@@ -13025,7 +13025,7 @@
               </a:defRPr>
             </a:pPr>
             <a:r>
-              <a:rPr sz="1650" b="1">
+              <a:rPr sz="1350" b="1">
                 <a:solidFill>
                   <a:srgbClr val="071426"/>
                 </a:solidFill>
@@ -13043,24 +13043,26 @@
           <p:cNvPr id="21" name="">
             <a:extLst xmlns:a="http://schemas.openxmlformats.org/drawingml/2006/main">
               <a:ext uri="{FF2B5EF4-FFF2-40B4-BE49-F238E27FC236}">
-                <a16:creationId xmlns:a16="http://schemas.microsoft.com/office/drawing/2014/main" id="{746F420B-A12C-4FD4-8FF9-19C5D98A6893}"/>
-              </a:ext>
-            </a:extLst>
-          </p:cNvPr>
-          <p:cNvSpPr>
-            <a:spLocks xmlns:a="http://schemas.openxmlformats.org/drawingml/2006/main" noGrp="1"/>
-          </p:cNvSpPr>
-          <p:nvPr/>
-        </p:nvSpPr>
-        <p:spPr>
-          <a:xfrm xmlns:a="http://schemas.openxmlformats.org/drawingml/2006/main">
-            <a:off x="609600" y="5943600"/>
-            <a:ext cx="10972800" cy="342900"/>
-          </a:xfrm>
-          <a:prstGeom xmlns:a="http://schemas.openxmlformats.org/drawingml/2006/main" prst="rect">
-            <a:avLst/>
-          </a:prstGeom>
-          <a:noFill xmlns:a="http://schemas.openxmlformats.org/drawingml/2006/main"/>
+                <a16:creationId xmlns:a16="http://schemas.microsoft.com/office/drawing/2014/main" id="{8355F5A7-E811-4A35-B499-2A35FEB8A052}"/>
+              </a:ext>
+            </a:extLst>
+          </p:cNvPr>
+          <p:cNvSpPr>
+            <a:spLocks xmlns:a="http://schemas.openxmlformats.org/drawingml/2006/main" noGrp="1"/>
+          </p:cNvSpPr>
+          <p:nvPr/>
+        </p:nvSpPr>
+        <p:spPr>
+          <a:xfrm xmlns:a="http://schemas.openxmlformats.org/drawingml/2006/main">
+            <a:off x="609600" y="5810250"/>
+            <a:ext cx="10972800" cy="457200"/>
+          </a:xfrm>
+          <a:prstGeom xmlns:a="http://schemas.openxmlformats.org/drawingml/2006/main" prst="rect">
+            <a:avLst/>
+          </a:prstGeom>
+          <a:solidFill xmlns:a="http://schemas.openxmlformats.org/drawingml/2006/main">
+            <a:srgbClr val="FFF7E6"/>
+          </a:solidFill>
           <a:ln xmlns:a="http://schemas.openxmlformats.org/drawingml/2006/main" w="0">
             <a:noFill/>
             <a:prstDash val="solid"/>
@@ -13103,7 +13105,7 @@
     </p:spTree>
     <p:extLst>
       <p:ext uri="{BB962C8B-B14F-4D97-AF65-F5344CB8AC3E}">
-        <p14:creationId xmlns:p14="http://schemas.microsoft.com/office/powerpoint/2010/main" val="543152891"/>
+        <p14:creationId xmlns:p14="http://schemas.microsoft.com/office/powerpoint/2010/main" val="244236242"/>
       </p:ext>
     </p:extLst>
   </p:cSld>
@@ -13131,10 +13133,10 @@
       </p:grpSpPr>
       <p:sp>
         <p:nvSpPr>
-          <p:cNvPr id="26" name="">
-            <a:extLst xmlns:a="http://schemas.openxmlformats.org/drawingml/2006/main">
-              <a:ext uri="{FF2B5EF4-FFF2-40B4-BE49-F238E27FC236}">
-                <a16:creationId xmlns:a16="http://schemas.microsoft.com/office/drawing/2014/main" id="{4417C098-0E84-4316-8FBB-F4137351D568}"/>
+          <p:cNvPr id="22" name="">
+            <a:extLst xmlns:a="http://schemas.openxmlformats.org/drawingml/2006/main">
+              <a:ext uri="{FF2B5EF4-FFF2-40B4-BE49-F238E27FC236}">
+                <a16:creationId xmlns:a16="http://schemas.microsoft.com/office/drawing/2014/main" id="{84D74024-008A-4BCB-9413-36809B6A8593}"/>
               </a:ext>
             </a:extLst>
           </p:cNvPr>
@@ -13165,7 +13167,7 @@
           <p:cNvPr id="2" name="">
             <a:extLst xmlns:a="http://schemas.openxmlformats.org/drawingml/2006/main">
               <a:ext uri="{FF2B5EF4-FFF2-40B4-BE49-F238E27FC236}">
-                <a16:creationId xmlns:a16="http://schemas.microsoft.com/office/drawing/2014/main" id="{4B219BC0-F910-4685-9E0D-EAEAD4F81A01}"/>
+                <a16:creationId xmlns:a16="http://schemas.microsoft.com/office/drawing/2014/main" id="{5FD2C4D7-4DF6-4E30-81A2-CAC4DF05CB69}"/>
               </a:ext>
             </a:extLst>
           </p:cNvPr>
@@ -13217,7 +13219,7 @@
                 <a:ea typeface="Aptos"/>
                 <a:cs typeface="Aptos"/>
               </a:rPr>
-              <a:t>PROTOKOLL</a:t>
+              <a:t>GELDVERFASSUNG</a:t>
             </a:r>
           </a:p>
         </p:txBody>
@@ -13227,7 +13229,7 @@
           <p:cNvPr id="3" name="">
             <a:extLst xmlns:a="http://schemas.openxmlformats.org/drawingml/2006/main">
               <a:ext uri="{FF2B5EF4-FFF2-40B4-BE49-F238E27FC236}">
-                <a16:creationId xmlns:a16="http://schemas.microsoft.com/office/drawing/2014/main" id="{C11A8AB5-A7DB-4F43-B66D-3AFE85C97630}"/>
+                <a16:creationId xmlns:a16="http://schemas.microsoft.com/office/drawing/2014/main" id="{F44BA829-C17B-4E3F-87E6-98B973989462}"/>
               </a:ext>
             </a:extLst>
           </p:cNvPr>
@@ -13261,7 +13263,7 @@
                 <a:spcPct val="108000"/>
               </a:lnSpc>
               <a:buNone/>
-              <a:defRPr sz="3150" b="1">
+              <a:defRPr sz="2550" b="1">
                 <a:solidFill>
                   <a:srgbClr val="071426"/>
                 </a:solidFill>
@@ -13271,7 +13273,7 @@
               </a:defRPr>
             </a:pPr>
             <a:r>
-              <a:rPr sz="3150" b="1">
+              <a:rPr sz="2550" b="1">
                 <a:solidFill>
                   <a:srgbClr val="071426"/>
                 </a:solidFill>
@@ -13289,7 +13291,7 @@
           <p:cNvPr id="4" name="">
             <a:extLst xmlns:a="http://schemas.openxmlformats.org/drawingml/2006/main">
               <a:ext uri="{FF2B5EF4-FFF2-40B4-BE49-F238E27FC236}">
-                <a16:creationId xmlns:a16="http://schemas.microsoft.com/office/drawing/2014/main" id="{C1A0D01B-F96E-4545-9C79-40FC55AD3792}"/>
+                <a16:creationId xmlns:a16="http://schemas.microsoft.com/office/drawing/2014/main" id="{3E0996E6-19CA-44C1-A01F-BF39DCC53753}"/>
               </a:ext>
             </a:extLst>
           </p:cNvPr>
@@ -13317,14 +13319,14 @@
       </p:sp>
       <p:pic>
         <p:nvPicPr>
-          <p:cNvPr id="30" name=""/>
+          <p:cNvPr id="26" name=""/>
           <p:cNvPicPr>
             <a:picLocks xmlns:a="http://schemas.openxmlformats.org/drawingml/2006/main" noChangeAspect="1"/>
           </p:cNvPicPr>
           <p:nvPr/>
         </p:nvPicPr>
         <p:blipFill>
-          <a:blip xmlns:r="http://schemas.openxmlformats.org/officeDocument/2006/relationships" xmlns:a="http://schemas.openxmlformats.org/drawingml/2006/main" r:embed="R25b7613c678840a2"/>
+          <a:blip xmlns:r="http://schemas.openxmlformats.org/officeDocument/2006/relationships" xmlns:a="http://schemas.openxmlformats.org/drawingml/2006/main" r:embed="R3a2b9319e09d4353"/>
           <a:srcRect xmlns:a="http://schemas.openxmlformats.org/drawingml/2006/main" l="0" t="0" r="0" b="0"/>
           <a:stretch xmlns:a="http://schemas.openxmlformats.org/drawingml/2006/main">
             <a:fillRect l="0" t="0" r="0" b="0"/>
@@ -13345,7 +13347,7 @@
           <p:cNvPr id="6" name="">
             <a:extLst xmlns:a="http://schemas.openxmlformats.org/drawingml/2006/main">
               <a:ext uri="{FF2B5EF4-FFF2-40B4-BE49-F238E27FC236}">
-                <a16:creationId xmlns:a16="http://schemas.microsoft.com/office/drawing/2014/main" id="{45CD137A-D3FE-445D-9737-DCC31E169FA9}"/>
+                <a16:creationId xmlns:a16="http://schemas.microsoft.com/office/drawing/2014/main" id="{D212DA91-8232-474C-9928-43EC5818F880}"/>
               </a:ext>
             </a:extLst>
           </p:cNvPr>
@@ -13407,7 +13409,7 @@
           <p:cNvPr id="7" name="">
             <a:extLst xmlns:a="http://schemas.openxmlformats.org/drawingml/2006/main">
               <a:ext uri="{FF2B5EF4-FFF2-40B4-BE49-F238E27FC236}">
-                <a16:creationId xmlns:a16="http://schemas.microsoft.com/office/drawing/2014/main" id="{88C6B5FD-0F70-451A-A0E8-189964B592BF}"/>
+                <a16:creationId xmlns:a16="http://schemas.microsoft.com/office/drawing/2014/main" id="{1E84C264-CA47-400E-B2BD-9AB5F1F762CF}"/>
               </a:ext>
             </a:extLst>
           </p:cNvPr>
@@ -13469,19 +13471,19 @@
           <p:cNvPr id="8" name="">
             <a:extLst xmlns:a="http://schemas.openxmlformats.org/drawingml/2006/main">
               <a:ext uri="{FF2B5EF4-FFF2-40B4-BE49-F238E27FC236}">
-                <a16:creationId xmlns:a16="http://schemas.microsoft.com/office/drawing/2014/main" id="{86546ADA-B654-49F5-933A-857C038FB509}"/>
-              </a:ext>
-            </a:extLst>
-          </p:cNvPr>
-          <p:cNvSpPr>
-            <a:spLocks xmlns:a="http://schemas.openxmlformats.org/drawingml/2006/main" noGrp="1"/>
-          </p:cNvSpPr>
-          <p:nvPr/>
-        </p:nvSpPr>
-        <p:spPr>
-          <a:xfrm xmlns:a="http://schemas.openxmlformats.org/drawingml/2006/main">
-            <a:off x="609600" y="1885950"/>
-            <a:ext cx="10972800" cy="1085850"/>
+                <a16:creationId xmlns:a16="http://schemas.microsoft.com/office/drawing/2014/main" id="{A4AD44A6-55FD-48E9-8E74-EEE23D731D65}"/>
+              </a:ext>
+            </a:extLst>
+          </p:cNvPr>
+          <p:cNvSpPr>
+            <a:spLocks xmlns:a="http://schemas.openxmlformats.org/drawingml/2006/main" noGrp="1"/>
+          </p:cNvSpPr>
+          <p:nvPr/>
+        </p:nvSpPr>
+        <p:spPr>
+          <a:xfrm xmlns:a="http://schemas.openxmlformats.org/drawingml/2006/main">
+            <a:off x="609600" y="1752600"/>
+            <a:ext cx="10972800" cy="781050"/>
           </a:xfrm>
           <a:prstGeom xmlns:a="http://schemas.openxmlformats.org/drawingml/2006/main" prst="rect">
             <a:avLst/>
@@ -13505,7 +13507,7 @@
                 <a:spcPct val="108000"/>
               </a:lnSpc>
               <a:buNone/>
-              <a:defRPr sz="4050" b="1">
+              <a:defRPr sz="3300" b="1">
                 <a:solidFill>
                   <a:srgbClr val="D9A84E"/>
                 </a:solidFill>
@@ -13515,7 +13517,7 @@
               </a:defRPr>
             </a:pPr>
             <a:r>
-              <a:rPr sz="4050" b="1">
+              <a:rPr sz="3300" b="1">
                 <a:solidFill>
                   <a:srgbClr val="D9A84E"/>
                 </a:solidFill>
@@ -13533,19 +13535,19 @@
           <p:cNvPr id="9" name="">
             <a:extLst xmlns:a="http://schemas.openxmlformats.org/drawingml/2006/main">
               <a:ext uri="{FF2B5EF4-FFF2-40B4-BE49-F238E27FC236}">
-                <a16:creationId xmlns:a16="http://schemas.microsoft.com/office/drawing/2014/main" id="{95CD6D90-B060-425F-9F10-AA2A93F0A3CC}"/>
-              </a:ext>
-            </a:extLst>
-          </p:cNvPr>
-          <p:cNvSpPr>
-            <a:spLocks xmlns:a="http://schemas.openxmlformats.org/drawingml/2006/main" noGrp="1"/>
-          </p:cNvSpPr>
-          <p:nvPr/>
-        </p:nvSpPr>
-        <p:spPr>
-          <a:xfrm xmlns:a="http://schemas.openxmlformats.org/drawingml/2006/main">
-            <a:off x="609600" y="1885950"/>
-            <a:ext cx="2614613" cy="4095750"/>
+                <a16:creationId xmlns:a16="http://schemas.microsoft.com/office/drawing/2014/main" id="{56425E9A-84C5-486E-8C48-353FBBC8784E}"/>
+              </a:ext>
+            </a:extLst>
+          </p:cNvPr>
+          <p:cNvSpPr>
+            <a:spLocks xmlns:a="http://schemas.openxmlformats.org/drawingml/2006/main" noGrp="1"/>
+          </p:cNvSpPr>
+          <p:nvPr/>
+        </p:nvSpPr>
+        <p:spPr>
+          <a:xfrm xmlns:a="http://schemas.openxmlformats.org/drawingml/2006/main">
+            <a:off x="609600" y="2724150"/>
+            <a:ext cx="2614613" cy="2781300"/>
           </a:xfrm>
           <a:prstGeom xmlns:a="http://schemas.openxmlformats.org/drawingml/2006/main" prst="roundRect">
             <a:avLst>
@@ -13568,19 +13570,19 @@
           <p:cNvPr id="10" name="">
             <a:extLst xmlns:a="http://schemas.openxmlformats.org/drawingml/2006/main">
               <a:ext uri="{FF2B5EF4-FFF2-40B4-BE49-F238E27FC236}">
-                <a16:creationId xmlns:a16="http://schemas.microsoft.com/office/drawing/2014/main" id="{4B909355-D6CB-4156-8970-35BA378C9533}"/>
-              </a:ext>
-            </a:extLst>
-          </p:cNvPr>
-          <p:cNvSpPr>
-            <a:spLocks xmlns:a="http://schemas.openxmlformats.org/drawingml/2006/main" noGrp="1"/>
-          </p:cNvSpPr>
-          <p:nvPr/>
-        </p:nvSpPr>
-        <p:spPr>
-          <a:xfrm xmlns:a="http://schemas.openxmlformats.org/drawingml/2006/main">
-            <a:off x="609600" y="1885950"/>
-            <a:ext cx="66675" cy="4095750"/>
+                <a16:creationId xmlns:a16="http://schemas.microsoft.com/office/drawing/2014/main" id="{62C97262-C43A-45CE-B210-F0C792C190A0}"/>
+              </a:ext>
+            </a:extLst>
+          </p:cNvPr>
+          <p:cNvSpPr>
+            <a:spLocks xmlns:a="http://schemas.openxmlformats.org/drawingml/2006/main" noGrp="1"/>
+          </p:cNvSpPr>
+          <p:nvPr/>
+        </p:nvSpPr>
+        <p:spPr>
+          <a:xfrm xmlns:a="http://schemas.openxmlformats.org/drawingml/2006/main">
+            <a:off x="609600" y="2724150"/>
+            <a:ext cx="66675" cy="2781300"/>
           </a:xfrm>
           <a:prstGeom xmlns:a="http://schemas.openxmlformats.org/drawingml/2006/main" prst="rect">
             <a:avLst/>
@@ -13599,19 +13601,19 @@
           <p:cNvPr id="11" name="">
             <a:extLst xmlns:a="http://schemas.openxmlformats.org/drawingml/2006/main">
               <a:ext uri="{FF2B5EF4-FFF2-40B4-BE49-F238E27FC236}">
-                <a16:creationId xmlns:a16="http://schemas.microsoft.com/office/drawing/2014/main" id="{4F83D50B-1FD9-4624-BD00-0076C125C74E}"/>
-              </a:ext>
-            </a:extLst>
-          </p:cNvPr>
-          <p:cNvSpPr>
-            <a:spLocks xmlns:a="http://schemas.openxmlformats.org/drawingml/2006/main" noGrp="1"/>
-          </p:cNvSpPr>
-          <p:nvPr/>
-        </p:nvSpPr>
-        <p:spPr>
-          <a:xfrm xmlns:a="http://schemas.openxmlformats.org/drawingml/2006/main">
-            <a:off x="819150" y="2038350"/>
-            <a:ext cx="2252663" cy="419100"/>
+                <a16:creationId xmlns:a16="http://schemas.microsoft.com/office/drawing/2014/main" id="{6381A879-EED8-4B10-830F-4FB9035EB10A}"/>
+              </a:ext>
+            </a:extLst>
+          </p:cNvPr>
+          <p:cNvSpPr>
+            <a:spLocks xmlns:a="http://schemas.openxmlformats.org/drawingml/2006/main" noGrp="1"/>
+          </p:cNvSpPr>
+          <p:nvPr/>
+        </p:nvSpPr>
+        <p:spPr>
+          <a:xfrm xmlns:a="http://schemas.openxmlformats.org/drawingml/2006/main">
+            <a:off x="819150" y="2952750"/>
+            <a:ext cx="2252663" cy="2133600"/>
           </a:xfrm>
           <a:prstGeom xmlns:a="http://schemas.openxmlformats.org/drawingml/2006/main" prst="rect">
             <a:avLst/>
@@ -13633,7 +13635,7 @@
                 <a:spcPct val="108000"/>
               </a:lnSpc>
               <a:buNone/>
-              <a:defRPr sz="1650" b="1">
+              <a:defRPr sz="1575" b="1">
                 <a:solidFill>
                   <a:srgbClr val="071426"/>
                 </a:solidFill>
@@ -13643,7 +13645,7 @@
               </a:defRPr>
             </a:pPr>
             <a:r>
-              <a:rPr sz="1650" b="1">
+              <a:rPr sz="1575" b="1">
                 <a:solidFill>
                   <a:srgbClr val="071426"/>
                 </a:solidFill>
@@ -13651,7 +13653,34 @@
                 <a:ea typeface="Aptos Display"/>
                 <a:cs typeface="Aptos Display"/>
               </a:rPr>
-              <a:t>D</a:t>
+              <a:t>D —</a:t>
+            </a:r>
+          </a:p>
+          <a:p xmlns:a="http://schemas.openxmlformats.org/drawingml/2006/main">
+            <a:pPr algn="l">
+              <a:lnSpc>
+                <a:spcPct val="108000"/>
+              </a:lnSpc>
+              <a:buNone/>
+              <a:defRPr sz="1575" b="1">
+                <a:solidFill>
+                  <a:srgbClr val="071426"/>
+                </a:solidFill>
+                <a:latin typeface="Aptos Display"/>
+                <a:ea typeface="Aptos Display"/>
+                <a:cs typeface="Aptos Display"/>
+              </a:defRPr>
+            </a:pPr>
+            <a:r>
+              <a:rPr sz="1575" b="1">
+                <a:solidFill>
+                  <a:srgbClr val="071426"/>
+                </a:solidFill>
+                <a:latin typeface="Aptos Display"/>
+                <a:ea typeface="Aptos Display"/>
+                <a:cs typeface="Aptos Display"/>
+              </a:rPr>
+              <a:t>digital frei umlaufend</a:t>
             </a:r>
           </a:p>
         </p:txBody>
@@ -13661,81 +13690,19 @@
           <p:cNvPr id="12" name="">
             <a:extLst xmlns:a="http://schemas.openxmlformats.org/drawingml/2006/main">
               <a:ext uri="{FF2B5EF4-FFF2-40B4-BE49-F238E27FC236}">
-                <a16:creationId xmlns:a16="http://schemas.microsoft.com/office/drawing/2014/main" id="{5FD77681-802A-49EB-B028-1260DF81AD4A}"/>
-              </a:ext>
-            </a:extLst>
-          </p:cNvPr>
-          <p:cNvSpPr>
-            <a:spLocks xmlns:a="http://schemas.openxmlformats.org/drawingml/2006/main" noGrp="1"/>
-          </p:cNvSpPr>
-          <p:nvPr/>
-        </p:nvSpPr>
-        <p:spPr>
-          <a:xfrm xmlns:a="http://schemas.openxmlformats.org/drawingml/2006/main">
-            <a:off x="819150" y="2466975"/>
-            <a:ext cx="2252663" cy="3390900"/>
-          </a:xfrm>
-          <a:prstGeom xmlns:a="http://schemas.openxmlformats.org/drawingml/2006/main" prst="rect">
-            <a:avLst/>
-          </a:prstGeom>
-          <a:noFill xmlns:a="http://schemas.openxmlformats.org/drawingml/2006/main"/>
-          <a:ln xmlns:a="http://schemas.openxmlformats.org/drawingml/2006/main" w="0">
-            <a:noFill/>
-            <a:prstDash val="solid"/>
-          </a:ln>
-        </p:spPr>
-        <p:txBody>
-          <a:bodyPr xmlns:a="http://schemas.openxmlformats.org/drawingml/2006/main" lIns="76200" tIns="57150" rIns="76200" bIns="57150" anchor="ctr">
-            <a:normAutofit fontScale="100000"/>
-          </a:bodyPr>
-          <a:lstStyle xmlns:a="http://schemas.openxmlformats.org/drawingml/2006/main"/>
-          <a:p xmlns:a="http://schemas.openxmlformats.org/drawingml/2006/main">
-            <a:pPr algn="l">
-              <a:lnSpc>
-                <a:spcPct val="108000"/>
-              </a:lnSpc>
-              <a:buNone/>
-              <a:defRPr sz="1275" b="0">
-                <a:solidFill>
-                  <a:srgbClr val="5F6B7A"/>
-                </a:solidFill>
-                <a:latin typeface="Aptos"/>
-                <a:ea typeface="Aptos"/>
-                <a:cs typeface="Aptos"/>
-              </a:defRPr>
-            </a:pPr>
-            <a:r>
-              <a:rPr sz="1275" b="0">
-                <a:solidFill>
-                  <a:srgbClr val="5F6B7A"/>
-                </a:solidFill>
-                <a:latin typeface="Aptos"/>
-                <a:ea typeface="Aptos"/>
-                <a:cs typeface="Aptos"/>
-              </a:rPr>
-              <a:t>digital frei umlaufend</a:t>
-            </a:r>
-          </a:p>
-        </p:txBody>
-      </p:sp>
-      <p:sp>
-        <p:nvSpPr>
-          <p:cNvPr id="13" name="">
-            <a:extLst xmlns:a="http://schemas.openxmlformats.org/drawingml/2006/main">
-              <a:ext uri="{FF2B5EF4-FFF2-40B4-BE49-F238E27FC236}">
-                <a16:creationId xmlns:a16="http://schemas.microsoft.com/office/drawing/2014/main" id="{E347EE0D-EF08-44CF-BB5C-4C616DF18C5B}"/>
-              </a:ext>
-            </a:extLst>
-          </p:cNvPr>
-          <p:cNvSpPr>
-            <a:spLocks xmlns:a="http://schemas.openxmlformats.org/drawingml/2006/main" noGrp="1"/>
-          </p:cNvSpPr>
-          <p:nvPr/>
-        </p:nvSpPr>
-        <p:spPr>
-          <a:xfrm xmlns:a="http://schemas.openxmlformats.org/drawingml/2006/main">
-            <a:off x="3395663" y="1885950"/>
-            <a:ext cx="2614613" cy="4095750"/>
+                <a16:creationId xmlns:a16="http://schemas.microsoft.com/office/drawing/2014/main" id="{06C998B8-03B2-43D4-814D-A581F190D57B}"/>
+              </a:ext>
+            </a:extLst>
+          </p:cNvPr>
+          <p:cNvSpPr>
+            <a:spLocks xmlns:a="http://schemas.openxmlformats.org/drawingml/2006/main" noGrp="1"/>
+          </p:cNvSpPr>
+          <p:nvPr/>
+        </p:nvSpPr>
+        <p:spPr>
+          <a:xfrm xmlns:a="http://schemas.openxmlformats.org/drawingml/2006/main">
+            <a:off x="3395663" y="2724150"/>
+            <a:ext cx="2614613" cy="2781300"/>
           </a:xfrm>
           <a:prstGeom xmlns:a="http://schemas.openxmlformats.org/drawingml/2006/main" prst="roundRect">
             <a:avLst>
@@ -13755,22 +13722,22 @@
       </p:sp>
       <p:sp>
         <p:nvSpPr>
-          <p:cNvPr id="14" name="">
-            <a:extLst xmlns:a="http://schemas.openxmlformats.org/drawingml/2006/main">
-              <a:ext uri="{FF2B5EF4-FFF2-40B4-BE49-F238E27FC236}">
-                <a16:creationId xmlns:a16="http://schemas.microsoft.com/office/drawing/2014/main" id="{C27194D0-5D2C-42BA-B4C1-687FE832CEC4}"/>
-              </a:ext>
-            </a:extLst>
-          </p:cNvPr>
-          <p:cNvSpPr>
-            <a:spLocks xmlns:a="http://schemas.openxmlformats.org/drawingml/2006/main" noGrp="1"/>
-          </p:cNvSpPr>
-          <p:nvPr/>
-        </p:nvSpPr>
-        <p:spPr>
-          <a:xfrm xmlns:a="http://schemas.openxmlformats.org/drawingml/2006/main">
-            <a:off x="3395663" y="1885950"/>
-            <a:ext cx="66675" cy="4095750"/>
+          <p:cNvPr id="13" name="">
+            <a:extLst xmlns:a="http://schemas.openxmlformats.org/drawingml/2006/main">
+              <a:ext uri="{FF2B5EF4-FFF2-40B4-BE49-F238E27FC236}">
+                <a16:creationId xmlns:a16="http://schemas.microsoft.com/office/drawing/2014/main" id="{61194257-A881-4A6B-8F79-F139D7DF1A6F}"/>
+              </a:ext>
+            </a:extLst>
+          </p:cNvPr>
+          <p:cNvSpPr>
+            <a:spLocks xmlns:a="http://schemas.openxmlformats.org/drawingml/2006/main" noGrp="1"/>
+          </p:cNvSpPr>
+          <p:nvPr/>
+        </p:nvSpPr>
+        <p:spPr>
+          <a:xfrm xmlns:a="http://schemas.openxmlformats.org/drawingml/2006/main">
+            <a:off x="3395663" y="2724150"/>
+            <a:ext cx="66675" cy="2781300"/>
           </a:xfrm>
           <a:prstGeom xmlns:a="http://schemas.openxmlformats.org/drawingml/2006/main" prst="rect">
             <a:avLst/>
@@ -13786,22 +13753,22 @@
       </p:sp>
       <p:sp>
         <p:nvSpPr>
-          <p:cNvPr id="15" name="">
-            <a:extLst xmlns:a="http://schemas.openxmlformats.org/drawingml/2006/main">
-              <a:ext uri="{FF2B5EF4-FFF2-40B4-BE49-F238E27FC236}">
-                <a16:creationId xmlns:a16="http://schemas.microsoft.com/office/drawing/2014/main" id="{88745EF8-FD7A-4751-855C-EDDBC73537D2}"/>
-              </a:ext>
-            </a:extLst>
-          </p:cNvPr>
-          <p:cNvSpPr>
-            <a:spLocks xmlns:a="http://schemas.openxmlformats.org/drawingml/2006/main" noGrp="1"/>
-          </p:cNvSpPr>
-          <p:nvPr/>
-        </p:nvSpPr>
-        <p:spPr>
-          <a:xfrm xmlns:a="http://schemas.openxmlformats.org/drawingml/2006/main">
-            <a:off x="3605213" y="2038350"/>
-            <a:ext cx="2252663" cy="419100"/>
+          <p:cNvPr id="14" name="">
+            <a:extLst xmlns:a="http://schemas.openxmlformats.org/drawingml/2006/main">
+              <a:ext uri="{FF2B5EF4-FFF2-40B4-BE49-F238E27FC236}">
+                <a16:creationId xmlns:a16="http://schemas.microsoft.com/office/drawing/2014/main" id="{B3525F04-E8EB-4F4E-AD87-DADEF3E48507}"/>
+              </a:ext>
+            </a:extLst>
+          </p:cNvPr>
+          <p:cNvSpPr>
+            <a:spLocks xmlns:a="http://schemas.openxmlformats.org/drawingml/2006/main" noGrp="1"/>
+          </p:cNvSpPr>
+          <p:nvPr/>
+        </p:nvSpPr>
+        <p:spPr>
+          <a:xfrm xmlns:a="http://schemas.openxmlformats.org/drawingml/2006/main">
+            <a:off x="3605213" y="2952750"/>
+            <a:ext cx="2252663" cy="2133600"/>
           </a:xfrm>
           <a:prstGeom xmlns:a="http://schemas.openxmlformats.org/drawingml/2006/main" prst="rect">
             <a:avLst/>
@@ -13823,7 +13790,7 @@
                 <a:spcPct val="108000"/>
               </a:lnSpc>
               <a:buNone/>
-              <a:defRPr sz="1650" b="1">
+              <a:defRPr sz="1575" b="1">
                 <a:solidFill>
                   <a:srgbClr val="071426"/>
                 </a:solidFill>
@@ -13833,7 +13800,7 @@
               </a:defRPr>
             </a:pPr>
             <a:r>
-              <a:rPr sz="1650" b="1">
+              <a:rPr sz="1575" b="1">
                 <a:solidFill>
                   <a:srgbClr val="071426"/>
                 </a:solidFill>
@@ -13841,67 +13808,32 @@
                 <a:ea typeface="Aptos Display"/>
                 <a:cs typeface="Aptos Display"/>
               </a:rPr>
-              <a:t>P</a:t>
-            </a:r>
-          </a:p>
-        </p:txBody>
-      </p:sp>
-      <p:sp>
-        <p:nvSpPr>
-          <p:cNvPr id="16" name="">
-            <a:extLst xmlns:a="http://schemas.openxmlformats.org/drawingml/2006/main">
-              <a:ext uri="{FF2B5EF4-FFF2-40B4-BE49-F238E27FC236}">
-                <a16:creationId xmlns:a16="http://schemas.microsoft.com/office/drawing/2014/main" id="{78BF4D78-A9BF-41A7-8943-45F3B024803F}"/>
-              </a:ext>
-            </a:extLst>
-          </p:cNvPr>
-          <p:cNvSpPr>
-            <a:spLocks xmlns:a="http://schemas.openxmlformats.org/drawingml/2006/main" noGrp="1"/>
-          </p:cNvSpPr>
-          <p:nvPr/>
-        </p:nvSpPr>
-        <p:spPr>
-          <a:xfrm xmlns:a="http://schemas.openxmlformats.org/drawingml/2006/main">
-            <a:off x="3605213" y="2466975"/>
-            <a:ext cx="2252663" cy="3390900"/>
-          </a:xfrm>
-          <a:prstGeom xmlns:a="http://schemas.openxmlformats.org/drawingml/2006/main" prst="rect">
-            <a:avLst/>
-          </a:prstGeom>
-          <a:noFill xmlns:a="http://schemas.openxmlformats.org/drawingml/2006/main"/>
-          <a:ln xmlns:a="http://schemas.openxmlformats.org/drawingml/2006/main" w="0">
-            <a:noFill/>
-            <a:prstDash val="solid"/>
-          </a:ln>
-        </p:spPr>
-        <p:txBody>
-          <a:bodyPr xmlns:a="http://schemas.openxmlformats.org/drawingml/2006/main" lIns="76200" tIns="57150" rIns="76200" bIns="57150" anchor="ctr">
-            <a:normAutofit fontScale="100000"/>
-          </a:bodyPr>
-          <a:lstStyle xmlns:a="http://schemas.openxmlformats.org/drawingml/2006/main"/>
+              <a:t>P —</a:t>
+            </a:r>
+          </a:p>
           <a:p xmlns:a="http://schemas.openxmlformats.org/drawingml/2006/main">
             <a:pPr algn="l">
               <a:lnSpc>
                 <a:spcPct val="108000"/>
               </a:lnSpc>
               <a:buNone/>
-              <a:defRPr sz="1275" b="0">
-                <a:solidFill>
-                  <a:srgbClr val="5F6B7A"/>
-                </a:solidFill>
-                <a:latin typeface="Aptos"/>
-                <a:ea typeface="Aptos"/>
-                <a:cs typeface="Aptos"/>
-              </a:defRPr>
-            </a:pPr>
-            <a:r>
-              <a:rPr sz="1275" b="0">
-                <a:solidFill>
-                  <a:srgbClr val="5F6B7A"/>
-                </a:solidFill>
-                <a:latin typeface="Aptos"/>
-                <a:ea typeface="Aptos"/>
-                <a:cs typeface="Aptos"/>
+              <a:defRPr sz="1575" b="1">
+                <a:solidFill>
+                  <a:srgbClr val="071426"/>
+                </a:solidFill>
+                <a:latin typeface="Aptos Display"/>
+                <a:ea typeface="Aptos Display"/>
+                <a:cs typeface="Aptos Display"/>
+              </a:defRPr>
+            </a:pPr>
+            <a:r>
+              <a:rPr sz="1575" b="1">
+                <a:solidFill>
+                  <a:srgbClr val="071426"/>
+                </a:solidFill>
+                <a:latin typeface="Aptos Display"/>
+                <a:ea typeface="Aptos Display"/>
+                <a:cs typeface="Aptos Display"/>
               </a:rPr>
               <a:t>für Papier und Metall gesperrt</a:t>
             </a:r>
@@ -13910,22 +13842,22 @@
       </p:sp>
       <p:sp>
         <p:nvSpPr>
-          <p:cNvPr id="17" name="">
-            <a:extLst xmlns:a="http://schemas.openxmlformats.org/drawingml/2006/main">
-              <a:ext uri="{FF2B5EF4-FFF2-40B4-BE49-F238E27FC236}">
-                <a16:creationId xmlns:a16="http://schemas.microsoft.com/office/drawing/2014/main" id="{610939D7-0E81-48E8-850C-33380F1C61C9}"/>
-              </a:ext>
-            </a:extLst>
-          </p:cNvPr>
-          <p:cNvSpPr>
-            <a:spLocks xmlns:a="http://schemas.openxmlformats.org/drawingml/2006/main" noGrp="1"/>
-          </p:cNvSpPr>
-          <p:nvPr/>
-        </p:nvSpPr>
-        <p:spPr>
-          <a:xfrm xmlns:a="http://schemas.openxmlformats.org/drawingml/2006/main">
-            <a:off x="6181725" y="1885950"/>
-            <a:ext cx="2614613" cy="4095750"/>
+          <p:cNvPr id="15" name="">
+            <a:extLst xmlns:a="http://schemas.openxmlformats.org/drawingml/2006/main">
+              <a:ext uri="{FF2B5EF4-FFF2-40B4-BE49-F238E27FC236}">
+                <a16:creationId xmlns:a16="http://schemas.microsoft.com/office/drawing/2014/main" id="{E0912B21-B718-40E1-BDF1-50CA2B84C398}"/>
+              </a:ext>
+            </a:extLst>
+          </p:cNvPr>
+          <p:cNvSpPr>
+            <a:spLocks xmlns:a="http://schemas.openxmlformats.org/drawingml/2006/main" noGrp="1"/>
+          </p:cNvSpPr>
+          <p:nvPr/>
+        </p:nvSpPr>
+        <p:spPr>
+          <a:xfrm xmlns:a="http://schemas.openxmlformats.org/drawingml/2006/main">
+            <a:off x="6181725" y="2724150"/>
+            <a:ext cx="2614613" cy="2781300"/>
           </a:xfrm>
           <a:prstGeom xmlns:a="http://schemas.openxmlformats.org/drawingml/2006/main" prst="roundRect">
             <a:avLst>
@@ -13945,22 +13877,22 @@
       </p:sp>
       <p:sp>
         <p:nvSpPr>
-          <p:cNvPr id="18" name="">
-            <a:extLst xmlns:a="http://schemas.openxmlformats.org/drawingml/2006/main">
-              <a:ext uri="{FF2B5EF4-FFF2-40B4-BE49-F238E27FC236}">
-                <a16:creationId xmlns:a16="http://schemas.microsoft.com/office/drawing/2014/main" id="{3BAB30B5-12CA-4E8B-88BA-32D618601F5E}"/>
-              </a:ext>
-            </a:extLst>
-          </p:cNvPr>
-          <p:cNvSpPr>
-            <a:spLocks xmlns:a="http://schemas.openxmlformats.org/drawingml/2006/main" noGrp="1"/>
-          </p:cNvSpPr>
-          <p:nvPr/>
-        </p:nvSpPr>
-        <p:spPr>
-          <a:xfrm xmlns:a="http://schemas.openxmlformats.org/drawingml/2006/main">
-            <a:off x="6181725" y="1885950"/>
-            <a:ext cx="66675" cy="4095750"/>
+          <p:cNvPr id="16" name="">
+            <a:extLst xmlns:a="http://schemas.openxmlformats.org/drawingml/2006/main">
+              <a:ext uri="{FF2B5EF4-FFF2-40B4-BE49-F238E27FC236}">
+                <a16:creationId xmlns:a16="http://schemas.microsoft.com/office/drawing/2014/main" id="{3BA9BB96-8034-4EA8-AC74-8DA8B25E1843}"/>
+              </a:ext>
+            </a:extLst>
+          </p:cNvPr>
+          <p:cNvSpPr>
+            <a:spLocks xmlns:a="http://schemas.openxmlformats.org/drawingml/2006/main" noGrp="1"/>
+          </p:cNvSpPr>
+          <p:nvPr/>
+        </p:nvSpPr>
+        <p:spPr>
+          <a:xfrm xmlns:a="http://schemas.openxmlformats.org/drawingml/2006/main">
+            <a:off x="6181725" y="2724150"/>
+            <a:ext cx="66675" cy="2781300"/>
           </a:xfrm>
           <a:prstGeom xmlns:a="http://schemas.openxmlformats.org/drawingml/2006/main" prst="rect">
             <a:avLst/>
@@ -13976,22 +13908,22 @@
       </p:sp>
       <p:sp>
         <p:nvSpPr>
-          <p:cNvPr id="19" name="">
-            <a:extLst xmlns:a="http://schemas.openxmlformats.org/drawingml/2006/main">
-              <a:ext uri="{FF2B5EF4-FFF2-40B4-BE49-F238E27FC236}">
-                <a16:creationId xmlns:a16="http://schemas.microsoft.com/office/drawing/2014/main" id="{6E60259D-0EED-4BAC-833D-686195BA36D9}"/>
-              </a:ext>
-            </a:extLst>
-          </p:cNvPr>
-          <p:cNvSpPr>
-            <a:spLocks xmlns:a="http://schemas.openxmlformats.org/drawingml/2006/main" noGrp="1"/>
-          </p:cNvSpPr>
-          <p:nvPr/>
-        </p:nvSpPr>
-        <p:spPr>
-          <a:xfrm xmlns:a="http://schemas.openxmlformats.org/drawingml/2006/main">
-            <a:off x="6391275" y="2038350"/>
-            <a:ext cx="2252663" cy="419100"/>
+          <p:cNvPr id="17" name="">
+            <a:extLst xmlns:a="http://schemas.openxmlformats.org/drawingml/2006/main">
+              <a:ext uri="{FF2B5EF4-FFF2-40B4-BE49-F238E27FC236}">
+                <a16:creationId xmlns:a16="http://schemas.microsoft.com/office/drawing/2014/main" id="{6AEB2CAE-39AA-4D30-BCB9-00C92217B73D}"/>
+              </a:ext>
+            </a:extLst>
+          </p:cNvPr>
+          <p:cNvSpPr>
+            <a:spLocks xmlns:a="http://schemas.openxmlformats.org/drawingml/2006/main" noGrp="1"/>
+          </p:cNvSpPr>
+          <p:nvPr/>
+        </p:nvSpPr>
+        <p:spPr>
+          <a:xfrm xmlns:a="http://schemas.openxmlformats.org/drawingml/2006/main">
+            <a:off x="6391275" y="2952750"/>
+            <a:ext cx="2252663" cy="2133600"/>
           </a:xfrm>
           <a:prstGeom xmlns:a="http://schemas.openxmlformats.org/drawingml/2006/main" prst="rect">
             <a:avLst/>
@@ -14013,7 +13945,7 @@
                 <a:spcPct val="108000"/>
               </a:lnSpc>
               <a:buNone/>
-              <a:defRPr sz="1650" b="1">
+              <a:defRPr sz="1575" b="1">
                 <a:solidFill>
                   <a:srgbClr val="071426"/>
                 </a:solidFill>
@@ -14023,7 +13955,7 @@
               </a:defRPr>
             </a:pPr>
             <a:r>
-              <a:rPr sz="1650" b="1">
+              <a:rPr sz="1575" b="1">
                 <a:solidFill>
                   <a:srgbClr val="071426"/>
                 </a:solidFill>
@@ -14031,67 +13963,32 @@
                 <a:ea typeface="Aptos Display"/>
                 <a:cs typeface="Aptos Display"/>
               </a:rPr>
-              <a:t>O</a:t>
-            </a:r>
-          </a:p>
-        </p:txBody>
-      </p:sp>
-      <p:sp>
-        <p:nvSpPr>
-          <p:cNvPr id="20" name="">
-            <a:extLst xmlns:a="http://schemas.openxmlformats.org/drawingml/2006/main">
-              <a:ext uri="{FF2B5EF4-FFF2-40B4-BE49-F238E27FC236}">
-                <a16:creationId xmlns:a16="http://schemas.microsoft.com/office/drawing/2014/main" id="{32F35972-802C-4C08-82AC-F5BBF395B2EB}"/>
-              </a:ext>
-            </a:extLst>
-          </p:cNvPr>
-          <p:cNvSpPr>
-            <a:spLocks xmlns:a="http://schemas.openxmlformats.org/drawingml/2006/main" noGrp="1"/>
-          </p:cNvSpPr>
-          <p:nvPr/>
-        </p:nvSpPr>
-        <p:spPr>
-          <a:xfrm xmlns:a="http://schemas.openxmlformats.org/drawingml/2006/main">
-            <a:off x="6391275" y="2466975"/>
-            <a:ext cx="2252663" cy="3390900"/>
-          </a:xfrm>
-          <a:prstGeom xmlns:a="http://schemas.openxmlformats.org/drawingml/2006/main" prst="rect">
-            <a:avLst/>
-          </a:prstGeom>
-          <a:noFill xmlns:a="http://schemas.openxmlformats.org/drawingml/2006/main"/>
-          <a:ln xmlns:a="http://schemas.openxmlformats.org/drawingml/2006/main" w="0">
-            <a:noFill/>
-            <a:prstDash val="solid"/>
-          </a:ln>
-        </p:spPr>
-        <p:txBody>
-          <a:bodyPr xmlns:a="http://schemas.openxmlformats.org/drawingml/2006/main" lIns="76200" tIns="57150" rIns="76200" bIns="57150" anchor="ctr">
-            <a:normAutofit fontScale="100000"/>
-          </a:bodyPr>
-          <a:lstStyle xmlns:a="http://schemas.openxmlformats.org/drawingml/2006/main"/>
+              <a:t>O —</a:t>
+            </a:r>
+          </a:p>
           <a:p xmlns:a="http://schemas.openxmlformats.org/drawingml/2006/main">
             <a:pPr algn="l">
               <a:lnSpc>
                 <a:spcPct val="108000"/>
               </a:lnSpc>
               <a:buNone/>
-              <a:defRPr sz="1275" b="0">
-                <a:solidFill>
-                  <a:srgbClr val="5F6B7A"/>
-                </a:solidFill>
-                <a:latin typeface="Aptos"/>
-                <a:ea typeface="Aptos"/>
-                <a:cs typeface="Aptos"/>
-              </a:defRPr>
-            </a:pPr>
-            <a:r>
-              <a:rPr sz="1275" b="0">
-                <a:solidFill>
-                  <a:srgbClr val="5F6B7A"/>
-                </a:solidFill>
-                <a:latin typeface="Aptos"/>
-                <a:ea typeface="Aptos"/>
-                <a:cs typeface="Aptos"/>
+              <a:defRPr sz="1575" b="1">
+                <a:solidFill>
+                  <a:srgbClr val="071426"/>
+                </a:solidFill>
+                <a:latin typeface="Aptos Display"/>
+                <a:ea typeface="Aptos Display"/>
+                <a:cs typeface="Aptos Display"/>
+              </a:defRPr>
+            </a:pPr>
+            <a:r>
+              <a:rPr sz="1575" b="1">
+                <a:solidFill>
+                  <a:srgbClr val="071426"/>
+                </a:solidFill>
+                <a:latin typeface="Aptos Display"/>
+                <a:ea typeface="Aptos Display"/>
+                <a:cs typeface="Aptos Display"/>
               </a:rPr>
               <a:t>für Offline-Zahlung gesperrt</a:t>
             </a:r>
@@ -14100,22 +13997,22 @@
       </p:sp>
       <p:sp>
         <p:nvSpPr>
-          <p:cNvPr id="21" name="">
-            <a:extLst xmlns:a="http://schemas.openxmlformats.org/drawingml/2006/main">
-              <a:ext uri="{FF2B5EF4-FFF2-40B4-BE49-F238E27FC236}">
-                <a16:creationId xmlns:a16="http://schemas.microsoft.com/office/drawing/2014/main" id="{0F75D128-FC2A-407A-92A6-017F1081F1C1}"/>
-              </a:ext>
-            </a:extLst>
-          </p:cNvPr>
-          <p:cNvSpPr>
-            <a:spLocks xmlns:a="http://schemas.openxmlformats.org/drawingml/2006/main" noGrp="1"/>
-          </p:cNvSpPr>
-          <p:nvPr/>
-        </p:nvSpPr>
-        <p:spPr>
-          <a:xfrm xmlns:a="http://schemas.openxmlformats.org/drawingml/2006/main">
-            <a:off x="8967788" y="1885950"/>
-            <a:ext cx="2614613" cy="4095750"/>
+          <p:cNvPr id="18" name="">
+            <a:extLst xmlns:a="http://schemas.openxmlformats.org/drawingml/2006/main">
+              <a:ext uri="{FF2B5EF4-FFF2-40B4-BE49-F238E27FC236}">
+                <a16:creationId xmlns:a16="http://schemas.microsoft.com/office/drawing/2014/main" id="{6CFA1D5A-D82E-43A4-9651-2270608B7D7B}"/>
+              </a:ext>
+            </a:extLst>
+          </p:cNvPr>
+          <p:cNvSpPr>
+            <a:spLocks xmlns:a="http://schemas.openxmlformats.org/drawingml/2006/main" noGrp="1"/>
+          </p:cNvSpPr>
+          <p:nvPr/>
+        </p:nvSpPr>
+        <p:spPr>
+          <a:xfrm xmlns:a="http://schemas.openxmlformats.org/drawingml/2006/main">
+            <a:off x="8967788" y="2724150"/>
+            <a:ext cx="2614613" cy="2781300"/>
           </a:xfrm>
           <a:prstGeom xmlns:a="http://schemas.openxmlformats.org/drawingml/2006/main" prst="roundRect">
             <a:avLst>
@@ -14135,22 +14032,22 @@
       </p:sp>
       <p:sp>
         <p:nvSpPr>
-          <p:cNvPr id="22" name="">
-            <a:extLst xmlns:a="http://schemas.openxmlformats.org/drawingml/2006/main">
-              <a:ext uri="{FF2B5EF4-FFF2-40B4-BE49-F238E27FC236}">
-                <a16:creationId xmlns:a16="http://schemas.microsoft.com/office/drawing/2014/main" id="{C4C49333-7E52-4517-A85E-754F56347714}"/>
-              </a:ext>
-            </a:extLst>
-          </p:cNvPr>
-          <p:cNvSpPr>
-            <a:spLocks xmlns:a="http://schemas.openxmlformats.org/drawingml/2006/main" noGrp="1"/>
-          </p:cNvSpPr>
-          <p:nvPr/>
-        </p:nvSpPr>
-        <p:spPr>
-          <a:xfrm xmlns:a="http://schemas.openxmlformats.org/drawingml/2006/main">
-            <a:off x="8967788" y="1885950"/>
-            <a:ext cx="66675" cy="4095750"/>
+          <p:cNvPr id="19" name="">
+            <a:extLst xmlns:a="http://schemas.openxmlformats.org/drawingml/2006/main">
+              <a:ext uri="{FF2B5EF4-FFF2-40B4-BE49-F238E27FC236}">
+                <a16:creationId xmlns:a16="http://schemas.microsoft.com/office/drawing/2014/main" id="{F4492300-C908-4D5B-9DCC-58D0D259DC3A}"/>
+              </a:ext>
+            </a:extLst>
+          </p:cNvPr>
+          <p:cNvSpPr>
+            <a:spLocks xmlns:a="http://schemas.openxmlformats.org/drawingml/2006/main" noGrp="1"/>
+          </p:cNvSpPr>
+          <p:nvPr/>
+        </p:nvSpPr>
+        <p:spPr>
+          <a:xfrm xmlns:a="http://schemas.openxmlformats.org/drawingml/2006/main">
+            <a:off x="8967788" y="2724150"/>
+            <a:ext cx="66675" cy="2781300"/>
           </a:xfrm>
           <a:prstGeom xmlns:a="http://schemas.openxmlformats.org/drawingml/2006/main" prst="rect">
             <a:avLst/>
@@ -14166,22 +14063,22 @@
       </p:sp>
       <p:sp>
         <p:nvSpPr>
-          <p:cNvPr id="23" name="">
-            <a:extLst xmlns:a="http://schemas.openxmlformats.org/drawingml/2006/main">
-              <a:ext uri="{FF2B5EF4-FFF2-40B4-BE49-F238E27FC236}">
-                <a16:creationId xmlns:a16="http://schemas.microsoft.com/office/drawing/2014/main" id="{E4F7832E-FCA3-4D2E-82AF-BA962CE08072}"/>
-              </a:ext>
-            </a:extLst>
-          </p:cNvPr>
-          <p:cNvSpPr>
-            <a:spLocks xmlns:a="http://schemas.openxmlformats.org/drawingml/2006/main" noGrp="1"/>
-          </p:cNvSpPr>
-          <p:nvPr/>
-        </p:nvSpPr>
-        <p:spPr>
-          <a:xfrm xmlns:a="http://schemas.openxmlformats.org/drawingml/2006/main">
-            <a:off x="9177338" y="2038350"/>
-            <a:ext cx="2252663" cy="419100"/>
+          <p:cNvPr id="20" name="">
+            <a:extLst xmlns:a="http://schemas.openxmlformats.org/drawingml/2006/main">
+              <a:ext uri="{FF2B5EF4-FFF2-40B4-BE49-F238E27FC236}">
+                <a16:creationId xmlns:a16="http://schemas.microsoft.com/office/drawing/2014/main" id="{77465C66-56B6-42C8-8847-9C2B9BDAC865}"/>
+              </a:ext>
+            </a:extLst>
+          </p:cNvPr>
+          <p:cNvSpPr>
+            <a:spLocks xmlns:a="http://schemas.openxmlformats.org/drawingml/2006/main" noGrp="1"/>
+          </p:cNvSpPr>
+          <p:nvPr/>
+        </p:nvSpPr>
+        <p:spPr>
+          <a:xfrm xmlns:a="http://schemas.openxmlformats.org/drawingml/2006/main">
+            <a:off x="9177338" y="2952750"/>
+            <a:ext cx="2252663" cy="2133600"/>
           </a:xfrm>
           <a:prstGeom xmlns:a="http://schemas.openxmlformats.org/drawingml/2006/main" prst="rect">
             <a:avLst/>
@@ -14203,7 +14100,7 @@
                 <a:spcPct val="108000"/>
               </a:lnSpc>
               <a:buNone/>
-              <a:defRPr sz="1650" b="1">
+              <a:defRPr sz="1575" b="1">
                 <a:solidFill>
                   <a:srgbClr val="071426"/>
                 </a:solidFill>
@@ -14213,7 +14110,7 @@
               </a:defRPr>
             </a:pPr>
             <a:r>
-              <a:rPr sz="1650" b="1">
+              <a:rPr sz="1575" b="1">
                 <a:solidFill>
                   <a:srgbClr val="071426"/>
                 </a:solidFill>
@@ -14221,34 +14118,63 @@
                 <a:ea typeface="Aptos Display"/>
                 <a:cs typeface="Aptos Display"/>
               </a:rPr>
-              <a:t>E</a:t>
-            </a:r>
-          </a:p>
-        </p:txBody>
-      </p:sp>
-      <p:sp>
-        <p:nvSpPr>
-          <p:cNvPr id="24" name="">
-            <a:extLst xmlns:a="http://schemas.openxmlformats.org/drawingml/2006/main">
-              <a:ext uri="{FF2B5EF4-FFF2-40B4-BE49-F238E27FC236}">
-                <a16:creationId xmlns:a16="http://schemas.microsoft.com/office/drawing/2014/main" id="{0B932E5C-3D2E-4241-A35D-1F3B1F3EC0CB}"/>
-              </a:ext>
-            </a:extLst>
-          </p:cNvPr>
-          <p:cNvSpPr>
-            <a:spLocks xmlns:a="http://schemas.openxmlformats.org/drawingml/2006/main" noGrp="1"/>
-          </p:cNvSpPr>
-          <p:nvPr/>
-        </p:nvSpPr>
-        <p:spPr>
-          <a:xfrm xmlns:a="http://schemas.openxmlformats.org/drawingml/2006/main">
-            <a:off x="9177338" y="2466975"/>
-            <a:ext cx="2252663" cy="3390900"/>
-          </a:xfrm>
-          <a:prstGeom xmlns:a="http://schemas.openxmlformats.org/drawingml/2006/main" prst="rect">
-            <a:avLst/>
-          </a:prstGeom>
-          <a:noFill xmlns:a="http://schemas.openxmlformats.org/drawingml/2006/main"/>
+              <a:t>E —</a:t>
+            </a:r>
+          </a:p>
+          <a:p xmlns:a="http://schemas.openxmlformats.org/drawingml/2006/main">
+            <a:pPr algn="l">
+              <a:lnSpc>
+                <a:spcPct val="108000"/>
+              </a:lnSpc>
+              <a:buNone/>
+              <a:defRPr sz="1575" b="1">
+                <a:solidFill>
+                  <a:srgbClr val="071426"/>
+                </a:solidFill>
+                <a:latin typeface="Aptos Display"/>
+                <a:ea typeface="Aptos Display"/>
+                <a:cs typeface="Aptos Display"/>
+              </a:defRPr>
+            </a:pPr>
+            <a:r>
+              <a:rPr sz="1575" b="1">
+                <a:solidFill>
+                  <a:srgbClr val="071426"/>
+                </a:solidFill>
+                <a:latin typeface="Aptos Display"/>
+                <a:ea typeface="Aptos Display"/>
+                <a:cs typeface="Aptos Display"/>
+              </a:rPr>
+              <a:t>eng definierte Sonderzustände</a:t>
+            </a:r>
+          </a:p>
+        </p:txBody>
+      </p:sp>
+      <p:sp>
+        <p:nvSpPr>
+          <p:cNvPr id="21" name="">
+            <a:extLst xmlns:a="http://schemas.openxmlformats.org/drawingml/2006/main">
+              <a:ext uri="{FF2B5EF4-FFF2-40B4-BE49-F238E27FC236}">
+                <a16:creationId xmlns:a16="http://schemas.microsoft.com/office/drawing/2014/main" id="{20EA1CDC-B35B-4EC2-87CE-0A0DE86244BA}"/>
+              </a:ext>
+            </a:extLst>
+          </p:cNvPr>
+          <p:cNvSpPr>
+            <a:spLocks xmlns:a="http://schemas.openxmlformats.org/drawingml/2006/main" noGrp="1"/>
+          </p:cNvSpPr>
+          <p:nvPr/>
+        </p:nvSpPr>
+        <p:spPr>
+          <a:xfrm xmlns:a="http://schemas.openxmlformats.org/drawingml/2006/main">
+            <a:off x="609600" y="5753100"/>
+            <a:ext cx="10972800" cy="495300"/>
+          </a:xfrm>
+          <a:prstGeom xmlns:a="http://schemas.openxmlformats.org/drawingml/2006/main" prst="rect">
+            <a:avLst/>
+          </a:prstGeom>
+          <a:solidFill xmlns:a="http://schemas.openxmlformats.org/drawingml/2006/main">
+            <a:srgbClr val="FFF7E6"/>
+          </a:solidFill>
           <a:ln xmlns:a="http://schemas.openxmlformats.org/drawingml/2006/main" w="0">
             <a:noFill/>
             <a:prstDash val="solid"/>
@@ -14260,68 +14186,6 @@
           </a:bodyPr>
           <a:lstStyle xmlns:a="http://schemas.openxmlformats.org/drawingml/2006/main"/>
           <a:p xmlns:a="http://schemas.openxmlformats.org/drawingml/2006/main">
-            <a:pPr algn="l">
-              <a:lnSpc>
-                <a:spcPct val="108000"/>
-              </a:lnSpc>
-              <a:buNone/>
-              <a:defRPr sz="1275" b="0">
-                <a:solidFill>
-                  <a:srgbClr val="5F6B7A"/>
-                </a:solidFill>
-                <a:latin typeface="Aptos"/>
-                <a:ea typeface="Aptos"/>
-                <a:cs typeface="Aptos"/>
-              </a:defRPr>
-            </a:pPr>
-            <a:r>
-              <a:rPr sz="1275" b="0">
-                <a:solidFill>
-                  <a:srgbClr val="5F6B7A"/>
-                </a:solidFill>
-                <a:latin typeface="Aptos"/>
-                <a:ea typeface="Aptos"/>
-                <a:cs typeface="Aptos"/>
-              </a:rPr>
-              <a:t>eng definierte Sonderzustände</a:t>
-            </a:r>
-          </a:p>
-        </p:txBody>
-      </p:sp>
-      <p:sp>
-        <p:nvSpPr>
-          <p:cNvPr id="25" name="">
-            <a:extLst xmlns:a="http://schemas.openxmlformats.org/drawingml/2006/main">
-              <a:ext uri="{FF2B5EF4-FFF2-40B4-BE49-F238E27FC236}">
-                <a16:creationId xmlns:a16="http://schemas.microsoft.com/office/drawing/2014/main" id="{41E0CC8D-CF35-4C51-A7B7-18493AE861CE}"/>
-              </a:ext>
-            </a:extLst>
-          </p:cNvPr>
-          <p:cNvSpPr>
-            <a:spLocks xmlns:a="http://schemas.openxmlformats.org/drawingml/2006/main" noGrp="1"/>
-          </p:cNvSpPr>
-          <p:nvPr/>
-        </p:nvSpPr>
-        <p:spPr>
-          <a:xfrm xmlns:a="http://schemas.openxmlformats.org/drawingml/2006/main">
-            <a:off x="609600" y="5943600"/>
-            <a:ext cx="10972800" cy="342900"/>
-          </a:xfrm>
-          <a:prstGeom xmlns:a="http://schemas.openxmlformats.org/drawingml/2006/main" prst="rect">
-            <a:avLst/>
-          </a:prstGeom>
-          <a:noFill xmlns:a="http://schemas.openxmlformats.org/drawingml/2006/main"/>
-          <a:ln xmlns:a="http://schemas.openxmlformats.org/drawingml/2006/main" w="0">
-            <a:noFill/>
-            <a:prstDash val="solid"/>
-          </a:ln>
-        </p:spPr>
-        <p:txBody>
-          <a:bodyPr xmlns:a="http://schemas.openxmlformats.org/drawingml/2006/main" lIns="76200" tIns="57150" rIns="76200" bIns="57150" anchor="ctr">
-            <a:normAutofit fontScale="100000"/>
-          </a:bodyPr>
-          <a:lstStyle xmlns:a="http://schemas.openxmlformats.org/drawingml/2006/main"/>
-          <a:p xmlns:a="http://schemas.openxmlformats.org/drawingml/2006/main">
             <a:pPr algn="ctr">
               <a:lnSpc>
                 <a:spcPct val="108000"/>
@@ -14353,7 +14217,7 @@
     </p:spTree>
     <p:extLst>
       <p:ext uri="{BB962C8B-B14F-4D97-AF65-F5344CB8AC3E}">
-        <p14:creationId xmlns:p14="http://schemas.microsoft.com/office/powerpoint/2010/main" val="259103669"/>
+        <p14:creationId xmlns:p14="http://schemas.microsoft.com/office/powerpoint/2010/main" val="1398488400"/>
       </p:ext>
     </p:extLst>
   </p:cSld>
@@ -14384,7 +14248,7 @@
           <p:cNvPr id="25" name="">
             <a:extLst xmlns:a="http://schemas.openxmlformats.org/drawingml/2006/main">
               <a:ext uri="{FF2B5EF4-FFF2-40B4-BE49-F238E27FC236}">
-                <a16:creationId xmlns:a16="http://schemas.microsoft.com/office/drawing/2014/main" id="{E368FF01-F227-421B-AF42-AD1D2D6F928A}"/>
+                <a16:creationId xmlns:a16="http://schemas.microsoft.com/office/drawing/2014/main" id="{59777F69-ECFD-4652-BCE2-8F677FFAEB42}"/>
               </a:ext>
             </a:extLst>
           </p:cNvPr>
@@ -14415,7 +14279,7 @@
           <p:cNvPr id="2" name="">
             <a:extLst xmlns:a="http://schemas.openxmlformats.org/drawingml/2006/main">
               <a:ext uri="{FF2B5EF4-FFF2-40B4-BE49-F238E27FC236}">
-                <a16:creationId xmlns:a16="http://schemas.microsoft.com/office/drawing/2014/main" id="{8A5CF5C4-A8DA-4094-B781-06A96C450404}"/>
+                <a16:creationId xmlns:a16="http://schemas.microsoft.com/office/drawing/2014/main" id="{A6624991-FC1D-4798-9595-38F7F54A2A09}"/>
               </a:ext>
             </a:extLst>
           </p:cNvPr>
@@ -14477,7 +14341,7 @@
           <p:cNvPr id="3" name="">
             <a:extLst xmlns:a="http://schemas.openxmlformats.org/drawingml/2006/main">
               <a:ext uri="{FF2B5EF4-FFF2-40B4-BE49-F238E27FC236}">
-                <a16:creationId xmlns:a16="http://schemas.microsoft.com/office/drawing/2014/main" id="{EC891CEC-4A0A-4F4E-A099-AF449B85990C}"/>
+                <a16:creationId xmlns:a16="http://schemas.microsoft.com/office/drawing/2014/main" id="{0C78B5BA-1E93-430A-9112-772C48F55777}"/>
               </a:ext>
             </a:extLst>
           </p:cNvPr>
@@ -14511,7 +14375,7 @@
                 <a:spcPct val="108000"/>
               </a:lnSpc>
               <a:buNone/>
-              <a:defRPr sz="3150" b="1">
+              <a:defRPr sz="2550" b="1">
                 <a:solidFill>
                   <a:srgbClr val="071426"/>
                 </a:solidFill>
@@ -14521,7 +14385,7 @@
               </a:defRPr>
             </a:pPr>
             <a:r>
-              <a:rPr sz="3150" b="1">
+              <a:rPr sz="2550" b="1">
                 <a:solidFill>
                   <a:srgbClr val="071426"/>
                 </a:solidFill>
@@ -14539,7 +14403,7 @@
           <p:cNvPr id="4" name="">
             <a:extLst xmlns:a="http://schemas.openxmlformats.org/drawingml/2006/main">
               <a:ext uri="{FF2B5EF4-FFF2-40B4-BE49-F238E27FC236}">
-                <a16:creationId xmlns:a16="http://schemas.microsoft.com/office/drawing/2014/main" id="{29557A60-2BAC-47EA-B714-936893886EED}"/>
+                <a16:creationId xmlns:a16="http://schemas.microsoft.com/office/drawing/2014/main" id="{1E1A0D6E-C501-45FB-9D67-2895E71840D9}"/>
               </a:ext>
             </a:extLst>
           </p:cNvPr>
@@ -14574,7 +14438,7 @@
           <p:nvPr/>
         </p:nvPicPr>
         <p:blipFill>
-          <a:blip xmlns:r="http://schemas.openxmlformats.org/officeDocument/2006/relationships" xmlns:a="http://schemas.openxmlformats.org/drawingml/2006/main" r:embed="R76f465a5d1dd4db8"/>
+          <a:blip xmlns:r="http://schemas.openxmlformats.org/officeDocument/2006/relationships" xmlns:a="http://schemas.openxmlformats.org/drawingml/2006/main" r:embed="R0b249c7cc90541c4"/>
           <a:srcRect xmlns:a="http://schemas.openxmlformats.org/drawingml/2006/main" l="0" t="0" r="0" b="0"/>
           <a:stretch xmlns:a="http://schemas.openxmlformats.org/drawingml/2006/main">
             <a:fillRect l="0" t="0" r="0" b="0"/>
@@ -14595,7 +14459,7 @@
           <p:cNvPr id="6" name="">
             <a:extLst xmlns:a="http://schemas.openxmlformats.org/drawingml/2006/main">
               <a:ext uri="{FF2B5EF4-FFF2-40B4-BE49-F238E27FC236}">
-                <a16:creationId xmlns:a16="http://schemas.microsoft.com/office/drawing/2014/main" id="{5EAAB066-83AD-45B3-B4A9-DEF2EF726290}"/>
+                <a16:creationId xmlns:a16="http://schemas.microsoft.com/office/drawing/2014/main" id="{B8DB204B-1F0A-4AA2-811C-0CF9C9CD317E}"/>
               </a:ext>
             </a:extLst>
           </p:cNvPr>
@@ -14657,7 +14521,7 @@
           <p:cNvPr id="7" name="">
             <a:extLst xmlns:a="http://schemas.openxmlformats.org/drawingml/2006/main">
               <a:ext uri="{FF2B5EF4-FFF2-40B4-BE49-F238E27FC236}">
-                <a16:creationId xmlns:a16="http://schemas.microsoft.com/office/drawing/2014/main" id="{AB151796-0661-44F5-BC4A-93431D414ADE}"/>
+                <a16:creationId xmlns:a16="http://schemas.microsoft.com/office/drawing/2014/main" id="{8BA15E23-9F0A-41E3-B065-4982FB313835}"/>
               </a:ext>
             </a:extLst>
           </p:cNvPr>
@@ -14719,7 +14583,7 @@
           <p:cNvPr id="8" name="">
             <a:extLst xmlns:a="http://schemas.openxmlformats.org/drawingml/2006/main">
               <a:ext uri="{FF2B5EF4-FFF2-40B4-BE49-F238E27FC236}">
-                <a16:creationId xmlns:a16="http://schemas.microsoft.com/office/drawing/2014/main" id="{676EAE98-408F-4ABA-AD5B-123A0C298933}"/>
+                <a16:creationId xmlns:a16="http://schemas.microsoft.com/office/drawing/2014/main" id="{210FA9E2-27C6-4C95-B96C-A9458CB56F3B}"/>
               </a:ext>
             </a:extLst>
           </p:cNvPr>
@@ -14731,11 +14595,11 @@
         <p:spPr>
           <a:xfrm xmlns:a="http://schemas.openxmlformats.org/drawingml/2006/main">
             <a:off x="609600" y="1952625"/>
-            <a:ext cx="3143250" cy="3619500"/>
+            <a:ext cx="2857500" cy="3333750"/>
           </a:xfrm>
           <a:prstGeom xmlns:a="http://schemas.openxmlformats.org/drawingml/2006/main" prst="roundRect">
             <a:avLst>
-              <a:gd name="adj" fmla="val 6061"/>
+              <a:gd name="adj" fmla="val 6667"/>
             </a:avLst>
           </a:prstGeom>
           <a:solidFill xmlns:a="http://schemas.openxmlformats.org/drawingml/2006/main">
@@ -14752,19 +14616,19 @@
           <p:cNvPr id="9" name="">
             <a:extLst xmlns:a="http://schemas.openxmlformats.org/drawingml/2006/main">
               <a:ext uri="{FF2B5EF4-FFF2-40B4-BE49-F238E27FC236}">
-                <a16:creationId xmlns:a16="http://schemas.microsoft.com/office/drawing/2014/main" id="{7E321BF9-AFEF-4BB7-9C52-E0FB4094314D}"/>
-              </a:ext>
-            </a:extLst>
-          </p:cNvPr>
-          <p:cNvSpPr>
-            <a:spLocks xmlns:a="http://schemas.openxmlformats.org/drawingml/2006/main" noGrp="1"/>
-          </p:cNvSpPr>
-          <p:nvPr/>
-        </p:nvSpPr>
-        <p:spPr>
-          <a:xfrm xmlns:a="http://schemas.openxmlformats.org/drawingml/2006/main">
-            <a:off x="895350" y="2400300"/>
-            <a:ext cx="2571750" cy="781050"/>
+                <a16:creationId xmlns:a16="http://schemas.microsoft.com/office/drawing/2014/main" id="{CCA0DD16-4A5B-4200-B2C0-DFEAFBC19CB4}"/>
+              </a:ext>
+            </a:extLst>
+          </p:cNvPr>
+          <p:cNvSpPr>
+            <a:spLocks xmlns:a="http://schemas.openxmlformats.org/drawingml/2006/main" noGrp="1"/>
+          </p:cNvSpPr>
+          <p:nvPr/>
+        </p:nvSpPr>
+        <p:spPr>
+          <a:xfrm xmlns:a="http://schemas.openxmlformats.org/drawingml/2006/main">
+            <a:off x="838200" y="2324100"/>
+            <a:ext cx="2400300" cy="685800"/>
           </a:xfrm>
           <a:prstGeom xmlns:a="http://schemas.openxmlformats.org/drawingml/2006/main" prst="rect">
             <a:avLst/>
@@ -14786,7 +14650,7 @@
                 <a:spcPct val="108000"/>
               </a:lnSpc>
               <a:buNone/>
-              <a:defRPr sz="3750" b="1">
+              <a:defRPr sz="3450" b="1">
                 <a:solidFill>
                   <a:srgbClr val="F0C873"/>
                 </a:solidFill>
@@ -14796,7 +14660,7 @@
               </a:defRPr>
             </a:pPr>
             <a:r>
-              <a:rPr sz="3750" b="1">
+              <a:rPr sz="3450" b="1">
                 <a:solidFill>
                   <a:srgbClr val="F0C873"/>
                 </a:solidFill>
@@ -14814,19 +14678,19 @@
           <p:cNvPr id="10" name="">
             <a:extLst xmlns:a="http://schemas.openxmlformats.org/drawingml/2006/main">
               <a:ext uri="{FF2B5EF4-FFF2-40B4-BE49-F238E27FC236}">
-                <a16:creationId xmlns:a16="http://schemas.microsoft.com/office/drawing/2014/main" id="{E040EC99-A550-41DF-9A40-D542D29BF0D8}"/>
-              </a:ext>
-            </a:extLst>
-          </p:cNvPr>
-          <p:cNvSpPr>
-            <a:spLocks xmlns:a="http://schemas.openxmlformats.org/drawingml/2006/main" noGrp="1"/>
-          </p:cNvSpPr>
-          <p:nvPr/>
-        </p:nvSpPr>
-        <p:spPr>
-          <a:xfrm xmlns:a="http://schemas.openxmlformats.org/drawingml/2006/main">
-            <a:off x="895350" y="3333750"/>
-            <a:ext cx="2571750" cy="1066800"/>
+                <a16:creationId xmlns:a16="http://schemas.microsoft.com/office/drawing/2014/main" id="{16BE321E-C6E2-4612-888C-34D298668198}"/>
+              </a:ext>
+            </a:extLst>
+          </p:cNvPr>
+          <p:cNvSpPr>
+            <a:spLocks xmlns:a="http://schemas.openxmlformats.org/drawingml/2006/main" noGrp="1"/>
+          </p:cNvSpPr>
+          <p:nvPr/>
+        </p:nvSpPr>
+        <p:spPr>
+          <a:xfrm xmlns:a="http://schemas.openxmlformats.org/drawingml/2006/main">
+            <a:off x="838200" y="3143250"/>
+            <a:ext cx="2400300" cy="952500"/>
           </a:xfrm>
           <a:prstGeom xmlns:a="http://schemas.openxmlformats.org/drawingml/2006/main" prst="rect">
             <a:avLst/>
@@ -14848,7 +14712,7 @@
                 <a:spcPct val="108000"/>
               </a:lnSpc>
               <a:buNone/>
-              <a:defRPr sz="1575" b="1">
+              <a:defRPr sz="1500" b="1">
                 <a:solidFill>
                   <a:srgbClr val="FFFFFF"/>
                 </a:solidFill>
@@ -14858,7 +14722,7 @@
               </a:defRPr>
             </a:pPr>
             <a:r>
-              <a:rPr sz="1575" b="1">
+              <a:rPr sz="1500" b="1">
                 <a:solidFill>
                   <a:srgbClr val="FFFFFF"/>
                 </a:solidFill>
@@ -14875,7 +14739,7 @@
                 <a:spcPct val="108000"/>
               </a:lnSpc>
               <a:buNone/>
-              <a:defRPr sz="1575" b="1">
+              <a:defRPr sz="1500" b="1">
                 <a:solidFill>
                   <a:srgbClr val="FFFFFF"/>
                 </a:solidFill>
@@ -14885,7 +14749,7 @@
               </a:defRPr>
             </a:pPr>
             <a:r>
-              <a:rPr sz="1575" b="1">
+              <a:rPr sz="1500" b="1">
                 <a:solidFill>
                   <a:srgbClr val="FFFFFF"/>
                 </a:solidFill>
@@ -14903,19 +14767,19 @@
           <p:cNvPr id="11" name="">
             <a:extLst xmlns:a="http://schemas.openxmlformats.org/drawingml/2006/main">
               <a:ext uri="{FF2B5EF4-FFF2-40B4-BE49-F238E27FC236}">
-                <a16:creationId xmlns:a16="http://schemas.microsoft.com/office/drawing/2014/main" id="{EDBBE469-F06B-4860-A472-2F1142309379}"/>
-              </a:ext>
-            </a:extLst>
-          </p:cNvPr>
-          <p:cNvSpPr>
-            <a:spLocks xmlns:a="http://schemas.openxmlformats.org/drawingml/2006/main" noGrp="1"/>
-          </p:cNvSpPr>
-          <p:nvPr/>
-        </p:nvSpPr>
-        <p:spPr>
-          <a:xfrm xmlns:a="http://schemas.openxmlformats.org/drawingml/2006/main">
-            <a:off x="895350" y="4667250"/>
-            <a:ext cx="2571750" cy="571500"/>
+                <a16:creationId xmlns:a16="http://schemas.microsoft.com/office/drawing/2014/main" id="{6C725F24-8A31-43F3-9A06-DF3E25BB2C63}"/>
+              </a:ext>
+            </a:extLst>
+          </p:cNvPr>
+          <p:cNvSpPr>
+            <a:spLocks xmlns:a="http://schemas.openxmlformats.org/drawingml/2006/main" noGrp="1"/>
+          </p:cNvSpPr>
+          <p:nvPr/>
+        </p:nvSpPr>
+        <p:spPr>
+          <a:xfrm xmlns:a="http://schemas.openxmlformats.org/drawingml/2006/main">
+            <a:off x="838200" y="4419600"/>
+            <a:ext cx="2400300" cy="552450"/>
           </a:xfrm>
           <a:prstGeom xmlns:a="http://schemas.openxmlformats.org/drawingml/2006/main" prst="rect">
             <a:avLst/>
@@ -14992,23 +14856,23 @@
           <p:cNvPr id="12" name="">
             <a:extLst xmlns:a="http://schemas.openxmlformats.org/drawingml/2006/main">
               <a:ext uri="{FF2B5EF4-FFF2-40B4-BE49-F238E27FC236}">
-                <a16:creationId xmlns:a16="http://schemas.microsoft.com/office/drawing/2014/main" id="{F504B420-F8F7-480D-B7AB-DD4255B8E009}"/>
-              </a:ext>
-            </a:extLst>
-          </p:cNvPr>
-          <p:cNvSpPr>
-            <a:spLocks xmlns:a="http://schemas.openxmlformats.org/drawingml/2006/main" noGrp="1"/>
-          </p:cNvSpPr>
-          <p:nvPr/>
-        </p:nvSpPr>
-        <p:spPr>
-          <a:xfrm xmlns:a="http://schemas.openxmlformats.org/drawingml/2006/main">
-            <a:off x="609600" y="1885950"/>
-            <a:ext cx="5400675" cy="1962150"/>
+                <a16:creationId xmlns:a16="http://schemas.microsoft.com/office/drawing/2014/main" id="{53D85FD3-F4F7-4285-AA7F-3141BA8033FA}"/>
+              </a:ext>
+            </a:extLst>
+          </p:cNvPr>
+          <p:cNvSpPr>
+            <a:spLocks xmlns:a="http://schemas.openxmlformats.org/drawingml/2006/main" noGrp="1"/>
+          </p:cNvSpPr>
+          <p:nvPr/>
+        </p:nvSpPr>
+        <p:spPr>
+          <a:xfrm xmlns:a="http://schemas.openxmlformats.org/drawingml/2006/main">
+            <a:off x="3714750" y="1952625"/>
+            <a:ext cx="3848100" cy="1581150"/>
           </a:xfrm>
           <a:prstGeom xmlns:a="http://schemas.openxmlformats.org/drawingml/2006/main" prst="roundRect">
             <a:avLst>
-              <a:gd name="adj" fmla="val 8738"/>
+              <a:gd name="adj" fmla="val 10843"/>
             </a:avLst>
           </a:prstGeom>
           <a:solidFill xmlns:a="http://schemas.openxmlformats.org/drawingml/2006/main">
@@ -15027,19 +14891,19 @@
           <p:cNvPr id="13" name="">
             <a:extLst xmlns:a="http://schemas.openxmlformats.org/drawingml/2006/main">
               <a:ext uri="{FF2B5EF4-FFF2-40B4-BE49-F238E27FC236}">
-                <a16:creationId xmlns:a16="http://schemas.microsoft.com/office/drawing/2014/main" id="{EE6EC305-8E31-4D47-B1CE-2D88E5DD94FD}"/>
-              </a:ext>
-            </a:extLst>
-          </p:cNvPr>
-          <p:cNvSpPr>
-            <a:spLocks xmlns:a="http://schemas.openxmlformats.org/drawingml/2006/main" noGrp="1"/>
-          </p:cNvSpPr>
-          <p:nvPr/>
-        </p:nvSpPr>
-        <p:spPr>
-          <a:xfrm xmlns:a="http://schemas.openxmlformats.org/drawingml/2006/main">
-            <a:off x="609600" y="1885950"/>
-            <a:ext cx="66675" cy="1962150"/>
+                <a16:creationId xmlns:a16="http://schemas.microsoft.com/office/drawing/2014/main" id="{3191B59D-BD04-441A-87C0-E92CE30D0AC9}"/>
+              </a:ext>
+            </a:extLst>
+          </p:cNvPr>
+          <p:cNvSpPr>
+            <a:spLocks xmlns:a="http://schemas.openxmlformats.org/drawingml/2006/main" noGrp="1"/>
+          </p:cNvSpPr>
+          <p:nvPr/>
+        </p:nvSpPr>
+        <p:spPr>
+          <a:xfrm xmlns:a="http://schemas.openxmlformats.org/drawingml/2006/main">
+            <a:off x="3714750" y="1952625"/>
+            <a:ext cx="66675" cy="1581150"/>
           </a:xfrm>
           <a:prstGeom xmlns:a="http://schemas.openxmlformats.org/drawingml/2006/main" prst="rect">
             <a:avLst/>
@@ -15058,19 +14922,19 @@
           <p:cNvPr id="14" name="">
             <a:extLst xmlns:a="http://schemas.openxmlformats.org/drawingml/2006/main">
               <a:ext uri="{FF2B5EF4-FFF2-40B4-BE49-F238E27FC236}">
-                <a16:creationId xmlns:a16="http://schemas.microsoft.com/office/drawing/2014/main" id="{15167C27-220F-4A38-9762-4C1CB2F2ABAF}"/>
-              </a:ext>
-            </a:extLst>
-          </p:cNvPr>
-          <p:cNvSpPr>
-            <a:spLocks xmlns:a="http://schemas.openxmlformats.org/drawingml/2006/main" noGrp="1"/>
-          </p:cNvSpPr>
-          <p:nvPr/>
-        </p:nvSpPr>
-        <p:spPr>
-          <a:xfrm xmlns:a="http://schemas.openxmlformats.org/drawingml/2006/main">
-            <a:off x="819150" y="2038350"/>
-            <a:ext cx="5038725" cy="419100"/>
+                <a16:creationId xmlns:a16="http://schemas.microsoft.com/office/drawing/2014/main" id="{8A22E593-35C1-43E2-B129-7259D6F439CB}"/>
+              </a:ext>
+            </a:extLst>
+          </p:cNvPr>
+          <p:cNvSpPr>
+            <a:spLocks xmlns:a="http://schemas.openxmlformats.org/drawingml/2006/main" noGrp="1"/>
+          </p:cNvSpPr>
+          <p:nvPr/>
+        </p:nvSpPr>
+        <p:spPr>
+          <a:xfrm xmlns:a="http://schemas.openxmlformats.org/drawingml/2006/main">
+            <a:off x="3924300" y="2105025"/>
+            <a:ext cx="3486150" cy="419100"/>
           </a:xfrm>
           <a:prstGeom xmlns:a="http://schemas.openxmlformats.org/drawingml/2006/main" prst="rect">
             <a:avLst/>
@@ -15083,7 +14947,7 @@
         </p:spPr>
         <p:txBody>
           <a:bodyPr xmlns:a="http://schemas.openxmlformats.org/drawingml/2006/main" lIns="76200" tIns="57150" rIns="76200" bIns="57150" anchor="ctr">
-            <a:normAutofit fontScale="92539"/>
+            <a:normAutofit fontScale="63198"/>
           </a:bodyPr>
           <a:lstStyle xmlns:a="http://schemas.openxmlformats.org/drawingml/2006/main"/>
           <a:p xmlns:a="http://schemas.openxmlformats.org/drawingml/2006/main">
@@ -15120,23 +14984,23 @@
           <p:cNvPr id="15" name="">
             <a:extLst xmlns:a="http://schemas.openxmlformats.org/drawingml/2006/main">
               <a:ext uri="{FF2B5EF4-FFF2-40B4-BE49-F238E27FC236}">
-                <a16:creationId xmlns:a16="http://schemas.microsoft.com/office/drawing/2014/main" id="{B20A600F-B91E-43BB-BAAC-687E0D667142}"/>
-              </a:ext>
-            </a:extLst>
-          </p:cNvPr>
-          <p:cNvSpPr>
-            <a:spLocks xmlns:a="http://schemas.openxmlformats.org/drawingml/2006/main" noGrp="1"/>
-          </p:cNvSpPr>
-          <p:nvPr/>
-        </p:nvSpPr>
-        <p:spPr>
-          <a:xfrm xmlns:a="http://schemas.openxmlformats.org/drawingml/2006/main">
-            <a:off x="6181725" y="1885950"/>
-            <a:ext cx="5400675" cy="1962150"/>
+                <a16:creationId xmlns:a16="http://schemas.microsoft.com/office/drawing/2014/main" id="{B28DFA0A-D8A1-44C0-9D2F-625B42515B40}"/>
+              </a:ext>
+            </a:extLst>
+          </p:cNvPr>
+          <p:cNvSpPr>
+            <a:spLocks xmlns:a="http://schemas.openxmlformats.org/drawingml/2006/main" noGrp="1"/>
+          </p:cNvSpPr>
+          <p:nvPr/>
+        </p:nvSpPr>
+        <p:spPr>
+          <a:xfrm xmlns:a="http://schemas.openxmlformats.org/drawingml/2006/main">
+            <a:off x="7734300" y="1952625"/>
+            <a:ext cx="3848100" cy="1581150"/>
           </a:xfrm>
           <a:prstGeom xmlns:a="http://schemas.openxmlformats.org/drawingml/2006/main" prst="roundRect">
             <a:avLst>
-              <a:gd name="adj" fmla="val 8738"/>
+              <a:gd name="adj" fmla="val 10843"/>
             </a:avLst>
           </a:prstGeom>
           <a:solidFill xmlns:a="http://schemas.openxmlformats.org/drawingml/2006/main">
@@ -15155,19 +15019,19 @@
           <p:cNvPr id="16" name="">
             <a:extLst xmlns:a="http://schemas.openxmlformats.org/drawingml/2006/main">
               <a:ext uri="{FF2B5EF4-FFF2-40B4-BE49-F238E27FC236}">
-                <a16:creationId xmlns:a16="http://schemas.microsoft.com/office/drawing/2014/main" id="{8D398470-6702-4CE5-A924-FF271EBCCFFF}"/>
-              </a:ext>
-            </a:extLst>
-          </p:cNvPr>
-          <p:cNvSpPr>
-            <a:spLocks xmlns:a="http://schemas.openxmlformats.org/drawingml/2006/main" noGrp="1"/>
-          </p:cNvSpPr>
-          <p:nvPr/>
-        </p:nvSpPr>
-        <p:spPr>
-          <a:xfrm xmlns:a="http://schemas.openxmlformats.org/drawingml/2006/main">
-            <a:off x="6181725" y="1885950"/>
-            <a:ext cx="66675" cy="1962150"/>
+                <a16:creationId xmlns:a16="http://schemas.microsoft.com/office/drawing/2014/main" id="{B538BD91-898F-4CBC-A6F6-F2E7896438C0}"/>
+              </a:ext>
+            </a:extLst>
+          </p:cNvPr>
+          <p:cNvSpPr>
+            <a:spLocks xmlns:a="http://schemas.openxmlformats.org/drawingml/2006/main" noGrp="1"/>
+          </p:cNvSpPr>
+          <p:nvPr/>
+        </p:nvSpPr>
+        <p:spPr>
+          <a:xfrm xmlns:a="http://schemas.openxmlformats.org/drawingml/2006/main">
+            <a:off x="7734300" y="1952625"/>
+            <a:ext cx="66675" cy="1581150"/>
           </a:xfrm>
           <a:prstGeom xmlns:a="http://schemas.openxmlformats.org/drawingml/2006/main" prst="rect">
             <a:avLst/>
@@ -15186,19 +15050,19 @@
           <p:cNvPr id="17" name="">
             <a:extLst xmlns:a="http://schemas.openxmlformats.org/drawingml/2006/main">
               <a:ext uri="{FF2B5EF4-FFF2-40B4-BE49-F238E27FC236}">
-                <a16:creationId xmlns:a16="http://schemas.microsoft.com/office/drawing/2014/main" id="{1F0266AA-AD63-419C-9FCF-5C6B8FC3C322}"/>
-              </a:ext>
-            </a:extLst>
-          </p:cNvPr>
-          <p:cNvSpPr>
-            <a:spLocks xmlns:a="http://schemas.openxmlformats.org/drawingml/2006/main" noGrp="1"/>
-          </p:cNvSpPr>
-          <p:nvPr/>
-        </p:nvSpPr>
-        <p:spPr>
-          <a:xfrm xmlns:a="http://schemas.openxmlformats.org/drawingml/2006/main">
-            <a:off x="6391275" y="2038350"/>
-            <a:ext cx="5038725" cy="419100"/>
+                <a16:creationId xmlns:a16="http://schemas.microsoft.com/office/drawing/2014/main" id="{A52C5070-788E-4479-B571-3E85D56D6D24}"/>
+              </a:ext>
+            </a:extLst>
+          </p:cNvPr>
+          <p:cNvSpPr>
+            <a:spLocks xmlns:a="http://schemas.openxmlformats.org/drawingml/2006/main" noGrp="1"/>
+          </p:cNvSpPr>
+          <p:nvPr/>
+        </p:nvSpPr>
+        <p:spPr>
+          <a:xfrm xmlns:a="http://schemas.openxmlformats.org/drawingml/2006/main">
+            <a:off x="7943850" y="2105025"/>
+            <a:ext cx="3486150" cy="419100"/>
           </a:xfrm>
           <a:prstGeom xmlns:a="http://schemas.openxmlformats.org/drawingml/2006/main" prst="rect">
             <a:avLst/>
@@ -15211,7 +15075,7 @@
         </p:spPr>
         <p:txBody>
           <a:bodyPr xmlns:a="http://schemas.openxmlformats.org/drawingml/2006/main" lIns="76200" tIns="57150" rIns="76200" bIns="57150" anchor="ctr">
-            <a:normAutofit fontScale="100000"/>
+            <a:normAutofit fontScale="78816"/>
           </a:bodyPr>
           <a:lstStyle xmlns:a="http://schemas.openxmlformats.org/drawingml/2006/main"/>
           <a:p xmlns:a="http://schemas.openxmlformats.org/drawingml/2006/main">
@@ -15248,23 +15112,23 @@
           <p:cNvPr id="18" name="">
             <a:extLst xmlns:a="http://schemas.openxmlformats.org/drawingml/2006/main">
               <a:ext uri="{FF2B5EF4-FFF2-40B4-BE49-F238E27FC236}">
-                <a16:creationId xmlns:a16="http://schemas.microsoft.com/office/drawing/2014/main" id="{2BAFB0B0-89F9-43D5-A1F9-3D1927E55711}"/>
-              </a:ext>
-            </a:extLst>
-          </p:cNvPr>
-          <p:cNvSpPr>
-            <a:spLocks xmlns:a="http://schemas.openxmlformats.org/drawingml/2006/main" noGrp="1"/>
-          </p:cNvSpPr>
-          <p:nvPr/>
-        </p:nvSpPr>
-        <p:spPr>
-          <a:xfrm xmlns:a="http://schemas.openxmlformats.org/drawingml/2006/main">
-            <a:off x="609600" y="4019550"/>
-            <a:ext cx="5400675" cy="1962150"/>
+                <a16:creationId xmlns:a16="http://schemas.microsoft.com/office/drawing/2014/main" id="{F309FF4A-BFCB-4F11-90B1-A85A3187C531}"/>
+              </a:ext>
+            </a:extLst>
+          </p:cNvPr>
+          <p:cNvSpPr>
+            <a:spLocks xmlns:a="http://schemas.openxmlformats.org/drawingml/2006/main" noGrp="1"/>
+          </p:cNvSpPr>
+          <p:nvPr/>
+        </p:nvSpPr>
+        <p:spPr>
+          <a:xfrm xmlns:a="http://schemas.openxmlformats.org/drawingml/2006/main">
+            <a:off x="3714750" y="3705225"/>
+            <a:ext cx="3848100" cy="1581150"/>
           </a:xfrm>
           <a:prstGeom xmlns:a="http://schemas.openxmlformats.org/drawingml/2006/main" prst="roundRect">
             <a:avLst>
-              <a:gd name="adj" fmla="val 8738"/>
+              <a:gd name="adj" fmla="val 10843"/>
             </a:avLst>
           </a:prstGeom>
           <a:solidFill xmlns:a="http://schemas.openxmlformats.org/drawingml/2006/main">
@@ -15283,19 +15147,19 @@
           <p:cNvPr id="19" name="">
             <a:extLst xmlns:a="http://schemas.openxmlformats.org/drawingml/2006/main">
               <a:ext uri="{FF2B5EF4-FFF2-40B4-BE49-F238E27FC236}">
-                <a16:creationId xmlns:a16="http://schemas.microsoft.com/office/drawing/2014/main" id="{60D6E185-B50F-4725-BEE6-B7FA60E6DAC2}"/>
-              </a:ext>
-            </a:extLst>
-          </p:cNvPr>
-          <p:cNvSpPr>
-            <a:spLocks xmlns:a="http://schemas.openxmlformats.org/drawingml/2006/main" noGrp="1"/>
-          </p:cNvSpPr>
-          <p:nvPr/>
-        </p:nvSpPr>
-        <p:spPr>
-          <a:xfrm xmlns:a="http://schemas.openxmlformats.org/drawingml/2006/main">
-            <a:off x="609600" y="4019550"/>
-            <a:ext cx="66675" cy="1962150"/>
+                <a16:creationId xmlns:a16="http://schemas.microsoft.com/office/drawing/2014/main" id="{9B63AB78-F446-430A-A4F7-18501EB0CDCC}"/>
+              </a:ext>
+            </a:extLst>
+          </p:cNvPr>
+          <p:cNvSpPr>
+            <a:spLocks xmlns:a="http://schemas.openxmlformats.org/drawingml/2006/main" noGrp="1"/>
+          </p:cNvSpPr>
+          <p:nvPr/>
+        </p:nvSpPr>
+        <p:spPr>
+          <a:xfrm xmlns:a="http://schemas.openxmlformats.org/drawingml/2006/main">
+            <a:off x="3714750" y="3705225"/>
+            <a:ext cx="66675" cy="1581150"/>
           </a:xfrm>
           <a:prstGeom xmlns:a="http://schemas.openxmlformats.org/drawingml/2006/main" prst="rect">
             <a:avLst/>
@@ -15314,19 +15178,19 @@
           <p:cNvPr id="20" name="">
             <a:extLst xmlns:a="http://schemas.openxmlformats.org/drawingml/2006/main">
               <a:ext uri="{FF2B5EF4-FFF2-40B4-BE49-F238E27FC236}">
-                <a16:creationId xmlns:a16="http://schemas.microsoft.com/office/drawing/2014/main" id="{1F8CB47D-7B8B-4AAF-BBFF-169A3799D7D6}"/>
-              </a:ext>
-            </a:extLst>
-          </p:cNvPr>
-          <p:cNvSpPr>
-            <a:spLocks xmlns:a="http://schemas.openxmlformats.org/drawingml/2006/main" noGrp="1"/>
-          </p:cNvSpPr>
-          <p:nvPr/>
-        </p:nvSpPr>
-        <p:spPr>
-          <a:xfrm xmlns:a="http://schemas.openxmlformats.org/drawingml/2006/main">
-            <a:off x="819150" y="4171950"/>
-            <a:ext cx="5038725" cy="419100"/>
+                <a16:creationId xmlns:a16="http://schemas.microsoft.com/office/drawing/2014/main" id="{94D030D0-C1F5-42F7-A280-D115B7C0FC5C}"/>
+              </a:ext>
+            </a:extLst>
+          </p:cNvPr>
+          <p:cNvSpPr>
+            <a:spLocks xmlns:a="http://schemas.openxmlformats.org/drawingml/2006/main" noGrp="1"/>
+          </p:cNvSpPr>
+          <p:nvPr/>
+        </p:nvSpPr>
+        <p:spPr>
+          <a:xfrm xmlns:a="http://schemas.openxmlformats.org/drawingml/2006/main">
+            <a:off x="3924300" y="3857625"/>
+            <a:ext cx="3486150" cy="419100"/>
           </a:xfrm>
           <a:prstGeom xmlns:a="http://schemas.openxmlformats.org/drawingml/2006/main" prst="rect">
             <a:avLst/>
@@ -15339,7 +15203,7 @@
         </p:spPr>
         <p:txBody>
           <a:bodyPr xmlns:a="http://schemas.openxmlformats.org/drawingml/2006/main" lIns="76200" tIns="57150" rIns="76200" bIns="57150" anchor="ctr">
-            <a:normAutofit fontScale="100000"/>
+            <a:normAutofit fontScale="82352"/>
           </a:bodyPr>
           <a:lstStyle xmlns:a="http://schemas.openxmlformats.org/drawingml/2006/main"/>
           <a:p xmlns:a="http://schemas.openxmlformats.org/drawingml/2006/main">
@@ -15376,23 +15240,23 @@
           <p:cNvPr id="21" name="">
             <a:extLst xmlns:a="http://schemas.openxmlformats.org/drawingml/2006/main">
               <a:ext uri="{FF2B5EF4-FFF2-40B4-BE49-F238E27FC236}">
-                <a16:creationId xmlns:a16="http://schemas.microsoft.com/office/drawing/2014/main" id="{AE65961E-15EF-4EDB-8B5F-BC13B743C4B2}"/>
-              </a:ext>
-            </a:extLst>
-          </p:cNvPr>
-          <p:cNvSpPr>
-            <a:spLocks xmlns:a="http://schemas.openxmlformats.org/drawingml/2006/main" noGrp="1"/>
-          </p:cNvSpPr>
-          <p:nvPr/>
-        </p:nvSpPr>
-        <p:spPr>
-          <a:xfrm xmlns:a="http://schemas.openxmlformats.org/drawingml/2006/main">
-            <a:off x="6181725" y="4019550"/>
-            <a:ext cx="5400675" cy="1962150"/>
+                <a16:creationId xmlns:a16="http://schemas.microsoft.com/office/drawing/2014/main" id="{3B85A068-EE55-4084-8193-E3508152FFDF}"/>
+              </a:ext>
+            </a:extLst>
+          </p:cNvPr>
+          <p:cNvSpPr>
+            <a:spLocks xmlns:a="http://schemas.openxmlformats.org/drawingml/2006/main" noGrp="1"/>
+          </p:cNvSpPr>
+          <p:nvPr/>
+        </p:nvSpPr>
+        <p:spPr>
+          <a:xfrm xmlns:a="http://schemas.openxmlformats.org/drawingml/2006/main">
+            <a:off x="7734300" y="3705225"/>
+            <a:ext cx="3848100" cy="1581150"/>
           </a:xfrm>
           <a:prstGeom xmlns:a="http://schemas.openxmlformats.org/drawingml/2006/main" prst="roundRect">
             <a:avLst>
-              <a:gd name="adj" fmla="val 8738"/>
+              <a:gd name="adj" fmla="val 10843"/>
             </a:avLst>
           </a:prstGeom>
           <a:solidFill xmlns:a="http://schemas.openxmlformats.org/drawingml/2006/main">
@@ -15411,19 +15275,19 @@
           <p:cNvPr id="22" name="">
             <a:extLst xmlns:a="http://schemas.openxmlformats.org/drawingml/2006/main">
               <a:ext uri="{FF2B5EF4-FFF2-40B4-BE49-F238E27FC236}">
-                <a16:creationId xmlns:a16="http://schemas.microsoft.com/office/drawing/2014/main" id="{012C0DFA-9EB7-4E79-8061-3A1488C41061}"/>
-              </a:ext>
-            </a:extLst>
-          </p:cNvPr>
-          <p:cNvSpPr>
-            <a:spLocks xmlns:a="http://schemas.openxmlformats.org/drawingml/2006/main" noGrp="1"/>
-          </p:cNvSpPr>
-          <p:nvPr/>
-        </p:nvSpPr>
-        <p:spPr>
-          <a:xfrm xmlns:a="http://schemas.openxmlformats.org/drawingml/2006/main">
-            <a:off x="6181725" y="4019550"/>
-            <a:ext cx="66675" cy="1962150"/>
+                <a16:creationId xmlns:a16="http://schemas.microsoft.com/office/drawing/2014/main" id="{99C0D85E-628D-4272-9DC0-DE35DA9D6BFC}"/>
+              </a:ext>
+            </a:extLst>
+          </p:cNvPr>
+          <p:cNvSpPr>
+            <a:spLocks xmlns:a="http://schemas.openxmlformats.org/drawingml/2006/main" noGrp="1"/>
+          </p:cNvSpPr>
+          <p:nvPr/>
+        </p:nvSpPr>
+        <p:spPr>
+          <a:xfrm xmlns:a="http://schemas.openxmlformats.org/drawingml/2006/main">
+            <a:off x="7734300" y="3705225"/>
+            <a:ext cx="66675" cy="1581150"/>
           </a:xfrm>
           <a:prstGeom xmlns:a="http://schemas.openxmlformats.org/drawingml/2006/main" prst="rect">
             <a:avLst/>
@@ -15442,19 +15306,19 @@
           <p:cNvPr id="23" name="">
             <a:extLst xmlns:a="http://schemas.openxmlformats.org/drawingml/2006/main">
               <a:ext uri="{FF2B5EF4-FFF2-40B4-BE49-F238E27FC236}">
-                <a16:creationId xmlns:a16="http://schemas.microsoft.com/office/drawing/2014/main" id="{BE4168BD-730F-405E-8BBE-31E90FD38D4A}"/>
-              </a:ext>
-            </a:extLst>
-          </p:cNvPr>
-          <p:cNvSpPr>
-            <a:spLocks xmlns:a="http://schemas.openxmlformats.org/drawingml/2006/main" noGrp="1"/>
-          </p:cNvSpPr>
-          <p:nvPr/>
-        </p:nvSpPr>
-        <p:spPr>
-          <a:xfrm xmlns:a="http://schemas.openxmlformats.org/drawingml/2006/main">
-            <a:off x="6391275" y="4171950"/>
-            <a:ext cx="5038725" cy="419100"/>
+                <a16:creationId xmlns:a16="http://schemas.microsoft.com/office/drawing/2014/main" id="{91B5E738-6C1B-4277-BCB3-1FB65D073A2E}"/>
+              </a:ext>
+            </a:extLst>
+          </p:cNvPr>
+          <p:cNvSpPr>
+            <a:spLocks xmlns:a="http://schemas.openxmlformats.org/drawingml/2006/main" noGrp="1"/>
+          </p:cNvSpPr>
+          <p:nvPr/>
+        </p:nvSpPr>
+        <p:spPr>
+          <a:xfrm xmlns:a="http://schemas.openxmlformats.org/drawingml/2006/main">
+            <a:off x="7943850" y="3857625"/>
+            <a:ext cx="3486150" cy="419100"/>
           </a:xfrm>
           <a:prstGeom xmlns:a="http://schemas.openxmlformats.org/drawingml/2006/main" prst="rect">
             <a:avLst/>
@@ -15467,7 +15331,7 @@
         </p:spPr>
         <p:txBody>
           <a:bodyPr xmlns:a="http://schemas.openxmlformats.org/drawingml/2006/main" lIns="76200" tIns="57150" rIns="76200" bIns="57150" anchor="ctr">
-            <a:normAutofit fontScale="81189"/>
+            <a:normAutofit fontScale="56117"/>
           </a:bodyPr>
           <a:lstStyle xmlns:a="http://schemas.openxmlformats.org/drawingml/2006/main"/>
           <a:p xmlns:a="http://schemas.openxmlformats.org/drawingml/2006/main">
@@ -15504,19 +15368,19 @@
           <p:cNvPr id="24" name="">
             <a:extLst xmlns:a="http://schemas.openxmlformats.org/drawingml/2006/main">
               <a:ext uri="{FF2B5EF4-FFF2-40B4-BE49-F238E27FC236}">
-                <a16:creationId xmlns:a16="http://schemas.microsoft.com/office/drawing/2014/main" id="{ED00EFD3-1A78-44AC-8835-4D915D1FDF28}"/>
-              </a:ext>
-            </a:extLst>
-          </p:cNvPr>
-          <p:cNvSpPr>
-            <a:spLocks xmlns:a="http://schemas.openxmlformats.org/drawingml/2006/main" noGrp="1"/>
-          </p:cNvSpPr>
-          <p:nvPr/>
-        </p:nvSpPr>
-        <p:spPr>
-          <a:xfrm xmlns:a="http://schemas.openxmlformats.org/drawingml/2006/main">
-            <a:off x="4000500" y="5791200"/>
-            <a:ext cx="7581900" cy="457200"/>
+                <a16:creationId xmlns:a16="http://schemas.microsoft.com/office/drawing/2014/main" id="{192B1012-923A-4438-990C-8E8FBCA5FFBA}"/>
+              </a:ext>
+            </a:extLst>
+          </p:cNvPr>
+          <p:cNvSpPr>
+            <a:spLocks xmlns:a="http://schemas.openxmlformats.org/drawingml/2006/main" noGrp="1"/>
+          </p:cNvSpPr>
+          <p:nvPr/>
+        </p:nvSpPr>
+        <p:spPr>
+          <a:xfrm xmlns:a="http://schemas.openxmlformats.org/drawingml/2006/main">
+            <a:off x="609600" y="5505450"/>
+            <a:ext cx="10972800" cy="666750"/>
           </a:xfrm>
           <a:prstGeom xmlns:a="http://schemas.openxmlformats.org/drawingml/2006/main" prst="rect">
             <a:avLst/>
@@ -15531,11 +15395,11 @@
         </p:spPr>
         <p:txBody>
           <a:bodyPr xmlns:a="http://schemas.openxmlformats.org/drawingml/2006/main" lIns="76200" tIns="57150" rIns="76200" bIns="57150" anchor="ctr">
-            <a:normAutofit fontScale="95777"/>
+            <a:normAutofit fontScale="100000"/>
           </a:bodyPr>
           <a:lstStyle xmlns:a="http://schemas.openxmlformats.org/drawingml/2006/main"/>
           <a:p xmlns:a="http://schemas.openxmlformats.org/drawingml/2006/main">
-            <a:pPr algn="l">
+            <a:pPr algn="ctr">
               <a:lnSpc>
                 <a:spcPct val="108000"/>
               </a:lnSpc>
@@ -15566,7 +15430,7 @@
     </p:spTree>
     <p:extLst>
       <p:ext uri="{BB962C8B-B14F-4D97-AF65-F5344CB8AC3E}">
-        <p14:creationId xmlns:p14="http://schemas.microsoft.com/office/powerpoint/2010/main" val="2135173279"/>
+        <p14:creationId xmlns:p14="http://schemas.microsoft.com/office/powerpoint/2010/main" val="1327073572"/>
       </p:ext>
     </p:extLst>
   </p:cSld>
@@ -15597,7 +15461,7 @@
           <p:cNvPr id="29" name="">
             <a:extLst xmlns:a="http://schemas.openxmlformats.org/drawingml/2006/main">
               <a:ext uri="{FF2B5EF4-FFF2-40B4-BE49-F238E27FC236}">
-                <a16:creationId xmlns:a16="http://schemas.microsoft.com/office/drawing/2014/main" id="{8BC1E530-093D-4429-9389-ADEDBAB4EC0F}"/>
+                <a16:creationId xmlns:a16="http://schemas.microsoft.com/office/drawing/2014/main" id="{CDF30051-DC14-47A2-8E02-B9CC29747F79}"/>
               </a:ext>
             </a:extLst>
           </p:cNvPr>
@@ -15628,7 +15492,7 @@
           <p:cNvPr id="2" name="">
             <a:extLst xmlns:a="http://schemas.openxmlformats.org/drawingml/2006/main">
               <a:ext uri="{FF2B5EF4-FFF2-40B4-BE49-F238E27FC236}">
-                <a16:creationId xmlns:a16="http://schemas.microsoft.com/office/drawing/2014/main" id="{503CA754-1220-42A4-868B-5065C300E03C}"/>
+                <a16:creationId xmlns:a16="http://schemas.microsoft.com/office/drawing/2014/main" id="{613F2C10-F266-4CD9-BAFE-3B9A772711BE}"/>
               </a:ext>
             </a:extLst>
           </p:cNvPr>
@@ -15690,7 +15554,7 @@
           <p:cNvPr id="3" name="">
             <a:extLst xmlns:a="http://schemas.openxmlformats.org/drawingml/2006/main">
               <a:ext uri="{FF2B5EF4-FFF2-40B4-BE49-F238E27FC236}">
-                <a16:creationId xmlns:a16="http://schemas.microsoft.com/office/drawing/2014/main" id="{D923AEA6-C6F4-4750-9638-033B7545897F}"/>
+                <a16:creationId xmlns:a16="http://schemas.microsoft.com/office/drawing/2014/main" id="{285FC807-E97A-40EC-8A73-A7BEA9855BCD}"/>
               </a:ext>
             </a:extLst>
           </p:cNvPr>
@@ -15752,7 +15616,7 @@
           <p:cNvPr id="4" name="">
             <a:extLst xmlns:a="http://schemas.openxmlformats.org/drawingml/2006/main">
               <a:ext uri="{FF2B5EF4-FFF2-40B4-BE49-F238E27FC236}">
-                <a16:creationId xmlns:a16="http://schemas.microsoft.com/office/drawing/2014/main" id="{ABDC89DD-A042-479D-A79B-2A3ABEB9B48D}"/>
+                <a16:creationId xmlns:a16="http://schemas.microsoft.com/office/drawing/2014/main" id="{83CD7546-1360-4484-8B6C-F2B3CAF011E5}"/>
               </a:ext>
             </a:extLst>
           </p:cNvPr>
@@ -15787,7 +15651,7 @@
           <p:nvPr/>
         </p:nvPicPr>
         <p:blipFill>
-          <a:blip xmlns:r="http://schemas.openxmlformats.org/officeDocument/2006/relationships" xmlns:a="http://schemas.openxmlformats.org/drawingml/2006/main" r:embed="R9d7c0750ce474043"/>
+          <a:blip xmlns:r="http://schemas.openxmlformats.org/officeDocument/2006/relationships" xmlns:a="http://schemas.openxmlformats.org/drawingml/2006/main" r:embed="R8bdd8958ca504f75"/>
           <a:srcRect xmlns:a="http://schemas.openxmlformats.org/drawingml/2006/main" l="0" t="0" r="0" b="0"/>
           <a:stretch xmlns:a="http://schemas.openxmlformats.org/drawingml/2006/main">
             <a:fillRect l="0" t="0" r="0" b="0"/>
@@ -15808,7 +15672,7 @@
           <p:cNvPr id="6" name="">
             <a:extLst xmlns:a="http://schemas.openxmlformats.org/drawingml/2006/main">
               <a:ext uri="{FF2B5EF4-FFF2-40B4-BE49-F238E27FC236}">
-                <a16:creationId xmlns:a16="http://schemas.microsoft.com/office/drawing/2014/main" id="{A4CE4B03-E569-4B03-9CF7-359BDB79229E}"/>
+                <a16:creationId xmlns:a16="http://schemas.microsoft.com/office/drawing/2014/main" id="{C1DC8731-0977-42C3-B81C-D6FF2AD4E109}"/>
               </a:ext>
             </a:extLst>
           </p:cNvPr>
@@ -15870,7 +15734,7 @@
           <p:cNvPr id="7" name="">
             <a:extLst xmlns:a="http://schemas.openxmlformats.org/drawingml/2006/main">
               <a:ext uri="{FF2B5EF4-FFF2-40B4-BE49-F238E27FC236}">
-                <a16:creationId xmlns:a16="http://schemas.microsoft.com/office/drawing/2014/main" id="{61D4AF6B-3F6B-4D5A-B377-1CFFA0B8810C}"/>
+                <a16:creationId xmlns:a16="http://schemas.microsoft.com/office/drawing/2014/main" id="{94CCC6FD-B908-4968-A428-54CF9CA3EDA9}"/>
               </a:ext>
             </a:extLst>
           </p:cNvPr>
@@ -15932,7 +15796,7 @@
           <p:cNvPr id="8" name="">
             <a:extLst xmlns:a="http://schemas.openxmlformats.org/drawingml/2006/main">
               <a:ext uri="{FF2B5EF4-FFF2-40B4-BE49-F238E27FC236}">
-                <a16:creationId xmlns:a16="http://schemas.microsoft.com/office/drawing/2014/main" id="{2CE18F2A-F9DC-4520-8DA6-D15FB47D0792}"/>
+                <a16:creationId xmlns:a16="http://schemas.microsoft.com/office/drawing/2014/main" id="{3DB59D4B-3D06-45F1-9DFE-06C9BBA98986}"/>
               </a:ext>
             </a:extLst>
           </p:cNvPr>
@@ -15967,7 +15831,7 @@
           <p:cNvPr id="9" name="">
             <a:extLst xmlns:a="http://schemas.openxmlformats.org/drawingml/2006/main">
               <a:ext uri="{FF2B5EF4-FFF2-40B4-BE49-F238E27FC236}">
-                <a16:creationId xmlns:a16="http://schemas.microsoft.com/office/drawing/2014/main" id="{3B299533-84E7-46BD-85C8-7F2D88CBC7BC}"/>
+                <a16:creationId xmlns:a16="http://schemas.microsoft.com/office/drawing/2014/main" id="{3F6479D5-1354-43B6-B189-E10723F6F47A}"/>
               </a:ext>
             </a:extLst>
           </p:cNvPr>
@@ -15998,7 +15862,7 @@
           <p:cNvPr id="10" name="">
             <a:extLst xmlns:a="http://schemas.openxmlformats.org/drawingml/2006/main">
               <a:ext uri="{FF2B5EF4-FFF2-40B4-BE49-F238E27FC236}">
-                <a16:creationId xmlns:a16="http://schemas.microsoft.com/office/drawing/2014/main" id="{39ED1316-845A-48B5-883A-5F2741150554}"/>
+                <a16:creationId xmlns:a16="http://schemas.microsoft.com/office/drawing/2014/main" id="{389D6AB0-0045-4B12-9B47-E175468E192F}"/>
               </a:ext>
             </a:extLst>
           </p:cNvPr>
@@ -16060,7 +15924,7 @@
           <p:cNvPr id="11" name="">
             <a:extLst xmlns:a="http://schemas.openxmlformats.org/drawingml/2006/main">
               <a:ext uri="{FF2B5EF4-FFF2-40B4-BE49-F238E27FC236}">
-                <a16:creationId xmlns:a16="http://schemas.microsoft.com/office/drawing/2014/main" id="{2E430A54-A64F-4AFB-9127-BF2F6C3F1931}"/>
+                <a16:creationId xmlns:a16="http://schemas.microsoft.com/office/drawing/2014/main" id="{5D8CF2BF-58D1-4CCB-BBAA-F984BF66FED8}"/>
               </a:ext>
             </a:extLst>
           </p:cNvPr>
@@ -16122,7 +15986,7 @@
           <p:cNvPr id="12" name="">
             <a:extLst xmlns:a="http://schemas.openxmlformats.org/drawingml/2006/main">
               <a:ext uri="{FF2B5EF4-FFF2-40B4-BE49-F238E27FC236}">
-                <a16:creationId xmlns:a16="http://schemas.microsoft.com/office/drawing/2014/main" id="{71F2884B-1455-430C-8F54-B9130136581C}"/>
+                <a16:creationId xmlns:a16="http://schemas.microsoft.com/office/drawing/2014/main" id="{8D65DF93-AD04-4ED6-B397-0B5F47F1BE8F}"/>
               </a:ext>
             </a:extLst>
           </p:cNvPr>
@@ -16157,7 +16021,7 @@
           <p:cNvPr id="13" name="">
             <a:extLst xmlns:a="http://schemas.openxmlformats.org/drawingml/2006/main">
               <a:ext uri="{FF2B5EF4-FFF2-40B4-BE49-F238E27FC236}">
-                <a16:creationId xmlns:a16="http://schemas.microsoft.com/office/drawing/2014/main" id="{A673423A-DF1D-4174-8840-0C37F47A6728}"/>
+                <a16:creationId xmlns:a16="http://schemas.microsoft.com/office/drawing/2014/main" id="{EA8F5A88-CE5A-47A2-91AA-9EAFDCC21190}"/>
               </a:ext>
             </a:extLst>
           </p:cNvPr>
@@ -16188,7 +16052,7 @@
           <p:cNvPr id="14" name="">
             <a:extLst xmlns:a="http://schemas.openxmlformats.org/drawingml/2006/main">
               <a:ext uri="{FF2B5EF4-FFF2-40B4-BE49-F238E27FC236}">
-                <a16:creationId xmlns:a16="http://schemas.microsoft.com/office/drawing/2014/main" id="{ACC893E3-DB97-4A65-A276-E8768618F4CC}"/>
+                <a16:creationId xmlns:a16="http://schemas.microsoft.com/office/drawing/2014/main" id="{21C4CEAE-5D80-45BF-BA19-DBEF4673B06C}"/>
               </a:ext>
             </a:extLst>
           </p:cNvPr>
@@ -16250,7 +16114,7 @@
           <p:cNvPr id="15" name="">
             <a:extLst xmlns:a="http://schemas.openxmlformats.org/drawingml/2006/main">
               <a:ext uri="{FF2B5EF4-FFF2-40B4-BE49-F238E27FC236}">
-                <a16:creationId xmlns:a16="http://schemas.microsoft.com/office/drawing/2014/main" id="{F90FF626-1F14-4876-BFD7-61E25978BE9D}"/>
+                <a16:creationId xmlns:a16="http://schemas.microsoft.com/office/drawing/2014/main" id="{4AE5D444-BCFD-430A-A76D-74116498E3DD}"/>
               </a:ext>
             </a:extLst>
           </p:cNvPr>
@@ -16312,7 +16176,7 @@
           <p:cNvPr id="16" name="">
             <a:extLst xmlns:a="http://schemas.openxmlformats.org/drawingml/2006/main">
               <a:ext uri="{FF2B5EF4-FFF2-40B4-BE49-F238E27FC236}">
-                <a16:creationId xmlns:a16="http://schemas.microsoft.com/office/drawing/2014/main" id="{971D4DF7-3F11-4F89-BC63-AC33B31DE8F3}"/>
+                <a16:creationId xmlns:a16="http://schemas.microsoft.com/office/drawing/2014/main" id="{5F73033F-661C-4C51-A217-3A73B2A115A5}"/>
               </a:ext>
             </a:extLst>
           </p:cNvPr>
@@ -16347,7 +16211,7 @@
           <p:cNvPr id="17" name="">
             <a:extLst xmlns:a="http://schemas.openxmlformats.org/drawingml/2006/main">
               <a:ext uri="{FF2B5EF4-FFF2-40B4-BE49-F238E27FC236}">
-                <a16:creationId xmlns:a16="http://schemas.microsoft.com/office/drawing/2014/main" id="{A3A610E2-0BD3-424C-9ABA-3C10CCBE596E}"/>
+                <a16:creationId xmlns:a16="http://schemas.microsoft.com/office/drawing/2014/main" id="{A106546D-E186-4B01-81E2-7C7ED1511DB9}"/>
               </a:ext>
             </a:extLst>
           </p:cNvPr>
@@ -16378,7 +16242,7 @@
           <p:cNvPr id="18" name="">
             <a:extLst xmlns:a="http://schemas.openxmlformats.org/drawingml/2006/main">
               <a:ext uri="{FF2B5EF4-FFF2-40B4-BE49-F238E27FC236}">
-                <a16:creationId xmlns:a16="http://schemas.microsoft.com/office/drawing/2014/main" id="{41E3464E-0361-46E3-A0B6-64BA81BBEA93}"/>
+                <a16:creationId xmlns:a16="http://schemas.microsoft.com/office/drawing/2014/main" id="{1E5CA3B7-B940-4205-BAEA-335FE74534C2}"/>
               </a:ext>
             </a:extLst>
           </p:cNvPr>
@@ -16440,7 +16304,7 @@
           <p:cNvPr id="19" name="">
             <a:extLst xmlns:a="http://schemas.openxmlformats.org/drawingml/2006/main">
               <a:ext uri="{FF2B5EF4-FFF2-40B4-BE49-F238E27FC236}">
-                <a16:creationId xmlns:a16="http://schemas.microsoft.com/office/drawing/2014/main" id="{C07F8CEF-91AC-4634-A4E3-9F132A644D0C}"/>
+                <a16:creationId xmlns:a16="http://schemas.microsoft.com/office/drawing/2014/main" id="{0E668B85-C196-4FEC-AB7A-0AAEE995CBBC}"/>
               </a:ext>
             </a:extLst>
           </p:cNvPr>
@@ -16502,7 +16366,7 @@
           <p:cNvPr id="20" name="">
             <a:extLst xmlns:a="http://schemas.openxmlformats.org/drawingml/2006/main">
               <a:ext uri="{FF2B5EF4-FFF2-40B4-BE49-F238E27FC236}">
-                <a16:creationId xmlns:a16="http://schemas.microsoft.com/office/drawing/2014/main" id="{7A46A7BA-0158-4A03-9FC3-078BB6FBDF29}"/>
+                <a16:creationId xmlns:a16="http://schemas.microsoft.com/office/drawing/2014/main" id="{ECEAA1F7-E3EB-44A6-A876-37568792BB13}"/>
               </a:ext>
             </a:extLst>
           </p:cNvPr>
@@ -16537,7 +16401,7 @@
           <p:cNvPr id="21" name="">
             <a:extLst xmlns:a="http://schemas.openxmlformats.org/drawingml/2006/main">
               <a:ext uri="{FF2B5EF4-FFF2-40B4-BE49-F238E27FC236}">
-                <a16:creationId xmlns:a16="http://schemas.microsoft.com/office/drawing/2014/main" id="{A860EC2D-03C3-4E8E-BCBD-F4DB82C6D07C}"/>
+                <a16:creationId xmlns:a16="http://schemas.microsoft.com/office/drawing/2014/main" id="{3C9CABB1-8591-4DB5-A8AF-106230B2BE07}"/>
               </a:ext>
             </a:extLst>
           </p:cNvPr>
@@ -16568,7 +16432,7 @@
           <p:cNvPr id="22" name="">
             <a:extLst xmlns:a="http://schemas.openxmlformats.org/drawingml/2006/main">
               <a:ext uri="{FF2B5EF4-FFF2-40B4-BE49-F238E27FC236}">
-                <a16:creationId xmlns:a16="http://schemas.microsoft.com/office/drawing/2014/main" id="{AAEA0CB9-5E24-4F73-B499-82F79B9B723D}"/>
+                <a16:creationId xmlns:a16="http://schemas.microsoft.com/office/drawing/2014/main" id="{421CDC0D-ECD0-4ECC-BA8B-ED6A7EA658BF}"/>
               </a:ext>
             </a:extLst>
           </p:cNvPr>
@@ -16630,7 +16494,7 @@
           <p:cNvPr id="23" name="">
             <a:extLst xmlns:a="http://schemas.openxmlformats.org/drawingml/2006/main">
               <a:ext uri="{FF2B5EF4-FFF2-40B4-BE49-F238E27FC236}">
-                <a16:creationId xmlns:a16="http://schemas.microsoft.com/office/drawing/2014/main" id="{230A6A29-9539-4668-AA0A-EF094A1ED5E6}"/>
+                <a16:creationId xmlns:a16="http://schemas.microsoft.com/office/drawing/2014/main" id="{9E77A154-EFA2-41C6-83FD-55C55F0030C9}"/>
               </a:ext>
             </a:extLst>
           </p:cNvPr>
@@ -16692,7 +16556,7 @@
           <p:cNvPr id="24" name="">
             <a:extLst xmlns:a="http://schemas.openxmlformats.org/drawingml/2006/main">
               <a:ext uri="{FF2B5EF4-FFF2-40B4-BE49-F238E27FC236}">
-                <a16:creationId xmlns:a16="http://schemas.microsoft.com/office/drawing/2014/main" id="{86894A5B-46A9-4ADA-9D32-547B056C8704}"/>
+                <a16:creationId xmlns:a16="http://schemas.microsoft.com/office/drawing/2014/main" id="{4E3B22FD-069D-45E2-91E6-A65A447D608A}"/>
               </a:ext>
             </a:extLst>
           </p:cNvPr>
@@ -16727,7 +16591,7 @@
           <p:cNvPr id="25" name="">
             <a:extLst xmlns:a="http://schemas.openxmlformats.org/drawingml/2006/main">
               <a:ext uri="{FF2B5EF4-FFF2-40B4-BE49-F238E27FC236}">
-                <a16:creationId xmlns:a16="http://schemas.microsoft.com/office/drawing/2014/main" id="{9575361B-4DFF-4FA1-AF30-CE887D98B12C}"/>
+                <a16:creationId xmlns:a16="http://schemas.microsoft.com/office/drawing/2014/main" id="{8C58AED1-9755-4CA1-8162-A9373C9826E3}"/>
               </a:ext>
             </a:extLst>
           </p:cNvPr>
@@ -16758,7 +16622,7 @@
           <p:cNvPr id="26" name="">
             <a:extLst xmlns:a="http://schemas.openxmlformats.org/drawingml/2006/main">
               <a:ext uri="{FF2B5EF4-FFF2-40B4-BE49-F238E27FC236}">
-                <a16:creationId xmlns:a16="http://schemas.microsoft.com/office/drawing/2014/main" id="{04FF04DC-368C-45E3-BC2F-F1AF033C6B76}"/>
+                <a16:creationId xmlns:a16="http://schemas.microsoft.com/office/drawing/2014/main" id="{A16543EB-0764-4CBF-A5C2-BB0524A5A869}"/>
               </a:ext>
             </a:extLst>
           </p:cNvPr>
@@ -16820,7 +16684,7 @@
           <p:cNvPr id="27" name="">
             <a:extLst xmlns:a="http://schemas.openxmlformats.org/drawingml/2006/main">
               <a:ext uri="{FF2B5EF4-FFF2-40B4-BE49-F238E27FC236}">
-                <a16:creationId xmlns:a16="http://schemas.microsoft.com/office/drawing/2014/main" id="{F87D80E8-26B7-4352-BA69-68052F16A928}"/>
+                <a16:creationId xmlns:a16="http://schemas.microsoft.com/office/drawing/2014/main" id="{A1BD52E0-1C22-4B0C-AC9B-99A47AE564E3}"/>
               </a:ext>
             </a:extLst>
           </p:cNvPr>
@@ -16882,7 +16746,7 @@
           <p:cNvPr id="28" name="">
             <a:extLst xmlns:a="http://schemas.openxmlformats.org/drawingml/2006/main">
               <a:ext uri="{FF2B5EF4-FFF2-40B4-BE49-F238E27FC236}">
-                <a16:creationId xmlns:a16="http://schemas.microsoft.com/office/drawing/2014/main" id="{0A931EE5-8817-47F0-B52D-8B2E7C68C6C4}"/>
+                <a16:creationId xmlns:a16="http://schemas.microsoft.com/office/drawing/2014/main" id="{07808A56-1BF1-4BD6-AAC7-1BE7CA7B63F9}"/>
               </a:ext>
             </a:extLst>
           </p:cNvPr>
@@ -16944,7 +16808,7 @@
     </p:spTree>
     <p:extLst>
       <p:ext uri="{BB962C8B-B14F-4D97-AF65-F5344CB8AC3E}">
-        <p14:creationId xmlns:p14="http://schemas.microsoft.com/office/powerpoint/2010/main" val="1114984547"/>
+        <p14:creationId xmlns:p14="http://schemas.microsoft.com/office/powerpoint/2010/main" val="333135647"/>
       </p:ext>
     </p:extLst>
   </p:cSld>
@@ -16975,7 +16839,7 @@
           <p:cNvPr id="28" name="">
             <a:extLst xmlns:a="http://schemas.openxmlformats.org/drawingml/2006/main">
               <a:ext uri="{FF2B5EF4-FFF2-40B4-BE49-F238E27FC236}">
-                <a16:creationId xmlns:a16="http://schemas.microsoft.com/office/drawing/2014/main" id="{B5B0FDB6-7C2F-46B7-A455-4B6D3E1C8BFE}"/>
+                <a16:creationId xmlns:a16="http://schemas.microsoft.com/office/drawing/2014/main" id="{F6A2F7E1-8E5A-43AE-ABF5-C84FFBC0BB29}"/>
               </a:ext>
             </a:extLst>
           </p:cNvPr>
@@ -17006,7 +16870,7 @@
           <p:cNvPr id="2" name="">
             <a:extLst xmlns:a="http://schemas.openxmlformats.org/drawingml/2006/main">
               <a:ext uri="{FF2B5EF4-FFF2-40B4-BE49-F238E27FC236}">
-                <a16:creationId xmlns:a16="http://schemas.microsoft.com/office/drawing/2014/main" id="{6225D75B-9BDB-4E70-A07C-8AFB711FF41C}"/>
+                <a16:creationId xmlns:a16="http://schemas.microsoft.com/office/drawing/2014/main" id="{6A224593-0A08-4921-B818-D691BA786723}"/>
               </a:ext>
             </a:extLst>
           </p:cNvPr>
@@ -17068,7 +16932,7 @@
           <p:cNvPr id="3" name="">
             <a:extLst xmlns:a="http://schemas.openxmlformats.org/drawingml/2006/main">
               <a:ext uri="{FF2B5EF4-FFF2-40B4-BE49-F238E27FC236}">
-                <a16:creationId xmlns:a16="http://schemas.microsoft.com/office/drawing/2014/main" id="{33796057-C8FA-4461-B5DE-E8F3D683CC02}"/>
+                <a16:creationId xmlns:a16="http://schemas.microsoft.com/office/drawing/2014/main" id="{AA924EC6-5945-440B-A59C-A02ECA94E810}"/>
               </a:ext>
             </a:extLst>
           </p:cNvPr>
@@ -17102,7 +16966,7 @@
                 <a:spcPct val="108000"/>
               </a:lnSpc>
               <a:buNone/>
-              <a:defRPr sz="3150" b="1">
+              <a:defRPr sz="2550" b="1">
                 <a:solidFill>
                   <a:srgbClr val="071426"/>
                 </a:solidFill>
@@ -17112,7 +16976,7 @@
               </a:defRPr>
             </a:pPr>
             <a:r>
-              <a:rPr sz="3150" b="1">
+              <a:rPr sz="2550" b="1">
                 <a:solidFill>
                   <a:srgbClr val="071426"/>
                 </a:solidFill>
@@ -17130,7 +16994,7 @@
           <p:cNvPr id="4" name="">
             <a:extLst xmlns:a="http://schemas.openxmlformats.org/drawingml/2006/main">
               <a:ext uri="{FF2B5EF4-FFF2-40B4-BE49-F238E27FC236}">
-                <a16:creationId xmlns:a16="http://schemas.microsoft.com/office/drawing/2014/main" id="{C26BBF5C-C1C6-4DFB-BE85-516FF2851A01}"/>
+                <a16:creationId xmlns:a16="http://schemas.microsoft.com/office/drawing/2014/main" id="{D400A2CE-9226-40DB-AF5E-2F1F9705EB16}"/>
               </a:ext>
             </a:extLst>
           </p:cNvPr>
@@ -17165,7 +17029,7 @@
           <p:nvPr/>
         </p:nvPicPr>
         <p:blipFill>
-          <a:blip xmlns:r="http://schemas.openxmlformats.org/officeDocument/2006/relationships" xmlns:a="http://schemas.openxmlformats.org/drawingml/2006/main" r:embed="Rabe03ef058f846d6"/>
+          <a:blip xmlns:r="http://schemas.openxmlformats.org/officeDocument/2006/relationships" xmlns:a="http://schemas.openxmlformats.org/drawingml/2006/main" r:embed="R16004a7f0047434e"/>
           <a:srcRect xmlns:a="http://schemas.openxmlformats.org/drawingml/2006/main" l="0" t="0" r="0" b="0"/>
           <a:stretch xmlns:a="http://schemas.openxmlformats.org/drawingml/2006/main">
             <a:fillRect l="0" t="0" r="0" b="0"/>
@@ -17186,7 +17050,7 @@
           <p:cNvPr id="6" name="">
             <a:extLst xmlns:a="http://schemas.openxmlformats.org/drawingml/2006/main">
               <a:ext uri="{FF2B5EF4-FFF2-40B4-BE49-F238E27FC236}">
-                <a16:creationId xmlns:a16="http://schemas.microsoft.com/office/drawing/2014/main" id="{D4E826B9-2325-4F67-8B79-7842ABF42E21}"/>
+                <a16:creationId xmlns:a16="http://schemas.microsoft.com/office/drawing/2014/main" id="{0941B1BC-1BA9-4BB7-8347-AE235E850B4A}"/>
               </a:ext>
             </a:extLst>
           </p:cNvPr>
@@ -17248,7 +17112,7 @@
           <p:cNvPr id="7" name="">
             <a:extLst xmlns:a="http://schemas.openxmlformats.org/drawingml/2006/main">
               <a:ext uri="{FF2B5EF4-FFF2-40B4-BE49-F238E27FC236}">
-                <a16:creationId xmlns:a16="http://schemas.microsoft.com/office/drawing/2014/main" id="{2174CFF5-AF58-42A9-9703-E0788AE6134D}"/>
+                <a16:creationId xmlns:a16="http://schemas.microsoft.com/office/drawing/2014/main" id="{2FB4372F-CDAC-4977-863C-2B81FE290C49}"/>
               </a:ext>
             </a:extLst>
           </p:cNvPr>
@@ -17310,7 +17174,7 @@
           <p:cNvPr id="8" name="">
             <a:extLst xmlns:a="http://schemas.openxmlformats.org/drawingml/2006/main">
               <a:ext uri="{FF2B5EF4-FFF2-40B4-BE49-F238E27FC236}">
-                <a16:creationId xmlns:a16="http://schemas.microsoft.com/office/drawing/2014/main" id="{6A217909-55CA-488A-8166-7B3F2BB720C6}"/>
+                <a16:creationId xmlns:a16="http://schemas.microsoft.com/office/drawing/2014/main" id="{4474128F-36E0-44F7-81E8-A680C1280A8C}"/>
               </a:ext>
             </a:extLst>
           </p:cNvPr>
@@ -17345,7 +17209,7 @@
           <p:cNvPr id="9" name="">
             <a:extLst xmlns:a="http://schemas.openxmlformats.org/drawingml/2006/main">
               <a:ext uri="{FF2B5EF4-FFF2-40B4-BE49-F238E27FC236}">
-                <a16:creationId xmlns:a16="http://schemas.microsoft.com/office/drawing/2014/main" id="{1052DA32-FBE0-4204-A287-96D17E2A6684}"/>
+                <a16:creationId xmlns:a16="http://schemas.microsoft.com/office/drawing/2014/main" id="{85D28FDB-6665-4110-9ABE-B7E345F77560}"/>
               </a:ext>
             </a:extLst>
           </p:cNvPr>
@@ -17376,7 +17240,7 @@
           <p:cNvPr id="10" name="">
             <a:extLst xmlns:a="http://schemas.openxmlformats.org/drawingml/2006/main">
               <a:ext uri="{FF2B5EF4-FFF2-40B4-BE49-F238E27FC236}">
-                <a16:creationId xmlns:a16="http://schemas.microsoft.com/office/drawing/2014/main" id="{45A84DB9-C18B-4C84-9ACF-FC754692C567}"/>
+                <a16:creationId xmlns:a16="http://schemas.microsoft.com/office/drawing/2014/main" id="{538A136F-19E0-4C15-9624-A3FBEF34B0BF}"/>
               </a:ext>
             </a:extLst>
           </p:cNvPr>
@@ -17438,7 +17302,7 @@
           <p:cNvPr id="11" name="">
             <a:extLst xmlns:a="http://schemas.openxmlformats.org/drawingml/2006/main">
               <a:ext uri="{FF2B5EF4-FFF2-40B4-BE49-F238E27FC236}">
-                <a16:creationId xmlns:a16="http://schemas.microsoft.com/office/drawing/2014/main" id="{95403D19-0C6A-4C24-A018-C35547B307CA}"/>
+                <a16:creationId xmlns:a16="http://schemas.microsoft.com/office/drawing/2014/main" id="{755CF783-BFDE-4E2D-94D4-A54C1EDA1E44}"/>
               </a:ext>
             </a:extLst>
           </p:cNvPr>
@@ -17500,7 +17364,7 @@
           <p:cNvPr id="12" name="">
             <a:extLst xmlns:a="http://schemas.openxmlformats.org/drawingml/2006/main">
               <a:ext uri="{FF2B5EF4-FFF2-40B4-BE49-F238E27FC236}">
-                <a16:creationId xmlns:a16="http://schemas.microsoft.com/office/drawing/2014/main" id="{E2073860-28FB-4E74-84AE-FB297E49075F}"/>
+                <a16:creationId xmlns:a16="http://schemas.microsoft.com/office/drawing/2014/main" id="{A611375F-922D-4296-9100-D9F021908723}"/>
               </a:ext>
             </a:extLst>
           </p:cNvPr>
@@ -17535,7 +17399,7 @@
           <p:cNvPr id="13" name="">
             <a:extLst xmlns:a="http://schemas.openxmlformats.org/drawingml/2006/main">
               <a:ext uri="{FF2B5EF4-FFF2-40B4-BE49-F238E27FC236}">
-                <a16:creationId xmlns:a16="http://schemas.microsoft.com/office/drawing/2014/main" id="{692E00A5-8576-4B8D-808A-CB9D57630640}"/>
+                <a16:creationId xmlns:a16="http://schemas.microsoft.com/office/drawing/2014/main" id="{3A3169C0-8B62-494B-9906-603EB8F92FCC}"/>
               </a:ext>
             </a:extLst>
           </p:cNvPr>
@@ -17566,7 +17430,7 @@
           <p:cNvPr id="14" name="">
             <a:extLst xmlns:a="http://schemas.openxmlformats.org/drawingml/2006/main">
               <a:ext uri="{FF2B5EF4-FFF2-40B4-BE49-F238E27FC236}">
-                <a16:creationId xmlns:a16="http://schemas.microsoft.com/office/drawing/2014/main" id="{BD0E227C-AADC-45DB-8017-98B03D6CF8AA}"/>
+                <a16:creationId xmlns:a16="http://schemas.microsoft.com/office/drawing/2014/main" id="{5F97F700-50C2-42E9-9BAE-4A90343326D3}"/>
               </a:ext>
             </a:extLst>
           </p:cNvPr>
@@ -17628,7 +17492,7 @@
           <p:cNvPr id="15" name="">
             <a:extLst xmlns:a="http://schemas.openxmlformats.org/drawingml/2006/main">
               <a:ext uri="{FF2B5EF4-FFF2-40B4-BE49-F238E27FC236}">
-                <a16:creationId xmlns:a16="http://schemas.microsoft.com/office/drawing/2014/main" id="{72BD7825-615B-490A-A819-46D588C325AD}"/>
+                <a16:creationId xmlns:a16="http://schemas.microsoft.com/office/drawing/2014/main" id="{32D6F7E4-108B-427A-8E5B-89E43FAC7EE4}"/>
               </a:ext>
             </a:extLst>
           </p:cNvPr>
@@ -17690,7 +17554,7 @@
           <p:cNvPr id="16" name="">
             <a:extLst xmlns:a="http://schemas.openxmlformats.org/drawingml/2006/main">
               <a:ext uri="{FF2B5EF4-FFF2-40B4-BE49-F238E27FC236}">
-                <a16:creationId xmlns:a16="http://schemas.microsoft.com/office/drawing/2014/main" id="{C82B3638-E663-4750-9819-394697F73BEC}"/>
+                <a16:creationId xmlns:a16="http://schemas.microsoft.com/office/drawing/2014/main" id="{7AF1CE88-6AAC-419C-8760-F9485813D71D}"/>
               </a:ext>
             </a:extLst>
           </p:cNvPr>
@@ -17725,7 +17589,7 @@
           <p:cNvPr id="17" name="">
             <a:extLst xmlns:a="http://schemas.openxmlformats.org/drawingml/2006/main">
               <a:ext uri="{FF2B5EF4-FFF2-40B4-BE49-F238E27FC236}">
-                <a16:creationId xmlns:a16="http://schemas.microsoft.com/office/drawing/2014/main" id="{45053F94-894E-43DF-BAEB-16EA65CDA718}"/>
+                <a16:creationId xmlns:a16="http://schemas.microsoft.com/office/drawing/2014/main" id="{043B80D6-77E0-4545-B14B-CDDD568F4DD1}"/>
               </a:ext>
             </a:extLst>
           </p:cNvPr>
@@ -17756,7 +17620,7 @@
           <p:cNvPr id="18" name="">
             <a:extLst xmlns:a="http://schemas.openxmlformats.org/drawingml/2006/main">
               <a:ext uri="{FF2B5EF4-FFF2-40B4-BE49-F238E27FC236}">
-                <a16:creationId xmlns:a16="http://schemas.microsoft.com/office/drawing/2014/main" id="{FF5812BE-0D58-4C45-AB40-F88348629B7D}"/>
+                <a16:creationId xmlns:a16="http://schemas.microsoft.com/office/drawing/2014/main" id="{892AE3C9-2935-4858-8876-54CB900C1F81}"/>
               </a:ext>
             </a:extLst>
           </p:cNvPr>
@@ -17818,7 +17682,7 @@
           <p:cNvPr id="19" name="">
             <a:extLst xmlns:a="http://schemas.openxmlformats.org/drawingml/2006/main">
               <a:ext uri="{FF2B5EF4-FFF2-40B4-BE49-F238E27FC236}">
-                <a16:creationId xmlns:a16="http://schemas.microsoft.com/office/drawing/2014/main" id="{8C8809E6-0B89-47FC-911C-63F176CEEFAD}"/>
+                <a16:creationId xmlns:a16="http://schemas.microsoft.com/office/drawing/2014/main" id="{5BF2CDC9-67CB-4925-86F2-2F7D8210FF9C}"/>
               </a:ext>
             </a:extLst>
           </p:cNvPr>
@@ -17880,7 +17744,7 @@
           <p:cNvPr id="20" name="">
             <a:extLst xmlns:a="http://schemas.openxmlformats.org/drawingml/2006/main">
               <a:ext uri="{FF2B5EF4-FFF2-40B4-BE49-F238E27FC236}">
-                <a16:creationId xmlns:a16="http://schemas.microsoft.com/office/drawing/2014/main" id="{F8F3B571-9050-478E-AC56-AAC322DB004A}"/>
+                <a16:creationId xmlns:a16="http://schemas.microsoft.com/office/drawing/2014/main" id="{D1CBD2E6-56F8-4D1A-86B1-ACADBA1BEABB}"/>
               </a:ext>
             </a:extLst>
           </p:cNvPr>
@@ -17915,7 +17779,7 @@
           <p:cNvPr id="21" name="">
             <a:extLst xmlns:a="http://schemas.openxmlformats.org/drawingml/2006/main">
               <a:ext uri="{FF2B5EF4-FFF2-40B4-BE49-F238E27FC236}">
-                <a16:creationId xmlns:a16="http://schemas.microsoft.com/office/drawing/2014/main" id="{97C42237-72DC-4EED-AC2A-5C595F73491D}"/>
+                <a16:creationId xmlns:a16="http://schemas.microsoft.com/office/drawing/2014/main" id="{D1D3329D-6E48-47EE-84BA-1AF60C257713}"/>
               </a:ext>
             </a:extLst>
           </p:cNvPr>
@@ -17946,7 +17810,7 @@
           <p:cNvPr id="22" name="">
             <a:extLst xmlns:a="http://schemas.openxmlformats.org/drawingml/2006/main">
               <a:ext uri="{FF2B5EF4-FFF2-40B4-BE49-F238E27FC236}">
-                <a16:creationId xmlns:a16="http://schemas.microsoft.com/office/drawing/2014/main" id="{D8BD5202-F1FD-4F21-A641-CE23E4AE9DFA}"/>
+                <a16:creationId xmlns:a16="http://schemas.microsoft.com/office/drawing/2014/main" id="{28718AF4-64BD-4E3E-AC0C-91A5DD6C5388}"/>
               </a:ext>
             </a:extLst>
           </p:cNvPr>
@@ -18008,7 +17872,7 @@
           <p:cNvPr id="23" name="">
             <a:extLst xmlns:a="http://schemas.openxmlformats.org/drawingml/2006/main">
               <a:ext uri="{FF2B5EF4-FFF2-40B4-BE49-F238E27FC236}">
-                <a16:creationId xmlns:a16="http://schemas.microsoft.com/office/drawing/2014/main" id="{C97A0F2F-1CFC-4868-B711-13AB063F123D}"/>
+                <a16:creationId xmlns:a16="http://schemas.microsoft.com/office/drawing/2014/main" id="{EB9E658E-54CF-4541-913D-C7B6F47D75E3}"/>
               </a:ext>
             </a:extLst>
           </p:cNvPr>
@@ -18070,7 +17934,7 @@
           <p:cNvPr id="24" name="">
             <a:extLst xmlns:a="http://schemas.openxmlformats.org/drawingml/2006/main">
               <a:ext uri="{FF2B5EF4-FFF2-40B4-BE49-F238E27FC236}">
-                <a16:creationId xmlns:a16="http://schemas.microsoft.com/office/drawing/2014/main" id="{5A1EC47D-CBF6-4598-9EE0-D35E44DF3338}"/>
+                <a16:creationId xmlns:a16="http://schemas.microsoft.com/office/drawing/2014/main" id="{ABC9C3F8-1787-4EEB-B75A-26162C947D79}"/>
               </a:ext>
             </a:extLst>
           </p:cNvPr>
@@ -18105,7 +17969,7 @@
           <p:cNvPr id="25" name="">
             <a:extLst xmlns:a="http://schemas.openxmlformats.org/drawingml/2006/main">
               <a:ext uri="{FF2B5EF4-FFF2-40B4-BE49-F238E27FC236}">
-                <a16:creationId xmlns:a16="http://schemas.microsoft.com/office/drawing/2014/main" id="{B96E748C-FD52-410B-93B5-36482F11BA25}"/>
+                <a16:creationId xmlns:a16="http://schemas.microsoft.com/office/drawing/2014/main" id="{E5F3FD5C-B3EF-49C3-A597-412F09E2C430}"/>
               </a:ext>
             </a:extLst>
           </p:cNvPr>
@@ -18136,7 +18000,7 @@
           <p:cNvPr id="26" name="">
             <a:extLst xmlns:a="http://schemas.openxmlformats.org/drawingml/2006/main">
               <a:ext uri="{FF2B5EF4-FFF2-40B4-BE49-F238E27FC236}">
-                <a16:creationId xmlns:a16="http://schemas.microsoft.com/office/drawing/2014/main" id="{BB104580-1F64-4FD3-8F3F-A48E1BF5183B}"/>
+                <a16:creationId xmlns:a16="http://schemas.microsoft.com/office/drawing/2014/main" id="{9AE6A318-5E9E-46C9-BF84-18E44CDA8EB0}"/>
               </a:ext>
             </a:extLst>
           </p:cNvPr>
@@ -18198,7 +18062,7 @@
           <p:cNvPr id="27" name="">
             <a:extLst xmlns:a="http://schemas.openxmlformats.org/drawingml/2006/main">
               <a:ext uri="{FF2B5EF4-FFF2-40B4-BE49-F238E27FC236}">
-                <a16:creationId xmlns:a16="http://schemas.microsoft.com/office/drawing/2014/main" id="{805F5CAF-0C32-448F-B92A-D8E70F3550F4}"/>
+                <a16:creationId xmlns:a16="http://schemas.microsoft.com/office/drawing/2014/main" id="{64EEED63-484D-443B-9D47-A2440024D772}"/>
               </a:ext>
             </a:extLst>
           </p:cNvPr>
@@ -18260,7 +18124,7 @@
     </p:spTree>
     <p:extLst>
       <p:ext uri="{BB962C8B-B14F-4D97-AF65-F5344CB8AC3E}">
-        <p14:creationId xmlns:p14="http://schemas.microsoft.com/office/powerpoint/2010/main" val="359488080"/>
+        <p14:creationId xmlns:p14="http://schemas.microsoft.com/office/powerpoint/2010/main" val="1614178425"/>
       </p:ext>
     </p:extLst>
   </p:cSld>
@@ -18291,7 +18155,7 @@
           <p:cNvPr id="22" name="">
             <a:extLst xmlns:a="http://schemas.openxmlformats.org/drawingml/2006/main">
               <a:ext uri="{FF2B5EF4-FFF2-40B4-BE49-F238E27FC236}">
-                <a16:creationId xmlns:a16="http://schemas.microsoft.com/office/drawing/2014/main" id="{D3B2CCB8-073D-4649-B8B7-7F1348741A4A}"/>
+                <a16:creationId xmlns:a16="http://schemas.microsoft.com/office/drawing/2014/main" id="{BF8B4D10-C9CD-478A-968F-86D47D6F6C7D}"/>
               </a:ext>
             </a:extLst>
           </p:cNvPr>
@@ -18322,7 +18186,7 @@
           <p:cNvPr id="2" name="">
             <a:extLst xmlns:a="http://schemas.openxmlformats.org/drawingml/2006/main">
               <a:ext uri="{FF2B5EF4-FFF2-40B4-BE49-F238E27FC236}">
-                <a16:creationId xmlns:a16="http://schemas.microsoft.com/office/drawing/2014/main" id="{99C6FEA4-AECF-4501-AB64-562B272A0310}"/>
+                <a16:creationId xmlns:a16="http://schemas.microsoft.com/office/drawing/2014/main" id="{A952B495-E0C3-4B72-9255-5E619DC637BF}"/>
               </a:ext>
             </a:extLst>
           </p:cNvPr>
@@ -18374,7 +18238,7 @@
                 <a:ea typeface="Aptos"/>
                 <a:cs typeface="Aptos"/>
               </a:rPr>
-              <a:t>BARGELD</a:t>
+              <a:t>OFFLINE</a:t>
             </a:r>
           </a:p>
         </p:txBody>
@@ -18384,7 +18248,7 @@
           <p:cNvPr id="3" name="">
             <a:extLst xmlns:a="http://schemas.openxmlformats.org/drawingml/2006/main">
               <a:ext uri="{FF2B5EF4-FFF2-40B4-BE49-F238E27FC236}">
-                <a16:creationId xmlns:a16="http://schemas.microsoft.com/office/drawing/2014/main" id="{02F006B6-88F2-45D1-BF28-BAC40ED07E63}"/>
+                <a16:creationId xmlns:a16="http://schemas.microsoft.com/office/drawing/2014/main" id="{1C52656C-4215-4112-9570-64148D0981C8}"/>
               </a:ext>
             </a:extLst>
           </p:cNvPr>
@@ -18446,7 +18310,7 @@
           <p:cNvPr id="4" name="">
             <a:extLst xmlns:a="http://schemas.openxmlformats.org/drawingml/2006/main">
               <a:ext uri="{FF2B5EF4-FFF2-40B4-BE49-F238E27FC236}">
-                <a16:creationId xmlns:a16="http://schemas.microsoft.com/office/drawing/2014/main" id="{255622DA-BFDF-41DB-9E6A-91DC01FFC6EE}"/>
+                <a16:creationId xmlns:a16="http://schemas.microsoft.com/office/drawing/2014/main" id="{B353B9D9-6229-4AD4-AB5C-3FCEE68E387C}"/>
               </a:ext>
             </a:extLst>
           </p:cNvPr>
@@ -18481,7 +18345,7 @@
           <p:nvPr/>
         </p:nvPicPr>
         <p:blipFill>
-          <a:blip xmlns:r="http://schemas.openxmlformats.org/officeDocument/2006/relationships" xmlns:a="http://schemas.openxmlformats.org/drawingml/2006/main" r:embed="Rc8d92a4ffd9544a8"/>
+          <a:blip xmlns:r="http://schemas.openxmlformats.org/officeDocument/2006/relationships" xmlns:a="http://schemas.openxmlformats.org/drawingml/2006/main" r:embed="Rdac775fa33a343b9"/>
           <a:srcRect xmlns:a="http://schemas.openxmlformats.org/drawingml/2006/main" l="0" t="0" r="0" b="0"/>
           <a:stretch xmlns:a="http://schemas.openxmlformats.org/drawingml/2006/main">
             <a:fillRect l="0" t="0" r="0" b="0"/>
@@ -18502,7 +18366,7 @@
           <p:cNvPr id="6" name="">
             <a:extLst xmlns:a="http://schemas.openxmlformats.org/drawingml/2006/main">
               <a:ext uri="{FF2B5EF4-FFF2-40B4-BE49-F238E27FC236}">
-                <a16:creationId xmlns:a16="http://schemas.microsoft.com/office/drawing/2014/main" id="{3FBD014E-731F-485D-9B4A-8C22D65C3400}"/>
+                <a16:creationId xmlns:a16="http://schemas.microsoft.com/office/drawing/2014/main" id="{4BE421AE-CA71-4755-85F6-96EC07CA6531}"/>
               </a:ext>
             </a:extLst>
           </p:cNvPr>
@@ -18564,7 +18428,7 @@
           <p:cNvPr id="7" name="">
             <a:extLst xmlns:a="http://schemas.openxmlformats.org/drawingml/2006/main">
               <a:ext uri="{FF2B5EF4-FFF2-40B4-BE49-F238E27FC236}">
-                <a16:creationId xmlns:a16="http://schemas.microsoft.com/office/drawing/2014/main" id="{795655B5-9681-4525-87A4-691286A51444}"/>
+                <a16:creationId xmlns:a16="http://schemas.microsoft.com/office/drawing/2014/main" id="{A0A42413-DC7A-406C-B054-D8A56B1DAF93}"/>
               </a:ext>
             </a:extLst>
           </p:cNvPr>
@@ -18626,19 +18490,19 @@
           <p:cNvPr id="8" name="">
             <a:extLst xmlns:a="http://schemas.openxmlformats.org/drawingml/2006/main">
               <a:ext uri="{FF2B5EF4-FFF2-40B4-BE49-F238E27FC236}">
-                <a16:creationId xmlns:a16="http://schemas.microsoft.com/office/drawing/2014/main" id="{C53847A5-5AD2-470B-87CB-8EAC3885BAD0}"/>
-              </a:ext>
-            </a:extLst>
-          </p:cNvPr>
-          <p:cNvSpPr>
-            <a:spLocks xmlns:a="http://schemas.openxmlformats.org/drawingml/2006/main" noGrp="1"/>
-          </p:cNvSpPr>
-          <p:nvPr/>
-        </p:nvSpPr>
-        <p:spPr>
-          <a:xfrm xmlns:a="http://schemas.openxmlformats.org/drawingml/2006/main">
-            <a:off x="609600" y="1885950"/>
-            <a:ext cx="2614613" cy="4095750"/>
+                <a16:creationId xmlns:a16="http://schemas.microsoft.com/office/drawing/2014/main" id="{495BE139-461B-47E8-8C2E-3E7FE4CD6E43}"/>
+              </a:ext>
+            </a:extLst>
+          </p:cNvPr>
+          <p:cNvSpPr>
+            <a:spLocks xmlns:a="http://schemas.openxmlformats.org/drawingml/2006/main" noGrp="1"/>
+          </p:cNvSpPr>
+          <p:nvPr/>
+        </p:nvSpPr>
+        <p:spPr>
+          <a:xfrm xmlns:a="http://schemas.openxmlformats.org/drawingml/2006/main">
+            <a:off x="609600" y="2038350"/>
+            <a:ext cx="2614613" cy="2667000"/>
           </a:xfrm>
           <a:prstGeom xmlns:a="http://schemas.openxmlformats.org/drawingml/2006/main" prst="roundRect">
             <a:avLst>
@@ -18661,19 +18525,19 @@
           <p:cNvPr id="9" name="">
             <a:extLst xmlns:a="http://schemas.openxmlformats.org/drawingml/2006/main">
               <a:ext uri="{FF2B5EF4-FFF2-40B4-BE49-F238E27FC236}">
-                <a16:creationId xmlns:a16="http://schemas.microsoft.com/office/drawing/2014/main" id="{DA4355D0-7E6C-4B9A-9646-DC64FB8DEB23}"/>
-              </a:ext>
-            </a:extLst>
-          </p:cNvPr>
-          <p:cNvSpPr>
-            <a:spLocks xmlns:a="http://schemas.openxmlformats.org/drawingml/2006/main" noGrp="1"/>
-          </p:cNvSpPr>
-          <p:nvPr/>
-        </p:nvSpPr>
-        <p:spPr>
-          <a:xfrm xmlns:a="http://schemas.openxmlformats.org/drawingml/2006/main">
-            <a:off x="609600" y="1885950"/>
-            <a:ext cx="66675" cy="4095750"/>
+                <a16:creationId xmlns:a16="http://schemas.microsoft.com/office/drawing/2014/main" id="{3D6BBB90-DF0C-4990-95BE-C79D136FD148}"/>
+              </a:ext>
+            </a:extLst>
+          </p:cNvPr>
+          <p:cNvSpPr>
+            <a:spLocks xmlns:a="http://schemas.openxmlformats.org/drawingml/2006/main" noGrp="1"/>
+          </p:cNvSpPr>
+          <p:nvPr/>
+        </p:nvSpPr>
+        <p:spPr>
+          <a:xfrm xmlns:a="http://schemas.openxmlformats.org/drawingml/2006/main">
+            <a:off x="609600" y="2038350"/>
+            <a:ext cx="66675" cy="2667000"/>
           </a:xfrm>
           <a:prstGeom xmlns:a="http://schemas.openxmlformats.org/drawingml/2006/main" prst="rect">
             <a:avLst/>
@@ -18692,18 +18556,18 @@
           <p:cNvPr id="10" name="">
             <a:extLst xmlns:a="http://schemas.openxmlformats.org/drawingml/2006/main">
               <a:ext uri="{FF2B5EF4-FFF2-40B4-BE49-F238E27FC236}">
-                <a16:creationId xmlns:a16="http://schemas.microsoft.com/office/drawing/2014/main" id="{2162A81E-3F13-4105-B462-382B13E4FD25}"/>
-              </a:ext>
-            </a:extLst>
-          </p:cNvPr>
-          <p:cNvSpPr>
-            <a:spLocks xmlns:a="http://schemas.openxmlformats.org/drawingml/2006/main" noGrp="1"/>
-          </p:cNvSpPr>
-          <p:nvPr/>
-        </p:nvSpPr>
-        <p:spPr>
-          <a:xfrm xmlns:a="http://schemas.openxmlformats.org/drawingml/2006/main">
-            <a:off x="819150" y="2038350"/>
+                <a16:creationId xmlns:a16="http://schemas.microsoft.com/office/drawing/2014/main" id="{6271958C-F2DE-4A9B-A977-95C9685678AE}"/>
+              </a:ext>
+            </a:extLst>
+          </p:cNvPr>
+          <p:cNvSpPr>
+            <a:spLocks xmlns:a="http://schemas.openxmlformats.org/drawingml/2006/main" noGrp="1"/>
+          </p:cNvSpPr>
+          <p:nvPr/>
+        </p:nvSpPr>
+        <p:spPr>
+          <a:xfrm xmlns:a="http://schemas.openxmlformats.org/drawingml/2006/main">
+            <a:off x="819150" y="2190750"/>
             <a:ext cx="2252663" cy="419100"/>
           </a:xfrm>
           <a:prstGeom xmlns:a="http://schemas.openxmlformats.org/drawingml/2006/main" prst="rect">
@@ -18754,19 +18618,19 @@
           <p:cNvPr id="11" name="">
             <a:extLst xmlns:a="http://schemas.openxmlformats.org/drawingml/2006/main">
               <a:ext uri="{FF2B5EF4-FFF2-40B4-BE49-F238E27FC236}">
-                <a16:creationId xmlns:a16="http://schemas.microsoft.com/office/drawing/2014/main" id="{D66E708D-F607-4E01-8CFD-A2A724FA7F71}"/>
-              </a:ext>
-            </a:extLst>
-          </p:cNvPr>
-          <p:cNvSpPr>
-            <a:spLocks xmlns:a="http://schemas.openxmlformats.org/drawingml/2006/main" noGrp="1"/>
-          </p:cNvSpPr>
-          <p:nvPr/>
-        </p:nvSpPr>
-        <p:spPr>
-          <a:xfrm xmlns:a="http://schemas.openxmlformats.org/drawingml/2006/main">
-            <a:off x="3395663" y="1885950"/>
-            <a:ext cx="2614613" cy="4095750"/>
+                <a16:creationId xmlns:a16="http://schemas.microsoft.com/office/drawing/2014/main" id="{C19F0E7B-9D24-4487-8657-EFE51FB1BA0C}"/>
+              </a:ext>
+            </a:extLst>
+          </p:cNvPr>
+          <p:cNvSpPr>
+            <a:spLocks xmlns:a="http://schemas.openxmlformats.org/drawingml/2006/main" noGrp="1"/>
+          </p:cNvSpPr>
+          <p:nvPr/>
+        </p:nvSpPr>
+        <p:spPr>
+          <a:xfrm xmlns:a="http://schemas.openxmlformats.org/drawingml/2006/main">
+            <a:off x="3395663" y="2038350"/>
+            <a:ext cx="2614613" cy="2667000"/>
           </a:xfrm>
           <a:prstGeom xmlns:a="http://schemas.openxmlformats.org/drawingml/2006/main" prst="roundRect">
             <a:avLst>
@@ -18789,19 +18653,19 @@
           <p:cNvPr id="12" name="">
             <a:extLst xmlns:a="http://schemas.openxmlformats.org/drawingml/2006/main">
               <a:ext uri="{FF2B5EF4-FFF2-40B4-BE49-F238E27FC236}">
-                <a16:creationId xmlns:a16="http://schemas.microsoft.com/office/drawing/2014/main" id="{7C9D8444-3B1D-4776-8909-11C1E647C6B0}"/>
-              </a:ext>
-            </a:extLst>
-          </p:cNvPr>
-          <p:cNvSpPr>
-            <a:spLocks xmlns:a="http://schemas.openxmlformats.org/drawingml/2006/main" noGrp="1"/>
-          </p:cNvSpPr>
-          <p:nvPr/>
-        </p:nvSpPr>
-        <p:spPr>
-          <a:xfrm xmlns:a="http://schemas.openxmlformats.org/drawingml/2006/main">
-            <a:off x="3395663" y="1885950"/>
-            <a:ext cx="66675" cy="4095750"/>
+                <a16:creationId xmlns:a16="http://schemas.microsoft.com/office/drawing/2014/main" id="{55551EE5-B827-42E6-A8C7-9494DB90A36E}"/>
+              </a:ext>
+            </a:extLst>
+          </p:cNvPr>
+          <p:cNvSpPr>
+            <a:spLocks xmlns:a="http://schemas.openxmlformats.org/drawingml/2006/main" noGrp="1"/>
+          </p:cNvSpPr>
+          <p:nvPr/>
+        </p:nvSpPr>
+        <p:spPr>
+          <a:xfrm xmlns:a="http://schemas.openxmlformats.org/drawingml/2006/main">
+            <a:off x="3395663" y="2038350"/>
+            <a:ext cx="66675" cy="2667000"/>
           </a:xfrm>
           <a:prstGeom xmlns:a="http://schemas.openxmlformats.org/drawingml/2006/main" prst="rect">
             <a:avLst/>
@@ -18820,18 +18684,18 @@
           <p:cNvPr id="13" name="">
             <a:extLst xmlns:a="http://schemas.openxmlformats.org/drawingml/2006/main">
               <a:ext uri="{FF2B5EF4-FFF2-40B4-BE49-F238E27FC236}">
-                <a16:creationId xmlns:a16="http://schemas.microsoft.com/office/drawing/2014/main" id="{CE0C4E10-E31E-4814-8515-7439AA56BD75}"/>
-              </a:ext>
-            </a:extLst>
-          </p:cNvPr>
-          <p:cNvSpPr>
-            <a:spLocks xmlns:a="http://schemas.openxmlformats.org/drawingml/2006/main" noGrp="1"/>
-          </p:cNvSpPr>
-          <p:nvPr/>
-        </p:nvSpPr>
-        <p:spPr>
-          <a:xfrm xmlns:a="http://schemas.openxmlformats.org/drawingml/2006/main">
-            <a:off x="3605213" y="2038350"/>
+                <a16:creationId xmlns:a16="http://schemas.microsoft.com/office/drawing/2014/main" id="{B475AEAD-8842-4B91-86E3-EC1C6017FF1D}"/>
+              </a:ext>
+            </a:extLst>
+          </p:cNvPr>
+          <p:cNvSpPr>
+            <a:spLocks xmlns:a="http://schemas.openxmlformats.org/drawingml/2006/main" noGrp="1"/>
+          </p:cNvSpPr>
+          <p:nvPr/>
+        </p:nvSpPr>
+        <p:spPr>
+          <a:xfrm xmlns:a="http://schemas.openxmlformats.org/drawingml/2006/main">
+            <a:off x="3605213" y="2190750"/>
             <a:ext cx="2252663" cy="419100"/>
           </a:xfrm>
           <a:prstGeom xmlns:a="http://schemas.openxmlformats.org/drawingml/2006/main" prst="rect">
@@ -18882,19 +18746,19 @@
           <p:cNvPr id="14" name="">
             <a:extLst xmlns:a="http://schemas.openxmlformats.org/drawingml/2006/main">
               <a:ext uri="{FF2B5EF4-FFF2-40B4-BE49-F238E27FC236}">
-                <a16:creationId xmlns:a16="http://schemas.microsoft.com/office/drawing/2014/main" id="{69FFD9D0-5FE2-4FE8-B1F8-C93935371C4D}"/>
-              </a:ext>
-            </a:extLst>
-          </p:cNvPr>
-          <p:cNvSpPr>
-            <a:spLocks xmlns:a="http://schemas.openxmlformats.org/drawingml/2006/main" noGrp="1"/>
-          </p:cNvSpPr>
-          <p:nvPr/>
-        </p:nvSpPr>
-        <p:spPr>
-          <a:xfrm xmlns:a="http://schemas.openxmlformats.org/drawingml/2006/main">
-            <a:off x="6181725" y="1885950"/>
-            <a:ext cx="2614613" cy="4095750"/>
+                <a16:creationId xmlns:a16="http://schemas.microsoft.com/office/drawing/2014/main" id="{493AF0D9-5ABA-43C1-9B5B-0E8111C26A0A}"/>
+              </a:ext>
+            </a:extLst>
+          </p:cNvPr>
+          <p:cNvSpPr>
+            <a:spLocks xmlns:a="http://schemas.openxmlformats.org/drawingml/2006/main" noGrp="1"/>
+          </p:cNvSpPr>
+          <p:nvPr/>
+        </p:nvSpPr>
+        <p:spPr>
+          <a:xfrm xmlns:a="http://schemas.openxmlformats.org/drawingml/2006/main">
+            <a:off x="6181725" y="2038350"/>
+            <a:ext cx="2614613" cy="2667000"/>
           </a:xfrm>
           <a:prstGeom xmlns:a="http://schemas.openxmlformats.org/drawingml/2006/main" prst="roundRect">
             <a:avLst>
@@ -18917,19 +18781,19 @@
           <p:cNvPr id="15" name="">
             <a:extLst xmlns:a="http://schemas.openxmlformats.org/drawingml/2006/main">
               <a:ext uri="{FF2B5EF4-FFF2-40B4-BE49-F238E27FC236}">
-                <a16:creationId xmlns:a16="http://schemas.microsoft.com/office/drawing/2014/main" id="{F76A9D56-327E-40B5-BC43-A8A4BECB594C}"/>
-              </a:ext>
-            </a:extLst>
-          </p:cNvPr>
-          <p:cNvSpPr>
-            <a:spLocks xmlns:a="http://schemas.openxmlformats.org/drawingml/2006/main" noGrp="1"/>
-          </p:cNvSpPr>
-          <p:nvPr/>
-        </p:nvSpPr>
-        <p:spPr>
-          <a:xfrm xmlns:a="http://schemas.openxmlformats.org/drawingml/2006/main">
-            <a:off x="6181725" y="1885950"/>
-            <a:ext cx="66675" cy="4095750"/>
+                <a16:creationId xmlns:a16="http://schemas.microsoft.com/office/drawing/2014/main" id="{EBBC26E8-3D88-4EC3-9E82-768E42984CBE}"/>
+              </a:ext>
+            </a:extLst>
+          </p:cNvPr>
+          <p:cNvSpPr>
+            <a:spLocks xmlns:a="http://schemas.openxmlformats.org/drawingml/2006/main" noGrp="1"/>
+          </p:cNvSpPr>
+          <p:nvPr/>
+        </p:nvSpPr>
+        <p:spPr>
+          <a:xfrm xmlns:a="http://schemas.openxmlformats.org/drawingml/2006/main">
+            <a:off x="6181725" y="2038350"/>
+            <a:ext cx="66675" cy="2667000"/>
           </a:xfrm>
           <a:prstGeom xmlns:a="http://schemas.openxmlformats.org/drawingml/2006/main" prst="rect">
             <a:avLst/>
@@ -18948,18 +18812,18 @@
           <p:cNvPr id="16" name="">
             <a:extLst xmlns:a="http://schemas.openxmlformats.org/drawingml/2006/main">
               <a:ext uri="{FF2B5EF4-FFF2-40B4-BE49-F238E27FC236}">
-                <a16:creationId xmlns:a16="http://schemas.microsoft.com/office/drawing/2014/main" id="{1C0423AB-3018-4942-8B64-CF300AB3E6E2}"/>
-              </a:ext>
-            </a:extLst>
-          </p:cNvPr>
-          <p:cNvSpPr>
-            <a:spLocks xmlns:a="http://schemas.openxmlformats.org/drawingml/2006/main" noGrp="1"/>
-          </p:cNvSpPr>
-          <p:nvPr/>
-        </p:nvSpPr>
-        <p:spPr>
-          <a:xfrm xmlns:a="http://schemas.openxmlformats.org/drawingml/2006/main">
-            <a:off x="6391275" y="2038350"/>
+                <a16:creationId xmlns:a16="http://schemas.microsoft.com/office/drawing/2014/main" id="{B8901F52-6F50-4578-B8E8-F6DF4BE77552}"/>
+              </a:ext>
+            </a:extLst>
+          </p:cNvPr>
+          <p:cNvSpPr>
+            <a:spLocks xmlns:a="http://schemas.openxmlformats.org/drawingml/2006/main" noGrp="1"/>
+          </p:cNvSpPr>
+          <p:nvPr/>
+        </p:nvSpPr>
+        <p:spPr>
+          <a:xfrm xmlns:a="http://schemas.openxmlformats.org/drawingml/2006/main">
+            <a:off x="6391275" y="2190750"/>
             <a:ext cx="2252663" cy="419100"/>
           </a:xfrm>
           <a:prstGeom xmlns:a="http://schemas.openxmlformats.org/drawingml/2006/main" prst="rect">
@@ -19010,19 +18874,19 @@
           <p:cNvPr id="17" name="">
             <a:extLst xmlns:a="http://schemas.openxmlformats.org/drawingml/2006/main">
               <a:ext uri="{FF2B5EF4-FFF2-40B4-BE49-F238E27FC236}">
-                <a16:creationId xmlns:a16="http://schemas.microsoft.com/office/drawing/2014/main" id="{1815A41E-A991-4675-994E-5CAE39C3064B}"/>
-              </a:ext>
-            </a:extLst>
-          </p:cNvPr>
-          <p:cNvSpPr>
-            <a:spLocks xmlns:a="http://schemas.openxmlformats.org/drawingml/2006/main" noGrp="1"/>
-          </p:cNvSpPr>
-          <p:nvPr/>
-        </p:nvSpPr>
-        <p:spPr>
-          <a:xfrm xmlns:a="http://schemas.openxmlformats.org/drawingml/2006/main">
-            <a:off x="8967788" y="1885950"/>
-            <a:ext cx="2614613" cy="4095750"/>
+                <a16:creationId xmlns:a16="http://schemas.microsoft.com/office/drawing/2014/main" id="{79740B01-F8FF-4B9E-B209-7EAE22F9FE73}"/>
+              </a:ext>
+            </a:extLst>
+          </p:cNvPr>
+          <p:cNvSpPr>
+            <a:spLocks xmlns:a="http://schemas.openxmlformats.org/drawingml/2006/main" noGrp="1"/>
+          </p:cNvSpPr>
+          <p:nvPr/>
+        </p:nvSpPr>
+        <p:spPr>
+          <a:xfrm xmlns:a="http://schemas.openxmlformats.org/drawingml/2006/main">
+            <a:off x="8967788" y="2038350"/>
+            <a:ext cx="2614613" cy="2667000"/>
           </a:xfrm>
           <a:prstGeom xmlns:a="http://schemas.openxmlformats.org/drawingml/2006/main" prst="roundRect">
             <a:avLst>
@@ -19045,19 +18909,19 @@
           <p:cNvPr id="18" name="">
             <a:extLst xmlns:a="http://schemas.openxmlformats.org/drawingml/2006/main">
               <a:ext uri="{FF2B5EF4-FFF2-40B4-BE49-F238E27FC236}">
-                <a16:creationId xmlns:a16="http://schemas.microsoft.com/office/drawing/2014/main" id="{3E770242-3143-44C0-9DA3-73F8F55D570A}"/>
-              </a:ext>
-            </a:extLst>
-          </p:cNvPr>
-          <p:cNvSpPr>
-            <a:spLocks xmlns:a="http://schemas.openxmlformats.org/drawingml/2006/main" noGrp="1"/>
-          </p:cNvSpPr>
-          <p:nvPr/>
-        </p:nvSpPr>
-        <p:spPr>
-          <a:xfrm xmlns:a="http://schemas.openxmlformats.org/drawingml/2006/main">
-            <a:off x="8967788" y="1885950"/>
-            <a:ext cx="66675" cy="4095750"/>
+                <a16:creationId xmlns:a16="http://schemas.microsoft.com/office/drawing/2014/main" id="{EB27BB15-7D38-44B6-9A0B-F009E8445823}"/>
+              </a:ext>
+            </a:extLst>
+          </p:cNvPr>
+          <p:cNvSpPr>
+            <a:spLocks xmlns:a="http://schemas.openxmlformats.org/drawingml/2006/main" noGrp="1"/>
+          </p:cNvSpPr>
+          <p:nvPr/>
+        </p:nvSpPr>
+        <p:spPr>
+          <a:xfrm xmlns:a="http://schemas.openxmlformats.org/drawingml/2006/main">
+            <a:off x="8967788" y="2038350"/>
+            <a:ext cx="66675" cy="2667000"/>
           </a:xfrm>
           <a:prstGeom xmlns:a="http://schemas.openxmlformats.org/drawingml/2006/main" prst="rect">
             <a:avLst/>
@@ -19076,18 +18940,18 @@
           <p:cNvPr id="19" name="">
             <a:extLst xmlns:a="http://schemas.openxmlformats.org/drawingml/2006/main">
               <a:ext uri="{FF2B5EF4-FFF2-40B4-BE49-F238E27FC236}">
-                <a16:creationId xmlns:a16="http://schemas.microsoft.com/office/drawing/2014/main" id="{B3EC099E-2F69-47E1-A65F-EF0EFD2951D3}"/>
-              </a:ext>
-            </a:extLst>
-          </p:cNvPr>
-          <p:cNvSpPr>
-            <a:spLocks xmlns:a="http://schemas.openxmlformats.org/drawingml/2006/main" noGrp="1"/>
-          </p:cNvSpPr>
-          <p:nvPr/>
-        </p:nvSpPr>
-        <p:spPr>
-          <a:xfrm xmlns:a="http://schemas.openxmlformats.org/drawingml/2006/main">
-            <a:off x="9177338" y="2038350"/>
+                <a16:creationId xmlns:a16="http://schemas.microsoft.com/office/drawing/2014/main" id="{BE5ED3EC-B009-48C5-9D67-A91779A7F437}"/>
+              </a:ext>
+            </a:extLst>
+          </p:cNvPr>
+          <p:cNvSpPr>
+            <a:spLocks xmlns:a="http://schemas.openxmlformats.org/drawingml/2006/main" noGrp="1"/>
+          </p:cNvSpPr>
+          <p:nvPr/>
+        </p:nvSpPr>
+        <p:spPr>
+          <a:xfrm xmlns:a="http://schemas.openxmlformats.org/drawingml/2006/main">
+            <a:off x="9177338" y="2190750"/>
             <a:ext cx="2252663" cy="419100"/>
           </a:xfrm>
           <a:prstGeom xmlns:a="http://schemas.openxmlformats.org/drawingml/2006/main" prst="rect">
@@ -19138,19 +19002,19 @@
           <p:cNvPr id="20" name="">
             <a:extLst xmlns:a="http://schemas.openxmlformats.org/drawingml/2006/main">
               <a:ext uri="{FF2B5EF4-FFF2-40B4-BE49-F238E27FC236}">
-                <a16:creationId xmlns:a16="http://schemas.microsoft.com/office/drawing/2014/main" id="{6BA4F104-4B07-4CA7-BD71-2E515E2C93DB}"/>
-              </a:ext>
-            </a:extLst>
-          </p:cNvPr>
-          <p:cNvSpPr>
-            <a:spLocks xmlns:a="http://schemas.openxmlformats.org/drawingml/2006/main" noGrp="1"/>
-          </p:cNvSpPr>
-          <p:nvPr/>
-        </p:nvSpPr>
-        <p:spPr>
-          <a:xfrm xmlns:a="http://schemas.openxmlformats.org/drawingml/2006/main">
-            <a:off x="609600" y="4953000"/>
-            <a:ext cx="10972800" cy="514350"/>
+                <a16:creationId xmlns:a16="http://schemas.microsoft.com/office/drawing/2014/main" id="{81B87DAC-C6AC-442C-A786-86A43BCBE15A}"/>
+              </a:ext>
+            </a:extLst>
+          </p:cNvPr>
+          <p:cNvSpPr>
+            <a:spLocks xmlns:a="http://schemas.openxmlformats.org/drawingml/2006/main" noGrp="1"/>
+          </p:cNvSpPr>
+          <p:nvPr/>
+        </p:nvSpPr>
+        <p:spPr>
+          <a:xfrm xmlns:a="http://schemas.openxmlformats.org/drawingml/2006/main">
+            <a:off x="609600" y="4838700"/>
+            <a:ext cx="10972800" cy="457200"/>
           </a:xfrm>
           <a:prstGeom xmlns:a="http://schemas.openxmlformats.org/drawingml/2006/main" prst="rect">
             <a:avLst/>
@@ -19172,7 +19036,7 @@
                 <a:spcPct val="108000"/>
               </a:lnSpc>
               <a:buNone/>
-              <a:defRPr sz="1350" b="0">
+              <a:defRPr sz="1275" b="0">
                 <a:solidFill>
                   <a:srgbClr val="5F6B7A"/>
                 </a:solidFill>
@@ -19182,7 +19046,7 @@
               </a:defRPr>
             </a:pPr>
             <a:r>
-              <a:rPr sz="1350" b="0">
+              <a:rPr sz="1275" b="0">
                 <a:solidFill>
                   <a:srgbClr val="5F6B7A"/>
                 </a:solidFill>
@@ -19200,19 +19064,19 @@
           <p:cNvPr id="21" name="">
             <a:extLst xmlns:a="http://schemas.openxmlformats.org/drawingml/2006/main">
               <a:ext uri="{FF2B5EF4-FFF2-40B4-BE49-F238E27FC236}">
-                <a16:creationId xmlns:a16="http://schemas.microsoft.com/office/drawing/2014/main" id="{B6D6F45F-0E52-436F-9F55-FF6EBF0F4337}"/>
-              </a:ext>
-            </a:extLst>
-          </p:cNvPr>
-          <p:cNvSpPr>
-            <a:spLocks xmlns:a="http://schemas.openxmlformats.org/drawingml/2006/main" noGrp="1"/>
-          </p:cNvSpPr>
-          <p:nvPr/>
-        </p:nvSpPr>
-        <p:spPr>
-          <a:xfrm xmlns:a="http://schemas.openxmlformats.org/drawingml/2006/main">
-            <a:off x="609600" y="5657850"/>
-            <a:ext cx="10972800" cy="609600"/>
+                <a16:creationId xmlns:a16="http://schemas.microsoft.com/office/drawing/2014/main" id="{40937BAC-9D07-41F4-B14C-3B95362450D9}"/>
+              </a:ext>
+            </a:extLst>
+          </p:cNvPr>
+          <p:cNvSpPr>
+            <a:spLocks xmlns:a="http://schemas.openxmlformats.org/drawingml/2006/main" noGrp="1"/>
+          </p:cNvSpPr>
+          <p:nvPr/>
+        </p:nvSpPr>
+        <p:spPr>
+          <a:xfrm xmlns:a="http://schemas.openxmlformats.org/drawingml/2006/main">
+            <a:off x="609600" y="5467350"/>
+            <a:ext cx="10972800" cy="723900"/>
           </a:xfrm>
           <a:prstGeom xmlns:a="http://schemas.openxmlformats.org/drawingml/2006/main" prst="rect">
             <a:avLst/>
@@ -19262,7 +19126,7 @@
     </p:spTree>
     <p:extLst>
       <p:ext uri="{BB962C8B-B14F-4D97-AF65-F5344CB8AC3E}">
-        <p14:creationId xmlns:p14="http://schemas.microsoft.com/office/powerpoint/2010/main" val="924951232"/>
+        <p14:creationId xmlns:p14="http://schemas.microsoft.com/office/powerpoint/2010/main" val="55235809"/>
       </p:ext>
     </p:extLst>
   </p:cSld>
@@ -19293,7 +19157,7 @@
           <p:cNvPr id="33" name="">
             <a:extLst xmlns:a="http://schemas.openxmlformats.org/drawingml/2006/main">
               <a:ext uri="{FF2B5EF4-FFF2-40B4-BE49-F238E27FC236}">
-                <a16:creationId xmlns:a16="http://schemas.microsoft.com/office/drawing/2014/main" id="{386A3419-482A-47D3-83E1-4A6770925F91}"/>
+                <a16:creationId xmlns:a16="http://schemas.microsoft.com/office/drawing/2014/main" id="{14646395-36DA-4566-A351-ACAA810DE52D}"/>
               </a:ext>
             </a:extLst>
           </p:cNvPr>
@@ -19324,7 +19188,7 @@
           <p:cNvPr id="2" name="">
             <a:extLst xmlns:a="http://schemas.openxmlformats.org/drawingml/2006/main">
               <a:ext uri="{FF2B5EF4-FFF2-40B4-BE49-F238E27FC236}">
-                <a16:creationId xmlns:a16="http://schemas.microsoft.com/office/drawing/2014/main" id="{CADDE2C7-9679-4F1F-A5F0-7FFDF88D63A2}"/>
+                <a16:creationId xmlns:a16="http://schemas.microsoft.com/office/drawing/2014/main" id="{BC23F7E3-E8D7-4323-80C3-48517C17ECE9}"/>
               </a:ext>
             </a:extLst>
           </p:cNvPr>
@@ -19376,7 +19240,7 @@
                 <a:ea typeface="Aptos"/>
                 <a:cs typeface="Aptos"/>
               </a:rPr>
-              <a:t>OFFLINE</a:t>
+              <a:t>GOVERNANCE</a:t>
             </a:r>
           </a:p>
         </p:txBody>
@@ -19386,7 +19250,7 @@
           <p:cNvPr id="3" name="">
             <a:extLst xmlns:a="http://schemas.openxmlformats.org/drawingml/2006/main">
               <a:ext uri="{FF2B5EF4-FFF2-40B4-BE49-F238E27FC236}">
-                <a16:creationId xmlns:a16="http://schemas.microsoft.com/office/drawing/2014/main" id="{1690A76C-3AF2-43B7-81C3-978673AB4DC0}"/>
+                <a16:creationId xmlns:a16="http://schemas.microsoft.com/office/drawing/2014/main" id="{B94E0DEE-71EF-4CC1-BA9B-ED32B78C33A4}"/>
               </a:ext>
             </a:extLst>
           </p:cNvPr>
@@ -19420,7 +19284,7 @@
                 <a:spcPct val="108000"/>
               </a:lnSpc>
               <a:buNone/>
-              <a:defRPr sz="3150" b="1">
+              <a:defRPr sz="2550" b="1">
                 <a:solidFill>
                   <a:srgbClr val="071426"/>
                 </a:solidFill>
@@ -19430,7 +19294,7 @@
               </a:defRPr>
             </a:pPr>
             <a:r>
-              <a:rPr sz="3150" b="1">
+              <a:rPr sz="2550" b="1">
                 <a:solidFill>
                   <a:srgbClr val="071426"/>
                 </a:solidFill>
@@ -19448,7 +19312,7 @@
           <p:cNvPr id="4" name="">
             <a:extLst xmlns:a="http://schemas.openxmlformats.org/drawingml/2006/main">
               <a:ext uri="{FF2B5EF4-FFF2-40B4-BE49-F238E27FC236}">
-                <a16:creationId xmlns:a16="http://schemas.microsoft.com/office/drawing/2014/main" id="{C0E023B2-DC21-4125-A770-D069697D7AE9}"/>
+                <a16:creationId xmlns:a16="http://schemas.microsoft.com/office/drawing/2014/main" id="{0BC89A7D-3EBF-4242-BAA6-4D264D30EE9E}"/>
               </a:ext>
             </a:extLst>
           </p:cNvPr>
@@ -19483,7 +19347,7 @@
           <p:nvPr/>
         </p:nvPicPr>
         <p:blipFill>
-          <a:blip xmlns:r="http://schemas.openxmlformats.org/officeDocument/2006/relationships" xmlns:a="http://schemas.openxmlformats.org/drawingml/2006/main" r:embed="R53b2245ba1c045e7"/>
+          <a:blip xmlns:r="http://schemas.openxmlformats.org/officeDocument/2006/relationships" xmlns:a="http://schemas.openxmlformats.org/drawingml/2006/main" r:embed="R3f7e4771da6b41b2"/>
           <a:srcRect xmlns:a="http://schemas.openxmlformats.org/drawingml/2006/main" l="0" t="0" r="0" b="0"/>
           <a:stretch xmlns:a="http://schemas.openxmlformats.org/drawingml/2006/main">
             <a:fillRect l="0" t="0" r="0" b="0"/>
@@ -19504,7 +19368,7 @@
           <p:cNvPr id="6" name="">
             <a:extLst xmlns:a="http://schemas.openxmlformats.org/drawingml/2006/main">
               <a:ext uri="{FF2B5EF4-FFF2-40B4-BE49-F238E27FC236}">
-                <a16:creationId xmlns:a16="http://schemas.microsoft.com/office/drawing/2014/main" id="{7ACCFB1B-B418-4B0D-9DA0-52FB58F41DC1}"/>
+                <a16:creationId xmlns:a16="http://schemas.microsoft.com/office/drawing/2014/main" id="{C0A3933C-627A-4E03-B590-78F14A45B815}"/>
               </a:ext>
             </a:extLst>
           </p:cNvPr>
@@ -19566,7 +19430,7 @@
           <p:cNvPr id="7" name="">
             <a:extLst xmlns:a="http://schemas.openxmlformats.org/drawingml/2006/main">
               <a:ext uri="{FF2B5EF4-FFF2-40B4-BE49-F238E27FC236}">
-                <a16:creationId xmlns:a16="http://schemas.microsoft.com/office/drawing/2014/main" id="{6819D313-CF1B-4F4E-AEC8-F2B36B1EBAF4}"/>
+                <a16:creationId xmlns:a16="http://schemas.microsoft.com/office/drawing/2014/main" id="{A893728C-395C-47CA-9D8F-F92E940AD1ED}"/>
               </a:ext>
             </a:extLst>
           </p:cNvPr>
@@ -19628,7 +19492,7 @@
           <p:cNvPr id="8" name="">
             <a:extLst xmlns:a="http://schemas.openxmlformats.org/drawingml/2006/main">
               <a:ext uri="{FF2B5EF4-FFF2-40B4-BE49-F238E27FC236}">
-                <a16:creationId xmlns:a16="http://schemas.microsoft.com/office/drawing/2014/main" id="{9B450255-98B9-461B-B50C-001DD354A929}"/>
+                <a16:creationId xmlns:a16="http://schemas.microsoft.com/office/drawing/2014/main" id="{AC25C5DC-7842-4112-9CB3-2C13489EDFCD}"/>
               </a:ext>
             </a:extLst>
           </p:cNvPr>
@@ -19659,7 +19523,7 @@
           <p:cNvPr id="9" name="">
             <a:extLst xmlns:a="http://schemas.openxmlformats.org/drawingml/2006/main">
               <a:ext uri="{FF2B5EF4-FFF2-40B4-BE49-F238E27FC236}">
-                <a16:creationId xmlns:a16="http://schemas.microsoft.com/office/drawing/2014/main" id="{1105EFB2-9E9F-4117-81A4-693E55488115}"/>
+                <a16:creationId xmlns:a16="http://schemas.microsoft.com/office/drawing/2014/main" id="{E7CA6953-F44F-4F1A-83B9-BCE22ABCAA3C}"/>
               </a:ext>
             </a:extLst>
           </p:cNvPr>
@@ -19721,7 +19585,7 @@
           <p:cNvPr id="10" name="">
             <a:extLst xmlns:a="http://schemas.openxmlformats.org/drawingml/2006/main">
               <a:ext uri="{FF2B5EF4-FFF2-40B4-BE49-F238E27FC236}">
-                <a16:creationId xmlns:a16="http://schemas.microsoft.com/office/drawing/2014/main" id="{4B1641C6-476A-4792-A7D9-BC1CB0D6AC3A}"/>
+                <a16:creationId xmlns:a16="http://schemas.microsoft.com/office/drawing/2014/main" id="{4D2AA7F3-FEB9-4777-A9BD-0E3567B36A9C}"/>
               </a:ext>
             </a:extLst>
           </p:cNvPr>
@@ -19756,7 +19620,7 @@
           <p:cNvPr id="11" name="">
             <a:extLst xmlns:a="http://schemas.openxmlformats.org/drawingml/2006/main">
               <a:ext uri="{FF2B5EF4-FFF2-40B4-BE49-F238E27FC236}">
-                <a16:creationId xmlns:a16="http://schemas.microsoft.com/office/drawing/2014/main" id="{23880CBC-E504-47BC-9436-AE454218ED87}"/>
+                <a16:creationId xmlns:a16="http://schemas.microsoft.com/office/drawing/2014/main" id="{B9B8BEB3-F74B-42F4-8FBD-4370A68E228F}"/>
               </a:ext>
             </a:extLst>
           </p:cNvPr>
@@ -19787,7 +19651,7 @@
           <p:cNvPr id="12" name="">
             <a:extLst xmlns:a="http://schemas.openxmlformats.org/drawingml/2006/main">
               <a:ext uri="{FF2B5EF4-FFF2-40B4-BE49-F238E27FC236}">
-                <a16:creationId xmlns:a16="http://schemas.microsoft.com/office/drawing/2014/main" id="{07F52156-A41E-4BFD-8B6D-27E5C5E18894}"/>
+                <a16:creationId xmlns:a16="http://schemas.microsoft.com/office/drawing/2014/main" id="{2AB6FF8E-43D3-4F9F-85B7-F281163713C7}"/>
               </a:ext>
             </a:extLst>
           </p:cNvPr>
@@ -19849,7 +19713,7 @@
           <p:cNvPr id="13" name="">
             <a:extLst xmlns:a="http://schemas.openxmlformats.org/drawingml/2006/main">
               <a:ext uri="{FF2B5EF4-FFF2-40B4-BE49-F238E27FC236}">
-                <a16:creationId xmlns:a16="http://schemas.microsoft.com/office/drawing/2014/main" id="{FCD7F202-6180-4A0E-93BF-252EE542A9CC}"/>
+                <a16:creationId xmlns:a16="http://schemas.microsoft.com/office/drawing/2014/main" id="{8003ADA9-B5B1-43FE-A2CA-F4F4701ACA2B}"/>
               </a:ext>
             </a:extLst>
           </p:cNvPr>
@@ -19901,7 +19765,7 @@
                 <a:ea typeface="Aptos"/>
                 <a:cs typeface="Aptos"/>
               </a:rPr>
-              <a:t>Testnet/Bugfixes</a:t>
+              <a:t>Testnet/Bugfixes · 4/7 · 48 Stunden</a:t>
             </a:r>
           </a:p>
         </p:txBody>
@@ -19911,7 +19775,7 @@
           <p:cNvPr id="14" name="">
             <a:extLst xmlns:a="http://schemas.openxmlformats.org/drawingml/2006/main">
               <a:ext uri="{FF2B5EF4-FFF2-40B4-BE49-F238E27FC236}">
-                <a16:creationId xmlns:a16="http://schemas.microsoft.com/office/drawing/2014/main" id="{8AEBEACC-6E7B-4919-9366-34E10684F4FE}"/>
+                <a16:creationId xmlns:a16="http://schemas.microsoft.com/office/drawing/2014/main" id="{3F4545DC-8F6F-4968-A9BA-1B0AC92E9806}"/>
               </a:ext>
             </a:extLst>
           </p:cNvPr>
@@ -19942,7 +19806,7 @@
           <p:cNvPr id="15" name="">
             <a:extLst xmlns:a="http://schemas.openxmlformats.org/drawingml/2006/main">
               <a:ext uri="{FF2B5EF4-FFF2-40B4-BE49-F238E27FC236}">
-                <a16:creationId xmlns:a16="http://schemas.microsoft.com/office/drawing/2014/main" id="{4AFC8D5A-9F9C-41C0-AF3A-6FC4502A4804}"/>
+                <a16:creationId xmlns:a16="http://schemas.microsoft.com/office/drawing/2014/main" id="{F941C5A9-517D-4955-AD09-62F765B7637E}"/>
               </a:ext>
             </a:extLst>
           </p:cNvPr>
@@ -20004,7 +19868,7 @@
           <p:cNvPr id="16" name="">
             <a:extLst xmlns:a="http://schemas.openxmlformats.org/drawingml/2006/main">
               <a:ext uri="{FF2B5EF4-FFF2-40B4-BE49-F238E27FC236}">
-                <a16:creationId xmlns:a16="http://schemas.microsoft.com/office/drawing/2014/main" id="{A5174402-5836-4A46-BFAF-02A40E9371CF}"/>
+                <a16:creationId xmlns:a16="http://schemas.microsoft.com/office/drawing/2014/main" id="{7900280A-8C06-482C-8993-7587931CB0B0}"/>
               </a:ext>
             </a:extLst>
           </p:cNvPr>
@@ -20039,7 +19903,7 @@
           <p:cNvPr id="17" name="">
             <a:extLst xmlns:a="http://schemas.openxmlformats.org/drawingml/2006/main">
               <a:ext uri="{FF2B5EF4-FFF2-40B4-BE49-F238E27FC236}">
-                <a16:creationId xmlns:a16="http://schemas.microsoft.com/office/drawing/2014/main" id="{BE40DA47-2884-47B0-A77A-3C235DBB1FCE}"/>
+                <a16:creationId xmlns:a16="http://schemas.microsoft.com/office/drawing/2014/main" id="{51BD8297-C0F7-4DCD-B37E-A2A12C8BEFE7}"/>
               </a:ext>
             </a:extLst>
           </p:cNvPr>
@@ -20070,7 +19934,7 @@
           <p:cNvPr id="18" name="">
             <a:extLst xmlns:a="http://schemas.openxmlformats.org/drawingml/2006/main">
               <a:ext uri="{FF2B5EF4-FFF2-40B4-BE49-F238E27FC236}">
-                <a16:creationId xmlns:a16="http://schemas.microsoft.com/office/drawing/2014/main" id="{35E3544E-545A-4E1A-A288-86B8B3D225C7}"/>
+                <a16:creationId xmlns:a16="http://schemas.microsoft.com/office/drawing/2014/main" id="{85CD5B1C-6FF1-4F4A-A484-C8143E473903}"/>
               </a:ext>
             </a:extLst>
           </p:cNvPr>
@@ -20132,7 +19996,7 @@
           <p:cNvPr id="19" name="">
             <a:extLst xmlns:a="http://schemas.openxmlformats.org/drawingml/2006/main">
               <a:ext uri="{FF2B5EF4-FFF2-40B4-BE49-F238E27FC236}">
-                <a16:creationId xmlns:a16="http://schemas.microsoft.com/office/drawing/2014/main" id="{569C5038-1AB7-4C68-9C04-B89481FE8002}"/>
+                <a16:creationId xmlns:a16="http://schemas.microsoft.com/office/drawing/2014/main" id="{D83FBB4D-E3F7-4219-BDDA-34C708C86B53}"/>
               </a:ext>
             </a:extLst>
           </p:cNvPr>
@@ -20184,7 +20048,7 @@
                 <a:ea typeface="Aptos"/>
                 <a:cs typeface="Aptos"/>
               </a:rPr>
-              <a:t>nur Security</a:t>
+              <a:t>nur Security · 5/9 · 14 Tage</a:t>
             </a:r>
           </a:p>
         </p:txBody>
@@ -20194,7 +20058,7 @@
           <p:cNvPr id="20" name="">
             <a:extLst xmlns:a="http://schemas.openxmlformats.org/drawingml/2006/main">
               <a:ext uri="{FF2B5EF4-FFF2-40B4-BE49-F238E27FC236}">
-                <a16:creationId xmlns:a16="http://schemas.microsoft.com/office/drawing/2014/main" id="{A0E168C3-0434-4EF1-8E27-878B15658668}"/>
+                <a16:creationId xmlns:a16="http://schemas.microsoft.com/office/drawing/2014/main" id="{4D303946-8C63-40AE-9BB0-5472701691C1}"/>
               </a:ext>
             </a:extLst>
           </p:cNvPr>
@@ -20225,7 +20089,7 @@
           <p:cNvPr id="21" name="">
             <a:extLst xmlns:a="http://schemas.openxmlformats.org/drawingml/2006/main">
               <a:ext uri="{FF2B5EF4-FFF2-40B4-BE49-F238E27FC236}">
-                <a16:creationId xmlns:a16="http://schemas.microsoft.com/office/drawing/2014/main" id="{3F8CB8D0-F546-459B-93F1-D3B8EDA7DE4A}"/>
+                <a16:creationId xmlns:a16="http://schemas.microsoft.com/office/drawing/2014/main" id="{A7992E02-0613-431A-8408-731B6FD290F7}"/>
               </a:ext>
             </a:extLst>
           </p:cNvPr>
@@ -20287,7 +20151,7 @@
           <p:cNvPr id="22" name="">
             <a:extLst xmlns:a="http://schemas.openxmlformats.org/drawingml/2006/main">
               <a:ext uri="{FF2B5EF4-FFF2-40B4-BE49-F238E27FC236}">
-                <a16:creationId xmlns:a16="http://schemas.microsoft.com/office/drawing/2014/main" id="{06FB0393-54D6-4C3A-83D9-8FE5C6DF5C7D}"/>
+                <a16:creationId xmlns:a16="http://schemas.microsoft.com/office/drawing/2014/main" id="{6DF7924D-1B71-4222-AB52-10607932C2A8}"/>
               </a:ext>
             </a:extLst>
           </p:cNvPr>
@@ -20322,7 +20186,7 @@
           <p:cNvPr id="23" name="">
             <a:extLst xmlns:a="http://schemas.openxmlformats.org/drawingml/2006/main">
               <a:ext uri="{FF2B5EF4-FFF2-40B4-BE49-F238E27FC236}">
-                <a16:creationId xmlns:a16="http://schemas.microsoft.com/office/drawing/2014/main" id="{3DB353C9-BC8F-4D42-AA00-8362F59CEEA5}"/>
+                <a16:creationId xmlns:a16="http://schemas.microsoft.com/office/drawing/2014/main" id="{7F15F532-6EB3-47D3-BC0B-795F368A1BF0}"/>
               </a:ext>
             </a:extLst>
           </p:cNvPr>
@@ -20353,7 +20217,7 @@
           <p:cNvPr id="24" name="">
             <a:extLst xmlns:a="http://schemas.openxmlformats.org/drawingml/2006/main">
               <a:ext uri="{FF2B5EF4-FFF2-40B4-BE49-F238E27FC236}">
-                <a16:creationId xmlns:a16="http://schemas.microsoft.com/office/drawing/2014/main" id="{37542F4B-69A7-424D-AD56-0F8996AC6BF5}"/>
+                <a16:creationId xmlns:a16="http://schemas.microsoft.com/office/drawing/2014/main" id="{3266BDA0-69BD-487A-8CCE-C486B3F10630}"/>
               </a:ext>
             </a:extLst>
           </p:cNvPr>
@@ -20415,7 +20279,7 @@
           <p:cNvPr id="25" name="">
             <a:extLst xmlns:a="http://schemas.openxmlformats.org/drawingml/2006/main">
               <a:ext uri="{FF2B5EF4-FFF2-40B4-BE49-F238E27FC236}">
-                <a16:creationId xmlns:a16="http://schemas.microsoft.com/office/drawing/2014/main" id="{F6231993-F558-4F1E-8455-F9C1201562F1}"/>
+                <a16:creationId xmlns:a16="http://schemas.microsoft.com/office/drawing/2014/main" id="{E1D09968-81DF-430D-97D6-B5746DF724B3}"/>
               </a:ext>
             </a:extLst>
           </p:cNvPr>
@@ -20467,7 +20331,7 @@
                 <a:ea typeface="Aptos"/>
                 <a:cs typeface="Aptos"/>
               </a:rPr>
-              <a:t>Übergabe</a:t>
+              <a:t>Übergabe · 6/11 · 30 Tage</a:t>
             </a:r>
           </a:p>
         </p:txBody>
@@ -20477,7 +20341,7 @@
           <p:cNvPr id="26" name="">
             <a:extLst xmlns:a="http://schemas.openxmlformats.org/drawingml/2006/main">
               <a:ext uri="{FF2B5EF4-FFF2-40B4-BE49-F238E27FC236}">
-                <a16:creationId xmlns:a16="http://schemas.microsoft.com/office/drawing/2014/main" id="{A7D2A057-587F-4C59-A7B4-33DCC454BDEB}"/>
+                <a16:creationId xmlns:a16="http://schemas.microsoft.com/office/drawing/2014/main" id="{08652EDB-5E01-4447-9BFB-4B57DBA7DEAE}"/>
               </a:ext>
             </a:extLst>
           </p:cNvPr>
@@ -20508,7 +20372,7 @@
           <p:cNvPr id="27" name="">
             <a:extLst xmlns:a="http://schemas.openxmlformats.org/drawingml/2006/main">
               <a:ext uri="{FF2B5EF4-FFF2-40B4-BE49-F238E27FC236}">
-                <a16:creationId xmlns:a16="http://schemas.microsoft.com/office/drawing/2014/main" id="{8DFBE0D4-D46F-46CC-84E8-19B94D037C8E}"/>
+                <a16:creationId xmlns:a16="http://schemas.microsoft.com/office/drawing/2014/main" id="{49FB45F9-73BD-4B39-8944-8643EB163C8C}"/>
               </a:ext>
             </a:extLst>
           </p:cNvPr>
@@ -20570,7 +20434,7 @@
           <p:cNvPr id="28" name="">
             <a:extLst xmlns:a="http://schemas.openxmlformats.org/drawingml/2006/main">
               <a:ext uri="{FF2B5EF4-FFF2-40B4-BE49-F238E27FC236}">
-                <a16:creationId xmlns:a16="http://schemas.microsoft.com/office/drawing/2014/main" id="{CA7071C2-22B0-42D2-AA12-19DA0170B965}"/>
+                <a16:creationId xmlns:a16="http://schemas.microsoft.com/office/drawing/2014/main" id="{4C250F38-5EAE-45E5-846B-49FDB826AFF4}"/>
               </a:ext>
             </a:extLst>
           </p:cNvPr>
@@ -20605,7 +20469,7 @@
           <p:cNvPr id="29" name="">
             <a:extLst xmlns:a="http://schemas.openxmlformats.org/drawingml/2006/main">
               <a:ext uri="{FF2B5EF4-FFF2-40B4-BE49-F238E27FC236}">
-                <a16:creationId xmlns:a16="http://schemas.microsoft.com/office/drawing/2014/main" id="{88F0BAA0-6295-4601-B194-35BDFB93013C}"/>
+                <a16:creationId xmlns:a16="http://schemas.microsoft.com/office/drawing/2014/main" id="{B965FDDB-DFC3-43F3-A7A9-6E05013E65F2}"/>
               </a:ext>
             </a:extLst>
           </p:cNvPr>
@@ -20636,7 +20500,7 @@
           <p:cNvPr id="30" name="">
             <a:extLst xmlns:a="http://schemas.openxmlformats.org/drawingml/2006/main">
               <a:ext uri="{FF2B5EF4-FFF2-40B4-BE49-F238E27FC236}">
-                <a16:creationId xmlns:a16="http://schemas.microsoft.com/office/drawing/2014/main" id="{242637E4-9351-4B91-93D5-731DC8BEE841}"/>
+                <a16:creationId xmlns:a16="http://schemas.microsoft.com/office/drawing/2014/main" id="{836DD490-2088-43DA-A93B-9E6F8836597C}"/>
               </a:ext>
             </a:extLst>
           </p:cNvPr>
@@ -20698,7 +20562,7 @@
           <p:cNvPr id="31" name="">
             <a:extLst xmlns:a="http://schemas.openxmlformats.org/drawingml/2006/main">
               <a:ext uri="{FF2B5EF4-FFF2-40B4-BE49-F238E27FC236}">
-                <a16:creationId xmlns:a16="http://schemas.microsoft.com/office/drawing/2014/main" id="{684CCF1B-AF5D-4BB2-AD99-81758F9F4F2B}"/>
+                <a16:creationId xmlns:a16="http://schemas.microsoft.com/office/drawing/2014/main" id="{7CB25609-C7B8-42BD-B571-5DED057CC179}"/>
               </a:ext>
             </a:extLst>
           </p:cNvPr>
@@ -20760,7 +20624,7 @@
           <p:cNvPr id="32" name="">
             <a:extLst xmlns:a="http://schemas.openxmlformats.org/drawingml/2006/main">
               <a:ext uri="{FF2B5EF4-FFF2-40B4-BE49-F238E27FC236}">
-                <a16:creationId xmlns:a16="http://schemas.microsoft.com/office/drawing/2014/main" id="{85291C8A-7840-4724-9975-380E6DB8114F}"/>
+                <a16:creationId xmlns:a16="http://schemas.microsoft.com/office/drawing/2014/main" id="{19085144-7737-47D9-BF08-96163FEB750B}"/>
               </a:ext>
             </a:extLst>
           </p:cNvPr>
@@ -20822,7 +20686,7 @@
     </p:spTree>
     <p:extLst>
       <p:ext uri="{BB962C8B-B14F-4D97-AF65-F5344CB8AC3E}">
-        <p14:creationId xmlns:p14="http://schemas.microsoft.com/office/powerpoint/2010/main" val="233327711"/>
+        <p14:creationId xmlns:p14="http://schemas.microsoft.com/office/powerpoint/2010/main" val="1607267448"/>
       </p:ext>
     </p:extLst>
   </p:cSld>
